--- a/public/deskbrief.pptx
+++ b/public/deskbrief.pptx
@@ -3128,7 +3128,7 @@
                 </a:solidFill>
                 <a:latin typeface="Calibri"/>
               </a:rPr>
-              <a:t>8 names  |  generated 09 Aug 2026 15:50  |  source: Yahoo Finance via yfinance, Indian financial RSS</a:t>
+              <a:t>8 names  |  generated 09 Aug 2026 20:44  |  source: Yahoo Finance via yfinance, Indian financial RSS</a:t>
             </a:r>
           </a:p>
         </p:txBody>
@@ -4952,7 +4952,7 @@
                 </a:solidFill>
                 <a:latin typeface="Calibri"/>
               </a:rPr>
-              <a:t>Breadth was risk-on: 5 of 8 names advanced on the day.</a:t>
+              <a:t>The market tone remains cautious ahead of Q1 results and geopolitical tensions in West Asia.</a:t>
             </a:r>
           </a:p>
           <a:p>
@@ -4968,7 +4968,7 @@
                 </a:solidFill>
                 <a:latin typeface="Calibri"/>
               </a:rPr>
-              <a:t>•  Best performer on the day: TCS.NS at +3.36%.</a:t>
+              <a:t>•  TCS.NS saw a significant 3.36% gain in today's trading session.</a:t>
             </a:r>
           </a:p>
           <a:p>
@@ -4984,7 +4984,7 @@
                 </a:solidFill>
                 <a:latin typeface="Calibri"/>
               </a:rPr>
-              <a:t>•  Weakest on the day: ICICIBANK.NS at -2.50%.</a:t>
+              <a:t>•  HDFCBANK.NS participated in the anchor round of Molbio Diagnostics' IPO, investing in the Rs 281 crore round.</a:t>
             </a:r>
           </a:p>
           <a:p>
@@ -5000,7 +5000,7 @@
                 </a:solidFill>
                 <a:latin typeface="Calibri"/>
               </a:rPr>
-              <a:t>•  Median one-day move across the watchlist: +0.34%.</a:t>
+              <a:t>•  Foreign investors continued their buying spree, pouring Rs 12,921 cr into the market in the first week of August.</a:t>
             </a:r>
           </a:p>
           <a:p>
@@ -5016,23 +5016,7 @@
                 </a:solidFill>
                 <a:latin typeface="Calibri"/>
               </a:rPr>
-              <a:t>•  INFY.NS sits furthest below its 52-week high, at -29.0%.</a:t>
-            </a:r>
-          </a:p>
-          <a:p>
-            <a:pPr>
-              <a:spcBef>
-                <a:spcPts val="500"/>
-              </a:spcBef>
-            </a:pPr>
-            <a:r>
-              <a:rPr sz="1000" b="0">
-                <a:solidFill>
-                  <a:srgbClr val="1F2A37"/>
-                </a:solidFill>
-                <a:latin typeface="Calibri"/>
-              </a:rPr>
-              <a:t>•  1 name(s) within 5% of the 52-week high: ICICIBANK.NS.</a:t>
+              <a:t>•  The market capitalization of four of the top-10 most valued firms, including RELIANCE.NS, jumped Rs 1.43 lakh cr.</a:t>
             </a:r>
           </a:p>
           <a:p>
@@ -5064,7 +5048,7 @@
                 </a:solidFill>
                 <a:latin typeface="Calibri"/>
               </a:rPr>
-              <a:t>•  Highest 30-day realised volatility: TCS.NS at 36.5% annualised.</a:t>
+              <a:t>•  Q1 results from companies like Tata Motors and Vodafone Idea, which are among 2,045 companies set to announce earnings this week.</a:t>
             </a:r>
           </a:p>
           <a:p>
@@ -5080,7 +5064,7 @@
                 </a:solidFill>
                 <a:latin typeface="Calibri"/>
               </a:rPr>
-              <a:t>•  60 headlines collected, 4 tagged to a watchlist name by substring match (unverified).</a:t>
+              <a:t>•  Geopolitical developments in West Asia and their potential impact on crude oil prices.</a:t>
             </a:r>
           </a:p>
           <a:p>
@@ -5096,7 +5080,7 @@
                 </a:solidFill>
                 <a:latin typeface="Calibri"/>
               </a:rPr>
-              <a:t>•  Commentary model was unavailable, so no qualitative read is included.</a:t>
+              <a:t>•  The performance of IPOs launching next week, with over ₹7,400 crore expected to be raised.</a:t>
             </a:r>
           </a:p>
         </p:txBody>
@@ -5130,7 +5114,7 @@
                 </a:solidFill>
                 <a:latin typeface="Calibri"/>
               </a:rPr>
-              <a:t>Commentary source: deterministic-fallback (no GROQ_API_KEY).  Headline ticker tags are substring matches, not verified entity links.  Not investment advice.</a:t>
+              <a:t>Commentary source: groq:llama-3.3-70b-versatile.  Headline ticker tags are substring matches, not verified entity links.  Not investment advice.</a:t>
             </a:r>
           </a:p>
         </p:txBody>

--- a/public/deskbrief.pptx
+++ b/public/deskbrief.pptx
@@ -3128,7 +3128,7 @@
                 </a:solidFill>
                 <a:latin typeface="Calibri"/>
               </a:rPr>
-              <a:t>8 names  |  generated 09 Aug 2026 20:44  |  source: Yahoo Finance via yfinance, Indian financial RSS</a:t>
+              <a:t>8 names  |  generated 10 Aug 2026 13:52  |  source: Yahoo Finance via yfinance, Indian financial RSS</a:t>
             </a:r>
           </a:p>
         </p:txBody>
@@ -3428,7 +3428,7 @@
                           </a:solidFill>
                           <a:latin typeface="Calibri"/>
                         </a:rPr>
-                        <a:t>1,960</a:t>
+                        <a:t>1,943</a:t>
                       </a:r>
                     </a:p>
                   </a:txBody>
@@ -3447,11 +3447,57 @@
                       <a:r>
                         <a:rPr sz="1000" b="0">
                           <a:solidFill>
+                            <a:srgbClr val="B3261E"/>
+                          </a:solidFill>
+                          <a:latin typeface="Calibri"/>
+                        </a:rPr>
+                        <a:t>-0.86%</a:t>
+                      </a:r>
+                    </a:p>
+                  </a:txBody>
+                  <a:tcPr>
+                    <a:solidFill>
+                      <a:srgbClr val="F3F5F7"/>
+                    </a:solidFill>
+                  </a:tcPr>
+                </a:tc>
+                <a:tc>
+                  <a:txBody>
+                    <a:bodyPr/>
+                    <a:lstStyle/>
+                    <a:p>
+                      <a:pPr algn="r"/>
+                      <a:r>
+                        <a:rPr sz="1000" b="0">
+                          <a:solidFill>
+                            <a:srgbClr val="B3261E"/>
+                          </a:solidFill>
+                          <a:latin typeface="Calibri"/>
+                        </a:rPr>
+                        <a:t>-1.40%</a:t>
+                      </a:r>
+                    </a:p>
+                  </a:txBody>
+                  <a:tcPr>
+                    <a:solidFill>
+                      <a:srgbClr val="F3F5F7"/>
+                    </a:solidFill>
+                  </a:tcPr>
+                </a:tc>
+                <a:tc>
+                  <a:txBody>
+                    <a:bodyPr/>
+                    <a:lstStyle/>
+                    <a:p>
+                      <a:pPr algn="r"/>
+                      <a:r>
+                        <a:rPr sz="1000" b="0">
+                          <a:solidFill>
                             <a:srgbClr val="0B7A3B"/>
                           </a:solidFill>
                           <a:latin typeface="Calibri"/>
                         </a:rPr>
-                        <a:t>+0.61%</a:t>
+                        <a:t>+2.45%</a:t>
                       </a:r>
                     </a:p>
                   </a:txBody>
@@ -3470,11 +3516,11 @@
                       <a:r>
                         <a:rPr sz="1000" b="0">
                           <a:solidFill>
-                            <a:srgbClr val="B3261E"/>
-                          </a:solidFill>
-                          <a:latin typeface="Calibri"/>
-                        </a:rPr>
-                        <a:t>-0.61%</a:t>
+                            <a:srgbClr val="1F2A37"/>
+                          </a:solidFill>
+                          <a:latin typeface="Calibri"/>
+                        </a:rPr>
+                        <a:t>-9.0%</a:t>
                       </a:r>
                     </a:p>
                   </a:txBody>
@@ -3493,11 +3539,11 @@
                       <a:r>
                         <a:rPr sz="1000" b="0">
                           <a:solidFill>
-                            <a:srgbClr val="0B7A3B"/>
-                          </a:solidFill>
-                          <a:latin typeface="Calibri"/>
-                        </a:rPr>
-                        <a:t>+2.77%</a:t>
+                            <a:srgbClr val="1F2A37"/>
+                          </a:solidFill>
+                          <a:latin typeface="Calibri"/>
+                        </a:rPr>
+                        <a:t>17%</a:t>
                       </a:r>
                     </a:p>
                   </a:txBody>
@@ -3520,53 +3566,7 @@
                           </a:solidFill>
                           <a:latin typeface="Calibri"/>
                         </a:rPr>
-                        <a:t>-8.2%</a:t>
-                      </a:r>
-                    </a:p>
-                  </a:txBody>
-                  <a:tcPr>
-                    <a:solidFill>
-                      <a:srgbClr val="F3F5F7"/>
-                    </a:solidFill>
-                  </a:tcPr>
-                </a:tc>
-                <a:tc>
-                  <a:txBody>
-                    <a:bodyPr/>
-                    <a:lstStyle/>
-                    <a:p>
-                      <a:pPr algn="r"/>
-                      <a:r>
-                        <a:rPr sz="1000" b="0">
-                          <a:solidFill>
-                            <a:srgbClr val="1F2A37"/>
-                          </a:solidFill>
-                          <a:latin typeface="Calibri"/>
-                        </a:rPr>
-                        <a:t>17%</a:t>
-                      </a:r>
-                    </a:p>
-                  </a:txBody>
-                  <a:tcPr>
-                    <a:solidFill>
-                      <a:srgbClr val="F3F5F7"/>
-                    </a:solidFill>
-                  </a:tcPr>
-                </a:tc>
-                <a:tc>
-                  <a:txBody>
-                    <a:bodyPr/>
-                    <a:lstStyle/>
-                    <a:p>
-                      <a:pPr algn="r"/>
-                      <a:r>
-                        <a:rPr sz="1000" b="0">
-                          <a:solidFill>
-                            <a:srgbClr val="1F2A37"/>
-                          </a:solidFill>
-                          <a:latin typeface="Calibri"/>
-                        </a:rPr>
-                        <a:t>41.0</a:t>
+                        <a:t>40.6</a:t>
                       </a:r>
                     </a:p>
                   </a:txBody>
@@ -3633,11 +3633,34 @@
                       <a:r>
                         <a:rPr sz="1000" b="0">
                           <a:solidFill>
+                            <a:srgbClr val="1F2A37"/>
+                          </a:solidFill>
+                          <a:latin typeface="Calibri"/>
+                        </a:rPr>
+                        <a:t>+0.00%</a:t>
+                      </a:r>
+                    </a:p>
+                  </a:txBody>
+                  <a:tcPr>
+                    <a:solidFill>
+                      <a:srgbClr val="FFFFFF"/>
+                    </a:solidFill>
+                  </a:tcPr>
+                </a:tc>
+                <a:tc>
+                  <a:txBody>
+                    <a:bodyPr/>
+                    <a:lstStyle/>
+                    <a:p>
+                      <a:pPr algn="r"/>
+                      <a:r>
+                        <a:rPr sz="1000" b="0">
+                          <a:solidFill>
                             <a:srgbClr val="B3261E"/>
                           </a:solidFill>
                           <a:latin typeface="Calibri"/>
                         </a:rPr>
-                        <a:t>-0.45%</a:t>
+                        <a:t>-2.92%</a:t>
                       </a:r>
                     </a:p>
                   </a:txBody>
@@ -3660,30 +3683,7 @@
                           </a:solidFill>
                           <a:latin typeface="Calibri"/>
                         </a:rPr>
-                        <a:t>-2.29%</a:t>
-                      </a:r>
-                    </a:p>
-                  </a:txBody>
-                  <a:tcPr>
-                    <a:solidFill>
-                      <a:srgbClr val="FFFFFF"/>
-                    </a:solidFill>
-                  </a:tcPr>
-                </a:tc>
-                <a:tc>
-                  <a:txBody>
-                    <a:bodyPr/>
-                    <a:lstStyle/>
-                    <a:p>
-                      <a:pPr algn="r"/>
-                      <a:r>
-                        <a:rPr sz="1000" b="0">
-                          <a:solidFill>
-                            <a:srgbClr val="B3261E"/>
-                          </a:solidFill>
-                          <a:latin typeface="Calibri"/>
-                        </a:rPr>
-                        <a:t>-10.59%</a:t>
+                        <a:t>-11.39%</a:t>
                       </a:r>
                     </a:p>
                   </a:txBody>
@@ -3800,7 +3800,7 @@
                           </a:solidFill>
                           <a:latin typeface="Calibri"/>
                         </a:rPr>
-                        <a:t>1,421</a:t>
+                        <a:t>1,432</a:t>
                       </a:r>
                     </a:p>
                   </a:txBody>
@@ -3819,11 +3819,34 @@
                       <a:r>
                         <a:rPr sz="1000" b="0">
                           <a:solidFill>
+                            <a:srgbClr val="0B7A3B"/>
+                          </a:solidFill>
+                          <a:latin typeface="Calibri"/>
+                        </a:rPr>
+                        <a:t>+0.76%</a:t>
+                      </a:r>
+                    </a:p>
+                  </a:txBody>
+                  <a:tcPr>
+                    <a:solidFill>
+                      <a:srgbClr val="F3F5F7"/>
+                    </a:solidFill>
+                  </a:tcPr>
+                </a:tc>
+                <a:tc>
+                  <a:txBody>
+                    <a:bodyPr/>
+                    <a:lstStyle/>
+                    <a:p>
+                      <a:pPr algn="r"/>
+                      <a:r>
+                        <a:rPr sz="1000" b="0">
+                          <a:solidFill>
                             <a:srgbClr val="B3261E"/>
                           </a:solidFill>
                           <a:latin typeface="Calibri"/>
                         </a:rPr>
-                        <a:t>-2.50%</a:t>
+                        <a:t>-1.93%</a:t>
                       </a:r>
                     </a:p>
                   </a:txBody>
@@ -3842,11 +3865,11 @@
                       <a:r>
                         <a:rPr sz="1000" b="0">
                           <a:solidFill>
-                            <a:srgbClr val="B3261E"/>
-                          </a:solidFill>
-                          <a:latin typeface="Calibri"/>
-                        </a:rPr>
-                        <a:t>-0.17%</a:t>
+                            <a:srgbClr val="0B7A3B"/>
+                          </a:solidFill>
+                          <a:latin typeface="Calibri"/>
+                        </a:rPr>
+                        <a:t>+3.05%</a:t>
                       </a:r>
                     </a:p>
                   </a:txBody>
@@ -3865,11 +3888,11 @@
                       <a:r>
                         <a:rPr sz="1000" b="0">
                           <a:solidFill>
-                            <a:srgbClr val="0B7A3B"/>
-                          </a:solidFill>
-                          <a:latin typeface="Calibri"/>
-                        </a:rPr>
-                        <a:t>+3.79%</a:t>
+                            <a:srgbClr val="1F2A37"/>
+                          </a:solidFill>
+                          <a:latin typeface="Calibri"/>
+                        </a:rPr>
+                        <a:t>-1.9%</a:t>
                       </a:r>
                     </a:p>
                   </a:txBody>
@@ -3892,7 +3915,7 @@
                           </a:solidFill>
                           <a:latin typeface="Calibri"/>
                         </a:rPr>
-                        <a:t>-2.7%</a:t>
+                        <a:t>18%</a:t>
                       </a:r>
                     </a:p>
                   </a:txBody>
@@ -3915,30 +3938,7 @@
                           </a:solidFill>
                           <a:latin typeface="Calibri"/>
                         </a:rPr>
-                        <a:t>18%</a:t>
-                      </a:r>
-                    </a:p>
-                  </a:txBody>
-                  <a:tcPr>
-                    <a:solidFill>
-                      <a:srgbClr val="F3F5F7"/>
-                    </a:solidFill>
-                  </a:tcPr>
-                </a:tc>
-                <a:tc>
-                  <a:txBody>
-                    <a:bodyPr/>
-                    <a:lstStyle/>
-                    <a:p>
-                      <a:pPr algn="r"/>
-                      <a:r>
-                        <a:rPr sz="1000" b="0">
-                          <a:solidFill>
-                            <a:srgbClr val="1F2A37"/>
-                          </a:solidFill>
-                          <a:latin typeface="Calibri"/>
-                        </a:rPr>
-                        <a:t>18.4</a:t>
+                        <a:t>18.5</a:t>
                       </a:r>
                     </a:p>
                   </a:txBody>
@@ -3986,7 +3986,7 @@
                           </a:solidFill>
                           <a:latin typeface="Calibri"/>
                         </a:rPr>
-                        <a:t>1,175</a:t>
+                        <a:t>1,183</a:t>
                       </a:r>
                     </a:p>
                   </a:txBody>
@@ -4009,7 +4009,7 @@
                           </a:solidFill>
                           <a:latin typeface="Calibri"/>
                         </a:rPr>
-                        <a:t>+0.87%</a:t>
+                        <a:t>+0.67%</a:t>
                       </a:r>
                     </a:p>
                   </a:txBody>
@@ -4032,7 +4032,7 @@
                           </a:solidFill>
                           <a:latin typeface="Calibri"/>
                         </a:rPr>
-                        <a:t>+3.98%</a:t>
+                        <a:t>+0.25%</a:t>
                       </a:r>
                     </a:p>
                   </a:txBody>
@@ -4055,7 +4055,7 @@
                           </a:solidFill>
                           <a:latin typeface="Calibri"/>
                         </a:rPr>
-                        <a:t>+11.83%</a:t>
+                        <a:t>+10.77%</a:t>
                       </a:r>
                     </a:p>
                   </a:txBody>
@@ -4078,7 +4078,7 @@
                           </a:solidFill>
                           <a:latin typeface="Calibri"/>
                         </a:rPr>
-                        <a:t>-29.0%</a:t>
+                        <a:t>-28.5%</a:t>
                       </a:r>
                     </a:p>
                   </a:txBody>
@@ -4124,7 +4124,7 @@
                           </a:solidFill>
                           <a:latin typeface="Calibri"/>
                         </a:rPr>
-                        <a:t>15.3</a:t>
+                        <a:t>15.4</a:t>
                       </a:r>
                     </a:p>
                   </a:txBody>
@@ -4172,7 +4172,7 @@
                           </a:solidFill>
                           <a:latin typeface="Calibri"/>
                         </a:rPr>
-                        <a:t>286</a:t>
+                        <a:t>283</a:t>
                       </a:r>
                     </a:p>
                   </a:txBody>
@@ -4191,11 +4191,57 @@
                       <a:r>
                         <a:rPr sz="1000" b="0">
                           <a:solidFill>
+                            <a:srgbClr val="B3261E"/>
+                          </a:solidFill>
+                          <a:latin typeface="Calibri"/>
+                        </a:rPr>
+                        <a:t>-1.21%</a:t>
+                      </a:r>
+                    </a:p>
+                  </a:txBody>
+                  <a:tcPr>
+                    <a:solidFill>
+                      <a:srgbClr val="F3F5F7"/>
+                    </a:solidFill>
+                  </a:tcPr>
+                </a:tc>
+                <a:tc>
+                  <a:txBody>
+                    <a:bodyPr/>
+                    <a:lstStyle/>
+                    <a:p>
+                      <a:pPr algn="r"/>
+                      <a:r>
+                        <a:rPr sz="1000" b="0">
+                          <a:solidFill>
+                            <a:srgbClr val="B3261E"/>
+                          </a:solidFill>
+                          <a:latin typeface="Calibri"/>
+                        </a:rPr>
+                        <a:t>-1.52%</a:t>
+                      </a:r>
+                    </a:p>
+                  </a:txBody>
+                  <a:tcPr>
+                    <a:solidFill>
+                      <a:srgbClr val="F3F5F7"/>
+                    </a:solidFill>
+                  </a:tcPr>
+                </a:tc>
+                <a:tc>
+                  <a:txBody>
+                    <a:bodyPr/>
+                    <a:lstStyle/>
+                    <a:p>
+                      <a:pPr algn="r"/>
+                      <a:r>
+                        <a:rPr sz="1000" b="0">
+                          <a:solidFill>
                             <a:srgbClr val="0B7A3B"/>
                           </a:solidFill>
                           <a:latin typeface="Calibri"/>
                         </a:rPr>
-                        <a:t>+0.07%</a:t>
+                        <a:t>+0.32%</a:t>
                       </a:r>
                     </a:p>
                   </a:txBody>
@@ -4214,11 +4260,11 @@
                       <a:r>
                         <a:rPr sz="1000" b="0">
                           <a:solidFill>
-                            <a:srgbClr val="0B7A3B"/>
-                          </a:solidFill>
-                          <a:latin typeface="Calibri"/>
-                        </a:rPr>
-                        <a:t>+1.81%</a:t>
+                            <a:srgbClr val="1F2A37"/>
+                          </a:solidFill>
+                          <a:latin typeface="Calibri"/>
+                        </a:rPr>
+                        <a:t>-29.7%</a:t>
                       </a:r>
                     </a:p>
                   </a:txBody>
@@ -4237,11 +4283,11 @@
                       <a:r>
                         <a:rPr sz="1000" b="0">
                           <a:solidFill>
-                            <a:srgbClr val="0B7A3B"/>
-                          </a:solidFill>
-                          <a:latin typeface="Calibri"/>
-                        </a:rPr>
-                        <a:t>+1.44%</a:t>
+                            <a:srgbClr val="1F2A37"/>
+                          </a:solidFill>
+                          <a:latin typeface="Calibri"/>
+                        </a:rPr>
+                        <a:t>15%</a:t>
                       </a:r>
                     </a:p>
                   </a:txBody>
@@ -4264,53 +4310,7 @@
                           </a:solidFill>
                           <a:latin typeface="Calibri"/>
                         </a:rPr>
-                        <a:t>-28.8%</a:t>
-                      </a:r>
-                    </a:p>
-                  </a:txBody>
-                  <a:tcPr>
-                    <a:solidFill>
-                      <a:srgbClr val="F3F5F7"/>
-                    </a:solidFill>
-                  </a:tcPr>
-                </a:tc>
-                <a:tc>
-                  <a:txBody>
-                    <a:bodyPr/>
-                    <a:lstStyle/>
-                    <a:p>
-                      <a:pPr algn="r"/>
-                      <a:r>
-                        <a:rPr sz="1000" b="0">
-                          <a:solidFill>
-                            <a:srgbClr val="1F2A37"/>
-                          </a:solidFill>
-                          <a:latin typeface="Calibri"/>
-                        </a:rPr>
-                        <a:t>15%</a:t>
-                      </a:r>
-                    </a:p>
-                  </a:txBody>
-                  <a:tcPr>
-                    <a:solidFill>
-                      <a:srgbClr val="F3F5F7"/>
-                    </a:solidFill>
-                  </a:tcPr>
-                </a:tc>
-                <a:tc>
-                  <a:txBody>
-                    <a:bodyPr/>
-                    <a:lstStyle/>
-                    <a:p>
-                      <a:pPr algn="r"/>
-                      <a:r>
-                        <a:rPr sz="1000" b="0">
-                          <a:solidFill>
-                            <a:srgbClr val="1F2A37"/>
-                          </a:solidFill>
-                          <a:latin typeface="Calibri"/>
-                        </a:rPr>
-                        <a:t>18.1</a:t>
+                        <a:t>17.8</a:t>
                       </a:r>
                     </a:p>
                   </a:txBody>
@@ -4358,7 +4358,7 @@
                           </a:solidFill>
                           <a:latin typeface="Calibri"/>
                         </a:rPr>
-                        <a:t>4,056</a:t>
+                        <a:t>4,080</a:t>
                       </a:r>
                     </a:p>
                   </a:txBody>
@@ -4377,11 +4377,11 @@
                       <a:r>
                         <a:rPr sz="1000" b="0">
                           <a:solidFill>
-                            <a:srgbClr val="B3261E"/>
-                          </a:solidFill>
-                          <a:latin typeface="Calibri"/>
-                        </a:rPr>
-                        <a:t>-0.14%</a:t>
+                            <a:srgbClr val="0B7A3B"/>
+                          </a:solidFill>
+                          <a:latin typeface="Calibri"/>
+                        </a:rPr>
+                        <a:t>+0.59%</a:t>
                       </a:r>
                     </a:p>
                   </a:txBody>
@@ -4404,7 +4404,7 @@
                           </a:solidFill>
                           <a:latin typeface="Calibri"/>
                         </a:rPr>
-                        <a:t>+2.97%</a:t>
+                        <a:t>+1.37%</a:t>
                       </a:r>
                     </a:p>
                   </a:txBody>
@@ -4427,7 +4427,7 @@
                           </a:solidFill>
                           <a:latin typeface="Calibri"/>
                         </a:rPr>
-                        <a:t>+4.37%</a:t>
+                        <a:t>+3.40%</a:t>
                       </a:r>
                     </a:p>
                   </a:txBody>
@@ -4450,7 +4450,7 @@
                           </a:solidFill>
                           <a:latin typeface="Calibri"/>
                         </a:rPr>
-                        <a:t>-7.3%</a:t>
+                        <a:t>-6.8%</a:t>
                       </a:r>
                     </a:p>
                   </a:txBody>
@@ -4473,7 +4473,7 @@
                           </a:solidFill>
                           <a:latin typeface="Calibri"/>
                         </a:rPr>
-                        <a:t>19%</a:t>
+                        <a:t>18%</a:t>
                       </a:r>
                     </a:p>
                   </a:txBody>
@@ -4496,7 +4496,7 @@
                           </a:solidFill>
                           <a:latin typeface="Calibri"/>
                         </a:rPr>
-                        <a:t>33.7</a:t>
+                        <a:t>33.9</a:t>
                       </a:r>
                     </a:p>
                   </a:txBody>
@@ -4544,7 +4544,7 @@
                           </a:solidFill>
                           <a:latin typeface="Calibri"/>
                         </a:rPr>
-                        <a:t>1,335</a:t>
+                        <a:t>1,327</a:t>
                       </a:r>
                     </a:p>
                   </a:txBody>
@@ -4563,11 +4563,34 @@
                       <a:r>
                         <a:rPr sz="1000" b="0">
                           <a:solidFill>
+                            <a:srgbClr val="B3261E"/>
+                          </a:solidFill>
+                          <a:latin typeface="Calibri"/>
+                        </a:rPr>
+                        <a:t>-0.56%</a:t>
+                      </a:r>
+                    </a:p>
+                  </a:txBody>
+                  <a:tcPr>
+                    <a:solidFill>
+                      <a:srgbClr val="F3F5F7"/>
+                    </a:solidFill>
+                  </a:tcPr>
+                </a:tc>
+                <a:tc>
+                  <a:txBody>
+                    <a:bodyPr/>
+                    <a:lstStyle/>
+                    <a:p>
+                      <a:pPr algn="r"/>
+                      <a:r>
+                        <a:rPr sz="1000" b="0">
+                          <a:solidFill>
                             <a:srgbClr val="0B7A3B"/>
                           </a:solidFill>
                           <a:latin typeface="Calibri"/>
                         </a:rPr>
-                        <a:t>+0.74%</a:t>
+                        <a:t>+0.63%</a:t>
                       </a:r>
                     </a:p>
                   </a:txBody>
@@ -4590,7 +4613,7 @@
                           </a:solidFill>
                           <a:latin typeface="Calibri"/>
                         </a:rPr>
-                        <a:t>+2.06%</a:t>
+                        <a:t>+1.49%</a:t>
                       </a:r>
                     </a:p>
                   </a:txBody>
@@ -4609,11 +4632,11 @@
                       <a:r>
                         <a:rPr sz="1000" b="0">
                           <a:solidFill>
-                            <a:srgbClr val="0B7A3B"/>
-                          </a:solidFill>
-                          <a:latin typeface="Calibri"/>
-                        </a:rPr>
-                        <a:t>+4.30%</a:t>
+                            <a:srgbClr val="1F2A37"/>
+                          </a:solidFill>
+                          <a:latin typeface="Calibri"/>
+                        </a:rPr>
+                        <a:t>-16.3%</a:t>
                       </a:r>
                     </a:p>
                   </a:txBody>
@@ -4636,7 +4659,7 @@
                           </a:solidFill>
                           <a:latin typeface="Calibri"/>
                         </a:rPr>
-                        <a:t>-15.8%</a:t>
+                        <a:t>21%</a:t>
                       </a:r>
                     </a:p>
                   </a:txBody>
@@ -4659,30 +4682,7 @@
                           </a:solidFill>
                           <a:latin typeface="Calibri"/>
                         </a:rPr>
-                        <a:t>21%</a:t>
-                      </a:r>
-                    </a:p>
-                  </a:txBody>
-                  <a:tcPr>
-                    <a:solidFill>
-                      <a:srgbClr val="F3F5F7"/>
-                    </a:solidFill>
-                  </a:tcPr>
-                </a:tc>
-                <a:tc>
-                  <a:txBody>
-                    <a:bodyPr/>
-                    <a:lstStyle/>
-                    <a:p>
-                      <a:pPr algn="r"/>
-                      <a:r>
-                        <a:rPr sz="1000" b="0">
-                          <a:solidFill>
-                            <a:srgbClr val="1F2A37"/>
-                          </a:solidFill>
-                          <a:latin typeface="Calibri"/>
-                        </a:rPr>
-                        <a:t>24.2</a:t>
+                        <a:t>24.0</a:t>
                       </a:r>
                     </a:p>
                   </a:txBody>
@@ -4730,7 +4730,7 @@
                           </a:solidFill>
                           <a:latin typeface="Calibri"/>
                         </a:rPr>
-                        <a:t>2,453</a:t>
+                        <a:t>2,426</a:t>
                       </a:r>
                     </a:p>
                   </a:txBody>
@@ -4749,11 +4749,57 @@
                       <a:r>
                         <a:rPr sz="1000" b="0">
                           <a:solidFill>
+                            <a:srgbClr val="B3261E"/>
+                          </a:solidFill>
+                          <a:latin typeface="Calibri"/>
+                        </a:rPr>
+                        <a:t>-1.10%</a:t>
+                      </a:r>
+                    </a:p>
+                  </a:txBody>
+                  <a:tcPr>
+                    <a:solidFill>
+                      <a:srgbClr val="FFFFFF"/>
+                    </a:solidFill>
+                  </a:tcPr>
+                </a:tc>
+                <a:tc>
+                  <a:txBody>
+                    <a:bodyPr/>
+                    <a:lstStyle/>
+                    <a:p>
+                      <a:pPr algn="r"/>
+                      <a:r>
+                        <a:rPr sz="1000" b="0">
+                          <a:solidFill>
+                            <a:srgbClr val="B3261E"/>
+                          </a:solidFill>
+                          <a:latin typeface="Calibri"/>
+                        </a:rPr>
+                        <a:t>-1.94%</a:t>
+                      </a:r>
+                    </a:p>
+                  </a:txBody>
+                  <a:tcPr>
+                    <a:solidFill>
+                      <a:srgbClr val="FFFFFF"/>
+                    </a:solidFill>
+                  </a:tcPr>
+                </a:tc>
+                <a:tc>
+                  <a:txBody>
+                    <a:bodyPr/>
+                    <a:lstStyle/>
+                    <a:p>
+                      <a:pPr algn="r"/>
+                      <a:r>
+                        <a:rPr sz="1000" b="0">
+                          <a:solidFill>
                             <a:srgbClr val="0B7A3B"/>
                           </a:solidFill>
                           <a:latin typeface="Calibri"/>
                         </a:rPr>
-                        <a:t>+3.36%</a:t>
+                        <a:t>+17.88%</a:t>
                       </a:r>
                     </a:p>
                   </a:txBody>
@@ -4772,11 +4818,11 @@
                       <a:r>
                         <a:rPr sz="1000" b="0">
                           <a:solidFill>
-                            <a:srgbClr val="0B7A3B"/>
-                          </a:solidFill>
-                          <a:latin typeface="Calibri"/>
-                        </a:rPr>
-                        <a:t>+3.68%</a:t>
+                            <a:srgbClr val="1F2A37"/>
+                          </a:solidFill>
+                          <a:latin typeface="Calibri"/>
+                        </a:rPr>
+                        <a:t>-24.3%</a:t>
                       </a:r>
                     </a:p>
                   </a:txBody>
@@ -4795,11 +4841,11 @@
                       <a:r>
                         <a:rPr sz="1000" b="0">
                           <a:solidFill>
-                            <a:srgbClr val="0B7A3B"/>
-                          </a:solidFill>
-                          <a:latin typeface="Calibri"/>
-                        </a:rPr>
-                        <a:t>+20.33%</a:t>
+                            <a:srgbClr val="1F2A37"/>
+                          </a:solidFill>
+                          <a:latin typeface="Calibri"/>
+                        </a:rPr>
+                        <a:t>37%</a:t>
                       </a:r>
                     </a:p>
                   </a:txBody>
@@ -4822,53 +4868,7 @@
                           </a:solidFill>
                           <a:latin typeface="Calibri"/>
                         </a:rPr>
-                        <a:t>-23.5%</a:t>
-                      </a:r>
-                    </a:p>
-                  </a:txBody>
-                  <a:tcPr>
-                    <a:solidFill>
-                      <a:srgbClr val="FFFFFF"/>
-                    </a:solidFill>
-                  </a:tcPr>
-                </a:tc>
-                <a:tc>
-                  <a:txBody>
-                    <a:bodyPr/>
-                    <a:lstStyle/>
-                    <a:p>
-                      <a:pPr algn="r"/>
-                      <a:r>
-                        <a:rPr sz="1000" b="0">
-                          <a:solidFill>
-                            <a:srgbClr val="1F2A37"/>
-                          </a:solidFill>
-                          <a:latin typeface="Calibri"/>
-                        </a:rPr>
-                        <a:t>37%</a:t>
-                      </a:r>
-                    </a:p>
-                  </a:txBody>
-                  <a:tcPr>
-                    <a:solidFill>
-                      <a:srgbClr val="FFFFFF"/>
-                    </a:solidFill>
-                  </a:tcPr>
-                </a:tc>
-                <a:tc>
-                  <a:txBody>
-                    <a:bodyPr/>
-                    <a:lstStyle/>
-                    <a:p>
-                      <a:pPr algn="r"/>
-                      <a:r>
-                        <a:rPr sz="1000" b="0">
-                          <a:solidFill>
-                            <a:srgbClr val="1F2A37"/>
-                          </a:solidFill>
-                          <a:latin typeface="Calibri"/>
-                        </a:rPr>
-                        <a:t>17.8</a:t>
+                        <a:t>17.6</a:t>
                       </a:r>
                     </a:p>
                   </a:txBody>
@@ -4952,7 +4952,7 @@
                 </a:solidFill>
                 <a:latin typeface="Calibri"/>
               </a:rPr>
-              <a:t>The market tone remains cautious ahead of Q1 results and geopolitical tensions in West Asia.</a:t>
+              <a:t>Indian large caps experienced mixed returns, with INFY.NS and TCS.NS showing strong 21-day returns of 10.77% and 17.88%, respectively.</a:t>
             </a:r>
           </a:p>
           <a:p>
@@ -4968,7 +4968,7 @@
                 </a:solidFill>
                 <a:latin typeface="Calibri"/>
               </a:rPr>
-              <a:t>•  TCS.NS saw a significant 3.36% gain in today's trading session.</a:t>
+              <a:t>•  HDFCBANK.NS and ICICIBANK.NS have underperformed in the 21-day period, with returns of -11.39% and 3.05%, respectively.</a:t>
             </a:r>
           </a:p>
           <a:p>
@@ -4984,7 +4984,7 @@
                 </a:solidFill>
                 <a:latin typeface="Calibri"/>
               </a:rPr>
-              <a:t>•  HDFCBANK.NS participated in the anchor round of Molbio Diagnostics' IPO, investing in the Rs 281 crore round.</a:t>
+              <a:t>•  The P/E ratio of LT.NS stands at 33.9, significantly higher than the other large caps.</a:t>
             </a:r>
           </a:p>
           <a:p>
@@ -5000,7 +5000,7 @@
                 </a:solidFill>
                 <a:latin typeface="Calibri"/>
               </a:rPr>
-              <a:t>•  Foreign investors continued their buying spree, pouring Rs 12,921 cr into the market in the first week of August.</a:t>
+              <a:t>•  RELIANCE.NS has seen a relatively stable 21-day return of 1.49%, despite being down 16.26% from its 52-week high.</a:t>
             </a:r>
           </a:p>
           <a:p>
@@ -5016,7 +5016,7 @@
                 </a:solidFill>
                 <a:latin typeface="Calibri"/>
               </a:rPr>
-              <a:t>•  The market capitalization of four of the top-10 most valued firms, including RELIANCE.NS, jumped Rs 1.43 lakh cr.</a:t>
+              <a:t>•  BHARTIARTL.NS has entered a strategic collaboration with ITI to accelerate India's digital transformation.</a:t>
             </a:r>
           </a:p>
           <a:p>
@@ -5048,7 +5048,7 @@
                 </a:solidFill>
                 <a:latin typeface="Calibri"/>
               </a:rPr>
-              <a:t>•  Q1 results from companies like Tata Motors and Vodafone Idea, which are among 2,045 companies set to announce earnings this week.</a:t>
+              <a:t>•  The performance of INFY.NS and TCS.NS in the technology sector, given their strong 21-day returns.</a:t>
             </a:r>
           </a:p>
           <a:p>
@@ -5064,7 +5064,7 @@
                 </a:solidFill>
                 <a:latin typeface="Calibri"/>
               </a:rPr>
-              <a:t>•  Geopolitical developments in West Asia and their potential impact on crude oil prices.</a:t>
+              <a:t>•  The impact of the Sebi proposal to raise the annual ISIN limit for private debt securities on the market.</a:t>
             </a:r>
           </a:p>
           <a:p>
@@ -5080,7 +5080,7 @@
                 </a:solidFill>
                 <a:latin typeface="Calibri"/>
               </a:rPr>
-              <a:t>•  The performance of IPOs launching next week, with over ₹7,400 crore expected to be raised.</a:t>
+              <a:t>•  The reaction of Zee Entertainment's stock to its Q1 results, which showed a 48% YoY decline in PAT.</a:t>
             </a:r>
           </a:p>
         </p:txBody>

--- a/public/deskbrief.pptx
+++ b/public/deskbrief.pptx
@@ -3128,7 +3128,7 @@
                 </a:solidFill>
                 <a:latin typeface="Calibri"/>
               </a:rPr>
-              <a:t>8 names  |  generated 10 Aug 2026 13:52  |  source: Yahoo Finance via yfinance, Indian financial RSS</a:t>
+              <a:t>8 names  |  generated 11 Aug 2026 13:51  |  source: Yahoo Finance via yfinance, Indian financial RSS</a:t>
             </a:r>
           </a:p>
         </p:txBody>
@@ -3428,7 +3428,7 @@
                           </a:solidFill>
                           <a:latin typeface="Calibri"/>
                         </a:rPr>
-                        <a:t>1,943</a:t>
+                        <a:t>1,915</a:t>
                       </a:r>
                     </a:p>
                   </a:txBody>
@@ -3451,7 +3451,7 @@
                           </a:solidFill>
                           <a:latin typeface="Calibri"/>
                         </a:rPr>
-                        <a:t>-0.86%</a:t>
+                        <a:t>-1.43%</a:t>
                       </a:r>
                     </a:p>
                   </a:txBody>
@@ -3474,7 +3474,7 @@
                           </a:solidFill>
                           <a:latin typeface="Calibri"/>
                         </a:rPr>
-                        <a:t>-1.40%</a:t>
+                        <a:t>-2.79%</a:t>
                       </a:r>
                     </a:p>
                   </a:txBody>
@@ -3497,7 +3497,7 @@
                           </a:solidFill>
                           <a:latin typeface="Calibri"/>
                         </a:rPr>
-                        <a:t>+2.45%</a:t>
+                        <a:t>+1.97%</a:t>
                       </a:r>
                     </a:p>
                   </a:txBody>
@@ -3520,7 +3520,7 @@
                           </a:solidFill>
                           <a:latin typeface="Calibri"/>
                         </a:rPr>
-                        <a:t>-9.0%</a:t>
+                        <a:t>-10.3%</a:t>
                       </a:r>
                     </a:p>
                   </a:txBody>
@@ -3543,7 +3543,7 @@
                           </a:solidFill>
                           <a:latin typeface="Calibri"/>
                         </a:rPr>
-                        <a:t>17%</a:t>
+                        <a:t>18%</a:t>
                       </a:r>
                     </a:p>
                   </a:txBody>
@@ -3566,7 +3566,7 @@
                           </a:solidFill>
                           <a:latin typeface="Calibri"/>
                         </a:rPr>
-                        <a:t>40.6</a:t>
+                        <a:t>40.1</a:t>
                       </a:r>
                     </a:p>
                   </a:txBody>
@@ -3614,7 +3614,7 @@
                           </a:solidFill>
                           <a:latin typeface="Calibri"/>
                         </a:rPr>
-                        <a:t>731</a:t>
+                        <a:t>729</a:t>
                       </a:r>
                     </a:p>
                   </a:txBody>
@@ -3633,11 +3633,80 @@
                       <a:r>
                         <a:rPr sz="1000" b="0">
                           <a:solidFill>
+                            <a:srgbClr val="B3261E"/>
+                          </a:solidFill>
+                          <a:latin typeface="Calibri"/>
+                        </a:rPr>
+                        <a:t>-0.27%</a:t>
+                      </a:r>
+                    </a:p>
+                  </a:txBody>
+                  <a:tcPr>
+                    <a:solidFill>
+                      <a:srgbClr val="FFFFFF"/>
+                    </a:solidFill>
+                  </a:tcPr>
+                </a:tc>
+                <a:tc>
+                  <a:txBody>
+                    <a:bodyPr/>
+                    <a:lstStyle/>
+                    <a:p>
+                      <a:pPr algn="r"/>
+                      <a:r>
+                        <a:rPr sz="1000" b="0">
+                          <a:solidFill>
+                            <a:srgbClr val="B3261E"/>
+                          </a:solidFill>
+                          <a:latin typeface="Calibri"/>
+                        </a:rPr>
+                        <a:t>-1.75%</a:t>
+                      </a:r>
+                    </a:p>
+                  </a:txBody>
+                  <a:tcPr>
+                    <a:solidFill>
+                      <a:srgbClr val="FFFFFF"/>
+                    </a:solidFill>
+                  </a:tcPr>
+                </a:tc>
+                <a:tc>
+                  <a:txBody>
+                    <a:bodyPr/>
+                    <a:lstStyle/>
+                    <a:p>
+                      <a:pPr algn="r"/>
+                      <a:r>
+                        <a:rPr sz="1000" b="0">
+                          <a:solidFill>
+                            <a:srgbClr val="B3261E"/>
+                          </a:solidFill>
+                          <a:latin typeface="Calibri"/>
+                        </a:rPr>
+                        <a:t>-10.87%</a:t>
+                      </a:r>
+                    </a:p>
+                  </a:txBody>
+                  <a:tcPr>
+                    <a:solidFill>
+                      <a:srgbClr val="FFFFFF"/>
+                    </a:solidFill>
+                  </a:tcPr>
+                </a:tc>
+                <a:tc>
+                  <a:txBody>
+                    <a:bodyPr/>
+                    <a:lstStyle/>
+                    <a:p>
+                      <a:pPr algn="r"/>
+                      <a:r>
+                        <a:rPr sz="1000" b="0">
+                          <a:solidFill>
                             <a:srgbClr val="1F2A37"/>
                           </a:solidFill>
                           <a:latin typeface="Calibri"/>
                         </a:rPr>
-                        <a:t>+0.00%</a:t>
+                        <a:t>-26.6%</a:t>
                       </a:r>
                     </a:p>
                   </a:txBody>
@@ -3656,11 +3725,11 @@
                       <a:r>
                         <a:rPr sz="1000" b="0">
                           <a:solidFill>
-                            <a:srgbClr val="B3261E"/>
-                          </a:solidFill>
-                          <a:latin typeface="Calibri"/>
-                        </a:rPr>
-                        <a:t>-2.92%</a:t>
+                            <a:srgbClr val="1F2A37"/>
+                          </a:solidFill>
+                          <a:latin typeface="Calibri"/>
+                        </a:rPr>
+                        <a:t>24%</a:t>
                       </a:r>
                     </a:p>
                   </a:txBody>
@@ -3679,80 +3748,11 @@
                       <a:r>
                         <a:rPr sz="1000" b="0">
                           <a:solidFill>
-                            <a:srgbClr val="B3261E"/>
-                          </a:solidFill>
-                          <a:latin typeface="Calibri"/>
-                        </a:rPr>
-                        <a:t>-11.39%</a:t>
-                      </a:r>
-                    </a:p>
-                  </a:txBody>
-                  <a:tcPr>
-                    <a:solidFill>
-                      <a:srgbClr val="FFFFFF"/>
-                    </a:solidFill>
-                  </a:tcPr>
-                </a:tc>
-                <a:tc>
-                  <a:txBody>
-                    <a:bodyPr/>
-                    <a:lstStyle/>
-                    <a:p>
-                      <a:pPr algn="r"/>
-                      <a:r>
-                        <a:rPr sz="1000" b="0">
-                          <a:solidFill>
                             <a:srgbClr val="1F2A37"/>
                           </a:solidFill>
                           <a:latin typeface="Calibri"/>
                         </a:rPr>
-                        <a:t>-26.4%</a:t>
-                      </a:r>
-                    </a:p>
-                  </a:txBody>
-                  <a:tcPr>
-                    <a:solidFill>
-                      <a:srgbClr val="FFFFFF"/>
-                    </a:solidFill>
-                  </a:tcPr>
-                </a:tc>
-                <a:tc>
-                  <a:txBody>
-                    <a:bodyPr/>
-                    <a:lstStyle/>
-                    <a:p>
-                      <a:pPr algn="r"/>
-                      <a:r>
-                        <a:rPr sz="1000" b="0">
-                          <a:solidFill>
-                            <a:srgbClr val="1F2A37"/>
-                          </a:solidFill>
-                          <a:latin typeface="Calibri"/>
-                        </a:rPr>
-                        <a:t>24%</a:t>
-                      </a:r>
-                    </a:p>
-                  </a:txBody>
-                  <a:tcPr>
-                    <a:solidFill>
-                      <a:srgbClr val="FFFFFF"/>
-                    </a:solidFill>
-                  </a:tcPr>
-                </a:tc>
-                <a:tc>
-                  <a:txBody>
-                    <a:bodyPr/>
-                    <a:lstStyle/>
-                    <a:p>
-                      <a:pPr algn="r"/>
-                      <a:r>
-                        <a:rPr sz="1000" b="0">
-                          <a:solidFill>
-                            <a:srgbClr val="1F2A37"/>
-                          </a:solidFill>
-                          <a:latin typeface="Calibri"/>
-                        </a:rPr>
-                        <a:t>16.0</a:t>
+                        <a:t>15.9</a:t>
                       </a:r>
                     </a:p>
                   </a:txBody>
@@ -3800,7 +3800,7 @@
                           </a:solidFill>
                           <a:latin typeface="Calibri"/>
                         </a:rPr>
-                        <a:t>1,432</a:t>
+                        <a:t>1,430</a:t>
                       </a:r>
                     </a:p>
                   </a:txBody>
@@ -3819,11 +3819,57 @@
                       <a:r>
                         <a:rPr sz="1000" b="0">
                           <a:solidFill>
+                            <a:srgbClr val="B3261E"/>
+                          </a:solidFill>
+                          <a:latin typeface="Calibri"/>
+                        </a:rPr>
+                        <a:t>-0.15%</a:t>
+                      </a:r>
+                    </a:p>
+                  </a:txBody>
+                  <a:tcPr>
+                    <a:solidFill>
+                      <a:srgbClr val="F3F5F7"/>
+                    </a:solidFill>
+                  </a:tcPr>
+                </a:tc>
+                <a:tc>
+                  <a:txBody>
+                    <a:bodyPr/>
+                    <a:lstStyle/>
+                    <a:p>
+                      <a:pPr algn="r"/>
+                      <a:r>
+                        <a:rPr sz="1000" b="0">
+                          <a:solidFill>
+                            <a:srgbClr val="B3261E"/>
+                          </a:solidFill>
+                          <a:latin typeface="Calibri"/>
+                        </a:rPr>
+                        <a:t>-1.72%</a:t>
+                      </a:r>
+                    </a:p>
+                  </a:txBody>
+                  <a:tcPr>
+                    <a:solidFill>
+                      <a:srgbClr val="F3F5F7"/>
+                    </a:solidFill>
+                  </a:tcPr>
+                </a:tc>
+                <a:tc>
+                  <a:txBody>
+                    <a:bodyPr/>
+                    <a:lstStyle/>
+                    <a:p>
+                      <a:pPr algn="r"/>
+                      <a:r>
+                        <a:rPr sz="1000" b="0">
+                          <a:solidFill>
                             <a:srgbClr val="0B7A3B"/>
                           </a:solidFill>
                           <a:latin typeface="Calibri"/>
                         </a:rPr>
-                        <a:t>+0.76%</a:t>
+                        <a:t>+2.28%</a:t>
                       </a:r>
                     </a:p>
                   </a:txBody>
@@ -3842,57 +3888,11 @@
                       <a:r>
                         <a:rPr sz="1000" b="0">
                           <a:solidFill>
-                            <a:srgbClr val="B3261E"/>
-                          </a:solidFill>
-                          <a:latin typeface="Calibri"/>
-                        </a:rPr>
-                        <a:t>-1.93%</a:t>
-                      </a:r>
-                    </a:p>
-                  </a:txBody>
-                  <a:tcPr>
-                    <a:solidFill>
-                      <a:srgbClr val="F3F5F7"/>
-                    </a:solidFill>
-                  </a:tcPr>
-                </a:tc>
-                <a:tc>
-                  <a:txBody>
-                    <a:bodyPr/>
-                    <a:lstStyle/>
-                    <a:p>
-                      <a:pPr algn="r"/>
-                      <a:r>
-                        <a:rPr sz="1000" b="0">
-                          <a:solidFill>
-                            <a:srgbClr val="0B7A3B"/>
-                          </a:solidFill>
-                          <a:latin typeface="Calibri"/>
-                        </a:rPr>
-                        <a:t>+3.05%</a:t>
-                      </a:r>
-                    </a:p>
-                  </a:txBody>
-                  <a:tcPr>
-                    <a:solidFill>
-                      <a:srgbClr val="F3F5F7"/>
-                    </a:solidFill>
-                  </a:tcPr>
-                </a:tc>
-                <a:tc>
-                  <a:txBody>
-                    <a:bodyPr/>
-                    <a:lstStyle/>
-                    <a:p>
-                      <a:pPr algn="r"/>
-                      <a:r>
-                        <a:rPr sz="1000" b="0">
-                          <a:solidFill>
                             <a:srgbClr val="1F2A37"/>
                           </a:solidFill>
                           <a:latin typeface="Calibri"/>
                         </a:rPr>
-                        <a:t>-1.9%</a:t>
+                        <a:t>-2.1%</a:t>
                       </a:r>
                     </a:p>
                   </a:txBody>
@@ -3986,7 +3986,7 @@
                           </a:solidFill>
                           <a:latin typeface="Calibri"/>
                         </a:rPr>
-                        <a:t>1,183</a:t>
+                        <a:t>1,191</a:t>
                       </a:r>
                     </a:p>
                   </a:txBody>
@@ -4009,7 +4009,7 @@
                           </a:solidFill>
                           <a:latin typeface="Calibri"/>
                         </a:rPr>
-                        <a:t>+0.67%</a:t>
+                        <a:t>+0.65%</a:t>
                       </a:r>
                     </a:p>
                   </a:txBody>
@@ -4032,7 +4032,7 @@
                           </a:solidFill>
                           <a:latin typeface="Calibri"/>
                         </a:rPr>
-                        <a:t>+0.25%</a:t>
+                        <a:t>+1.99%</a:t>
                       </a:r>
                     </a:p>
                   </a:txBody>
@@ -4055,7 +4055,7 @@
                           </a:solidFill>
                           <a:latin typeface="Calibri"/>
                         </a:rPr>
-                        <a:t>+10.77%</a:t>
+                        <a:t>+7.99%</a:t>
                       </a:r>
                     </a:p>
                   </a:txBody>
@@ -4078,7 +4078,7 @@
                           </a:solidFill>
                           <a:latin typeface="Calibri"/>
                         </a:rPr>
-                        <a:t>-28.5%</a:t>
+                        <a:t>-28.0%</a:t>
                       </a:r>
                     </a:p>
                   </a:txBody>
@@ -4101,7 +4101,7 @@
                           </a:solidFill>
                           <a:latin typeface="Calibri"/>
                         </a:rPr>
-                        <a:t>35%</a:t>
+                        <a:t>33%</a:t>
                       </a:r>
                     </a:p>
                   </a:txBody>
@@ -4172,7 +4172,7 @@
                           </a:solidFill>
                           <a:latin typeface="Calibri"/>
                         </a:rPr>
-                        <a:t>283</a:t>
+                        <a:t>279</a:t>
                       </a:r>
                     </a:p>
                   </a:txBody>
@@ -4195,7 +4195,7 @@
                           </a:solidFill>
                           <a:latin typeface="Calibri"/>
                         </a:rPr>
-                        <a:t>-1.21%</a:t>
+                        <a:t>-1.29%</a:t>
                       </a:r>
                     </a:p>
                   </a:txBody>
@@ -4218,7 +4218,7 @@
                           </a:solidFill>
                           <a:latin typeface="Calibri"/>
                         </a:rPr>
-                        <a:t>-1.52%</a:t>
+                        <a:t>-3.46%</a:t>
                       </a:r>
                     </a:p>
                   </a:txBody>
@@ -4237,11 +4237,11 @@
                       <a:r>
                         <a:rPr sz="1000" b="0">
                           <a:solidFill>
-                            <a:srgbClr val="0B7A3B"/>
-                          </a:solidFill>
-                          <a:latin typeface="Calibri"/>
-                        </a:rPr>
-                        <a:t>+0.32%</a:t>
+                            <a:srgbClr val="B3261E"/>
+                          </a:solidFill>
+                          <a:latin typeface="Calibri"/>
+                        </a:rPr>
+                        <a:t>-0.23%</a:t>
                       </a:r>
                     </a:p>
                   </a:txBody>
@@ -4264,7 +4264,7 @@
                           </a:solidFill>
                           <a:latin typeface="Calibri"/>
                         </a:rPr>
-                        <a:t>-29.7%</a:t>
+                        <a:t>-30.6%</a:t>
                       </a:r>
                     </a:p>
                   </a:txBody>
@@ -4310,7 +4310,7 @@
                           </a:solidFill>
                           <a:latin typeface="Calibri"/>
                         </a:rPr>
-                        <a:t>17.8</a:t>
+                        <a:t>17.6</a:t>
                       </a:r>
                     </a:p>
                   </a:txBody>
@@ -4358,7 +4358,7 @@
                           </a:solidFill>
                           <a:latin typeface="Calibri"/>
                         </a:rPr>
-                        <a:t>4,080</a:t>
+                        <a:t>4,037</a:t>
                       </a:r>
                     </a:p>
                   </a:txBody>
@@ -4377,11 +4377,34 @@
                       <a:r>
                         <a:rPr sz="1000" b="0">
                           <a:solidFill>
+                            <a:srgbClr val="B3261E"/>
+                          </a:solidFill>
+                          <a:latin typeface="Calibri"/>
+                        </a:rPr>
+                        <a:t>-1.04%</a:t>
+                      </a:r>
+                    </a:p>
+                  </a:txBody>
+                  <a:tcPr>
+                    <a:solidFill>
+                      <a:srgbClr val="FFFFFF"/>
+                    </a:solidFill>
+                  </a:tcPr>
+                </a:tc>
+                <a:tc>
+                  <a:txBody>
+                    <a:bodyPr/>
+                    <a:lstStyle/>
+                    <a:p>
+                      <a:pPr algn="r"/>
+                      <a:r>
+                        <a:rPr sz="1000" b="0">
+                          <a:solidFill>
                             <a:srgbClr val="0B7A3B"/>
                           </a:solidFill>
                           <a:latin typeface="Calibri"/>
                         </a:rPr>
-                        <a:t>+0.59%</a:t>
+                        <a:t>+1.19%</a:t>
                       </a:r>
                     </a:p>
                   </a:txBody>
@@ -4404,7 +4427,7 @@
                           </a:solidFill>
                           <a:latin typeface="Calibri"/>
                         </a:rPr>
-                        <a:t>+1.37%</a:t>
+                        <a:t>+2.77%</a:t>
                       </a:r>
                     </a:p>
                   </a:txBody>
@@ -4423,11 +4446,11 @@
                       <a:r>
                         <a:rPr sz="1000" b="0">
                           <a:solidFill>
-                            <a:srgbClr val="0B7A3B"/>
-                          </a:solidFill>
-                          <a:latin typeface="Calibri"/>
-                        </a:rPr>
-                        <a:t>+3.40%</a:t>
+                            <a:srgbClr val="1F2A37"/>
+                          </a:solidFill>
+                          <a:latin typeface="Calibri"/>
+                        </a:rPr>
+                        <a:t>-7.7%</a:t>
                       </a:r>
                     </a:p>
                   </a:txBody>
@@ -4450,7 +4473,7 @@
                           </a:solidFill>
                           <a:latin typeface="Calibri"/>
                         </a:rPr>
-                        <a:t>-6.8%</a:t>
+                        <a:t>19%</a:t>
                       </a:r>
                     </a:p>
                   </a:txBody>
@@ -4473,30 +4496,7 @@
                           </a:solidFill>
                           <a:latin typeface="Calibri"/>
                         </a:rPr>
-                        <a:t>18%</a:t>
-                      </a:r>
-                    </a:p>
-                  </a:txBody>
-                  <a:tcPr>
-                    <a:solidFill>
-                      <a:srgbClr val="FFFFFF"/>
-                    </a:solidFill>
-                  </a:tcPr>
-                </a:tc>
-                <a:tc>
-                  <a:txBody>
-                    <a:bodyPr/>
-                    <a:lstStyle/>
-                    <a:p>
-                      <a:pPr algn="r"/>
-                      <a:r>
-                        <a:rPr sz="1000" b="0">
-                          <a:solidFill>
-                            <a:srgbClr val="1F2A37"/>
-                          </a:solidFill>
-                          <a:latin typeface="Calibri"/>
-                        </a:rPr>
-                        <a:t>33.9</a:t>
+                        <a:t>33.5</a:t>
                       </a:r>
                     </a:p>
                   </a:txBody>
@@ -4544,7 +4544,7 @@
                           </a:solidFill>
                           <a:latin typeface="Calibri"/>
                         </a:rPr>
-                        <a:t>1,327</a:t>
+                        <a:t>1,324</a:t>
                       </a:r>
                     </a:p>
                   </a:txBody>
@@ -4567,7 +4567,7 @@
                           </a:solidFill>
                           <a:latin typeface="Calibri"/>
                         </a:rPr>
-                        <a:t>-0.56%</a:t>
+                        <a:t>-0.26%</a:t>
                       </a:r>
                     </a:p>
                   </a:txBody>
@@ -4590,7 +4590,7 @@
                           </a:solidFill>
                           <a:latin typeface="Calibri"/>
                         </a:rPr>
-                        <a:t>+0.63%</a:t>
+                        <a:t>+2.56%</a:t>
                       </a:r>
                     </a:p>
                   </a:txBody>
@@ -4613,7 +4613,7 @@
                           </a:solidFill>
                           <a:latin typeface="Calibri"/>
                         </a:rPr>
-                        <a:t>+1.49%</a:t>
+                        <a:t>+2.08%</a:t>
                       </a:r>
                     </a:p>
                   </a:txBody>
@@ -4636,7 +4636,7 @@
                           </a:solidFill>
                           <a:latin typeface="Calibri"/>
                         </a:rPr>
-                        <a:t>-16.3%</a:t>
+                        <a:t>-16.5%</a:t>
                       </a:r>
                     </a:p>
                   </a:txBody>
@@ -4682,7 +4682,7 @@
                           </a:solidFill>
                           <a:latin typeface="Calibri"/>
                         </a:rPr>
-                        <a:t>24.0</a:t>
+                        <a:t>24.1</a:t>
                       </a:r>
                     </a:p>
                   </a:txBody>
@@ -4730,7 +4730,7 @@
                           </a:solidFill>
                           <a:latin typeface="Calibri"/>
                         </a:rPr>
-                        <a:t>2,426</a:t>
+                        <a:t>2,446</a:t>
                       </a:r>
                     </a:p>
                   </a:txBody>
@@ -4749,11 +4749,34 @@
                       <a:r>
                         <a:rPr sz="1000" b="0">
                           <a:solidFill>
+                            <a:srgbClr val="0B7A3B"/>
+                          </a:solidFill>
+                          <a:latin typeface="Calibri"/>
+                        </a:rPr>
+                        <a:t>+0.82%</a:t>
+                      </a:r>
+                    </a:p>
+                  </a:txBody>
+                  <a:tcPr>
+                    <a:solidFill>
+                      <a:srgbClr val="FFFFFF"/>
+                    </a:solidFill>
+                  </a:tcPr>
+                </a:tc>
+                <a:tc>
+                  <a:txBody>
+                    <a:bodyPr/>
+                    <a:lstStyle/>
+                    <a:p>
+                      <a:pPr algn="r"/>
+                      <a:r>
+                        <a:rPr sz="1000" b="0">
+                          <a:solidFill>
                             <a:srgbClr val="B3261E"/>
                           </a:solidFill>
                           <a:latin typeface="Calibri"/>
                         </a:rPr>
-                        <a:t>-1.10%</a:t>
+                        <a:t>-0.58%</a:t>
                       </a:r>
                     </a:p>
                   </a:txBody>
@@ -4772,11 +4795,11 @@
                       <a:r>
                         <a:rPr sz="1000" b="0">
                           <a:solidFill>
-                            <a:srgbClr val="B3261E"/>
-                          </a:solidFill>
-                          <a:latin typeface="Calibri"/>
-                        </a:rPr>
-                        <a:t>-1.94%</a:t>
+                            <a:srgbClr val="0B7A3B"/>
+                          </a:solidFill>
+                          <a:latin typeface="Calibri"/>
+                        </a:rPr>
+                        <a:t>+12.73%</a:t>
                       </a:r>
                     </a:p>
                   </a:txBody>
@@ -4795,11 +4818,11 @@
                       <a:r>
                         <a:rPr sz="1000" b="0">
                           <a:solidFill>
-                            <a:srgbClr val="0B7A3B"/>
-                          </a:solidFill>
-                          <a:latin typeface="Calibri"/>
-                        </a:rPr>
-                        <a:t>+17.88%</a:t>
+                            <a:srgbClr val="1F2A37"/>
+                          </a:solidFill>
+                          <a:latin typeface="Calibri"/>
+                        </a:rPr>
+                        <a:t>-23.7%</a:t>
                       </a:r>
                     </a:p>
                   </a:txBody>
@@ -4822,7 +4845,7 @@
                           </a:solidFill>
                           <a:latin typeface="Calibri"/>
                         </a:rPr>
-                        <a:t>-24.3%</a:t>
+                        <a:t>35%</a:t>
                       </a:r>
                     </a:p>
                   </a:txBody>
@@ -4845,30 +4868,7 @@
                           </a:solidFill>
                           <a:latin typeface="Calibri"/>
                         </a:rPr>
-                        <a:t>37%</a:t>
-                      </a:r>
-                    </a:p>
-                  </a:txBody>
-                  <a:tcPr>
-                    <a:solidFill>
-                      <a:srgbClr val="FFFFFF"/>
-                    </a:solidFill>
-                  </a:tcPr>
-                </a:tc>
-                <a:tc>
-                  <a:txBody>
-                    <a:bodyPr/>
-                    <a:lstStyle/>
-                    <a:p>
-                      <a:pPr algn="r"/>
-                      <a:r>
-                        <a:rPr sz="1000" b="0">
-                          <a:solidFill>
-                            <a:srgbClr val="1F2A37"/>
-                          </a:solidFill>
-                          <a:latin typeface="Calibri"/>
-                        </a:rPr>
-                        <a:t>17.6</a:t>
+                        <a:t>17.8</a:t>
                       </a:r>
                     </a:p>
                   </a:txBody>
@@ -4952,7 +4952,7 @@
                 </a:solidFill>
                 <a:latin typeface="Calibri"/>
               </a:rPr>
-              <a:t>Indian large caps experienced mixed returns, with INFY.NS and TCS.NS showing strong 21-day returns of 10.77% and 17.88%, respectively.</a:t>
+              <a:t>Indian large caps experienced a mixed day with INFY.NS and TCS.NS showing positive returns, while most other stocks declined.</a:t>
             </a:r>
           </a:p>
           <a:p>
@@ -4968,7 +4968,7 @@
                 </a:solidFill>
                 <a:latin typeface="Calibri"/>
               </a:rPr>
-              <a:t>•  HDFCBANK.NS and ICICIBANK.NS have underperformed in the 21-day period, with returns of -11.39% and 3.05%, respectively.</a:t>
+              <a:t>•  INFY.NS and TCS.NS were among the top performers, with returns of +0.65% and +0.82% respectively.</a:t>
             </a:r>
           </a:p>
           <a:p>
@@ -4984,7 +4984,7 @@
                 </a:solidFill>
                 <a:latin typeface="Calibri"/>
               </a:rPr>
-              <a:t>•  The P/E ratio of LT.NS stands at 33.9, significantly higher than the other large caps.</a:t>
+              <a:t>•  HDFCBANK.NS and ICICIBANK.NS showed relatively stable performance, with declines of -0.27% and -0.15% respectively.</a:t>
             </a:r>
           </a:p>
           <a:p>
@@ -5000,7 +5000,7 @@
                 </a:solidFill>
                 <a:latin typeface="Calibri"/>
               </a:rPr>
-              <a:t>•  RELIANCE.NS has seen a relatively stable 21-day return of 1.49%, despite being down 16.26% from its 52-week high.</a:t>
+              <a:t>•  The S&amp;P 500 and Nasdaq opened higher, potentially influencing Indian market sentiment.</a:t>
             </a:r>
           </a:p>
           <a:p>
@@ -5016,7 +5016,7 @@
                 </a:solidFill>
                 <a:latin typeface="Calibri"/>
               </a:rPr>
-              <a:t>•  BHARTIARTL.NS has entered a strategic collaboration with ITI to accelerate India's digital transformation.</a:t>
+              <a:t>•  Several Indian companies reported significant increases in net profit, including Manappuram Finance and Motor &amp; General Finance.</a:t>
             </a:r>
           </a:p>
           <a:p>
@@ -5048,7 +5048,7 @@
                 </a:solidFill>
                 <a:latin typeface="Calibri"/>
               </a:rPr>
-              <a:t>•  The performance of INFY.NS and TCS.NS in the technology sector, given their strong 21-day returns.</a:t>
+              <a:t>•  The performance of HDFCBANK.NS and ICICIBANK.NS, given their relatively stable returns today.</a:t>
             </a:r>
           </a:p>
           <a:p>
@@ -5064,7 +5064,7 @@
                 </a:solidFill>
                 <a:latin typeface="Calibri"/>
               </a:rPr>
-              <a:t>•  The impact of the Sebi proposal to raise the annual ISIN limit for private debt securities on the market.</a:t>
+              <a:t>•  The impact of the new US-Iran peace proposal on the Indian market.</a:t>
             </a:r>
           </a:p>
           <a:p>
@@ -5080,7 +5080,7 @@
                 </a:solidFill>
                 <a:latin typeface="Calibri"/>
               </a:rPr>
-              <a:t>•  The reaction of Zee Entertainment's stock to its Q1 results, which showed a 48% YoY decline in PAT.</a:t>
+              <a:t>•  The upcoming IPO of Sunshine Pictures, with a price band set at ₹342-360.</a:t>
             </a:r>
           </a:p>
         </p:txBody>

--- a/public/deskbrief.pptx
+++ b/public/deskbrief.pptx
@@ -3128,7 +3128,7 @@
                 </a:solidFill>
                 <a:latin typeface="Calibri"/>
               </a:rPr>
-              <a:t>8 names  |  generated 11 Aug 2026 13:51  |  source: Yahoo Finance via yfinance, Indian financial RSS</a:t>
+              <a:t>8 names  |  generated 12 Aug 2026 13:55  |  source: Yahoo Finance via yfinance, Indian financial RSS</a:t>
             </a:r>
           </a:p>
         </p:txBody>
@@ -3428,7 +3428,7 @@
                           </a:solidFill>
                           <a:latin typeface="Calibri"/>
                         </a:rPr>
-                        <a:t>1,915</a:t>
+                        <a:t>1,945</a:t>
                       </a:r>
                     </a:p>
                   </a:txBody>
@@ -3447,11 +3447,34 @@
                       <a:r>
                         <a:rPr sz="1000" b="0">
                           <a:solidFill>
+                            <a:srgbClr val="0B7A3B"/>
+                          </a:solidFill>
+                          <a:latin typeface="Calibri"/>
+                        </a:rPr>
+                        <a:t>+1.56%</a:t>
+                      </a:r>
+                    </a:p>
+                  </a:txBody>
+                  <a:tcPr>
+                    <a:solidFill>
+                      <a:srgbClr val="F3F5F7"/>
+                    </a:solidFill>
+                  </a:tcPr>
+                </a:tc>
+                <a:tc>
+                  <a:txBody>
+                    <a:bodyPr/>
+                    <a:lstStyle/>
+                    <a:p>
+                      <a:pPr algn="r"/>
+                      <a:r>
+                        <a:rPr sz="1000" b="0">
+                          <a:solidFill>
                             <a:srgbClr val="B3261E"/>
                           </a:solidFill>
                           <a:latin typeface="Calibri"/>
                         </a:rPr>
-                        <a:t>-1.43%</a:t>
+                        <a:t>-1.67%</a:t>
                       </a:r>
                     </a:p>
                   </a:txBody>
@@ -3470,11 +3493,11 @@
                       <a:r>
                         <a:rPr sz="1000" b="0">
                           <a:solidFill>
-                            <a:srgbClr val="B3261E"/>
-                          </a:solidFill>
-                          <a:latin typeface="Calibri"/>
-                        </a:rPr>
-                        <a:t>-2.79%</a:t>
+                            <a:srgbClr val="0B7A3B"/>
+                          </a:solidFill>
+                          <a:latin typeface="Calibri"/>
+                        </a:rPr>
+                        <a:t>+1.70%</a:t>
                       </a:r>
                     </a:p>
                   </a:txBody>
@@ -3493,11 +3516,11 @@
                       <a:r>
                         <a:rPr sz="1000" b="0">
                           <a:solidFill>
-                            <a:srgbClr val="0B7A3B"/>
-                          </a:solidFill>
-                          <a:latin typeface="Calibri"/>
-                        </a:rPr>
-                        <a:t>+1.97%</a:t>
+                            <a:srgbClr val="1F2A37"/>
+                          </a:solidFill>
+                          <a:latin typeface="Calibri"/>
+                        </a:rPr>
+                        <a:t>-8.9%</a:t>
                       </a:r>
                     </a:p>
                   </a:txBody>
@@ -3520,7 +3543,7 @@
                           </a:solidFill>
                           <a:latin typeface="Calibri"/>
                         </a:rPr>
-                        <a:t>-10.3%</a:t>
+                        <a:t>18%</a:t>
                       </a:r>
                     </a:p>
                   </a:txBody>
@@ -3543,30 +3566,7 @@
                           </a:solidFill>
                           <a:latin typeface="Calibri"/>
                         </a:rPr>
-                        <a:t>18%</a:t>
-                      </a:r>
-                    </a:p>
-                  </a:txBody>
-                  <a:tcPr>
-                    <a:solidFill>
-                      <a:srgbClr val="F3F5F7"/>
-                    </a:solidFill>
-                  </a:tcPr>
-                </a:tc>
-                <a:tc>
-                  <a:txBody>
-                    <a:bodyPr/>
-                    <a:lstStyle/>
-                    <a:p>
-                      <a:pPr algn="r"/>
-                      <a:r>
-                        <a:rPr sz="1000" b="0">
-                          <a:solidFill>
-                            <a:srgbClr val="1F2A37"/>
-                          </a:solidFill>
-                          <a:latin typeface="Calibri"/>
-                        </a:rPr>
-                        <a:t>40.1</a:t>
+                        <a:t>40.6</a:t>
                       </a:r>
                     </a:p>
                   </a:txBody>
@@ -3633,11 +3633,34 @@
                       <a:r>
                         <a:rPr sz="1000" b="0">
                           <a:solidFill>
+                            <a:srgbClr val="1F2A37"/>
+                          </a:solidFill>
+                          <a:latin typeface="Calibri"/>
+                        </a:rPr>
+                        <a:t>+0.00%</a:t>
+                      </a:r>
+                    </a:p>
+                  </a:txBody>
+                  <a:tcPr>
+                    <a:solidFill>
+                      <a:srgbClr val="FFFFFF"/>
+                    </a:solidFill>
+                  </a:tcPr>
+                </a:tc>
+                <a:tc>
+                  <a:txBody>
+                    <a:bodyPr/>
+                    <a:lstStyle/>
+                    <a:p>
+                      <a:pPr algn="r"/>
+                      <a:r>
+                        <a:rPr sz="1000" b="0">
+                          <a:solidFill>
                             <a:srgbClr val="B3261E"/>
                           </a:solidFill>
                           <a:latin typeface="Calibri"/>
                         </a:rPr>
-                        <a:t>-0.27%</a:t>
+                        <a:t>-0.82%</a:t>
                       </a:r>
                     </a:p>
                   </a:txBody>
@@ -3660,7 +3683,7 @@
                           </a:solidFill>
                           <a:latin typeface="Calibri"/>
                         </a:rPr>
-                        <a:t>-1.75%</a:t>
+                        <a:t>-9.93%</a:t>
                       </a:r>
                     </a:p>
                   </a:txBody>
@@ -3679,11 +3702,11 @@
                       <a:r>
                         <a:rPr sz="1000" b="0">
                           <a:solidFill>
-                            <a:srgbClr val="B3261E"/>
-                          </a:solidFill>
-                          <a:latin typeface="Calibri"/>
-                        </a:rPr>
-                        <a:t>-10.87%</a:t>
+                            <a:srgbClr val="1F2A37"/>
+                          </a:solidFill>
+                          <a:latin typeface="Calibri"/>
+                        </a:rPr>
+                        <a:t>-26.6%</a:t>
                       </a:r>
                     </a:p>
                   </a:txBody>
@@ -3706,7 +3729,7 @@
                           </a:solidFill>
                           <a:latin typeface="Calibri"/>
                         </a:rPr>
-                        <a:t>-26.6%</a:t>
+                        <a:t>24%</a:t>
                       </a:r>
                     </a:p>
                   </a:txBody>
@@ -3729,30 +3752,7 @@
                           </a:solidFill>
                           <a:latin typeface="Calibri"/>
                         </a:rPr>
-                        <a:t>24%</a:t>
-                      </a:r>
-                    </a:p>
-                  </a:txBody>
-                  <a:tcPr>
-                    <a:solidFill>
-                      <a:srgbClr val="FFFFFF"/>
-                    </a:solidFill>
-                  </a:tcPr>
-                </a:tc>
-                <a:tc>
-                  <a:txBody>
-                    <a:bodyPr/>
-                    <a:lstStyle/>
-                    <a:p>
-                      <a:pPr algn="r"/>
-                      <a:r>
-                        <a:rPr sz="1000" b="0">
-                          <a:solidFill>
-                            <a:srgbClr val="1F2A37"/>
-                          </a:solidFill>
-                          <a:latin typeface="Calibri"/>
-                        </a:rPr>
-                        <a:t>15.9</a:t>
+                        <a:t>16.0</a:t>
                       </a:r>
                     </a:p>
                   </a:txBody>
@@ -3800,7 +3800,7 @@
                           </a:solidFill>
                           <a:latin typeface="Calibri"/>
                         </a:rPr>
-                        <a:t>1,430</a:t>
+                        <a:t>1,432</a:t>
                       </a:r>
                     </a:p>
                   </a:txBody>
@@ -3819,11 +3819,34 @@
                       <a:r>
                         <a:rPr sz="1000" b="0">
                           <a:solidFill>
+                            <a:srgbClr val="0B7A3B"/>
+                          </a:solidFill>
+                          <a:latin typeface="Calibri"/>
+                        </a:rPr>
+                        <a:t>+0.15%</a:t>
+                      </a:r>
+                    </a:p>
+                  </a:txBody>
+                  <a:tcPr>
+                    <a:solidFill>
+                      <a:srgbClr val="F3F5F7"/>
+                    </a:solidFill>
+                  </a:tcPr>
+                </a:tc>
+                <a:tc>
+                  <a:txBody>
+                    <a:bodyPr/>
+                    <a:lstStyle/>
+                    <a:p>
+                      <a:pPr algn="r"/>
+                      <a:r>
+                        <a:rPr sz="1000" b="0">
+                          <a:solidFill>
                             <a:srgbClr val="B3261E"/>
                           </a:solidFill>
                           <a:latin typeface="Calibri"/>
                         </a:rPr>
-                        <a:t>-0.15%</a:t>
+                        <a:t>-1.27%</a:t>
                       </a:r>
                     </a:p>
                   </a:txBody>
@@ -3842,11 +3865,11 @@
                       <a:r>
                         <a:rPr sz="1000" b="0">
                           <a:solidFill>
-                            <a:srgbClr val="B3261E"/>
-                          </a:solidFill>
-                          <a:latin typeface="Calibri"/>
-                        </a:rPr>
-                        <a:t>-1.72%</a:t>
+                            <a:srgbClr val="0B7A3B"/>
+                          </a:solidFill>
+                          <a:latin typeface="Calibri"/>
+                        </a:rPr>
+                        <a:t>+2.56%</a:t>
                       </a:r>
                     </a:p>
                   </a:txBody>
@@ -3865,34 +3888,11 @@
                       <a:r>
                         <a:rPr sz="1000" b="0">
                           <a:solidFill>
-                            <a:srgbClr val="0B7A3B"/>
-                          </a:solidFill>
-                          <a:latin typeface="Calibri"/>
-                        </a:rPr>
-                        <a:t>+2.28%</a:t>
-                      </a:r>
-                    </a:p>
-                  </a:txBody>
-                  <a:tcPr>
-                    <a:solidFill>
-                      <a:srgbClr val="F3F5F7"/>
-                    </a:solidFill>
-                  </a:tcPr>
-                </a:tc>
-                <a:tc>
-                  <a:txBody>
-                    <a:bodyPr/>
-                    <a:lstStyle/>
-                    <a:p>
-                      <a:pPr algn="r"/>
-                      <a:r>
-                        <a:rPr sz="1000" b="0">
-                          <a:solidFill>
                             <a:srgbClr val="1F2A37"/>
                           </a:solidFill>
                           <a:latin typeface="Calibri"/>
                         </a:rPr>
-                        <a:t>-2.1%</a:t>
+                        <a:t>-1.9%</a:t>
                       </a:r>
                     </a:p>
                   </a:txBody>
@@ -3986,7 +3986,7 @@
                           </a:solidFill>
                           <a:latin typeface="Calibri"/>
                         </a:rPr>
-                        <a:t>1,191</a:t>
+                        <a:t>1,176</a:t>
                       </a:r>
                     </a:p>
                   </a:txBody>
@@ -4005,11 +4005,34 @@
                       <a:r>
                         <a:rPr sz="1000" b="0">
                           <a:solidFill>
+                            <a:srgbClr val="B3261E"/>
+                          </a:solidFill>
+                          <a:latin typeface="Calibri"/>
+                        </a:rPr>
+                        <a:t>-1.23%</a:t>
+                      </a:r>
+                    </a:p>
+                  </a:txBody>
+                  <a:tcPr>
+                    <a:solidFill>
+                      <a:srgbClr val="FFFFFF"/>
+                    </a:solidFill>
+                  </a:tcPr>
+                </a:tc>
+                <a:tc>
+                  <a:txBody>
+                    <a:bodyPr/>
+                    <a:lstStyle/>
+                    <a:p>
+                      <a:pPr algn="r"/>
+                      <a:r>
+                        <a:rPr sz="1000" b="0">
+                          <a:solidFill>
                             <a:srgbClr val="0B7A3B"/>
                           </a:solidFill>
                           <a:latin typeface="Calibri"/>
                         </a:rPr>
-                        <a:t>+0.65%</a:t>
+                        <a:t>+0.18%</a:t>
                       </a:r>
                     </a:p>
                   </a:txBody>
@@ -4032,7 +4055,7 @@
                           </a:solidFill>
                           <a:latin typeface="Calibri"/>
                         </a:rPr>
-                        <a:t>+1.99%</a:t>
+                        <a:t>+7.61%</a:t>
                       </a:r>
                     </a:p>
                   </a:txBody>
@@ -4051,11 +4074,11 @@
                       <a:r>
                         <a:rPr sz="1000" b="0">
                           <a:solidFill>
-                            <a:srgbClr val="0B7A3B"/>
-                          </a:solidFill>
-                          <a:latin typeface="Calibri"/>
-                        </a:rPr>
-                        <a:t>+7.99%</a:t>
+                            <a:srgbClr val="1F2A37"/>
+                          </a:solidFill>
+                          <a:latin typeface="Calibri"/>
+                        </a:rPr>
+                        <a:t>-28.9%</a:t>
                       </a:r>
                     </a:p>
                   </a:txBody>
@@ -4078,7 +4101,7 @@
                           </a:solidFill>
                           <a:latin typeface="Calibri"/>
                         </a:rPr>
-                        <a:t>-28.0%</a:t>
+                        <a:t>33%</a:t>
                       </a:r>
                     </a:p>
                   </a:txBody>
@@ -4101,30 +4124,7 @@
                           </a:solidFill>
                           <a:latin typeface="Calibri"/>
                         </a:rPr>
-                        <a:t>33%</a:t>
-                      </a:r>
-                    </a:p>
-                  </a:txBody>
-                  <a:tcPr>
-                    <a:solidFill>
-                      <a:srgbClr val="FFFFFF"/>
-                    </a:solidFill>
-                  </a:tcPr>
-                </a:tc>
-                <a:tc>
-                  <a:txBody>
-                    <a:bodyPr/>
-                    <a:lstStyle/>
-                    <a:p>
-                      <a:pPr algn="r"/>
-                      <a:r>
-                        <a:rPr sz="1000" b="0">
-                          <a:solidFill>
-                            <a:srgbClr val="1F2A37"/>
-                          </a:solidFill>
-                          <a:latin typeface="Calibri"/>
-                        </a:rPr>
-                        <a:t>15.4</a:t>
+                        <a:t>15.2</a:t>
                       </a:r>
                     </a:p>
                   </a:txBody>
@@ -4172,7 +4172,7 @@
                           </a:solidFill>
                           <a:latin typeface="Calibri"/>
                         </a:rPr>
-                        <a:t>279</a:t>
+                        <a:t>276</a:t>
                       </a:r>
                     </a:p>
                   </a:txBody>
@@ -4195,7 +4195,7 @@
                           </a:solidFill>
                           <a:latin typeface="Calibri"/>
                         </a:rPr>
-                        <a:t>-1.29%</a:t>
+                        <a:t>-1.02%</a:t>
                       </a:r>
                     </a:p>
                   </a:txBody>
@@ -4218,7 +4218,7 @@
                           </a:solidFill>
                           <a:latin typeface="Calibri"/>
                         </a:rPr>
-                        <a:t>-3.46%</a:t>
+                        <a:t>-3.76%</a:t>
                       </a:r>
                     </a:p>
                   </a:txBody>
@@ -4237,11 +4237,11 @@
                       <a:r>
                         <a:rPr sz="1000" b="0">
                           <a:solidFill>
-                            <a:srgbClr val="B3261E"/>
-                          </a:solidFill>
-                          <a:latin typeface="Calibri"/>
-                        </a:rPr>
-                        <a:t>-0.23%</a:t>
+                            <a:srgbClr val="0B7A3B"/>
+                          </a:solidFill>
+                          <a:latin typeface="Calibri"/>
+                        </a:rPr>
+                        <a:t>+0.22%</a:t>
                       </a:r>
                     </a:p>
                   </a:txBody>
@@ -4264,7 +4264,7 @@
                           </a:solidFill>
                           <a:latin typeface="Calibri"/>
                         </a:rPr>
-                        <a:t>-30.6%</a:t>
+                        <a:t>-31.3%</a:t>
                       </a:r>
                     </a:p>
                   </a:txBody>
@@ -4310,7 +4310,7 @@
                           </a:solidFill>
                           <a:latin typeface="Calibri"/>
                         </a:rPr>
-                        <a:t>17.6</a:t>
+                        <a:t>17.4</a:t>
                       </a:r>
                     </a:p>
                   </a:txBody>
@@ -4358,7 +4358,7 @@
                           </a:solidFill>
                           <a:latin typeface="Calibri"/>
                         </a:rPr>
-                        <a:t>4,037</a:t>
+                        <a:t>4,020</a:t>
                       </a:r>
                     </a:p>
                   </a:txBody>
@@ -4381,7 +4381,7 @@
                           </a:solidFill>
                           <a:latin typeface="Calibri"/>
                         </a:rPr>
-                        <a:t>-1.04%</a:t>
+                        <a:t>-0.43%</a:t>
                       </a:r>
                     </a:p>
                   </a:txBody>
@@ -4400,11 +4400,34 @@
                       <a:r>
                         <a:rPr sz="1000" b="0">
                           <a:solidFill>
+                            <a:srgbClr val="B3261E"/>
+                          </a:solidFill>
+                          <a:latin typeface="Calibri"/>
+                        </a:rPr>
+                        <a:t>-0.91%</a:t>
+                      </a:r>
+                    </a:p>
+                  </a:txBody>
+                  <a:tcPr>
+                    <a:solidFill>
+                      <a:srgbClr val="FFFFFF"/>
+                    </a:solidFill>
+                  </a:tcPr>
+                </a:tc>
+                <a:tc>
+                  <a:txBody>
+                    <a:bodyPr/>
+                    <a:lstStyle/>
+                    <a:p>
+                      <a:pPr algn="r"/>
+                      <a:r>
+                        <a:rPr sz="1000" b="0">
+                          <a:solidFill>
                             <a:srgbClr val="0B7A3B"/>
                           </a:solidFill>
                           <a:latin typeface="Calibri"/>
                         </a:rPr>
-                        <a:t>+1.19%</a:t>
+                        <a:t>+4.45%</a:t>
                       </a:r>
                     </a:p>
                   </a:txBody>
@@ -4423,11 +4446,11 @@
                       <a:r>
                         <a:rPr sz="1000" b="0">
                           <a:solidFill>
-                            <a:srgbClr val="0B7A3B"/>
-                          </a:solidFill>
-                          <a:latin typeface="Calibri"/>
-                        </a:rPr>
-                        <a:t>+2.77%</a:t>
+                            <a:srgbClr val="1F2A37"/>
+                          </a:solidFill>
+                          <a:latin typeface="Calibri"/>
+                        </a:rPr>
+                        <a:t>-8.1%</a:t>
                       </a:r>
                     </a:p>
                   </a:txBody>
@@ -4450,7 +4473,7 @@
                           </a:solidFill>
                           <a:latin typeface="Calibri"/>
                         </a:rPr>
-                        <a:t>-7.7%</a:t>
+                        <a:t>18%</a:t>
                       </a:r>
                     </a:p>
                   </a:txBody>
@@ -4473,30 +4496,7 @@
                           </a:solidFill>
                           <a:latin typeface="Calibri"/>
                         </a:rPr>
-                        <a:t>19%</a:t>
-                      </a:r>
-                    </a:p>
-                  </a:txBody>
-                  <a:tcPr>
-                    <a:solidFill>
-                      <a:srgbClr val="FFFFFF"/>
-                    </a:solidFill>
-                  </a:tcPr>
-                </a:tc>
-                <a:tc>
-                  <a:txBody>
-                    <a:bodyPr/>
-                    <a:lstStyle/>
-                    <a:p>
-                      <a:pPr algn="r"/>
-                      <a:r>
-                        <a:rPr sz="1000" b="0">
-                          <a:solidFill>
-                            <a:srgbClr val="1F2A37"/>
-                          </a:solidFill>
-                          <a:latin typeface="Calibri"/>
-                        </a:rPr>
-                        <a:t>33.5</a:t>
+                        <a:t>33.3</a:t>
                       </a:r>
                     </a:p>
                   </a:txBody>
@@ -4544,7 +4544,7 @@
                           </a:solidFill>
                           <a:latin typeface="Calibri"/>
                         </a:rPr>
-                        <a:t>1,324</a:t>
+                        <a:t>1,329</a:t>
                       </a:r>
                     </a:p>
                   </a:txBody>
@@ -4563,11 +4563,11 @@
                       <a:r>
                         <a:rPr sz="1000" b="0">
                           <a:solidFill>
-                            <a:srgbClr val="B3261E"/>
-                          </a:solidFill>
-                          <a:latin typeface="Calibri"/>
-                        </a:rPr>
-                        <a:t>-0.26%</a:t>
+                            <a:srgbClr val="0B7A3B"/>
+                          </a:solidFill>
+                          <a:latin typeface="Calibri"/>
+                        </a:rPr>
+                        <a:t>+0.39%</a:t>
                       </a:r>
                     </a:p>
                   </a:txBody>
@@ -4590,7 +4590,7 @@
                           </a:solidFill>
                           <a:latin typeface="Calibri"/>
                         </a:rPr>
-                        <a:t>+2.56%</a:t>
+                        <a:t>+3.83%</a:t>
                       </a:r>
                     </a:p>
                   </a:txBody>
@@ -4613,7 +4613,7 @@
                           </a:solidFill>
                           <a:latin typeface="Calibri"/>
                         </a:rPr>
-                        <a:t>+2.08%</a:t>
+                        <a:t>+2.78%</a:t>
                       </a:r>
                     </a:p>
                   </a:txBody>
@@ -4636,7 +4636,7 @@
                           </a:solidFill>
                           <a:latin typeface="Calibri"/>
                         </a:rPr>
-                        <a:t>-16.5%</a:t>
+                        <a:t>-16.1%</a:t>
                       </a:r>
                     </a:p>
                   </a:txBody>
@@ -4730,7 +4730,7 @@
                           </a:solidFill>
                           <a:latin typeface="Calibri"/>
                         </a:rPr>
-                        <a:t>2,446</a:t>
+                        <a:t>2,350</a:t>
                       </a:r>
                     </a:p>
                   </a:txBody>
@@ -4749,11 +4749,57 @@
                       <a:r>
                         <a:rPr sz="1000" b="0">
                           <a:solidFill>
+                            <a:srgbClr val="B3261E"/>
+                          </a:solidFill>
+                          <a:latin typeface="Calibri"/>
+                        </a:rPr>
+                        <a:t>-3.93%</a:t>
+                      </a:r>
+                    </a:p>
+                  </a:txBody>
+                  <a:tcPr>
+                    <a:solidFill>
+                      <a:srgbClr val="FFFFFF"/>
+                    </a:solidFill>
+                  </a:tcPr>
+                </a:tc>
+                <a:tc>
+                  <a:txBody>
+                    <a:bodyPr/>
+                    <a:lstStyle/>
+                    <a:p>
+                      <a:pPr algn="r"/>
+                      <a:r>
+                        <a:rPr sz="1000" b="0">
+                          <a:solidFill>
+                            <a:srgbClr val="B3261E"/>
+                          </a:solidFill>
+                          <a:latin typeface="Calibri"/>
+                        </a:rPr>
+                        <a:t>-2.62%</a:t>
+                      </a:r>
+                    </a:p>
+                  </a:txBody>
+                  <a:tcPr>
+                    <a:solidFill>
+                      <a:srgbClr val="FFFFFF"/>
+                    </a:solidFill>
+                  </a:tcPr>
+                </a:tc>
+                <a:tc>
+                  <a:txBody>
+                    <a:bodyPr/>
+                    <a:lstStyle/>
+                    <a:p>
+                      <a:pPr algn="r"/>
+                      <a:r>
+                        <a:rPr sz="1000" b="0">
+                          <a:solidFill>
                             <a:srgbClr val="0B7A3B"/>
                           </a:solidFill>
                           <a:latin typeface="Calibri"/>
                         </a:rPr>
-                        <a:t>+0.82%</a:t>
+                        <a:t>+7.36%</a:t>
                       </a:r>
                     </a:p>
                   </a:txBody>
@@ -4772,11 +4818,11 @@
                       <a:r>
                         <a:rPr sz="1000" b="0">
                           <a:solidFill>
-                            <a:srgbClr val="B3261E"/>
-                          </a:solidFill>
-                          <a:latin typeface="Calibri"/>
-                        </a:rPr>
-                        <a:t>-0.58%</a:t>
+                            <a:srgbClr val="1F2A37"/>
+                          </a:solidFill>
+                          <a:latin typeface="Calibri"/>
+                        </a:rPr>
+                        <a:t>-26.7%</a:t>
                       </a:r>
                     </a:p>
                   </a:txBody>
@@ -4795,11 +4841,11 @@
                       <a:r>
                         <a:rPr sz="1000" b="0">
                           <a:solidFill>
-                            <a:srgbClr val="0B7A3B"/>
-                          </a:solidFill>
-                          <a:latin typeface="Calibri"/>
-                        </a:rPr>
-                        <a:t>+12.73%</a:t>
+                            <a:srgbClr val="1F2A37"/>
+                          </a:solidFill>
+                          <a:latin typeface="Calibri"/>
+                        </a:rPr>
+                        <a:t>37%</a:t>
                       </a:r>
                     </a:p>
                   </a:txBody>
@@ -4822,53 +4868,7 @@
                           </a:solidFill>
                           <a:latin typeface="Calibri"/>
                         </a:rPr>
-                        <a:t>-23.7%</a:t>
-                      </a:r>
-                    </a:p>
-                  </a:txBody>
-                  <a:tcPr>
-                    <a:solidFill>
-                      <a:srgbClr val="FFFFFF"/>
-                    </a:solidFill>
-                  </a:tcPr>
-                </a:tc>
-                <a:tc>
-                  <a:txBody>
-                    <a:bodyPr/>
-                    <a:lstStyle/>
-                    <a:p>
-                      <a:pPr algn="r"/>
-                      <a:r>
-                        <a:rPr sz="1000" b="0">
-                          <a:solidFill>
-                            <a:srgbClr val="1F2A37"/>
-                          </a:solidFill>
-                          <a:latin typeface="Calibri"/>
-                        </a:rPr>
-                        <a:t>35%</a:t>
-                      </a:r>
-                    </a:p>
-                  </a:txBody>
-                  <a:tcPr>
-                    <a:solidFill>
-                      <a:srgbClr val="FFFFFF"/>
-                    </a:solidFill>
-                  </a:tcPr>
-                </a:tc>
-                <a:tc>
-                  <a:txBody>
-                    <a:bodyPr/>
-                    <a:lstStyle/>
-                    <a:p>
-                      <a:pPr algn="r"/>
-                      <a:r>
-                        <a:rPr sz="1000" b="0">
-                          <a:solidFill>
-                            <a:srgbClr val="1F2A37"/>
-                          </a:solidFill>
-                          <a:latin typeface="Calibri"/>
-                        </a:rPr>
-                        <a:t>17.8</a:t>
+                        <a:t>16.9</a:t>
                       </a:r>
                     </a:p>
                   </a:txBody>
@@ -4952,7 +4952,7 @@
                 </a:solidFill>
                 <a:latin typeface="Calibri"/>
               </a:rPr>
-              <a:t>Indian large caps experienced a mixed day with INFY.NS and TCS.NS showing positive returns, while most other stocks declined.</a:t>
+              <a:t>The market tone remains mixed with some stocks like BHARTIARTL.NS and RELIANCE.NS showing gains, while others like TCS.NS and INFY.NS are in the red.</a:t>
             </a:r>
           </a:p>
           <a:p>
@@ -4968,7 +4968,7 @@
                 </a:solidFill>
                 <a:latin typeface="Calibri"/>
               </a:rPr>
-              <a:t>•  INFY.NS and TCS.NS were among the top performers, with returns of +0.65% and +0.82% respectively.</a:t>
+              <a:t>•  The S&amp;P 500 and Nasdaq have opened higher after inflation data and earnings boost, which could have a positive impact on the Indian market.</a:t>
             </a:r>
           </a:p>
           <a:p>
@@ -4984,7 +4984,7 @@
                 </a:solidFill>
                 <a:latin typeface="Calibri"/>
               </a:rPr>
-              <a:t>•  HDFCBANK.NS and ICICIBANK.NS showed relatively stable performance, with declines of -0.27% and -0.15% respectively.</a:t>
+              <a:t>•  Bank credit growth has spiked to 19% on year, indicating a strong demand for credit in the economy.</a:t>
             </a:r>
           </a:p>
           <a:p>
@@ -5000,7 +5000,7 @@
                 </a:solidFill>
                 <a:latin typeface="Calibri"/>
               </a:rPr>
-              <a:t>•  The S&amp;P 500 and Nasdaq opened higher, potentially influencing Indian market sentiment.</a:t>
+              <a:t>•  The Indian rupee remains under pressure due to elevated oil prices and uncertainty surrounding Hormuz re-opening.</a:t>
             </a:r>
           </a:p>
           <a:p>
@@ -5016,7 +5016,7 @@
                 </a:solidFill>
                 <a:latin typeface="Calibri"/>
               </a:rPr>
-              <a:t>•  Several Indian companies reported significant increases in net profit, including Manappuram Finance and Motor &amp; General Finance.</a:t>
+              <a:t>•  IPOs like Milky Mist Dairy Food and Molbio Diagnostics have seen strong subscription, with the latter being subscribed 70.26 times.</a:t>
             </a:r>
           </a:p>
           <a:p>
@@ -5048,7 +5048,7 @@
                 </a:solidFill>
                 <a:latin typeface="Calibri"/>
               </a:rPr>
-              <a:t>•  The performance of HDFCBANK.NS and ICICIBANK.NS, given their relatively stable returns today.</a:t>
+              <a:t>•  The performance of HDFCBANK.NS and ICICIBANK.NS, which are among the major financial sector stocks.</a:t>
             </a:r>
           </a:p>
           <a:p>
@@ -5064,7 +5064,7 @@
                 </a:solidFill>
                 <a:latin typeface="Calibri"/>
               </a:rPr>
-              <a:t>•  The impact of the new US-Iran peace proposal on the Indian market.</a:t>
+              <a:t>•  The movement of the Indian rupee against the US dollar, given the elevated oil prices and global uncertainty.</a:t>
             </a:r>
           </a:p>
           <a:p>
@@ -5080,7 +5080,7 @@
                 </a:solidFill>
                 <a:latin typeface="Calibri"/>
               </a:rPr>
-              <a:t>•  The upcoming IPO of Sunshine Pictures, with a price band set at ₹342-360.</a:t>
+              <a:t>•  The upcoming earnings reports of major Indian companies, which could impact the market sentiment.</a:t>
             </a:r>
           </a:p>
         </p:txBody>

--- a/public/deskbrief.pptx
+++ b/public/deskbrief.pptx
@@ -3128,7 +3128,7 @@
                 </a:solidFill>
                 <a:latin typeface="Calibri"/>
               </a:rPr>
-              <a:t>8 names  |  generated 12 Aug 2026 13:55  |  source: Yahoo Finance via yfinance, Indian financial RSS</a:t>
+              <a:t>8 names  |  generated 13 Aug 2026 13:54  |  source: Yahoo Finance via yfinance, Indian financial RSS</a:t>
             </a:r>
           </a:p>
         </p:txBody>
@@ -3428,7 +3428,7 @@
                           </a:solidFill>
                           <a:latin typeface="Calibri"/>
                         </a:rPr>
-                        <a:t>1,945</a:t>
+                        <a:t>1,939</a:t>
                       </a:r>
                     </a:p>
                   </a:txBody>
@@ -3447,11 +3447,57 @@
                       <a:r>
                         <a:rPr sz="1000" b="0">
                           <a:solidFill>
+                            <a:srgbClr val="B3261E"/>
+                          </a:solidFill>
+                          <a:latin typeface="Calibri"/>
+                        </a:rPr>
+                        <a:t>-0.30%</a:t>
+                      </a:r>
+                    </a:p>
+                  </a:txBody>
+                  <a:tcPr>
+                    <a:solidFill>
+                      <a:srgbClr val="F3F5F7"/>
+                    </a:solidFill>
+                  </a:tcPr>
+                </a:tc>
+                <a:tc>
+                  <a:txBody>
+                    <a:bodyPr/>
+                    <a:lstStyle/>
+                    <a:p>
+                      <a:pPr algn="r"/>
+                      <a:r>
+                        <a:rPr sz="1000" b="0">
+                          <a:solidFill>
+                            <a:srgbClr val="B3261E"/>
+                          </a:solidFill>
+                          <a:latin typeface="Calibri"/>
+                        </a:rPr>
+                        <a:t>-0.46%</a:t>
+                      </a:r>
+                    </a:p>
+                  </a:txBody>
+                  <a:tcPr>
+                    <a:solidFill>
+                      <a:srgbClr val="F3F5F7"/>
+                    </a:solidFill>
+                  </a:tcPr>
+                </a:tc>
+                <a:tc>
+                  <a:txBody>
+                    <a:bodyPr/>
+                    <a:lstStyle/>
+                    <a:p>
+                      <a:pPr algn="r"/>
+                      <a:r>
+                        <a:rPr sz="1000" b="0">
+                          <a:solidFill>
                             <a:srgbClr val="0B7A3B"/>
                           </a:solidFill>
                           <a:latin typeface="Calibri"/>
                         </a:rPr>
-                        <a:t>+1.56%</a:t>
+                        <a:t>+2.36%</a:t>
                       </a:r>
                     </a:p>
                   </a:txBody>
@@ -3470,11 +3516,11 @@
                       <a:r>
                         <a:rPr sz="1000" b="0">
                           <a:solidFill>
-                            <a:srgbClr val="B3261E"/>
-                          </a:solidFill>
-                          <a:latin typeface="Calibri"/>
-                        </a:rPr>
-                        <a:t>-1.67%</a:t>
+                            <a:srgbClr val="1F2A37"/>
+                          </a:solidFill>
+                          <a:latin typeface="Calibri"/>
+                        </a:rPr>
+                        <a:t>-9.2%</a:t>
                       </a:r>
                     </a:p>
                   </a:txBody>
@@ -3493,11 +3539,11 @@
                       <a:r>
                         <a:rPr sz="1000" b="0">
                           <a:solidFill>
-                            <a:srgbClr val="0B7A3B"/>
-                          </a:solidFill>
-                          <a:latin typeface="Calibri"/>
-                        </a:rPr>
-                        <a:t>+1.70%</a:t>
+                            <a:srgbClr val="1F2A37"/>
+                          </a:solidFill>
+                          <a:latin typeface="Calibri"/>
+                        </a:rPr>
+                        <a:t>18%</a:t>
                       </a:r>
                     </a:p>
                   </a:txBody>
@@ -3520,53 +3566,7 @@
                           </a:solidFill>
                           <a:latin typeface="Calibri"/>
                         </a:rPr>
-                        <a:t>-8.9%</a:t>
-                      </a:r>
-                    </a:p>
-                  </a:txBody>
-                  <a:tcPr>
-                    <a:solidFill>
-                      <a:srgbClr val="F3F5F7"/>
-                    </a:solidFill>
-                  </a:tcPr>
-                </a:tc>
-                <a:tc>
-                  <a:txBody>
-                    <a:bodyPr/>
-                    <a:lstStyle/>
-                    <a:p>
-                      <a:pPr algn="r"/>
-                      <a:r>
-                        <a:rPr sz="1000" b="0">
-                          <a:solidFill>
-                            <a:srgbClr val="1F2A37"/>
-                          </a:solidFill>
-                          <a:latin typeface="Calibri"/>
-                        </a:rPr>
-                        <a:t>18%</a:t>
-                      </a:r>
-                    </a:p>
-                  </a:txBody>
-                  <a:tcPr>
-                    <a:solidFill>
-                      <a:srgbClr val="F3F5F7"/>
-                    </a:solidFill>
-                  </a:tcPr>
-                </a:tc>
-                <a:tc>
-                  <a:txBody>
-                    <a:bodyPr/>
-                    <a:lstStyle/>
-                    <a:p>
-                      <a:pPr algn="r"/>
-                      <a:r>
-                        <a:rPr sz="1000" b="0">
-                          <a:solidFill>
-                            <a:srgbClr val="1F2A37"/>
-                          </a:solidFill>
-                          <a:latin typeface="Calibri"/>
-                        </a:rPr>
-                        <a:t>40.6</a:t>
+                        <a:t>40.5</a:t>
                       </a:r>
                     </a:p>
                   </a:txBody>
@@ -3614,7 +3614,7 @@
                           </a:solidFill>
                           <a:latin typeface="Calibri"/>
                         </a:rPr>
-                        <a:t>729</a:t>
+                        <a:t>725</a:t>
                       </a:r>
                     </a:p>
                   </a:txBody>
@@ -3633,11 +3633,80 @@
                       <a:r>
                         <a:rPr sz="1000" b="0">
                           <a:solidFill>
+                            <a:srgbClr val="B3261E"/>
+                          </a:solidFill>
+                          <a:latin typeface="Calibri"/>
+                        </a:rPr>
+                        <a:t>-0.55%</a:t>
+                      </a:r>
+                    </a:p>
+                  </a:txBody>
+                  <a:tcPr>
+                    <a:solidFill>
+                      <a:srgbClr val="FFFFFF"/>
+                    </a:solidFill>
+                  </a:tcPr>
+                </a:tc>
+                <a:tc>
+                  <a:txBody>
+                    <a:bodyPr/>
+                    <a:lstStyle/>
+                    <a:p>
+                      <a:pPr algn="r"/>
+                      <a:r>
+                        <a:rPr sz="1000" b="0">
+                          <a:solidFill>
+                            <a:srgbClr val="B3261E"/>
+                          </a:solidFill>
+                          <a:latin typeface="Calibri"/>
+                        </a:rPr>
+                        <a:t>-1.27%</a:t>
+                      </a:r>
+                    </a:p>
+                  </a:txBody>
+                  <a:tcPr>
+                    <a:solidFill>
+                      <a:srgbClr val="FFFFFF"/>
+                    </a:solidFill>
+                  </a:tcPr>
+                </a:tc>
+                <a:tc>
+                  <a:txBody>
+                    <a:bodyPr/>
+                    <a:lstStyle/>
+                    <a:p>
+                      <a:pPr algn="r"/>
+                      <a:r>
+                        <a:rPr sz="1000" b="0">
+                          <a:solidFill>
+                            <a:srgbClr val="B3261E"/>
+                          </a:solidFill>
+                          <a:latin typeface="Calibri"/>
+                        </a:rPr>
+                        <a:t>-11.09%</a:t>
+                      </a:r>
+                    </a:p>
+                  </a:txBody>
+                  <a:tcPr>
+                    <a:solidFill>
+                      <a:srgbClr val="FFFFFF"/>
+                    </a:solidFill>
+                  </a:tcPr>
+                </a:tc>
+                <a:tc>
+                  <a:txBody>
+                    <a:bodyPr/>
+                    <a:lstStyle/>
+                    <a:p>
+                      <a:pPr algn="r"/>
+                      <a:r>
+                        <a:rPr sz="1000" b="0">
+                          <a:solidFill>
                             <a:srgbClr val="1F2A37"/>
                           </a:solidFill>
                           <a:latin typeface="Calibri"/>
                         </a:rPr>
-                        <a:t>+0.00%</a:t>
+                        <a:t>-27.0%</a:t>
                       </a:r>
                     </a:p>
                   </a:txBody>
@@ -3656,11 +3725,11 @@
                       <a:r>
                         <a:rPr sz="1000" b="0">
                           <a:solidFill>
-                            <a:srgbClr val="B3261E"/>
-                          </a:solidFill>
-                          <a:latin typeface="Calibri"/>
-                        </a:rPr>
-                        <a:t>-0.82%</a:t>
+                            <a:srgbClr val="1F2A37"/>
+                          </a:solidFill>
+                          <a:latin typeface="Calibri"/>
+                        </a:rPr>
+                        <a:t>24%</a:t>
                       </a:r>
                     </a:p>
                   </a:txBody>
@@ -3679,80 +3748,11 @@
                       <a:r>
                         <a:rPr sz="1000" b="0">
                           <a:solidFill>
-                            <a:srgbClr val="B3261E"/>
-                          </a:solidFill>
-                          <a:latin typeface="Calibri"/>
-                        </a:rPr>
-                        <a:t>-9.93%</a:t>
-                      </a:r>
-                    </a:p>
-                  </a:txBody>
-                  <a:tcPr>
-                    <a:solidFill>
-                      <a:srgbClr val="FFFFFF"/>
-                    </a:solidFill>
-                  </a:tcPr>
-                </a:tc>
-                <a:tc>
-                  <a:txBody>
-                    <a:bodyPr/>
-                    <a:lstStyle/>
-                    <a:p>
-                      <a:pPr algn="r"/>
-                      <a:r>
-                        <a:rPr sz="1000" b="0">
-                          <a:solidFill>
                             <a:srgbClr val="1F2A37"/>
                           </a:solidFill>
                           <a:latin typeface="Calibri"/>
                         </a:rPr>
-                        <a:t>-26.6%</a:t>
-                      </a:r>
-                    </a:p>
-                  </a:txBody>
-                  <a:tcPr>
-                    <a:solidFill>
-                      <a:srgbClr val="FFFFFF"/>
-                    </a:solidFill>
-                  </a:tcPr>
-                </a:tc>
-                <a:tc>
-                  <a:txBody>
-                    <a:bodyPr/>
-                    <a:lstStyle/>
-                    <a:p>
-                      <a:pPr algn="r"/>
-                      <a:r>
-                        <a:rPr sz="1000" b="0">
-                          <a:solidFill>
-                            <a:srgbClr val="1F2A37"/>
-                          </a:solidFill>
-                          <a:latin typeface="Calibri"/>
-                        </a:rPr>
-                        <a:t>24%</a:t>
-                      </a:r>
-                    </a:p>
-                  </a:txBody>
-                  <a:tcPr>
-                    <a:solidFill>
-                      <a:srgbClr val="FFFFFF"/>
-                    </a:solidFill>
-                  </a:tcPr>
-                </a:tc>
-                <a:tc>
-                  <a:txBody>
-                    <a:bodyPr/>
-                    <a:lstStyle/>
-                    <a:p>
-                      <a:pPr algn="r"/>
-                      <a:r>
-                        <a:rPr sz="1000" b="0">
-                          <a:solidFill>
-                            <a:srgbClr val="1F2A37"/>
-                          </a:solidFill>
-                          <a:latin typeface="Calibri"/>
-                        </a:rPr>
-                        <a:t>16.0</a:t>
+                        <a:t>15.8</a:t>
                       </a:r>
                     </a:p>
                   </a:txBody>
@@ -3800,7 +3800,7 @@
                           </a:solidFill>
                           <a:latin typeface="Calibri"/>
                         </a:rPr>
-                        <a:t>1,432</a:t>
+                        <a:t>1,407</a:t>
                       </a:r>
                     </a:p>
                   </a:txBody>
@@ -3819,11 +3819,57 @@
                       <a:r>
                         <a:rPr sz="1000" b="0">
                           <a:solidFill>
+                            <a:srgbClr val="B3261E"/>
+                          </a:solidFill>
+                          <a:latin typeface="Calibri"/>
+                        </a:rPr>
+                        <a:t>-1.74%</a:t>
+                      </a:r>
+                    </a:p>
+                  </a:txBody>
+                  <a:tcPr>
+                    <a:solidFill>
+                      <a:srgbClr val="F3F5F7"/>
+                    </a:solidFill>
+                  </a:tcPr>
+                </a:tc>
+                <a:tc>
+                  <a:txBody>
+                    <a:bodyPr/>
+                    <a:lstStyle/>
+                    <a:p>
+                      <a:pPr algn="r"/>
+                      <a:r>
+                        <a:rPr sz="1000" b="0">
+                          <a:solidFill>
+                            <a:srgbClr val="B3261E"/>
+                          </a:solidFill>
+                          <a:latin typeface="Calibri"/>
+                        </a:rPr>
+                        <a:t>-3.48%</a:t>
+                      </a:r>
+                    </a:p>
+                  </a:txBody>
+                  <a:tcPr>
+                    <a:solidFill>
+                      <a:srgbClr val="F3F5F7"/>
+                    </a:solidFill>
+                  </a:tcPr>
+                </a:tc>
+                <a:tc>
+                  <a:txBody>
+                    <a:bodyPr/>
+                    <a:lstStyle/>
+                    <a:p>
+                      <a:pPr algn="r"/>
+                      <a:r>
+                        <a:rPr sz="1000" b="0">
+                          <a:solidFill>
                             <a:srgbClr val="0B7A3B"/>
                           </a:solidFill>
                           <a:latin typeface="Calibri"/>
                         </a:rPr>
-                        <a:t>+0.15%</a:t>
+                        <a:t>+0.17%</a:t>
                       </a:r>
                     </a:p>
                   </a:txBody>
@@ -3842,11 +3888,11 @@
                       <a:r>
                         <a:rPr sz="1000" b="0">
                           <a:solidFill>
-                            <a:srgbClr val="B3261E"/>
-                          </a:solidFill>
-                          <a:latin typeface="Calibri"/>
-                        </a:rPr>
-                        <a:t>-1.27%</a:t>
+                            <a:srgbClr val="1F2A37"/>
+                          </a:solidFill>
+                          <a:latin typeface="Calibri"/>
+                        </a:rPr>
+                        <a:t>-3.6%</a:t>
                       </a:r>
                     </a:p>
                   </a:txBody>
@@ -3865,11 +3911,11 @@
                       <a:r>
                         <a:rPr sz="1000" b="0">
                           <a:solidFill>
-                            <a:srgbClr val="0B7A3B"/>
-                          </a:solidFill>
-                          <a:latin typeface="Calibri"/>
-                        </a:rPr>
-                        <a:t>+2.56%</a:t>
+                            <a:srgbClr val="1F2A37"/>
+                          </a:solidFill>
+                          <a:latin typeface="Calibri"/>
+                        </a:rPr>
+                        <a:t>18%</a:t>
                       </a:r>
                     </a:p>
                   </a:txBody>
@@ -3892,53 +3938,7 @@
                           </a:solidFill>
                           <a:latin typeface="Calibri"/>
                         </a:rPr>
-                        <a:t>-1.9%</a:t>
-                      </a:r>
-                    </a:p>
-                  </a:txBody>
-                  <a:tcPr>
-                    <a:solidFill>
-                      <a:srgbClr val="F3F5F7"/>
-                    </a:solidFill>
-                  </a:tcPr>
-                </a:tc>
-                <a:tc>
-                  <a:txBody>
-                    <a:bodyPr/>
-                    <a:lstStyle/>
-                    <a:p>
-                      <a:pPr algn="r"/>
-                      <a:r>
-                        <a:rPr sz="1000" b="0">
-                          <a:solidFill>
-                            <a:srgbClr val="1F2A37"/>
-                          </a:solidFill>
-                          <a:latin typeface="Calibri"/>
-                        </a:rPr>
-                        <a:t>18%</a:t>
-                      </a:r>
-                    </a:p>
-                  </a:txBody>
-                  <a:tcPr>
-                    <a:solidFill>
-                      <a:srgbClr val="F3F5F7"/>
-                    </a:solidFill>
-                  </a:tcPr>
-                </a:tc>
-                <a:tc>
-                  <a:txBody>
-                    <a:bodyPr/>
-                    <a:lstStyle/>
-                    <a:p>
-                      <a:pPr algn="r"/>
-                      <a:r>
-                        <a:rPr sz="1000" b="0">
-                          <a:solidFill>
-                            <a:srgbClr val="1F2A37"/>
-                          </a:solidFill>
-                          <a:latin typeface="Calibri"/>
-                        </a:rPr>
-                        <a:t>18.5</a:t>
+                        <a:t>18.2</a:t>
                       </a:r>
                     </a:p>
                   </a:txBody>
@@ -3986,7 +3986,7 @@
                           </a:solidFill>
                           <a:latin typeface="Calibri"/>
                         </a:rPr>
-                        <a:t>1,176</a:t>
+                        <a:t>1,175</a:t>
                       </a:r>
                     </a:p>
                   </a:txBody>
@@ -4009,7 +4009,7 @@
                           </a:solidFill>
                           <a:latin typeface="Calibri"/>
                         </a:rPr>
-                        <a:t>-1.23%</a:t>
+                        <a:t>-0.09%</a:t>
                       </a:r>
                     </a:p>
                   </a:txBody>
@@ -4032,7 +4032,7 @@
                           </a:solidFill>
                           <a:latin typeface="Calibri"/>
                         </a:rPr>
-                        <a:t>+0.18%</a:t>
+                        <a:t>+0.86%</a:t>
                       </a:r>
                     </a:p>
                   </a:txBody>
@@ -4055,7 +4055,7 @@
                           </a:solidFill>
                           <a:latin typeface="Calibri"/>
                         </a:rPr>
-                        <a:t>+7.61%</a:t>
+                        <a:t>+9.17%</a:t>
                       </a:r>
                     </a:p>
                   </a:txBody>
@@ -4078,7 +4078,7 @@
                           </a:solidFill>
                           <a:latin typeface="Calibri"/>
                         </a:rPr>
-                        <a:t>-28.9%</a:t>
+                        <a:t>-29.0%</a:t>
                       </a:r>
                     </a:p>
                   </a:txBody>
@@ -4101,7 +4101,7 @@
                           </a:solidFill>
                           <a:latin typeface="Calibri"/>
                         </a:rPr>
-                        <a:t>33%</a:t>
+                        <a:t>29%</a:t>
                       </a:r>
                     </a:p>
                   </a:txBody>
@@ -4172,7 +4172,7 @@
                           </a:solidFill>
                           <a:latin typeface="Calibri"/>
                         </a:rPr>
-                        <a:t>276</a:t>
+                        <a:t>278</a:t>
                       </a:r>
                     </a:p>
                   </a:txBody>
@@ -4191,11 +4191,34 @@
                       <a:r>
                         <a:rPr sz="1000" b="0">
                           <a:solidFill>
+                            <a:srgbClr val="0B7A3B"/>
+                          </a:solidFill>
+                          <a:latin typeface="Calibri"/>
+                        </a:rPr>
+                        <a:t>+0.85%</a:t>
+                      </a:r>
+                    </a:p>
+                  </a:txBody>
+                  <a:tcPr>
+                    <a:solidFill>
+                      <a:srgbClr val="F3F5F7"/>
+                    </a:solidFill>
+                  </a:tcPr>
+                </a:tc>
+                <a:tc>
+                  <a:txBody>
+                    <a:bodyPr/>
+                    <a:lstStyle/>
+                    <a:p>
+                      <a:pPr algn="r"/>
+                      <a:r>
+                        <a:rPr sz="1000" b="0">
+                          <a:solidFill>
                             <a:srgbClr val="B3261E"/>
                           </a:solidFill>
                           <a:latin typeface="Calibri"/>
                         </a:rPr>
-                        <a:t>-1.02%</a:t>
+                        <a:t>-2.59%</a:t>
                       </a:r>
                     </a:p>
                   </a:txBody>
@@ -4214,11 +4237,11 @@
                       <a:r>
                         <a:rPr sz="1000" b="0">
                           <a:solidFill>
-                            <a:srgbClr val="B3261E"/>
-                          </a:solidFill>
-                          <a:latin typeface="Calibri"/>
-                        </a:rPr>
-                        <a:t>-3.76%</a:t>
+                            <a:srgbClr val="0B7A3B"/>
+                          </a:solidFill>
+                          <a:latin typeface="Calibri"/>
+                        </a:rPr>
+                        <a:t>+0.67%</a:t>
                       </a:r>
                     </a:p>
                   </a:txBody>
@@ -4237,11 +4260,11 @@
                       <a:r>
                         <a:rPr sz="1000" b="0">
                           <a:solidFill>
-                            <a:srgbClr val="0B7A3B"/>
-                          </a:solidFill>
-                          <a:latin typeface="Calibri"/>
-                        </a:rPr>
-                        <a:t>+0.22%</a:t>
+                            <a:srgbClr val="1F2A37"/>
+                          </a:solidFill>
+                          <a:latin typeface="Calibri"/>
+                        </a:rPr>
+                        <a:t>-30.7%</a:t>
                       </a:r>
                     </a:p>
                   </a:txBody>
@@ -4264,7 +4287,7 @@
                           </a:solidFill>
                           <a:latin typeface="Calibri"/>
                         </a:rPr>
-                        <a:t>-31.3%</a:t>
+                        <a:t>16%</a:t>
                       </a:r>
                     </a:p>
                   </a:txBody>
@@ -4287,30 +4310,7 @@
                           </a:solidFill>
                           <a:latin typeface="Calibri"/>
                         </a:rPr>
-                        <a:t>15%</a:t>
-                      </a:r>
-                    </a:p>
-                  </a:txBody>
-                  <a:tcPr>
-                    <a:solidFill>
-                      <a:srgbClr val="F3F5F7"/>
-                    </a:solidFill>
-                  </a:tcPr>
-                </a:tc>
-                <a:tc>
-                  <a:txBody>
-                    <a:bodyPr/>
-                    <a:lstStyle/>
-                    <a:p>
-                      <a:pPr algn="r"/>
-                      <a:r>
-                        <a:rPr sz="1000" b="0">
-                          <a:solidFill>
-                            <a:srgbClr val="1F2A37"/>
-                          </a:solidFill>
-                          <a:latin typeface="Calibri"/>
-                        </a:rPr>
-                        <a:t>17.4</a:t>
+                        <a:t>17.6</a:t>
                       </a:r>
                     </a:p>
                   </a:txBody>
@@ -4358,7 +4358,7 @@
                           </a:solidFill>
                           <a:latin typeface="Calibri"/>
                         </a:rPr>
-                        <a:t>4,020</a:t>
+                        <a:t>4,071</a:t>
                       </a:r>
                     </a:p>
                   </a:txBody>
@@ -4377,11 +4377,11 @@
                       <a:r>
                         <a:rPr sz="1000" b="0">
                           <a:solidFill>
-                            <a:srgbClr val="B3261E"/>
-                          </a:solidFill>
-                          <a:latin typeface="Calibri"/>
-                        </a:rPr>
-                        <a:t>-0.43%</a:t>
+                            <a:srgbClr val="0B7A3B"/>
+                          </a:solidFill>
+                          <a:latin typeface="Calibri"/>
+                        </a:rPr>
+                        <a:t>+1.26%</a:t>
                       </a:r>
                     </a:p>
                   </a:txBody>
@@ -4400,11 +4400,11 @@
                       <a:r>
                         <a:rPr sz="1000" b="0">
                           <a:solidFill>
-                            <a:srgbClr val="B3261E"/>
-                          </a:solidFill>
-                          <a:latin typeface="Calibri"/>
-                        </a:rPr>
-                        <a:t>-0.91%</a:t>
+                            <a:srgbClr val="0B7A3B"/>
+                          </a:solidFill>
+                          <a:latin typeface="Calibri"/>
+                        </a:rPr>
+                        <a:t>+0.22%</a:t>
                       </a:r>
                     </a:p>
                   </a:txBody>
@@ -4427,7 +4427,7 @@
                           </a:solidFill>
                           <a:latin typeface="Calibri"/>
                         </a:rPr>
-                        <a:t>+4.45%</a:t>
+                        <a:t>+7.58%</a:t>
                       </a:r>
                     </a:p>
                   </a:txBody>
@@ -4450,7 +4450,7 @@
                           </a:solidFill>
                           <a:latin typeface="Calibri"/>
                         </a:rPr>
-                        <a:t>-8.1%</a:t>
+                        <a:t>-7.0%</a:t>
                       </a:r>
                     </a:p>
                   </a:txBody>
@@ -4473,7 +4473,7 @@
                           </a:solidFill>
                           <a:latin typeface="Calibri"/>
                         </a:rPr>
-                        <a:t>18%</a:t>
+                        <a:t>19%</a:t>
                       </a:r>
                     </a:p>
                   </a:txBody>
@@ -4496,7 +4496,7 @@
                           </a:solidFill>
                           <a:latin typeface="Calibri"/>
                         </a:rPr>
-                        <a:t>33.3</a:t>
+                        <a:t>33.8</a:t>
                       </a:r>
                     </a:p>
                   </a:txBody>
@@ -4544,7 +4544,7 @@
                           </a:solidFill>
                           <a:latin typeface="Calibri"/>
                         </a:rPr>
-                        <a:t>1,329</a:t>
+                        <a:t>1,317</a:t>
                       </a:r>
                     </a:p>
                   </a:txBody>
@@ -4563,11 +4563,57 @@
                       <a:r>
                         <a:rPr sz="1000" b="0">
                           <a:solidFill>
+                            <a:srgbClr val="B3261E"/>
+                          </a:solidFill>
+                          <a:latin typeface="Calibri"/>
+                        </a:rPr>
+                        <a:t>-0.90%</a:t>
+                      </a:r>
+                    </a:p>
+                  </a:txBody>
+                  <a:tcPr>
+                    <a:solidFill>
+                      <a:srgbClr val="F3F5F7"/>
+                    </a:solidFill>
+                  </a:tcPr>
+                </a:tc>
+                <a:tc>
+                  <a:txBody>
+                    <a:bodyPr/>
+                    <a:lstStyle/>
+                    <a:p>
+                      <a:pPr algn="r"/>
+                      <a:r>
+                        <a:rPr sz="1000" b="0">
+                          <a:solidFill>
+                            <a:srgbClr val="B3261E"/>
+                          </a:solidFill>
+                          <a:latin typeface="Calibri"/>
+                        </a:rPr>
+                        <a:t>-0.60%</a:t>
+                      </a:r>
+                    </a:p>
+                  </a:txBody>
+                  <a:tcPr>
+                    <a:solidFill>
+                      <a:srgbClr val="F3F5F7"/>
+                    </a:solidFill>
+                  </a:tcPr>
+                </a:tc>
+                <a:tc>
+                  <a:txBody>
+                    <a:bodyPr/>
+                    <a:lstStyle/>
+                    <a:p>
+                      <a:pPr algn="r"/>
+                      <a:r>
+                        <a:rPr sz="1000" b="0">
+                          <a:solidFill>
                             <a:srgbClr val="0B7A3B"/>
                           </a:solidFill>
                           <a:latin typeface="Calibri"/>
                         </a:rPr>
-                        <a:t>+0.39%</a:t>
+                        <a:t>+1.66%</a:t>
                       </a:r>
                     </a:p>
                   </a:txBody>
@@ -4586,11 +4632,11 @@
                       <a:r>
                         <a:rPr sz="1000" b="0">
                           <a:solidFill>
-                            <a:srgbClr val="0B7A3B"/>
-                          </a:solidFill>
-                          <a:latin typeface="Calibri"/>
-                        </a:rPr>
-                        <a:t>+3.83%</a:t>
+                            <a:srgbClr val="1F2A37"/>
+                          </a:solidFill>
+                          <a:latin typeface="Calibri"/>
+                        </a:rPr>
+                        <a:t>-16.9%</a:t>
                       </a:r>
                     </a:p>
                   </a:txBody>
@@ -4609,11 +4655,11 @@
                       <a:r>
                         <a:rPr sz="1000" b="0">
                           <a:solidFill>
-                            <a:srgbClr val="0B7A3B"/>
-                          </a:solidFill>
-                          <a:latin typeface="Calibri"/>
-                        </a:rPr>
-                        <a:t>+2.78%</a:t>
+                            <a:srgbClr val="1F2A37"/>
+                          </a:solidFill>
+                          <a:latin typeface="Calibri"/>
+                        </a:rPr>
+                        <a:t>21%</a:t>
                       </a:r>
                     </a:p>
                   </a:txBody>
@@ -4636,53 +4682,7 @@
                           </a:solidFill>
                           <a:latin typeface="Calibri"/>
                         </a:rPr>
-                        <a:t>-16.1%</a:t>
-                      </a:r>
-                    </a:p>
-                  </a:txBody>
-                  <a:tcPr>
-                    <a:solidFill>
-                      <a:srgbClr val="F3F5F7"/>
-                    </a:solidFill>
-                  </a:tcPr>
-                </a:tc>
-                <a:tc>
-                  <a:txBody>
-                    <a:bodyPr/>
-                    <a:lstStyle/>
-                    <a:p>
-                      <a:pPr algn="r"/>
-                      <a:r>
-                        <a:rPr sz="1000" b="0">
-                          <a:solidFill>
-                            <a:srgbClr val="1F2A37"/>
-                          </a:solidFill>
-                          <a:latin typeface="Calibri"/>
-                        </a:rPr>
-                        <a:t>21%</a:t>
-                      </a:r>
-                    </a:p>
-                  </a:txBody>
-                  <a:tcPr>
-                    <a:solidFill>
-                      <a:srgbClr val="F3F5F7"/>
-                    </a:solidFill>
-                  </a:tcPr>
-                </a:tc>
-                <a:tc>
-                  <a:txBody>
-                    <a:bodyPr/>
-                    <a:lstStyle/>
-                    <a:p>
-                      <a:pPr algn="r"/>
-                      <a:r>
-                        <a:rPr sz="1000" b="0">
-                          <a:solidFill>
-                            <a:srgbClr val="1F2A37"/>
-                          </a:solidFill>
-                          <a:latin typeface="Calibri"/>
-                        </a:rPr>
-                        <a:t>24.1</a:t>
+                        <a:t>23.8</a:t>
                       </a:r>
                     </a:p>
                   </a:txBody>
@@ -4730,7 +4730,7 @@
                           </a:solidFill>
                           <a:latin typeface="Calibri"/>
                         </a:rPr>
-                        <a:t>2,350</a:t>
+                        <a:t>2,375</a:t>
                       </a:r>
                     </a:p>
                   </a:txBody>
@@ -4749,11 +4749,11 @@
                       <a:r>
                         <a:rPr sz="1000" b="0">
                           <a:solidFill>
-                            <a:srgbClr val="B3261E"/>
-                          </a:solidFill>
-                          <a:latin typeface="Calibri"/>
-                        </a:rPr>
-                        <a:t>-3.93%</a:t>
+                            <a:srgbClr val="0B7A3B"/>
+                          </a:solidFill>
+                          <a:latin typeface="Calibri"/>
+                        </a:rPr>
+                        <a:t>+1.08%</a:t>
                       </a:r>
                     </a:p>
                   </a:txBody>
@@ -4772,11 +4772,11 @@
                       <a:r>
                         <a:rPr sz="1000" b="0">
                           <a:solidFill>
-                            <a:srgbClr val="B3261E"/>
-                          </a:solidFill>
-                          <a:latin typeface="Calibri"/>
-                        </a:rPr>
-                        <a:t>-2.62%</a:t>
+                            <a:srgbClr val="0B7A3B"/>
+                          </a:solidFill>
+                          <a:latin typeface="Calibri"/>
+                        </a:rPr>
+                        <a:t>+0.08%</a:t>
                       </a:r>
                     </a:p>
                   </a:txBody>
@@ -4799,7 +4799,7 @@
                           </a:solidFill>
                           <a:latin typeface="Calibri"/>
                         </a:rPr>
-                        <a:t>+7.36%</a:t>
+                        <a:t>+8.49%</a:t>
                       </a:r>
                     </a:p>
                   </a:txBody>
@@ -4822,7 +4822,7 @@
                           </a:solidFill>
                           <a:latin typeface="Calibri"/>
                         </a:rPr>
-                        <a:t>-26.7%</a:t>
+                        <a:t>-25.9%</a:t>
                       </a:r>
                     </a:p>
                   </a:txBody>
@@ -4845,7 +4845,7 @@
                           </a:solidFill>
                           <a:latin typeface="Calibri"/>
                         </a:rPr>
-                        <a:t>37%</a:t>
+                        <a:t>35%</a:t>
                       </a:r>
                     </a:p>
                   </a:txBody>
@@ -4868,7 +4868,7 @@
                           </a:solidFill>
                           <a:latin typeface="Calibri"/>
                         </a:rPr>
-                        <a:t>16.9</a:t>
+                        <a:t>17.2</a:t>
                       </a:r>
                     </a:p>
                   </a:txBody>
@@ -4952,7 +4952,7 @@
                 </a:solidFill>
                 <a:latin typeface="Calibri"/>
               </a:rPr>
-              <a:t>The market tone remains mixed with some stocks like BHARTIARTL.NS and RELIANCE.NS showing gains, while others like TCS.NS and INFY.NS are in the red.</a:t>
+              <a:t>Indian large caps show mixed performance with LT.NS and TCS.NS gaining over 1% while HDFCBANK.NS and ICICIBANK.NS decline</a:t>
             </a:r>
           </a:p>
           <a:p>
@@ -4968,7 +4968,7 @@
                 </a:solidFill>
                 <a:latin typeface="Calibri"/>
               </a:rPr>
-              <a:t>•  The S&amp;P 500 and Nasdaq have opened higher after inflation data and earnings boost, which could have a positive impact on the Indian market.</a:t>
+              <a:t>•  BHARTIARTL.NS is trading at a P/E of 40.5, the highest among the listed companies</a:t>
             </a:r>
           </a:p>
           <a:p>
@@ -4984,7 +4984,7 @@
                 </a:solidFill>
                 <a:latin typeface="Calibri"/>
               </a:rPr>
-              <a:t>•  Bank credit growth has spiked to 19% on year, indicating a strong demand for credit in the economy.</a:t>
+              <a:t>•  HDFCBANK.NS has declined 11.09% in the last 21 days, the largest decline among the listed companies</a:t>
             </a:r>
           </a:p>
           <a:p>
@@ -5000,7 +5000,7 @@
                 </a:solidFill>
                 <a:latin typeface="Calibri"/>
               </a:rPr>
-              <a:t>•  The Indian rupee remains under pressure due to elevated oil prices and uncertainty surrounding Hormuz re-opening.</a:t>
+              <a:t>•  INFY.NS and TCS.NS have gained 9.17% and 8.49% respectively in the last 21 days, driven by the technology sector</a:t>
             </a:r>
           </a:p>
           <a:p>
@@ -5016,7 +5016,7 @@
                 </a:solidFill>
                 <a:latin typeface="Calibri"/>
               </a:rPr>
-              <a:t>•  IPOs like Milky Mist Dairy Food and Molbio Diagnostics have seen strong subscription, with the latter being subscribed 70.26 times.</a:t>
+              <a:t>•  RELIANCE.NS has declined 0.90% today, despite India's crude oil demand expected to surge 7% in 2027</a:t>
             </a:r>
           </a:p>
           <a:p>
@@ -5048,7 +5048,7 @@
                 </a:solidFill>
                 <a:latin typeface="Calibri"/>
               </a:rPr>
-              <a:t>•  The performance of HDFCBANK.NS and ICICIBANK.NS, which are among the major financial sector stocks.</a:t>
+              <a:t>•  Tata Motors' 80% decline in Q1 PAT</a:t>
             </a:r>
           </a:p>
           <a:p>
@@ -5064,7 +5064,7 @@
                 </a:solidFill>
                 <a:latin typeface="Calibri"/>
               </a:rPr>
-              <a:t>•  The movement of the Indian rupee against the US dollar, given the elevated oil prices and global uncertainty.</a:t>
+              <a:t>•  The performance of smallcap and midcap funds, with nearly one in three MF equity folios now invested in these funds</a:t>
             </a:r>
           </a:p>
           <a:p>
@@ -5080,7 +5080,7 @@
                 </a:solidFill>
                 <a:latin typeface="Calibri"/>
               </a:rPr>
-              <a:t>•  The upcoming earnings reports of major Indian companies, which could impact the market sentiment.</a:t>
+              <a:t>•  The impact of falling oil prices on the Indian market</a:t>
             </a:r>
           </a:p>
         </p:txBody>

--- a/public/deskbrief.pptx
+++ b/public/deskbrief.pptx
@@ -3128,7 +3128,7 @@
                 </a:solidFill>
                 <a:latin typeface="Calibri"/>
               </a:rPr>
-              <a:t>8 names  |  generated 13 Aug 2026 13:54  |  source: Yahoo Finance via yfinance, Indian financial RSS</a:t>
+              <a:t>8 names  |  generated 14 Aug 2026 13:51  |  source: Yahoo Finance via yfinance, Indian financial RSS</a:t>
             </a:r>
           </a:p>
         </p:txBody>
@@ -3428,7 +3428,7 @@
                           </a:solidFill>
                           <a:latin typeface="Calibri"/>
                         </a:rPr>
-                        <a:t>1,939</a:t>
+                        <a:t>1,992</a:t>
                       </a:r>
                     </a:p>
                   </a:txBody>
@@ -3447,11 +3447,11 @@
                       <a:r>
                         <a:rPr sz="1000" b="0">
                           <a:solidFill>
-                            <a:srgbClr val="B3261E"/>
-                          </a:solidFill>
-                          <a:latin typeface="Calibri"/>
-                        </a:rPr>
-                        <a:t>-0.30%</a:t>
+                            <a:srgbClr val="0B7A3B"/>
+                          </a:solidFill>
+                          <a:latin typeface="Calibri"/>
+                        </a:rPr>
+                        <a:t>+2.73%</a:t>
                       </a:r>
                     </a:p>
                   </a:txBody>
@@ -3470,11 +3470,11 @@
                       <a:r>
                         <a:rPr sz="1000" b="0">
                           <a:solidFill>
-                            <a:srgbClr val="B3261E"/>
-                          </a:solidFill>
-                          <a:latin typeface="Calibri"/>
-                        </a:rPr>
-                        <a:t>-0.46%</a:t>
+                            <a:srgbClr val="0B7A3B"/>
+                          </a:solidFill>
+                          <a:latin typeface="Calibri"/>
+                        </a:rPr>
+                        <a:t>+1.64%</a:t>
                       </a:r>
                     </a:p>
                   </a:txBody>
@@ -3497,7 +3497,7 @@
                           </a:solidFill>
                           <a:latin typeface="Calibri"/>
                         </a:rPr>
-                        <a:t>+2.36%</a:t>
+                        <a:t>+4.96%</a:t>
                       </a:r>
                     </a:p>
                   </a:txBody>
@@ -3520,7 +3520,7 @@
                           </a:solidFill>
                           <a:latin typeface="Calibri"/>
                         </a:rPr>
-                        <a:t>-9.2%</a:t>
+                        <a:t>-6.7%</a:t>
                       </a:r>
                     </a:p>
                   </a:txBody>
@@ -3543,7 +3543,7 @@
                           </a:solidFill>
                           <a:latin typeface="Calibri"/>
                         </a:rPr>
-                        <a:t>18%</a:t>
+                        <a:t>19%</a:t>
                       </a:r>
                     </a:p>
                   </a:txBody>
@@ -3566,7 +3566,7 @@
                           </a:solidFill>
                           <a:latin typeface="Calibri"/>
                         </a:rPr>
-                        <a:t>40.5</a:t>
+                        <a:t>41.6</a:t>
                       </a:r>
                     </a:p>
                   </a:txBody>
@@ -3614,7 +3614,7 @@
                           </a:solidFill>
                           <a:latin typeface="Calibri"/>
                         </a:rPr>
-                        <a:t>725</a:t>
+                        <a:t>727</a:t>
                       </a:r>
                     </a:p>
                   </a:txBody>
@@ -3633,6 +3633,29 @@
                       <a:r>
                         <a:rPr sz="1000" b="0">
                           <a:solidFill>
+                            <a:srgbClr val="0B7A3B"/>
+                          </a:solidFill>
+                          <a:latin typeface="Calibri"/>
+                        </a:rPr>
+                        <a:t>+0.28%</a:t>
+                      </a:r>
+                    </a:p>
+                  </a:txBody>
+                  <a:tcPr>
+                    <a:solidFill>
+                      <a:srgbClr val="FFFFFF"/>
+                    </a:solidFill>
+                  </a:tcPr>
+                </a:tc>
+                <a:tc>
+                  <a:txBody>
+                    <a:bodyPr/>
+                    <a:lstStyle/>
+                    <a:p>
+                      <a:pPr algn="r"/>
+                      <a:r>
+                        <a:rPr sz="1000" b="0">
+                          <a:solidFill>
                             <a:srgbClr val="B3261E"/>
                           </a:solidFill>
                           <a:latin typeface="Calibri"/>
@@ -3660,7 +3683,7 @@
                           </a:solidFill>
                           <a:latin typeface="Calibri"/>
                         </a:rPr>
-                        <a:t>-1.27%</a:t>
+                        <a:t>-10.06%</a:t>
                       </a:r>
                     </a:p>
                   </a:txBody>
@@ -3679,11 +3702,11 @@
                       <a:r>
                         <a:rPr sz="1000" b="0">
                           <a:solidFill>
-                            <a:srgbClr val="B3261E"/>
-                          </a:solidFill>
-                          <a:latin typeface="Calibri"/>
-                        </a:rPr>
-                        <a:t>-11.09%</a:t>
+                            <a:srgbClr val="1F2A37"/>
+                          </a:solidFill>
+                          <a:latin typeface="Calibri"/>
+                        </a:rPr>
+                        <a:t>-26.8%</a:t>
                       </a:r>
                     </a:p>
                   </a:txBody>
@@ -3706,7 +3729,7 @@
                           </a:solidFill>
                           <a:latin typeface="Calibri"/>
                         </a:rPr>
-                        <a:t>-27.0%</a:t>
+                        <a:t>24%</a:t>
                       </a:r>
                     </a:p>
                   </a:txBody>
@@ -3729,30 +3752,7 @@
                           </a:solidFill>
                           <a:latin typeface="Calibri"/>
                         </a:rPr>
-                        <a:t>24%</a:t>
-                      </a:r>
-                    </a:p>
-                  </a:txBody>
-                  <a:tcPr>
-                    <a:solidFill>
-                      <a:srgbClr val="FFFFFF"/>
-                    </a:solidFill>
-                  </a:tcPr>
-                </a:tc>
-                <a:tc>
-                  <a:txBody>
-                    <a:bodyPr/>
-                    <a:lstStyle/>
-                    <a:p>
-                      <a:pPr algn="r"/>
-                      <a:r>
-                        <a:rPr sz="1000" b="0">
-                          <a:solidFill>
-                            <a:srgbClr val="1F2A37"/>
-                          </a:solidFill>
-                          <a:latin typeface="Calibri"/>
-                        </a:rPr>
-                        <a:t>15.8</a:t>
+                        <a:t>16.0</a:t>
                       </a:r>
                     </a:p>
                   </a:txBody>
@@ -3800,7 +3800,7 @@
                           </a:solidFill>
                           <a:latin typeface="Calibri"/>
                         </a:rPr>
-                        <a:t>1,407</a:t>
+                        <a:t>1,417</a:t>
                       </a:r>
                     </a:p>
                   </a:txBody>
@@ -3819,11 +3819,34 @@
                       <a:r>
                         <a:rPr sz="1000" b="0">
                           <a:solidFill>
+                            <a:srgbClr val="0B7A3B"/>
+                          </a:solidFill>
+                          <a:latin typeface="Calibri"/>
+                        </a:rPr>
+                        <a:t>+0.73%</a:t>
+                      </a:r>
+                    </a:p>
+                  </a:txBody>
+                  <a:tcPr>
+                    <a:solidFill>
+                      <a:srgbClr val="F3F5F7"/>
+                    </a:solidFill>
+                  </a:tcPr>
+                </a:tc>
+                <a:tc>
+                  <a:txBody>
+                    <a:bodyPr/>
+                    <a:lstStyle/>
+                    <a:p>
+                      <a:pPr algn="r"/>
+                      <a:r>
+                        <a:rPr sz="1000" b="0">
+                          <a:solidFill>
                             <a:srgbClr val="B3261E"/>
                           </a:solidFill>
                           <a:latin typeface="Calibri"/>
                         </a:rPr>
-                        <a:t>-1.74%</a:t>
+                        <a:t>-0.28%</a:t>
                       </a:r>
                     </a:p>
                   </a:txBody>
@@ -3842,11 +3865,11 @@
                       <a:r>
                         <a:rPr sz="1000" b="0">
                           <a:solidFill>
-                            <a:srgbClr val="B3261E"/>
-                          </a:solidFill>
-                          <a:latin typeface="Calibri"/>
-                        </a:rPr>
-                        <a:t>-3.48%</a:t>
+                            <a:srgbClr val="0B7A3B"/>
+                          </a:solidFill>
+                          <a:latin typeface="Calibri"/>
+                        </a:rPr>
+                        <a:t>+0.76%</a:t>
                       </a:r>
                     </a:p>
                   </a:txBody>
@@ -3865,11 +3888,11 @@
                       <a:r>
                         <a:rPr sz="1000" b="0">
                           <a:solidFill>
-                            <a:srgbClr val="0B7A3B"/>
-                          </a:solidFill>
-                          <a:latin typeface="Calibri"/>
-                        </a:rPr>
-                        <a:t>+0.17%</a:t>
+                            <a:srgbClr val="1F2A37"/>
+                          </a:solidFill>
+                          <a:latin typeface="Calibri"/>
+                        </a:rPr>
+                        <a:t>-2.9%</a:t>
                       </a:r>
                     </a:p>
                   </a:txBody>
@@ -3892,7 +3915,7 @@
                           </a:solidFill>
                           <a:latin typeface="Calibri"/>
                         </a:rPr>
-                        <a:t>-3.6%</a:t>
+                        <a:t>18%</a:t>
                       </a:r>
                     </a:p>
                   </a:txBody>
@@ -3915,30 +3938,7 @@
                           </a:solidFill>
                           <a:latin typeface="Calibri"/>
                         </a:rPr>
-                        <a:t>18%</a:t>
-                      </a:r>
-                    </a:p>
-                  </a:txBody>
-                  <a:tcPr>
-                    <a:solidFill>
-                      <a:srgbClr val="F3F5F7"/>
-                    </a:solidFill>
-                  </a:tcPr>
-                </a:tc>
-                <a:tc>
-                  <a:txBody>
-                    <a:bodyPr/>
-                    <a:lstStyle/>
-                    <a:p>
-                      <a:pPr algn="r"/>
-                      <a:r>
-                        <a:rPr sz="1000" b="0">
-                          <a:solidFill>
-                            <a:srgbClr val="1F2A37"/>
-                          </a:solidFill>
-                          <a:latin typeface="Calibri"/>
-                        </a:rPr>
-                        <a:t>18.2</a:t>
+                        <a:t>18.3</a:t>
                       </a:r>
                     </a:p>
                   </a:txBody>
@@ -3986,7 +3986,7 @@
                           </a:solidFill>
                           <a:latin typeface="Calibri"/>
                         </a:rPr>
-                        <a:t>1,175</a:t>
+                        <a:t>1,169</a:t>
                       </a:r>
                     </a:p>
                   </a:txBody>
@@ -4009,7 +4009,7 @@
                           </a:solidFill>
                           <a:latin typeface="Calibri"/>
                         </a:rPr>
-                        <a:t>-0.09%</a:t>
+                        <a:t>-0.49%</a:t>
                       </a:r>
                     </a:p>
                   </a:txBody>
@@ -4028,11 +4028,34 @@
                       <a:r>
                         <a:rPr sz="1000" b="0">
                           <a:solidFill>
+                            <a:srgbClr val="B3261E"/>
+                          </a:solidFill>
+                          <a:latin typeface="Calibri"/>
+                        </a:rPr>
+                        <a:t>-0.50%</a:t>
+                      </a:r>
+                    </a:p>
+                  </a:txBody>
+                  <a:tcPr>
+                    <a:solidFill>
+                      <a:srgbClr val="FFFFFF"/>
+                    </a:solidFill>
+                  </a:tcPr>
+                </a:tc>
+                <a:tc>
+                  <a:txBody>
+                    <a:bodyPr/>
+                    <a:lstStyle/>
+                    <a:p>
+                      <a:pPr algn="r"/>
+                      <a:r>
+                        <a:rPr sz="1000" b="0">
+                          <a:solidFill>
                             <a:srgbClr val="0B7A3B"/>
                           </a:solidFill>
                           <a:latin typeface="Calibri"/>
                         </a:rPr>
-                        <a:t>+0.86%</a:t>
+                        <a:t>+8.02%</a:t>
                       </a:r>
                     </a:p>
                   </a:txBody>
@@ -4051,11 +4074,11 @@
                       <a:r>
                         <a:rPr sz="1000" b="0">
                           <a:solidFill>
-                            <a:srgbClr val="0B7A3B"/>
-                          </a:solidFill>
-                          <a:latin typeface="Calibri"/>
-                        </a:rPr>
-                        <a:t>+9.17%</a:t>
+                            <a:srgbClr val="1F2A37"/>
+                          </a:solidFill>
+                          <a:latin typeface="Calibri"/>
+                        </a:rPr>
+                        <a:t>-29.3%</a:t>
                       </a:r>
                     </a:p>
                   </a:txBody>
@@ -4078,7 +4101,7 @@
                           </a:solidFill>
                           <a:latin typeface="Calibri"/>
                         </a:rPr>
-                        <a:t>-29.0%</a:t>
+                        <a:t>29%</a:t>
                       </a:r>
                     </a:p>
                   </a:txBody>
@@ -4101,30 +4124,7 @@
                           </a:solidFill>
                           <a:latin typeface="Calibri"/>
                         </a:rPr>
-                        <a:t>29%</a:t>
-                      </a:r>
-                    </a:p>
-                  </a:txBody>
-                  <a:tcPr>
-                    <a:solidFill>
-                      <a:srgbClr val="FFFFFF"/>
-                    </a:solidFill>
-                  </a:tcPr>
-                </a:tc>
-                <a:tc>
-                  <a:txBody>
-                    <a:bodyPr/>
-                    <a:lstStyle/>
-                    <a:p>
-                      <a:pPr algn="r"/>
-                      <a:r>
-                        <a:rPr sz="1000" b="0">
-                          <a:solidFill>
-                            <a:srgbClr val="1F2A37"/>
-                          </a:solidFill>
-                          <a:latin typeface="Calibri"/>
-                        </a:rPr>
-                        <a:t>15.2</a:t>
+                        <a:t>15.1</a:t>
                       </a:r>
                     </a:p>
                   </a:txBody>
@@ -4191,11 +4191,11 @@
                       <a:r>
                         <a:rPr sz="1000" b="0">
                           <a:solidFill>
-                            <a:srgbClr val="0B7A3B"/>
-                          </a:solidFill>
-                          <a:latin typeface="Calibri"/>
-                        </a:rPr>
-                        <a:t>+0.85%</a:t>
+                            <a:srgbClr val="B3261E"/>
+                          </a:solidFill>
+                          <a:latin typeface="Calibri"/>
+                        </a:rPr>
+                        <a:t>-0.11%</a:t>
                       </a:r>
                     </a:p>
                   </a:txBody>
@@ -4218,7 +4218,7 @@
                           </a:solidFill>
                           <a:latin typeface="Calibri"/>
                         </a:rPr>
-                        <a:t>-2.59%</a:t>
+                        <a:t>-2.76%</a:t>
                       </a:r>
                     </a:p>
                   </a:txBody>
@@ -4237,11 +4237,11 @@
                       <a:r>
                         <a:rPr sz="1000" b="0">
                           <a:solidFill>
-                            <a:srgbClr val="0B7A3B"/>
-                          </a:solidFill>
-                          <a:latin typeface="Calibri"/>
-                        </a:rPr>
-                        <a:t>+0.67%</a:t>
+                            <a:srgbClr val="B3261E"/>
+                          </a:solidFill>
+                          <a:latin typeface="Calibri"/>
+                        </a:rPr>
+                        <a:t>-0.41%</a:t>
                       </a:r>
                     </a:p>
                   </a:txBody>
@@ -4264,7 +4264,7 @@
                           </a:solidFill>
                           <a:latin typeface="Calibri"/>
                         </a:rPr>
-                        <a:t>-30.7%</a:t>
+                        <a:t>-30.8%</a:t>
                       </a:r>
                     </a:p>
                   </a:txBody>
@@ -4358,7 +4358,7 @@
                           </a:solidFill>
                           <a:latin typeface="Calibri"/>
                         </a:rPr>
-                        <a:t>4,071</a:t>
+                        <a:t>4,057</a:t>
                       </a:r>
                     </a:p>
                   </a:txBody>
@@ -4377,11 +4377,34 @@
                       <a:r>
                         <a:rPr sz="1000" b="0">
                           <a:solidFill>
+                            <a:srgbClr val="B3261E"/>
+                          </a:solidFill>
+                          <a:latin typeface="Calibri"/>
+                        </a:rPr>
+                        <a:t>-0.34%</a:t>
+                      </a:r>
+                    </a:p>
+                  </a:txBody>
+                  <a:tcPr>
+                    <a:solidFill>
+                      <a:srgbClr val="FFFFFF"/>
+                    </a:solidFill>
+                  </a:tcPr>
+                </a:tc>
+                <a:tc>
+                  <a:txBody>
+                    <a:bodyPr/>
+                    <a:lstStyle/>
+                    <a:p>
+                      <a:pPr algn="r"/>
+                      <a:r>
+                        <a:rPr sz="1000" b="0">
+                          <a:solidFill>
                             <a:srgbClr val="0B7A3B"/>
                           </a:solidFill>
                           <a:latin typeface="Calibri"/>
                         </a:rPr>
-                        <a:t>+1.26%</a:t>
+                        <a:t>+0.02%</a:t>
                       </a:r>
                     </a:p>
                   </a:txBody>
@@ -4404,7 +4427,7 @@
                           </a:solidFill>
                           <a:latin typeface="Calibri"/>
                         </a:rPr>
-                        <a:t>+0.22%</a:t>
+                        <a:t>+7.45%</a:t>
                       </a:r>
                     </a:p>
                   </a:txBody>
@@ -4423,11 +4446,11 @@
                       <a:r>
                         <a:rPr sz="1000" b="0">
                           <a:solidFill>
-                            <a:srgbClr val="0B7A3B"/>
-                          </a:solidFill>
-                          <a:latin typeface="Calibri"/>
-                        </a:rPr>
-                        <a:t>+7.58%</a:t>
+                            <a:srgbClr val="1F2A37"/>
+                          </a:solidFill>
+                          <a:latin typeface="Calibri"/>
+                        </a:rPr>
+                        <a:t>-7.3%</a:t>
                       </a:r>
                     </a:p>
                   </a:txBody>
@@ -4450,7 +4473,7 @@
                           </a:solidFill>
                           <a:latin typeface="Calibri"/>
                         </a:rPr>
-                        <a:t>-7.0%</a:t>
+                        <a:t>18%</a:t>
                       </a:r>
                     </a:p>
                   </a:txBody>
@@ -4473,30 +4496,7 @@
                           </a:solidFill>
                           <a:latin typeface="Calibri"/>
                         </a:rPr>
-                        <a:t>19%</a:t>
-                      </a:r>
-                    </a:p>
-                  </a:txBody>
-                  <a:tcPr>
-                    <a:solidFill>
-                      <a:srgbClr val="FFFFFF"/>
-                    </a:solidFill>
-                  </a:tcPr>
-                </a:tc>
-                <a:tc>
-                  <a:txBody>
-                    <a:bodyPr/>
-                    <a:lstStyle/>
-                    <a:p>
-                      <a:pPr algn="r"/>
-                      <a:r>
-                        <a:rPr sz="1000" b="0">
-                          <a:solidFill>
-                            <a:srgbClr val="1F2A37"/>
-                          </a:solidFill>
-                          <a:latin typeface="Calibri"/>
-                        </a:rPr>
-                        <a:t>33.8</a:t>
+                        <a:t>33.7</a:t>
                       </a:r>
                     </a:p>
                   </a:txBody>
@@ -4544,7 +4544,7 @@
                           </a:solidFill>
                           <a:latin typeface="Calibri"/>
                         </a:rPr>
-                        <a:t>1,317</a:t>
+                        <a:t>1,310</a:t>
                       </a:r>
                     </a:p>
                   </a:txBody>
@@ -4567,7 +4567,7 @@
                           </a:solidFill>
                           <a:latin typeface="Calibri"/>
                         </a:rPr>
-                        <a:t>-0.90%</a:t>
+                        <a:t>-0.53%</a:t>
                       </a:r>
                     </a:p>
                   </a:txBody>
@@ -4590,7 +4590,7 @@
                           </a:solidFill>
                           <a:latin typeface="Calibri"/>
                         </a:rPr>
-                        <a:t>-0.60%</a:t>
+                        <a:t>-1.86%</a:t>
                       </a:r>
                     </a:p>
                   </a:txBody>
@@ -4613,7 +4613,7 @@
                           </a:solidFill>
                           <a:latin typeface="Calibri"/>
                         </a:rPr>
-                        <a:t>+1.66%</a:t>
+                        <a:t>+1.03%</a:t>
                       </a:r>
                     </a:p>
                   </a:txBody>
@@ -4636,7 +4636,7 @@
                           </a:solidFill>
                           <a:latin typeface="Calibri"/>
                         </a:rPr>
-                        <a:t>-16.9%</a:t>
+                        <a:t>-17.3%</a:t>
                       </a:r>
                     </a:p>
                   </a:txBody>
@@ -4682,7 +4682,7 @@
                           </a:solidFill>
                           <a:latin typeface="Calibri"/>
                         </a:rPr>
-                        <a:t>23.8</a:t>
+                        <a:t>23.9</a:t>
                       </a:r>
                     </a:p>
                   </a:txBody>
@@ -4730,7 +4730,7 @@
                           </a:solidFill>
                           <a:latin typeface="Calibri"/>
                         </a:rPr>
-                        <a:t>2,375</a:t>
+                        <a:t>2,361</a:t>
                       </a:r>
                     </a:p>
                   </a:txBody>
@@ -4749,11 +4749,57 @@
                       <a:r>
                         <a:rPr sz="1000" b="0">
                           <a:solidFill>
+                            <a:srgbClr val="B3261E"/>
+                          </a:solidFill>
+                          <a:latin typeface="Calibri"/>
+                        </a:rPr>
+                        <a:t>-0.59%</a:t>
+                      </a:r>
+                    </a:p>
+                  </a:txBody>
+                  <a:tcPr>
+                    <a:solidFill>
+                      <a:srgbClr val="FFFFFF"/>
+                    </a:solidFill>
+                  </a:tcPr>
+                </a:tc>
+                <a:tc>
+                  <a:txBody>
+                    <a:bodyPr/>
+                    <a:lstStyle/>
+                    <a:p>
+                      <a:pPr algn="r"/>
+                      <a:r>
+                        <a:rPr sz="1000" b="0">
+                          <a:solidFill>
+                            <a:srgbClr val="B3261E"/>
+                          </a:solidFill>
+                          <a:latin typeface="Calibri"/>
+                        </a:rPr>
+                        <a:t>-3.74%</a:t>
+                      </a:r>
+                    </a:p>
+                  </a:txBody>
+                  <a:tcPr>
+                    <a:solidFill>
+                      <a:srgbClr val="FFFFFF"/>
+                    </a:solidFill>
+                  </a:tcPr>
+                </a:tc>
+                <a:tc>
+                  <a:txBody>
+                    <a:bodyPr/>
+                    <a:lstStyle/>
+                    <a:p>
+                      <a:pPr algn="r"/>
+                      <a:r>
+                        <a:rPr sz="1000" b="0">
+                          <a:solidFill>
                             <a:srgbClr val="0B7A3B"/>
                           </a:solidFill>
                           <a:latin typeface="Calibri"/>
                         </a:rPr>
-                        <a:t>+1.08%</a:t>
+                        <a:t>+7.27%</a:t>
                       </a:r>
                     </a:p>
                   </a:txBody>
@@ -4772,11 +4818,11 @@
                       <a:r>
                         <a:rPr sz="1000" b="0">
                           <a:solidFill>
-                            <a:srgbClr val="0B7A3B"/>
-                          </a:solidFill>
-                          <a:latin typeface="Calibri"/>
-                        </a:rPr>
-                        <a:t>+0.08%</a:t>
+                            <a:srgbClr val="1F2A37"/>
+                          </a:solidFill>
+                          <a:latin typeface="Calibri"/>
+                        </a:rPr>
+                        <a:t>-26.3%</a:t>
                       </a:r>
                     </a:p>
                   </a:txBody>
@@ -4795,11 +4841,11 @@
                       <a:r>
                         <a:rPr sz="1000" b="0">
                           <a:solidFill>
-                            <a:srgbClr val="0B7A3B"/>
-                          </a:solidFill>
-                          <a:latin typeface="Calibri"/>
-                        </a:rPr>
-                        <a:t>+8.49%</a:t>
+                            <a:srgbClr val="1F2A37"/>
+                          </a:solidFill>
+                          <a:latin typeface="Calibri"/>
+                        </a:rPr>
+                        <a:t>35%</a:t>
                       </a:r>
                     </a:p>
                   </a:txBody>
@@ -4822,53 +4868,7 @@
                           </a:solidFill>
                           <a:latin typeface="Calibri"/>
                         </a:rPr>
-                        <a:t>-25.9%</a:t>
-                      </a:r>
-                    </a:p>
-                  </a:txBody>
-                  <a:tcPr>
-                    <a:solidFill>
-                      <a:srgbClr val="FFFFFF"/>
-                    </a:solidFill>
-                  </a:tcPr>
-                </a:tc>
-                <a:tc>
-                  <a:txBody>
-                    <a:bodyPr/>
-                    <a:lstStyle/>
-                    <a:p>
-                      <a:pPr algn="r"/>
-                      <a:r>
-                        <a:rPr sz="1000" b="0">
-                          <a:solidFill>
-                            <a:srgbClr val="1F2A37"/>
-                          </a:solidFill>
-                          <a:latin typeface="Calibri"/>
-                        </a:rPr>
-                        <a:t>35%</a:t>
-                      </a:r>
-                    </a:p>
-                  </a:txBody>
-                  <a:tcPr>
-                    <a:solidFill>
-                      <a:srgbClr val="FFFFFF"/>
-                    </a:solidFill>
-                  </a:tcPr>
-                </a:tc>
-                <a:tc>
-                  <a:txBody>
-                    <a:bodyPr/>
-                    <a:lstStyle/>
-                    <a:p>
-                      <a:pPr algn="r"/>
-                      <a:r>
-                        <a:rPr sz="1000" b="0">
-                          <a:solidFill>
-                            <a:srgbClr val="1F2A37"/>
-                          </a:solidFill>
-                          <a:latin typeface="Calibri"/>
-                        </a:rPr>
-                        <a:t>17.2</a:t>
+                        <a:t>17.1</a:t>
                       </a:r>
                     </a:p>
                   </a:txBody>
@@ -4952,7 +4952,7 @@
                 </a:solidFill>
                 <a:latin typeface="Calibri"/>
               </a:rPr>
-              <a:t>Indian large caps show mixed performance with LT.NS and TCS.NS gaining over 1% while HDFCBANK.NS and ICICIBANK.NS decline</a:t>
+              <a:t>The market tone remains mixed with Bharti Airtel rising 2.73% and HDFC Bank up 0.28%, while Infy and TCS declined 0.49% and 0.59% respectively.</a:t>
             </a:r>
           </a:p>
           <a:p>
@@ -4968,7 +4968,7 @@
                 </a:solidFill>
                 <a:latin typeface="Calibri"/>
               </a:rPr>
-              <a:t>•  BHARTIARTL.NS is trading at a P/E of 40.5, the highest among the listed companies</a:t>
+              <a:t>•  Bharti Airtel's stock price rose 2.73% today, outperforming the broader market.</a:t>
             </a:r>
           </a:p>
           <a:p>
@@ -4984,7 +4984,7 @@
                 </a:solidFill>
                 <a:latin typeface="Calibri"/>
               </a:rPr>
-              <a:t>•  HDFCBANK.NS has declined 11.09% in the last 21 days, the largest decline among the listed companies</a:t>
+              <a:t>•  HDFC Bank's stock price increased by 0.28% despite a decline of 10.06% in the past 21 days.</a:t>
             </a:r>
           </a:p>
           <a:p>
@@ -5000,7 +5000,7 @@
                 </a:solidFill>
                 <a:latin typeface="Calibri"/>
               </a:rPr>
-              <a:t>•  INFY.NS and TCS.NS have gained 9.17% and 8.49% respectively in the last 21 days, driven by the technology sector</a:t>
+              <a:t>•  The technology sector saw mixed results, with Infy declining 0.49% and TCS down 0.59%.</a:t>
             </a:r>
           </a:p>
           <a:p>
@@ -5016,7 +5016,7 @@
                 </a:solidFill>
                 <a:latin typeface="Calibri"/>
               </a:rPr>
-              <a:t>•  RELIANCE.NS has declined 0.90% today, despite India's crude oil demand expected to surge 7% in 2027</a:t>
+              <a:t>•  The P/E ratio of Bharti Airtel stands at 41.6, significantly higher than its peers in the financial services sector.</a:t>
             </a:r>
           </a:p>
           <a:p>
@@ -5048,7 +5048,7 @@
                 </a:solidFill>
                 <a:latin typeface="Calibri"/>
               </a:rPr>
-              <a:t>•  Tata Motors' 80% decline in Q1 PAT</a:t>
+              <a:t>•  The performance of HDFC Bank and ICICIBANK in the next session, given their recent decline.</a:t>
             </a:r>
           </a:p>
           <a:p>
@@ -5064,7 +5064,7 @@
                 </a:solidFill>
                 <a:latin typeface="Calibri"/>
               </a:rPr>
-              <a:t>•  The performance of smallcap and midcap funds, with nearly one in three MF equity folios now invested in these funds</a:t>
+              <a:t>•  The movement of Infy and TCS stocks, considering their significant volume and price changes.</a:t>
             </a:r>
           </a:p>
           <a:p>
@@ -5080,7 +5080,7 @@
                 </a:solidFill>
                 <a:latin typeface="Calibri"/>
               </a:rPr>
-              <a:t>•  The impact of falling oil prices on the Indian market</a:t>
+              <a:t>•  The impact of the Svatantra Microfin public offer on the market, given its size of ₹3,000 crore.</a:t>
             </a:r>
           </a:p>
         </p:txBody>

--- a/public/deskbrief.pptx
+++ b/public/deskbrief.pptx
@@ -3128,7 +3128,7 @@
                 </a:solidFill>
                 <a:latin typeface="Calibri"/>
               </a:rPr>
-              <a:t>8 names  |  generated 14 Aug 2026 13:51  |  source: Yahoo Finance via yfinance, Indian financial RSS</a:t>
+              <a:t>8 names  |  generated 17 Aug 2026 13:14  |  source: Yahoo Finance via yfinance, Indian financial RSS</a:t>
             </a:r>
           </a:p>
         </p:txBody>
@@ -3428,7 +3428,7 @@
                           </a:solidFill>
                           <a:latin typeface="Calibri"/>
                         </a:rPr>
-                        <a:t>1,992</a:t>
+                        <a:t>1,969</a:t>
                       </a:r>
                     </a:p>
                   </a:txBody>
@@ -3447,11 +3447,34 @@
                       <a:r>
                         <a:rPr sz="1000" b="0">
                           <a:solidFill>
+                            <a:srgbClr val="B3261E"/>
+                          </a:solidFill>
+                          <a:latin typeface="Calibri"/>
+                        </a:rPr>
+                        <a:t>-1.14%</a:t>
+                      </a:r>
+                    </a:p>
+                  </a:txBody>
+                  <a:tcPr>
+                    <a:solidFill>
+                      <a:srgbClr val="F3F5F7"/>
+                    </a:solidFill>
+                  </a:tcPr>
+                </a:tc>
+                <a:tc>
+                  <a:txBody>
+                    <a:bodyPr/>
+                    <a:lstStyle/>
+                    <a:p>
+                      <a:pPr algn="r"/>
+                      <a:r>
+                        <a:rPr sz="1000" b="0">
+                          <a:solidFill>
                             <a:srgbClr val="0B7A3B"/>
                           </a:solidFill>
                           <a:latin typeface="Calibri"/>
                         </a:rPr>
-                        <a:t>+2.73%</a:t>
+                        <a:t>+1.35%</a:t>
                       </a:r>
                     </a:p>
                   </a:txBody>
@@ -3474,7 +3497,7 @@
                           </a:solidFill>
                           <a:latin typeface="Calibri"/>
                         </a:rPr>
-                        <a:t>+1.64%</a:t>
+                        <a:t>+4.47%</a:t>
                       </a:r>
                     </a:p>
                   </a:txBody>
@@ -3493,11 +3516,11 @@
                       <a:r>
                         <a:rPr sz="1000" b="0">
                           <a:solidFill>
-                            <a:srgbClr val="0B7A3B"/>
-                          </a:solidFill>
-                          <a:latin typeface="Calibri"/>
-                        </a:rPr>
-                        <a:t>+4.96%</a:t>
+                            <a:srgbClr val="1F2A37"/>
+                          </a:solidFill>
+                          <a:latin typeface="Calibri"/>
+                        </a:rPr>
+                        <a:t>-7.8%</a:t>
                       </a:r>
                     </a:p>
                   </a:txBody>
@@ -3520,7 +3543,7 @@
                           </a:solidFill>
                           <a:latin typeface="Calibri"/>
                         </a:rPr>
-                        <a:t>-6.7%</a:t>
+                        <a:t>19%</a:t>
                       </a:r>
                     </a:p>
                   </a:txBody>
@@ -3543,30 +3566,7 @@
                           </a:solidFill>
                           <a:latin typeface="Calibri"/>
                         </a:rPr>
-                        <a:t>19%</a:t>
-                      </a:r>
-                    </a:p>
-                  </a:txBody>
-                  <a:tcPr>
-                    <a:solidFill>
-                      <a:srgbClr val="F3F5F7"/>
-                    </a:solidFill>
-                  </a:tcPr>
-                </a:tc>
-                <a:tc>
-                  <a:txBody>
-                    <a:bodyPr/>
-                    <a:lstStyle/>
-                    <a:p>
-                      <a:pPr algn="r"/>
-                      <a:r>
-                        <a:rPr sz="1000" b="0">
-                          <a:solidFill>
-                            <a:srgbClr val="1F2A37"/>
-                          </a:solidFill>
-                          <a:latin typeface="Calibri"/>
-                        </a:rPr>
-                        <a:t>41.6</a:t>
+                        <a:t>41.2</a:t>
                       </a:r>
                     </a:p>
                   </a:txBody>
@@ -3614,7 +3614,7 @@
                           </a:solidFill>
                           <a:latin typeface="Calibri"/>
                         </a:rPr>
-                        <a:t>727</a:t>
+                        <a:t>729</a:t>
                       </a:r>
                     </a:p>
                   </a:txBody>
@@ -3660,7 +3660,7 @@
                           </a:solidFill>
                           <a:latin typeface="Calibri"/>
                         </a:rPr>
-                        <a:t>-0.55%</a:t>
+                        <a:t>-0.27%</a:t>
                       </a:r>
                     </a:p>
                   </a:txBody>
@@ -3683,7 +3683,7 @@
                           </a:solidFill>
                           <a:latin typeface="Calibri"/>
                         </a:rPr>
-                        <a:t>-10.06%</a:t>
+                        <a:t>-11.05%</a:t>
                       </a:r>
                     </a:p>
                   </a:txBody>
@@ -3706,7 +3706,7 @@
                           </a:solidFill>
                           <a:latin typeface="Calibri"/>
                         </a:rPr>
-                        <a:t>-26.8%</a:t>
+                        <a:t>-26.6%</a:t>
                       </a:r>
                     </a:p>
                   </a:txBody>
@@ -3729,7 +3729,7 @@
                           </a:solidFill>
                           <a:latin typeface="Calibri"/>
                         </a:rPr>
-                        <a:t>24%</a:t>
+                        <a:t>21%</a:t>
                       </a:r>
                     </a:p>
                   </a:txBody>
@@ -3752,7 +3752,7 @@
                           </a:solidFill>
                           <a:latin typeface="Calibri"/>
                         </a:rPr>
-                        <a:t>16.0</a:t>
+                        <a:t>15.9</a:t>
                       </a:r>
                     </a:p>
                   </a:txBody>
@@ -3800,7 +3800,7 @@
                           </a:solidFill>
                           <a:latin typeface="Calibri"/>
                         </a:rPr>
-                        <a:t>1,417</a:t>
+                        <a:t>1,415</a:t>
                       </a:r>
                     </a:p>
                   </a:txBody>
@@ -3819,11 +3819,11 @@
                       <a:r>
                         <a:rPr sz="1000" b="0">
                           <a:solidFill>
-                            <a:srgbClr val="0B7A3B"/>
-                          </a:solidFill>
-                          <a:latin typeface="Calibri"/>
-                        </a:rPr>
-                        <a:t>+0.73%</a:t>
+                            <a:srgbClr val="B3261E"/>
+                          </a:solidFill>
+                          <a:latin typeface="Calibri"/>
+                        </a:rPr>
+                        <a:t>-0.12%</a:t>
                       </a:r>
                     </a:p>
                   </a:txBody>
@@ -3846,7 +3846,7 @@
                           </a:solidFill>
                           <a:latin typeface="Calibri"/>
                         </a:rPr>
-                        <a:t>-0.28%</a:t>
+                        <a:t>-1.15%</a:t>
                       </a:r>
                     </a:p>
                   </a:txBody>
@@ -3865,11 +3865,11 @@
                       <a:r>
                         <a:rPr sz="1000" b="0">
                           <a:solidFill>
-                            <a:srgbClr val="0B7A3B"/>
-                          </a:solidFill>
-                          <a:latin typeface="Calibri"/>
-                        </a:rPr>
-                        <a:t>+0.76%</a:t>
+                            <a:srgbClr val="B3261E"/>
+                          </a:solidFill>
+                          <a:latin typeface="Calibri"/>
+                        </a:rPr>
+                        <a:t>-1.18%</a:t>
                       </a:r>
                     </a:p>
                   </a:txBody>
@@ -3892,7 +3892,7 @@
                           </a:solidFill>
                           <a:latin typeface="Calibri"/>
                         </a:rPr>
-                        <a:t>-2.9%</a:t>
+                        <a:t>-3.1%</a:t>
                       </a:r>
                     </a:p>
                   </a:txBody>
@@ -3986,7 +3986,7 @@
                           </a:solidFill>
                           <a:latin typeface="Calibri"/>
                         </a:rPr>
-                        <a:t>1,169</a:t>
+                        <a:t>1,140</a:t>
                       </a:r>
                     </a:p>
                   </a:txBody>
@@ -4009,7 +4009,7 @@
                           </a:solidFill>
                           <a:latin typeface="Calibri"/>
                         </a:rPr>
-                        <a:t>-0.49%</a:t>
+                        <a:t>-2.51%</a:t>
                       </a:r>
                     </a:p>
                   </a:txBody>
@@ -4032,7 +4032,7 @@
                           </a:solidFill>
                           <a:latin typeface="Calibri"/>
                         </a:rPr>
-                        <a:t>-0.50%</a:t>
+                        <a:t>-3.64%</a:t>
                       </a:r>
                     </a:p>
                   </a:txBody>
@@ -4055,7 +4055,7 @@
                           </a:solidFill>
                           <a:latin typeface="Calibri"/>
                         </a:rPr>
-                        <a:t>+8.02%</a:t>
+                        <a:t>+3.96%</a:t>
                       </a:r>
                     </a:p>
                   </a:txBody>
@@ -4078,7 +4078,7 @@
                           </a:solidFill>
                           <a:latin typeface="Calibri"/>
                         </a:rPr>
-                        <a:t>-29.3%</a:t>
+                        <a:t>-31.1%</a:t>
                       </a:r>
                     </a:p>
                   </a:txBody>
@@ -4101,7 +4101,7 @@
                           </a:solidFill>
                           <a:latin typeface="Calibri"/>
                         </a:rPr>
-                        <a:t>29%</a:t>
+                        <a:t>30%</a:t>
                       </a:r>
                     </a:p>
                   </a:txBody>
@@ -4124,7 +4124,7 @@
                           </a:solidFill>
                           <a:latin typeface="Calibri"/>
                         </a:rPr>
-                        <a:t>15.1</a:t>
+                        <a:t>14.8</a:t>
                       </a:r>
                     </a:p>
                   </a:txBody>
@@ -4172,7 +4172,7 @@
                           </a:solidFill>
                           <a:latin typeface="Calibri"/>
                         </a:rPr>
-                        <a:t>278</a:t>
+                        <a:t>273</a:t>
                       </a:r>
                     </a:p>
                   </a:txBody>
@@ -4195,7 +4195,7 @@
                           </a:solidFill>
                           <a:latin typeface="Calibri"/>
                         </a:rPr>
-                        <a:t>-0.11%</a:t>
+                        <a:t>-1.85%</a:t>
                       </a:r>
                     </a:p>
                   </a:txBody>
@@ -4218,7 +4218,7 @@
                           </a:solidFill>
                           <a:latin typeface="Calibri"/>
                         </a:rPr>
-                        <a:t>-2.76%</a:t>
+                        <a:t>-3.40%</a:t>
                       </a:r>
                     </a:p>
                   </a:txBody>
@@ -4241,7 +4241,7 @@
                           </a:solidFill>
                           <a:latin typeface="Calibri"/>
                         </a:rPr>
-                        <a:t>-0.41%</a:t>
+                        <a:t>-2.73%</a:t>
                       </a:r>
                     </a:p>
                   </a:txBody>
@@ -4264,7 +4264,7 @@
                           </a:solidFill>
                           <a:latin typeface="Calibri"/>
                         </a:rPr>
-                        <a:t>-30.8%</a:t>
+                        <a:t>-32.1%</a:t>
                       </a:r>
                     </a:p>
                   </a:txBody>
@@ -4310,7 +4310,7 @@
                           </a:solidFill>
                           <a:latin typeface="Calibri"/>
                         </a:rPr>
-                        <a:t>17.6</a:t>
+                        <a:t>17.2</a:t>
                       </a:r>
                     </a:p>
                   </a:txBody>
@@ -4358,7 +4358,7 @@
                           </a:solidFill>
                           <a:latin typeface="Calibri"/>
                         </a:rPr>
-                        <a:t>4,057</a:t>
+                        <a:t>4,087</a:t>
                       </a:r>
                     </a:p>
                   </a:txBody>
@@ -4377,11 +4377,11 @@
                       <a:r>
                         <a:rPr sz="1000" b="0">
                           <a:solidFill>
-                            <a:srgbClr val="B3261E"/>
-                          </a:solidFill>
-                          <a:latin typeface="Calibri"/>
-                        </a:rPr>
-                        <a:t>-0.34%</a:t>
+                            <a:srgbClr val="0B7A3B"/>
+                          </a:solidFill>
+                          <a:latin typeface="Calibri"/>
+                        </a:rPr>
+                        <a:t>+0.73%</a:t>
                       </a:r>
                     </a:p>
                   </a:txBody>
@@ -4404,7 +4404,7 @@
                           </a:solidFill>
                           <a:latin typeface="Calibri"/>
                         </a:rPr>
-                        <a:t>+0.02%</a:t>
+                        <a:t>+0.16%</a:t>
                       </a:r>
                     </a:p>
                   </a:txBody>
@@ -4427,7 +4427,7 @@
                           </a:solidFill>
                           <a:latin typeface="Calibri"/>
                         </a:rPr>
-                        <a:t>+7.45%</a:t>
+                        <a:t>+7.14%</a:t>
                       </a:r>
                     </a:p>
                   </a:txBody>
@@ -4450,7 +4450,7 @@
                           </a:solidFill>
                           <a:latin typeface="Calibri"/>
                         </a:rPr>
-                        <a:t>-7.3%</a:t>
+                        <a:t>-6.6%</a:t>
                       </a:r>
                     </a:p>
                   </a:txBody>
@@ -4473,7 +4473,7 @@
                           </a:solidFill>
                           <a:latin typeface="Calibri"/>
                         </a:rPr>
-                        <a:t>18%</a:t>
+                        <a:t>19%</a:t>
                       </a:r>
                     </a:p>
                   </a:txBody>
@@ -4496,7 +4496,7 @@
                           </a:solidFill>
                           <a:latin typeface="Calibri"/>
                         </a:rPr>
-                        <a:t>33.7</a:t>
+                        <a:t>33.9</a:t>
                       </a:r>
                     </a:p>
                   </a:txBody>
@@ -4544,7 +4544,7 @@
                           </a:solidFill>
                           <a:latin typeface="Calibri"/>
                         </a:rPr>
-                        <a:t>1,310</a:t>
+                        <a:t>1,316</a:t>
                       </a:r>
                     </a:p>
                   </a:txBody>
@@ -4563,11 +4563,34 @@
                       <a:r>
                         <a:rPr sz="1000" b="0">
                           <a:solidFill>
+                            <a:srgbClr val="0B7A3B"/>
+                          </a:solidFill>
+                          <a:latin typeface="Calibri"/>
+                        </a:rPr>
+                        <a:t>+0.46%</a:t>
+                      </a:r>
+                    </a:p>
+                  </a:txBody>
+                  <a:tcPr>
+                    <a:solidFill>
+                      <a:srgbClr val="F3F5F7"/>
+                    </a:solidFill>
+                  </a:tcPr>
+                </a:tc>
+                <a:tc>
+                  <a:txBody>
+                    <a:bodyPr/>
+                    <a:lstStyle/>
+                    <a:p>
+                      <a:pPr algn="r"/>
+                      <a:r>
+                        <a:rPr sz="1000" b="0">
+                          <a:solidFill>
                             <a:srgbClr val="B3261E"/>
                           </a:solidFill>
                           <a:latin typeface="Calibri"/>
                         </a:rPr>
-                        <a:t>-0.53%</a:t>
+                        <a:t>-0.85%</a:t>
                       </a:r>
                     </a:p>
                   </a:txBody>
@@ -4590,7 +4613,7 @@
                           </a:solidFill>
                           <a:latin typeface="Calibri"/>
                         </a:rPr>
-                        <a:t>-1.86%</a:t>
+                        <a:t>-0.84%</a:t>
                       </a:r>
                     </a:p>
                   </a:txBody>
@@ -4609,11 +4632,11 @@
                       <a:r>
                         <a:rPr sz="1000" b="0">
                           <a:solidFill>
-                            <a:srgbClr val="0B7A3B"/>
-                          </a:solidFill>
-                          <a:latin typeface="Calibri"/>
-                        </a:rPr>
-                        <a:t>+1.03%</a:t>
+                            <a:srgbClr val="1F2A37"/>
+                          </a:solidFill>
+                          <a:latin typeface="Calibri"/>
+                        </a:rPr>
+                        <a:t>-17.0%</a:t>
                       </a:r>
                     </a:p>
                   </a:txBody>
@@ -4636,7 +4659,7 @@
                           </a:solidFill>
                           <a:latin typeface="Calibri"/>
                         </a:rPr>
-                        <a:t>-17.3%</a:t>
+                        <a:t>21%</a:t>
                       </a:r>
                     </a:p>
                   </a:txBody>
@@ -4659,30 +4682,7 @@
                           </a:solidFill>
                           <a:latin typeface="Calibri"/>
                         </a:rPr>
-                        <a:t>21%</a:t>
-                      </a:r>
-                    </a:p>
-                  </a:txBody>
-                  <a:tcPr>
-                    <a:solidFill>
-                      <a:srgbClr val="F3F5F7"/>
-                    </a:solidFill>
-                  </a:tcPr>
-                </a:tc>
-                <a:tc>
-                  <a:txBody>
-                    <a:bodyPr/>
-                    <a:lstStyle/>
-                    <a:p>
-                      <a:pPr algn="r"/>
-                      <a:r>
-                        <a:rPr sz="1000" b="0">
-                          <a:solidFill>
-                            <a:srgbClr val="1F2A37"/>
-                          </a:solidFill>
-                          <a:latin typeface="Calibri"/>
-                        </a:rPr>
-                        <a:t>23.9</a:t>
+                        <a:t>23.8</a:t>
                       </a:r>
                     </a:p>
                   </a:txBody>
@@ -4730,7 +4730,7 @@
                           </a:solidFill>
                           <a:latin typeface="Calibri"/>
                         </a:rPr>
-                        <a:t>2,361</a:t>
+                        <a:t>2,313</a:t>
                       </a:r>
                     </a:p>
                   </a:txBody>
@@ -4753,7 +4753,7 @@
                           </a:solidFill>
                           <a:latin typeface="Calibri"/>
                         </a:rPr>
-                        <a:t>-0.59%</a:t>
+                        <a:t>-2.02%</a:t>
                       </a:r>
                     </a:p>
                   </a:txBody>
@@ -4776,7 +4776,7 @@
                           </a:solidFill>
                           <a:latin typeface="Calibri"/>
                         </a:rPr>
-                        <a:t>-3.74%</a:t>
+                        <a:t>-4.64%</a:t>
                       </a:r>
                     </a:p>
                   </a:txBody>
@@ -4799,7 +4799,7 @@
                           </a:solidFill>
                           <a:latin typeface="Calibri"/>
                         </a:rPr>
-                        <a:t>+7.27%</a:t>
+                        <a:t>+1.95%</a:t>
                       </a:r>
                     </a:p>
                   </a:txBody>
@@ -4822,7 +4822,7 @@
                           </a:solidFill>
                           <a:latin typeface="Calibri"/>
                         </a:rPr>
-                        <a:t>-26.3%</a:t>
+                        <a:t>-27.8%</a:t>
                       </a:r>
                     </a:p>
                   </a:txBody>
@@ -4868,7 +4868,7 @@
                           </a:solidFill>
                           <a:latin typeface="Calibri"/>
                         </a:rPr>
-                        <a:t>17.1</a:t>
+                        <a:t>16.8</a:t>
                       </a:r>
                     </a:p>
                   </a:txBody>
@@ -4952,7 +4952,7 @@
                 </a:solidFill>
                 <a:latin typeface="Calibri"/>
               </a:rPr>
-              <a:t>The market tone remains mixed with Bharti Airtel rising 2.73% and HDFC Bank up 0.28%, while Infy and TCS declined 0.49% and 0.59% respectively.</a:t>
+              <a:t>Breadth was risk-off: 3 of 8 names advanced on the day.</a:t>
             </a:r>
           </a:p>
           <a:p>
@@ -4968,7 +4968,7 @@
                 </a:solidFill>
                 <a:latin typeface="Calibri"/>
               </a:rPr>
-              <a:t>•  Bharti Airtel's stock price rose 2.73% today, outperforming the broader market.</a:t>
+              <a:t>•  Best performer on the day: LT.NS at +0.73%.</a:t>
             </a:r>
           </a:p>
           <a:p>
@@ -4984,7 +4984,7 @@
                 </a:solidFill>
                 <a:latin typeface="Calibri"/>
               </a:rPr>
-              <a:t>•  HDFC Bank's stock price increased by 0.28% despite a decline of 10.06% in the past 21 days.</a:t>
+              <a:t>•  Weakest on the day: INFY.NS at -2.51%.</a:t>
             </a:r>
           </a:p>
           <a:p>
@@ -5000,7 +5000,7 @@
                 </a:solidFill>
                 <a:latin typeface="Calibri"/>
               </a:rPr>
-              <a:t>•  The technology sector saw mixed results, with Infy declining 0.49% and TCS down 0.59%.</a:t>
+              <a:t>•  Median one-day move across the watchlist: -0.63%.</a:t>
             </a:r>
           </a:p>
           <a:p>
@@ -5016,7 +5016,23 @@
                 </a:solidFill>
                 <a:latin typeface="Calibri"/>
               </a:rPr>
-              <a:t>•  The P/E ratio of Bharti Airtel stands at 41.6, significantly higher than its peers in the financial services sector.</a:t>
+              <a:t>•  ITC.NS sits furthest below its 52-week high, at -32.1%.</a:t>
+            </a:r>
+          </a:p>
+          <a:p>
+            <a:pPr>
+              <a:spcBef>
+                <a:spcPts val="500"/>
+              </a:spcBef>
+            </a:pPr>
+            <a:r>
+              <a:rPr sz="1000" b="0">
+                <a:solidFill>
+                  <a:srgbClr val="1F2A37"/>
+                </a:solidFill>
+                <a:latin typeface="Calibri"/>
+              </a:rPr>
+              <a:t>•  1 name(s) within 5% of the 52-week high: ICICIBANK.NS.</a:t>
             </a:r>
           </a:p>
           <a:p>
@@ -5048,7 +5064,7 @@
                 </a:solidFill>
                 <a:latin typeface="Calibri"/>
               </a:rPr>
-              <a:t>•  The performance of HDFC Bank and ICICIBANK in the next session, given their recent decline.</a:t>
+              <a:t>•  Highest 30-day realised volatility: TCS.NS at 35.2% annualised.</a:t>
             </a:r>
           </a:p>
           <a:p>
@@ -5064,7 +5080,7 @@
                 </a:solidFill>
                 <a:latin typeface="Calibri"/>
               </a:rPr>
-              <a:t>•  The movement of Infy and TCS stocks, considering their significant volume and price changes.</a:t>
+              <a:t>•  60 headlines collected, 3 tagged to a watchlist name by substring match (unverified).</a:t>
             </a:r>
           </a:p>
           <a:p>
@@ -5080,7 +5096,7 @@
                 </a:solidFill>
                 <a:latin typeface="Calibri"/>
               </a:rPr>
-              <a:t>•  The impact of the Svatantra Microfin public offer on the market, given its size of ₹3,000 crore.</a:t>
+              <a:t>•  Commentary model was unavailable, so no qualitative read is included.</a:t>
             </a:r>
           </a:p>
         </p:txBody>
@@ -5114,7 +5130,7 @@
                 </a:solidFill>
                 <a:latin typeface="Calibri"/>
               </a:rPr>
-              <a:t>Commentary source: groq:llama-3.3-70b-versatile.  Headline ticker tags are substring matches, not verified entity links.  Not investment advice.</a:t>
+              <a:t>Commentary source: deterministic-fallback (model returned unusable output twice).  Headline ticker tags are substring matches, not verified entity links.  Not investment advice.</a:t>
             </a:r>
           </a:p>
         </p:txBody>

--- a/public/deskbrief.pptx
+++ b/public/deskbrief.pptx
@@ -3128,7 +3128,7 @@
                 </a:solidFill>
                 <a:latin typeface="Calibri"/>
               </a:rPr>
-              <a:t>8 names  |  generated 17 Aug 2026 13:14  |  source: Yahoo Finance via yfinance, Indian financial RSS</a:t>
+              <a:t>8 names  |  generated 18 Aug 2026 13:22  |  source: Yahoo Finance via yfinance, Indian financial RSS</a:t>
             </a:r>
           </a:p>
         </p:txBody>
@@ -3428,7 +3428,7 @@
                           </a:solidFill>
                           <a:latin typeface="Calibri"/>
                         </a:rPr>
-                        <a:t>1,969</a:t>
+                        <a:t>1,934</a:t>
                       </a:r>
                     </a:p>
                   </a:txBody>
@@ -3451,7 +3451,7 @@
                           </a:solidFill>
                           <a:latin typeface="Calibri"/>
                         </a:rPr>
-                        <a:t>-1.14%</a:t>
+                        <a:t>-1.78%</a:t>
                       </a:r>
                     </a:p>
                   </a:txBody>
@@ -3474,7 +3474,7 @@
                           </a:solidFill>
                           <a:latin typeface="Calibri"/>
                         </a:rPr>
-                        <a:t>+1.35%</a:t>
+                        <a:t>+0.99%</a:t>
                       </a:r>
                     </a:p>
                   </a:txBody>
@@ -3497,7 +3497,7 @@
                           </a:solidFill>
                           <a:latin typeface="Calibri"/>
                         </a:rPr>
-                        <a:t>+4.47%</a:t>
+                        <a:t>+0.95%</a:t>
                       </a:r>
                     </a:p>
                   </a:txBody>
@@ -3520,7 +3520,7 @@
                           </a:solidFill>
                           <a:latin typeface="Calibri"/>
                         </a:rPr>
-                        <a:t>-7.8%</a:t>
+                        <a:t>-9.4%</a:t>
                       </a:r>
                     </a:p>
                   </a:txBody>
@@ -3543,7 +3543,7 @@
                           </a:solidFill>
                           <a:latin typeface="Calibri"/>
                         </a:rPr>
-                        <a:t>19%</a:t>
+                        <a:t>20%</a:t>
                       </a:r>
                     </a:p>
                   </a:txBody>
@@ -3566,7 +3566,7 @@
                           </a:solidFill>
                           <a:latin typeface="Calibri"/>
                         </a:rPr>
-                        <a:t>41.2</a:t>
+                        <a:t>40.4</a:t>
                       </a:r>
                     </a:p>
                   </a:txBody>
@@ -3614,7 +3614,7 @@
                           </a:solidFill>
                           <a:latin typeface="Calibri"/>
                         </a:rPr>
-                        <a:t>729</a:t>
+                        <a:t>723</a:t>
                       </a:r>
                     </a:p>
                   </a:txBody>
@@ -3633,11 +3633,11 @@
                       <a:r>
                         <a:rPr sz="1000" b="0">
                           <a:solidFill>
-                            <a:srgbClr val="0B7A3B"/>
-                          </a:solidFill>
-                          <a:latin typeface="Calibri"/>
-                        </a:rPr>
-                        <a:t>+0.28%</a:t>
+                            <a:srgbClr val="B3261E"/>
+                          </a:solidFill>
+                          <a:latin typeface="Calibri"/>
+                        </a:rPr>
+                        <a:t>-0.82%</a:t>
                       </a:r>
                     </a:p>
                   </a:txBody>
@@ -3660,7 +3660,7 @@
                           </a:solidFill>
                           <a:latin typeface="Calibri"/>
                         </a:rPr>
-                        <a:t>-0.27%</a:t>
+                        <a:t>-0.82%</a:t>
                       </a:r>
                     </a:p>
                   </a:txBody>
@@ -3683,7 +3683,7 @@
                           </a:solidFill>
                           <a:latin typeface="Calibri"/>
                         </a:rPr>
-                        <a:t>-11.05%</a:t>
+                        <a:t>-7.02%</a:t>
                       </a:r>
                     </a:p>
                   </a:txBody>
@@ -3706,7 +3706,7 @@
                           </a:solidFill>
                           <a:latin typeface="Calibri"/>
                         </a:rPr>
-                        <a:t>-26.6%</a:t>
+                        <a:t>-27.2%</a:t>
                       </a:r>
                     </a:p>
                   </a:txBody>
@@ -3752,7 +3752,7 @@
                           </a:solidFill>
                           <a:latin typeface="Calibri"/>
                         </a:rPr>
-                        <a:t>15.9</a:t>
+                        <a:t>15.8</a:t>
                       </a:r>
                     </a:p>
                   </a:txBody>
@@ -3800,7 +3800,7 @@
                           </a:solidFill>
                           <a:latin typeface="Calibri"/>
                         </a:rPr>
-                        <a:t>1,415</a:t>
+                        <a:t>1,412</a:t>
                       </a:r>
                     </a:p>
                   </a:txBody>
@@ -3823,7 +3823,7 @@
                           </a:solidFill>
                           <a:latin typeface="Calibri"/>
                         </a:rPr>
-                        <a:t>-0.12%</a:t>
+                        <a:t>-0.23%</a:t>
                       </a:r>
                     </a:p>
                   </a:txBody>
@@ -3846,7 +3846,7 @@
                           </a:solidFill>
                           <a:latin typeface="Calibri"/>
                         </a:rPr>
-                        <a:t>-1.15%</a:t>
+                        <a:t>-1.23%</a:t>
                       </a:r>
                     </a:p>
                   </a:txBody>
@@ -3869,7 +3869,7 @@
                           </a:solidFill>
                           <a:latin typeface="Calibri"/>
                         </a:rPr>
-                        <a:t>-1.18%</a:t>
+                        <a:t>-2.49%</a:t>
                       </a:r>
                     </a:p>
                   </a:txBody>
@@ -3892,7 +3892,7 @@
                           </a:solidFill>
                           <a:latin typeface="Calibri"/>
                         </a:rPr>
-                        <a:t>-3.1%</a:t>
+                        <a:t>-3.3%</a:t>
                       </a:r>
                     </a:p>
                   </a:txBody>
@@ -3938,7 +3938,7 @@
                           </a:solidFill>
                           <a:latin typeface="Calibri"/>
                         </a:rPr>
-                        <a:t>18.3</a:t>
+                        <a:t>18.2</a:t>
                       </a:r>
                     </a:p>
                   </a:txBody>
@@ -3986,7 +3986,7 @@
                           </a:solidFill>
                           <a:latin typeface="Calibri"/>
                         </a:rPr>
-                        <a:t>1,140</a:t>
+                        <a:t>1,115</a:t>
                       </a:r>
                     </a:p>
                   </a:txBody>
@@ -4009,7 +4009,7 @@
                           </a:solidFill>
                           <a:latin typeface="Calibri"/>
                         </a:rPr>
-                        <a:t>-2.51%</a:t>
+                        <a:t>-2.18%</a:t>
                       </a:r>
                     </a:p>
                   </a:txBody>
@@ -4032,7 +4032,7 @@
                           </a:solidFill>
                           <a:latin typeface="Calibri"/>
                         </a:rPr>
-                        <a:t>-3.64%</a:t>
+                        <a:t>-6.36%</a:t>
                       </a:r>
                     </a:p>
                   </a:txBody>
@@ -4055,7 +4055,7 @@
                           </a:solidFill>
                           <a:latin typeface="Calibri"/>
                         </a:rPr>
-                        <a:t>+3.96%</a:t>
+                        <a:t>+2.57%</a:t>
                       </a:r>
                     </a:p>
                   </a:txBody>
@@ -4078,7 +4078,7 @@
                           </a:solidFill>
                           <a:latin typeface="Calibri"/>
                         </a:rPr>
-                        <a:t>-31.1%</a:t>
+                        <a:t>-32.6%</a:t>
                       </a:r>
                     </a:p>
                   </a:txBody>
@@ -4124,7 +4124,7 @@
                           </a:solidFill>
                           <a:latin typeface="Calibri"/>
                         </a:rPr>
-                        <a:t>14.8</a:t>
+                        <a:t>14.4</a:t>
                       </a:r>
                     </a:p>
                   </a:txBody>
@@ -4172,7 +4172,7 @@
                           </a:solidFill>
                           <a:latin typeface="Calibri"/>
                         </a:rPr>
-                        <a:t>273</a:t>
+                        <a:t>270</a:t>
                       </a:r>
                     </a:p>
                   </a:txBody>
@@ -4195,7 +4195,7 @@
                           </a:solidFill>
                           <a:latin typeface="Calibri"/>
                         </a:rPr>
-                        <a:t>-1.85%</a:t>
+                        <a:t>-1.12%</a:t>
                       </a:r>
                     </a:p>
                   </a:txBody>
@@ -4218,7 +4218,7 @@
                           </a:solidFill>
                           <a:latin typeface="Calibri"/>
                         </a:rPr>
-                        <a:t>-3.40%</a:t>
+                        <a:t>-3.23%</a:t>
                       </a:r>
                     </a:p>
                   </a:txBody>
@@ -4241,7 +4241,7 @@
                           </a:solidFill>
                           <a:latin typeface="Calibri"/>
                         </a:rPr>
-                        <a:t>-2.73%</a:t>
+                        <a:t>-4.49%</a:t>
                       </a:r>
                     </a:p>
                   </a:txBody>
@@ -4264,7 +4264,7 @@
                           </a:solidFill>
                           <a:latin typeface="Calibri"/>
                         </a:rPr>
-                        <a:t>-32.1%</a:t>
+                        <a:t>-32.8%</a:t>
                       </a:r>
                     </a:p>
                   </a:txBody>
@@ -4310,7 +4310,7 @@
                           </a:solidFill>
                           <a:latin typeface="Calibri"/>
                         </a:rPr>
-                        <a:t>17.2</a:t>
+                        <a:t>17.0</a:t>
                       </a:r>
                     </a:p>
                   </a:txBody>
@@ -4358,7 +4358,7 @@
                           </a:solidFill>
                           <a:latin typeface="Calibri"/>
                         </a:rPr>
-                        <a:t>4,087</a:t>
+                        <a:t>4,064</a:t>
                       </a:r>
                     </a:p>
                   </a:txBody>
@@ -4377,11 +4377,34 @@
                       <a:r>
                         <a:rPr sz="1000" b="0">
                           <a:solidFill>
+                            <a:srgbClr val="B3261E"/>
+                          </a:solidFill>
+                          <a:latin typeface="Calibri"/>
+                        </a:rPr>
+                        <a:t>-0.55%</a:t>
+                      </a:r>
+                    </a:p>
+                  </a:txBody>
+                  <a:tcPr>
+                    <a:solidFill>
+                      <a:srgbClr val="FFFFFF"/>
+                    </a:solidFill>
+                  </a:tcPr>
+                </a:tc>
+                <a:tc>
+                  <a:txBody>
+                    <a:bodyPr/>
+                    <a:lstStyle/>
+                    <a:p>
+                      <a:pPr algn="r"/>
+                      <a:r>
+                        <a:rPr sz="1000" b="0">
+                          <a:solidFill>
                             <a:srgbClr val="0B7A3B"/>
                           </a:solidFill>
                           <a:latin typeface="Calibri"/>
                         </a:rPr>
-                        <a:t>+0.73%</a:t>
+                        <a:t>+0.67%</a:t>
                       </a:r>
                     </a:p>
                   </a:txBody>
@@ -4404,7 +4427,7 @@
                           </a:solidFill>
                           <a:latin typeface="Calibri"/>
                         </a:rPr>
-                        <a:t>+0.16%</a:t>
+                        <a:t>+5.87%</a:t>
                       </a:r>
                     </a:p>
                   </a:txBody>
@@ -4423,11 +4446,11 @@
                       <a:r>
                         <a:rPr sz="1000" b="0">
                           <a:solidFill>
-                            <a:srgbClr val="0B7A3B"/>
-                          </a:solidFill>
-                          <a:latin typeface="Calibri"/>
-                        </a:rPr>
-                        <a:t>+7.14%</a:t>
+                            <a:srgbClr val="1F2A37"/>
+                          </a:solidFill>
+                          <a:latin typeface="Calibri"/>
+                        </a:rPr>
+                        <a:t>-7.1%</a:t>
                       </a:r>
                     </a:p>
                   </a:txBody>
@@ -4450,7 +4473,7 @@
                           </a:solidFill>
                           <a:latin typeface="Calibri"/>
                         </a:rPr>
-                        <a:t>-6.6%</a:t>
+                        <a:t>18%</a:t>
                       </a:r>
                     </a:p>
                   </a:txBody>
@@ -4473,30 +4496,7 @@
                           </a:solidFill>
                           <a:latin typeface="Calibri"/>
                         </a:rPr>
-                        <a:t>19%</a:t>
-                      </a:r>
-                    </a:p>
-                  </a:txBody>
-                  <a:tcPr>
-                    <a:solidFill>
-                      <a:srgbClr val="FFFFFF"/>
-                    </a:solidFill>
-                  </a:tcPr>
-                </a:tc>
-                <a:tc>
-                  <a:txBody>
-                    <a:bodyPr/>
-                    <a:lstStyle/>
-                    <a:p>
-                      <a:pPr algn="r"/>
-                      <a:r>
-                        <a:rPr sz="1000" b="0">
-                          <a:solidFill>
-                            <a:srgbClr val="1F2A37"/>
-                          </a:solidFill>
-                          <a:latin typeface="Calibri"/>
-                        </a:rPr>
-                        <a:t>33.9</a:t>
+                        <a:t>33.7</a:t>
                       </a:r>
                     </a:p>
                   </a:txBody>
@@ -4544,7 +4544,7 @@
                           </a:solidFill>
                           <a:latin typeface="Calibri"/>
                         </a:rPr>
-                        <a:t>1,316</a:t>
+                        <a:t>1,322</a:t>
                       </a:r>
                     </a:p>
                   </a:txBody>
@@ -4590,7 +4590,7 @@
                           </a:solidFill>
                           <a:latin typeface="Calibri"/>
                         </a:rPr>
-                        <a:t>-0.85%</a:t>
+                        <a:t>-0.14%</a:t>
                       </a:r>
                     </a:p>
                   </a:txBody>
@@ -4613,7 +4613,7 @@
                           </a:solidFill>
                           <a:latin typeface="Calibri"/>
                         </a:rPr>
-                        <a:t>-0.84%</a:t>
+                        <a:t>-0.08%</a:t>
                       </a:r>
                     </a:p>
                   </a:txBody>
@@ -4636,7 +4636,7 @@
                           </a:solidFill>
                           <a:latin typeface="Calibri"/>
                         </a:rPr>
-                        <a:t>-17.0%</a:t>
+                        <a:t>-16.6%</a:t>
                       </a:r>
                     </a:p>
                   </a:txBody>
@@ -4659,7 +4659,7 @@
                           </a:solidFill>
                           <a:latin typeface="Calibri"/>
                         </a:rPr>
-                        <a:t>21%</a:t>
+                        <a:t>20%</a:t>
                       </a:r>
                     </a:p>
                   </a:txBody>
@@ -4730,7 +4730,7 @@
                           </a:solidFill>
                           <a:latin typeface="Calibri"/>
                         </a:rPr>
-                        <a:t>2,313</a:t>
+                        <a:t>2,280</a:t>
                       </a:r>
                     </a:p>
                   </a:txBody>
@@ -4753,7 +4753,7 @@
                           </a:solidFill>
                           <a:latin typeface="Calibri"/>
                         </a:rPr>
-                        <a:t>-2.02%</a:t>
+                        <a:t>-1.44%</a:t>
                       </a:r>
                     </a:p>
                   </a:txBody>
@@ -4776,7 +4776,7 @@
                           </a:solidFill>
                           <a:latin typeface="Calibri"/>
                         </a:rPr>
-                        <a:t>-4.64%</a:t>
+                        <a:t>-6.78%</a:t>
                       </a:r>
                     </a:p>
                   </a:txBody>
@@ -4799,7 +4799,7 @@
                           </a:solidFill>
                           <a:latin typeface="Calibri"/>
                         </a:rPr>
-                        <a:t>+1.95%</a:t>
+                        <a:t>+1.28%</a:t>
                       </a:r>
                     </a:p>
                   </a:txBody>
@@ -4822,7 +4822,7 @@
                           </a:solidFill>
                           <a:latin typeface="Calibri"/>
                         </a:rPr>
-                        <a:t>-27.8%</a:t>
+                        <a:t>-28.8%</a:t>
                       </a:r>
                     </a:p>
                   </a:txBody>
@@ -4868,7 +4868,7 @@
                           </a:solidFill>
                           <a:latin typeface="Calibri"/>
                         </a:rPr>
-                        <a:t>16.8</a:t>
+                        <a:t>16.6</a:t>
                       </a:r>
                     </a:p>
                   </a:txBody>
@@ -4952,7 +4952,7 @@
                 </a:solidFill>
                 <a:latin typeface="Calibri"/>
               </a:rPr>
-              <a:t>Breadth was risk-off: 3 of 8 names advanced on the day.</a:t>
+              <a:t>Breadth was risk-off: 1 of 8 names advanced on the day.</a:t>
             </a:r>
           </a:p>
           <a:p>
@@ -4968,7 +4968,7 @@
                 </a:solidFill>
                 <a:latin typeface="Calibri"/>
               </a:rPr>
-              <a:t>•  Best performer on the day: LT.NS at +0.73%.</a:t>
+              <a:t>•  Best performer on the day: RELIANCE.NS at +0.46%.</a:t>
             </a:r>
           </a:p>
           <a:p>
@@ -4984,7 +4984,7 @@
                 </a:solidFill>
                 <a:latin typeface="Calibri"/>
               </a:rPr>
-              <a:t>•  Weakest on the day: INFY.NS at -2.51%.</a:t>
+              <a:t>•  Weakest on the day: INFY.NS at -2.18%.</a:t>
             </a:r>
           </a:p>
           <a:p>
@@ -5000,7 +5000,7 @@
                 </a:solidFill>
                 <a:latin typeface="Calibri"/>
               </a:rPr>
-              <a:t>•  Median one-day move across the watchlist: -0.63%.</a:t>
+              <a:t>•  Median one-day move across the watchlist: -0.97%.</a:t>
             </a:r>
           </a:p>
           <a:p>
@@ -5016,7 +5016,7 @@
                 </a:solidFill>
                 <a:latin typeface="Calibri"/>
               </a:rPr>
-              <a:t>•  ITC.NS sits furthest below its 52-week high, at -32.1%.</a:t>
+              <a:t>•  ITC.NS sits furthest below its 52-week high, at -32.8%.</a:t>
             </a:r>
           </a:p>
           <a:p>
@@ -5064,7 +5064,7 @@
                 </a:solidFill>
                 <a:latin typeface="Calibri"/>
               </a:rPr>
-              <a:t>•  Highest 30-day realised volatility: TCS.NS at 35.2% annualised.</a:t>
+              <a:t>•  Highest 30-day realised volatility: TCS.NS at 35.3% annualised.</a:t>
             </a:r>
           </a:p>
           <a:p>
@@ -5080,7 +5080,7 @@
                 </a:solidFill>
                 <a:latin typeface="Calibri"/>
               </a:rPr>
-              <a:t>•  60 headlines collected, 3 tagged to a watchlist name by substring match (unverified).</a:t>
+              <a:t>•  60 headlines collected, 5 tagged to a watchlist name by substring match (unverified).</a:t>
             </a:r>
           </a:p>
           <a:p>

--- a/public/deskbrief.pptx
+++ b/public/deskbrief.pptx
@@ -3128,7 +3128,7 @@
                 </a:solidFill>
                 <a:latin typeface="Calibri"/>
               </a:rPr>
-              <a:t>8 names  |  generated 18 Aug 2026 13:22  |  source: Yahoo Finance via yfinance, Indian financial RSS</a:t>
+              <a:t>8 names  |  generated 19 Aug 2026 13:24  |  source: Yahoo Finance via yfinance, Indian financial RSS</a:t>
             </a:r>
           </a:p>
         </p:txBody>
@@ -3428,7 +3428,7 @@
                           </a:solidFill>
                           <a:latin typeface="Calibri"/>
                         </a:rPr>
-                        <a:t>1,934</a:t>
+                        <a:t>1,922</a:t>
                       </a:r>
                     </a:p>
                   </a:txBody>
@@ -3451,7 +3451,7 @@
                           </a:solidFill>
                           <a:latin typeface="Calibri"/>
                         </a:rPr>
-                        <a:t>-1.78%</a:t>
+                        <a:t>-0.63%</a:t>
                       </a:r>
                     </a:p>
                   </a:txBody>
@@ -3470,11 +3470,11 @@
                       <a:r>
                         <a:rPr sz="1000" b="0">
                           <a:solidFill>
-                            <a:srgbClr val="0B7A3B"/>
-                          </a:solidFill>
-                          <a:latin typeface="Calibri"/>
-                        </a:rPr>
-                        <a:t>+0.99%</a:t>
+                            <a:srgbClr val="B3261E"/>
+                          </a:solidFill>
+                          <a:latin typeface="Calibri"/>
+                        </a:rPr>
+                        <a:t>-1.18%</a:t>
                       </a:r>
                     </a:p>
                   </a:txBody>
@@ -3493,11 +3493,11 @@
                       <a:r>
                         <a:rPr sz="1000" b="0">
                           <a:solidFill>
-                            <a:srgbClr val="0B7A3B"/>
-                          </a:solidFill>
-                          <a:latin typeface="Calibri"/>
-                        </a:rPr>
-                        <a:t>+0.95%</a:t>
+                            <a:srgbClr val="B3261E"/>
+                          </a:solidFill>
+                          <a:latin typeface="Calibri"/>
+                        </a:rPr>
+                        <a:t>-0.11%</a:t>
                       </a:r>
                     </a:p>
                   </a:txBody>
@@ -3520,7 +3520,7 @@
                           </a:solidFill>
                           <a:latin typeface="Calibri"/>
                         </a:rPr>
-                        <a:t>-9.4%</a:t>
+                        <a:t>-10.0%</a:t>
                       </a:r>
                     </a:p>
                   </a:txBody>
@@ -3543,7 +3543,7 @@
                           </a:solidFill>
                           <a:latin typeface="Calibri"/>
                         </a:rPr>
-                        <a:t>20%</a:t>
+                        <a:t>19%</a:t>
                       </a:r>
                     </a:p>
                   </a:txBody>
@@ -3566,7 +3566,7 @@
                           </a:solidFill>
                           <a:latin typeface="Calibri"/>
                         </a:rPr>
-                        <a:t>40.4</a:t>
+                        <a:t>40.2</a:t>
                       </a:r>
                     </a:p>
                   </a:txBody>
@@ -3614,7 +3614,7 @@
                           </a:solidFill>
                           <a:latin typeface="Calibri"/>
                         </a:rPr>
-                        <a:t>723</a:t>
+                        <a:t>720</a:t>
                       </a:r>
                     </a:p>
                   </a:txBody>
@@ -3637,7 +3637,7 @@
                           </a:solidFill>
                           <a:latin typeface="Calibri"/>
                         </a:rPr>
-                        <a:t>-0.82%</a:t>
+                        <a:t>-0.41%</a:t>
                       </a:r>
                     </a:p>
                   </a:txBody>
@@ -3660,7 +3660,7 @@
                           </a:solidFill>
                           <a:latin typeface="Calibri"/>
                         </a:rPr>
-                        <a:t>-0.82%</a:t>
+                        <a:t>-1.23%</a:t>
                       </a:r>
                     </a:p>
                   </a:txBody>
@@ -3683,7 +3683,7 @@
                           </a:solidFill>
                           <a:latin typeface="Calibri"/>
                         </a:rPr>
-                        <a:t>-7.02%</a:t>
+                        <a:t>-5.44%</a:t>
                       </a:r>
                     </a:p>
                   </a:txBody>
@@ -3706,7 +3706,7 @@
                           </a:solidFill>
                           <a:latin typeface="Calibri"/>
                         </a:rPr>
-                        <a:t>-27.2%</a:t>
+                        <a:t>-27.5%</a:t>
                       </a:r>
                     </a:p>
                   </a:txBody>
@@ -3729,7 +3729,7 @@
                           </a:solidFill>
                           <a:latin typeface="Calibri"/>
                         </a:rPr>
-                        <a:t>21%</a:t>
+                        <a:t>20%</a:t>
                       </a:r>
                     </a:p>
                   </a:txBody>
@@ -3752,7 +3752,7 @@
                           </a:solidFill>
                           <a:latin typeface="Calibri"/>
                         </a:rPr>
-                        <a:t>15.8</a:t>
+                        <a:t>15.7</a:t>
                       </a:r>
                     </a:p>
                   </a:txBody>
@@ -3800,7 +3800,7 @@
                           </a:solidFill>
                           <a:latin typeface="Calibri"/>
                         </a:rPr>
-                        <a:t>1,412</a:t>
+                        <a:t>1,402</a:t>
                       </a:r>
                     </a:p>
                   </a:txBody>
@@ -3823,7 +3823,7 @@
                           </a:solidFill>
                           <a:latin typeface="Calibri"/>
                         </a:rPr>
-                        <a:t>-0.23%</a:t>
+                        <a:t>-0.71%</a:t>
                       </a:r>
                     </a:p>
                   </a:txBody>
@@ -3846,7 +3846,7 @@
                           </a:solidFill>
                           <a:latin typeface="Calibri"/>
                         </a:rPr>
-                        <a:t>-1.23%</a:t>
+                        <a:t>-2.07%</a:t>
                       </a:r>
                     </a:p>
                   </a:txBody>
@@ -3869,7 +3869,7 @@
                           </a:solidFill>
                           <a:latin typeface="Calibri"/>
                         </a:rPr>
-                        <a:t>-2.49%</a:t>
+                        <a:t>-3.37%</a:t>
                       </a:r>
                     </a:p>
                   </a:txBody>
@@ -3892,7 +3892,7 @@
                           </a:solidFill>
                           <a:latin typeface="Calibri"/>
                         </a:rPr>
-                        <a:t>-3.3%</a:t>
+                        <a:t>-4.0%</a:t>
                       </a:r>
                     </a:p>
                   </a:txBody>
@@ -3915,7 +3915,7 @@
                           </a:solidFill>
                           <a:latin typeface="Calibri"/>
                         </a:rPr>
-                        <a:t>18%</a:t>
+                        <a:t>16%</a:t>
                       </a:r>
                     </a:p>
                   </a:txBody>
@@ -3986,7 +3986,7 @@
                           </a:solidFill>
                           <a:latin typeface="Calibri"/>
                         </a:rPr>
-                        <a:t>1,115</a:t>
+                        <a:t>1,120</a:t>
                       </a:r>
                     </a:p>
                   </a:txBody>
@@ -4005,11 +4005,34 @@
                       <a:r>
                         <a:rPr sz="1000" b="0">
                           <a:solidFill>
+                            <a:srgbClr val="0B7A3B"/>
+                          </a:solidFill>
+                          <a:latin typeface="Calibri"/>
+                        </a:rPr>
+                        <a:t>+0.43%</a:t>
+                      </a:r>
+                    </a:p>
+                  </a:txBody>
+                  <a:tcPr>
+                    <a:solidFill>
+                      <a:srgbClr val="FFFFFF"/>
+                    </a:solidFill>
+                  </a:tcPr>
+                </a:tc>
+                <a:tc>
+                  <a:txBody>
+                    <a:bodyPr/>
+                    <a:lstStyle/>
+                    <a:p>
+                      <a:pPr algn="r"/>
+                      <a:r>
+                        <a:rPr sz="1000" b="0">
+                          <a:solidFill>
                             <a:srgbClr val="B3261E"/>
                           </a:solidFill>
                           <a:latin typeface="Calibri"/>
                         </a:rPr>
-                        <a:t>-2.18%</a:t>
+                        <a:t>-4.79%</a:t>
                       </a:r>
                     </a:p>
                   </a:txBody>
@@ -4028,11 +4051,11 @@
                       <a:r>
                         <a:rPr sz="1000" b="0">
                           <a:solidFill>
-                            <a:srgbClr val="B3261E"/>
-                          </a:solidFill>
-                          <a:latin typeface="Calibri"/>
-                        </a:rPr>
-                        <a:t>-6.36%</a:t>
+                            <a:srgbClr val="0B7A3B"/>
+                          </a:solidFill>
+                          <a:latin typeface="Calibri"/>
+                        </a:rPr>
+                        <a:t>+4.31%</a:t>
                       </a:r>
                     </a:p>
                   </a:txBody>
@@ -4051,11 +4074,11 @@
                       <a:r>
                         <a:rPr sz="1000" b="0">
                           <a:solidFill>
-                            <a:srgbClr val="0B7A3B"/>
-                          </a:solidFill>
-                          <a:latin typeface="Calibri"/>
-                        </a:rPr>
-                        <a:t>+2.57%</a:t>
+                            <a:srgbClr val="1F2A37"/>
+                          </a:solidFill>
+                          <a:latin typeface="Calibri"/>
+                        </a:rPr>
+                        <a:t>-32.3%</a:t>
                       </a:r>
                     </a:p>
                   </a:txBody>
@@ -4078,7 +4101,7 @@
                           </a:solidFill>
                           <a:latin typeface="Calibri"/>
                         </a:rPr>
-                        <a:t>-32.6%</a:t>
+                        <a:t>30%</a:t>
                       </a:r>
                     </a:p>
                   </a:txBody>
@@ -4101,30 +4124,7 @@
                           </a:solidFill>
                           <a:latin typeface="Calibri"/>
                         </a:rPr>
-                        <a:t>30%</a:t>
-                      </a:r>
-                    </a:p>
-                  </a:txBody>
-                  <a:tcPr>
-                    <a:solidFill>
-                      <a:srgbClr val="FFFFFF"/>
-                    </a:solidFill>
-                  </a:tcPr>
-                </a:tc>
-                <a:tc>
-                  <a:txBody>
-                    <a:bodyPr/>
-                    <a:lstStyle/>
-                    <a:p>
-                      <a:pPr algn="r"/>
-                      <a:r>
-                        <a:rPr sz="1000" b="0">
-                          <a:solidFill>
-                            <a:srgbClr val="1F2A37"/>
-                          </a:solidFill>
-                          <a:latin typeface="Calibri"/>
-                        </a:rPr>
-                        <a:t>14.4</a:t>
+                        <a:t>14.5</a:t>
                       </a:r>
                     </a:p>
                   </a:txBody>
@@ -4172,7 +4172,7 @@
                           </a:solidFill>
                           <a:latin typeface="Calibri"/>
                         </a:rPr>
-                        <a:t>270</a:t>
+                        <a:t>267</a:t>
                       </a:r>
                     </a:p>
                   </a:txBody>
@@ -4195,7 +4195,7 @@
                           </a:solidFill>
                           <a:latin typeface="Calibri"/>
                         </a:rPr>
-                        <a:t>-1.12%</a:t>
+                        <a:t>-1.09%</a:t>
                       </a:r>
                     </a:p>
                   </a:txBody>
@@ -4218,7 +4218,7 @@
                           </a:solidFill>
                           <a:latin typeface="Calibri"/>
                         </a:rPr>
-                        <a:t>-3.23%</a:t>
+                        <a:t>-3.30%</a:t>
                       </a:r>
                     </a:p>
                   </a:txBody>
@@ -4241,7 +4241,7 @@
                           </a:solidFill>
                           <a:latin typeface="Calibri"/>
                         </a:rPr>
-                        <a:t>-4.49%</a:t>
+                        <a:t>-4.96%</a:t>
                       </a:r>
                     </a:p>
                   </a:txBody>
@@ -4264,7 +4264,7 @@
                           </a:solidFill>
                           <a:latin typeface="Calibri"/>
                         </a:rPr>
-                        <a:t>-32.8%</a:t>
+                        <a:t>-33.6%</a:t>
                       </a:r>
                     </a:p>
                   </a:txBody>
@@ -4287,7 +4287,7 @@
                           </a:solidFill>
                           <a:latin typeface="Calibri"/>
                         </a:rPr>
-                        <a:t>16%</a:t>
+                        <a:t>15%</a:t>
                       </a:r>
                     </a:p>
                   </a:txBody>
@@ -4310,7 +4310,7 @@
                           </a:solidFill>
                           <a:latin typeface="Calibri"/>
                         </a:rPr>
-                        <a:t>17.0</a:t>
+                        <a:t>16.8</a:t>
                       </a:r>
                     </a:p>
                   </a:txBody>
@@ -4358,7 +4358,7 @@
                           </a:solidFill>
                           <a:latin typeface="Calibri"/>
                         </a:rPr>
-                        <a:t>4,064</a:t>
+                        <a:t>4,041</a:t>
                       </a:r>
                     </a:p>
                   </a:txBody>
@@ -4381,7 +4381,7 @@
                           </a:solidFill>
                           <a:latin typeface="Calibri"/>
                         </a:rPr>
-                        <a:t>-0.55%</a:t>
+                        <a:t>-0.57%</a:t>
                       </a:r>
                     </a:p>
                   </a:txBody>
@@ -4404,7 +4404,7 @@
                           </a:solidFill>
                           <a:latin typeface="Calibri"/>
                         </a:rPr>
-                        <a:t>+0.67%</a:t>
+                        <a:t>+0.53%</a:t>
                       </a:r>
                     </a:p>
                   </a:txBody>
@@ -4427,7 +4427,7 @@
                           </a:solidFill>
                           <a:latin typeface="Calibri"/>
                         </a:rPr>
-                        <a:t>+5.87%</a:t>
+                        <a:t>+5.06%</a:t>
                       </a:r>
                     </a:p>
                   </a:txBody>
@@ -4450,7 +4450,7 @@
                           </a:solidFill>
                           <a:latin typeface="Calibri"/>
                         </a:rPr>
-                        <a:t>-7.1%</a:t>
+                        <a:t>-7.6%</a:t>
                       </a:r>
                     </a:p>
                   </a:txBody>
@@ -4473,7 +4473,7 @@
                           </a:solidFill>
                           <a:latin typeface="Calibri"/>
                         </a:rPr>
-                        <a:t>18%</a:t>
+                        <a:t>17%</a:t>
                       </a:r>
                     </a:p>
                   </a:txBody>
@@ -4496,7 +4496,7 @@
                           </a:solidFill>
                           <a:latin typeface="Calibri"/>
                         </a:rPr>
-                        <a:t>33.7</a:t>
+                        <a:t>33.5</a:t>
                       </a:r>
                     </a:p>
                   </a:txBody>
@@ -4544,7 +4544,7 @@
                           </a:solidFill>
                           <a:latin typeface="Calibri"/>
                         </a:rPr>
-                        <a:t>1,322</a:t>
+                        <a:t>1,311</a:t>
                       </a:r>
                     </a:p>
                   </a:txBody>
@@ -4563,11 +4563,57 @@
                       <a:r>
                         <a:rPr sz="1000" b="0">
                           <a:solidFill>
+                            <a:srgbClr val="B3261E"/>
+                          </a:solidFill>
+                          <a:latin typeface="Calibri"/>
+                        </a:rPr>
+                        <a:t>-0.83%</a:t>
+                      </a:r>
+                    </a:p>
+                  </a:txBody>
+                  <a:tcPr>
+                    <a:solidFill>
+                      <a:srgbClr val="F3F5F7"/>
+                    </a:solidFill>
+                  </a:tcPr>
+                </a:tc>
+                <a:tc>
+                  <a:txBody>
+                    <a:bodyPr/>
+                    <a:lstStyle/>
+                    <a:p>
+                      <a:pPr algn="r"/>
+                      <a:r>
+                        <a:rPr sz="1000" b="0">
+                          <a:solidFill>
+                            <a:srgbClr val="B3261E"/>
+                          </a:solidFill>
+                          <a:latin typeface="Calibri"/>
+                        </a:rPr>
+                        <a:t>-1.35%</a:t>
+                      </a:r>
+                    </a:p>
+                  </a:txBody>
+                  <a:tcPr>
+                    <a:solidFill>
+                      <a:srgbClr val="F3F5F7"/>
+                    </a:solidFill>
+                  </a:tcPr>
+                </a:tc>
+                <a:tc>
+                  <a:txBody>
+                    <a:bodyPr/>
+                    <a:lstStyle/>
+                    <a:p>
+                      <a:pPr algn="r"/>
+                      <a:r>
+                        <a:rPr sz="1000" b="0">
+                          <a:solidFill>
                             <a:srgbClr val="0B7A3B"/>
                           </a:solidFill>
                           <a:latin typeface="Calibri"/>
                         </a:rPr>
-                        <a:t>+0.46%</a:t>
+                        <a:t>+0.56%</a:t>
                       </a:r>
                     </a:p>
                   </a:txBody>
@@ -4586,11 +4632,11 @@
                       <a:r>
                         <a:rPr sz="1000" b="0">
                           <a:solidFill>
-                            <a:srgbClr val="B3261E"/>
-                          </a:solidFill>
-                          <a:latin typeface="Calibri"/>
-                        </a:rPr>
-                        <a:t>-0.14%</a:t>
+                            <a:srgbClr val="1F2A37"/>
+                          </a:solidFill>
+                          <a:latin typeface="Calibri"/>
+                        </a:rPr>
+                        <a:t>-17.3%</a:t>
                       </a:r>
                     </a:p>
                   </a:txBody>
@@ -4609,11 +4655,11 @@
                       <a:r>
                         <a:rPr sz="1000" b="0">
                           <a:solidFill>
-                            <a:srgbClr val="B3261E"/>
-                          </a:solidFill>
-                          <a:latin typeface="Calibri"/>
-                        </a:rPr>
-                        <a:t>-0.08%</a:t>
+                            <a:srgbClr val="1F2A37"/>
+                          </a:solidFill>
+                          <a:latin typeface="Calibri"/>
+                        </a:rPr>
+                        <a:t>19%</a:t>
                       </a:r>
                     </a:p>
                   </a:txBody>
@@ -4636,53 +4682,7 @@
                           </a:solidFill>
                           <a:latin typeface="Calibri"/>
                         </a:rPr>
-                        <a:t>-16.6%</a:t>
-                      </a:r>
-                    </a:p>
-                  </a:txBody>
-                  <a:tcPr>
-                    <a:solidFill>
-                      <a:srgbClr val="F3F5F7"/>
-                    </a:solidFill>
-                  </a:tcPr>
-                </a:tc>
-                <a:tc>
-                  <a:txBody>
-                    <a:bodyPr/>
-                    <a:lstStyle/>
-                    <a:p>
-                      <a:pPr algn="r"/>
-                      <a:r>
-                        <a:rPr sz="1000" b="0">
-                          <a:solidFill>
-                            <a:srgbClr val="1F2A37"/>
-                          </a:solidFill>
-                          <a:latin typeface="Calibri"/>
-                        </a:rPr>
-                        <a:t>20%</a:t>
-                      </a:r>
-                    </a:p>
-                  </a:txBody>
-                  <a:tcPr>
-                    <a:solidFill>
-                      <a:srgbClr val="F3F5F7"/>
-                    </a:solidFill>
-                  </a:tcPr>
-                </a:tc>
-                <a:tc>
-                  <a:txBody>
-                    <a:bodyPr/>
-                    <a:lstStyle/>
-                    <a:p>
-                      <a:pPr algn="r"/>
-                      <a:r>
-                        <a:rPr sz="1000" b="0">
-                          <a:solidFill>
-                            <a:srgbClr val="1F2A37"/>
-                          </a:solidFill>
-                          <a:latin typeface="Calibri"/>
-                        </a:rPr>
-                        <a:t>23.8</a:t>
+                        <a:t>23.7</a:t>
                       </a:r>
                     </a:p>
                   </a:txBody>
@@ -4730,7 +4730,7 @@
                           </a:solidFill>
                           <a:latin typeface="Calibri"/>
                         </a:rPr>
-                        <a:t>2,280</a:t>
+                        <a:t>2,289</a:t>
                       </a:r>
                     </a:p>
                   </a:txBody>
@@ -4749,11 +4749,34 @@
                       <a:r>
                         <a:rPr sz="1000" b="0">
                           <a:solidFill>
+                            <a:srgbClr val="0B7A3B"/>
+                          </a:solidFill>
+                          <a:latin typeface="Calibri"/>
+                        </a:rPr>
+                        <a:t>+0.39%</a:t>
+                      </a:r>
+                    </a:p>
+                  </a:txBody>
+                  <a:tcPr>
+                    <a:solidFill>
+                      <a:srgbClr val="FFFFFF"/>
+                    </a:solidFill>
+                  </a:tcPr>
+                </a:tc>
+                <a:tc>
+                  <a:txBody>
+                    <a:bodyPr/>
+                    <a:lstStyle/>
+                    <a:p>
+                      <a:pPr algn="r"/>
+                      <a:r>
+                        <a:rPr sz="1000" b="0">
+                          <a:solidFill>
                             <a:srgbClr val="B3261E"/>
                           </a:solidFill>
                           <a:latin typeface="Calibri"/>
                         </a:rPr>
-                        <a:t>-1.44%</a:t>
+                        <a:t>-2.58%</a:t>
                       </a:r>
                     </a:p>
                   </a:txBody>
@@ -4772,11 +4795,11 @@
                       <a:r>
                         <a:rPr sz="1000" b="0">
                           <a:solidFill>
-                            <a:srgbClr val="B3261E"/>
-                          </a:solidFill>
-                          <a:latin typeface="Calibri"/>
-                        </a:rPr>
-                        <a:t>-6.78%</a:t>
+                            <a:srgbClr val="0B7A3B"/>
+                          </a:solidFill>
+                          <a:latin typeface="Calibri"/>
+                        </a:rPr>
+                        <a:t>+3.06%</a:t>
                       </a:r>
                     </a:p>
                   </a:txBody>
@@ -4795,34 +4818,11 @@
                       <a:r>
                         <a:rPr sz="1000" b="0">
                           <a:solidFill>
-                            <a:srgbClr val="0B7A3B"/>
-                          </a:solidFill>
-                          <a:latin typeface="Calibri"/>
-                        </a:rPr>
-                        <a:t>+1.28%</a:t>
-                      </a:r>
-                    </a:p>
-                  </a:txBody>
-                  <a:tcPr>
-                    <a:solidFill>
-                      <a:srgbClr val="FFFFFF"/>
-                    </a:solidFill>
-                  </a:tcPr>
-                </a:tc>
-                <a:tc>
-                  <a:txBody>
-                    <a:bodyPr/>
-                    <a:lstStyle/>
-                    <a:p>
-                      <a:pPr algn="r"/>
-                      <a:r>
-                        <a:rPr sz="1000" b="0">
-                          <a:solidFill>
                             <a:srgbClr val="1F2A37"/>
                           </a:solidFill>
                           <a:latin typeface="Calibri"/>
                         </a:rPr>
-                        <a:t>-28.8%</a:t>
+                        <a:t>-28.6%</a:t>
                       </a:r>
                     </a:p>
                   </a:txBody>
@@ -4952,7 +4952,7 @@
                 </a:solidFill>
                 <a:latin typeface="Calibri"/>
               </a:rPr>
-              <a:t>Breadth was risk-off: 1 of 8 names advanced on the day.</a:t>
+              <a:t>Breadth was risk-off: 2 of 8 names advanced on the day.</a:t>
             </a:r>
           </a:p>
           <a:p>
@@ -4968,7 +4968,7 @@
                 </a:solidFill>
                 <a:latin typeface="Calibri"/>
               </a:rPr>
-              <a:t>•  Best performer on the day: RELIANCE.NS at +0.46%.</a:t>
+              <a:t>•  Best performer on the day: INFY.NS at +0.43%.</a:t>
             </a:r>
           </a:p>
           <a:p>
@@ -4984,7 +4984,7 @@
                 </a:solidFill>
                 <a:latin typeface="Calibri"/>
               </a:rPr>
-              <a:t>•  Weakest on the day: INFY.NS at -2.18%.</a:t>
+              <a:t>•  Weakest on the day: ITC.NS at -1.09%.</a:t>
             </a:r>
           </a:p>
           <a:p>
@@ -5000,7 +5000,7 @@
                 </a:solidFill>
                 <a:latin typeface="Calibri"/>
               </a:rPr>
-              <a:t>•  Median one-day move across the watchlist: -0.97%.</a:t>
+              <a:t>•  Median one-day move across the watchlist: -0.60%.</a:t>
             </a:r>
           </a:p>
           <a:p>
@@ -5016,7 +5016,7 @@
                 </a:solidFill>
                 <a:latin typeface="Calibri"/>
               </a:rPr>
-              <a:t>•  ITC.NS sits furthest below its 52-week high, at -32.8%.</a:t>
+              <a:t>•  ITC.NS sits furthest below its 52-week high, at -33.6%.</a:t>
             </a:r>
           </a:p>
           <a:p>
@@ -5064,7 +5064,7 @@
                 </a:solidFill>
                 <a:latin typeface="Calibri"/>
               </a:rPr>
-              <a:t>•  Highest 30-day realised volatility: TCS.NS at 35.3% annualised.</a:t>
+              <a:t>•  Highest 30-day realised volatility: TCS.NS at 34.7% annualised.</a:t>
             </a:r>
           </a:p>
           <a:p>

--- a/public/deskbrief.pptx
+++ b/public/deskbrief.pptx
@@ -3128,7 +3128,7 @@
                 </a:solidFill>
                 <a:latin typeface="Calibri"/>
               </a:rPr>
-              <a:t>8 names  |  generated 19 Aug 2026 13:24  |  source: Yahoo Finance via yfinance, Indian financial RSS</a:t>
+              <a:t>8 names  |  generated 20 Aug 2026 13:26  |  source: Yahoo Finance via yfinance, Indian financial RSS</a:t>
             </a:r>
           </a:p>
         </p:txBody>
@@ -3428,7 +3428,7 @@
                           </a:solidFill>
                           <a:latin typeface="Calibri"/>
                         </a:rPr>
-                        <a:t>1,922</a:t>
+                        <a:t>1,942</a:t>
                       </a:r>
                     </a:p>
                   </a:txBody>
@@ -3447,11 +3447,11 @@
                       <a:r>
                         <a:rPr sz="1000" b="0">
                           <a:solidFill>
-                            <a:srgbClr val="B3261E"/>
-                          </a:solidFill>
-                          <a:latin typeface="Calibri"/>
-                        </a:rPr>
-                        <a:t>-0.63%</a:t>
+                            <a:srgbClr val="0B7A3B"/>
+                          </a:solidFill>
+                          <a:latin typeface="Calibri"/>
+                        </a:rPr>
+                        <a:t>+1.02%</a:t>
                       </a:r>
                     </a:p>
                   </a:txBody>
@@ -3470,11 +3470,11 @@
                       <a:r>
                         <a:rPr sz="1000" b="0">
                           <a:solidFill>
-                            <a:srgbClr val="B3261E"/>
-                          </a:solidFill>
-                          <a:latin typeface="Calibri"/>
-                        </a:rPr>
-                        <a:t>-1.18%</a:t>
+                            <a:srgbClr val="0B7A3B"/>
+                          </a:solidFill>
+                          <a:latin typeface="Calibri"/>
+                        </a:rPr>
+                        <a:t>+0.13%</a:t>
                       </a:r>
                     </a:p>
                   </a:txBody>
@@ -3493,11 +3493,11 @@
                       <a:r>
                         <a:rPr sz="1000" b="0">
                           <a:solidFill>
-                            <a:srgbClr val="B3261E"/>
-                          </a:solidFill>
-                          <a:latin typeface="Calibri"/>
-                        </a:rPr>
-                        <a:t>-0.11%</a:t>
+                            <a:srgbClr val="0B7A3B"/>
+                          </a:solidFill>
+                          <a:latin typeface="Calibri"/>
+                        </a:rPr>
+                        <a:t>+0.88%</a:t>
                       </a:r>
                     </a:p>
                   </a:txBody>
@@ -3520,7 +3520,7 @@
                           </a:solidFill>
                           <a:latin typeface="Calibri"/>
                         </a:rPr>
-                        <a:t>-10.0%</a:t>
+                        <a:t>-9.1%</a:t>
                       </a:r>
                     </a:p>
                   </a:txBody>
@@ -3543,7 +3543,7 @@
                           </a:solidFill>
                           <a:latin typeface="Calibri"/>
                         </a:rPr>
-                        <a:t>19%</a:t>
+                        <a:t>18%</a:t>
                       </a:r>
                     </a:p>
                   </a:txBody>
@@ -3566,7 +3566,7 @@
                           </a:solidFill>
                           <a:latin typeface="Calibri"/>
                         </a:rPr>
-                        <a:t>40.2</a:t>
+                        <a:t>40.6</a:t>
                       </a:r>
                     </a:p>
                   </a:txBody>
@@ -3614,7 +3614,7 @@
                           </a:solidFill>
                           <a:latin typeface="Calibri"/>
                         </a:rPr>
-                        <a:t>720</a:t>
+                        <a:t>725</a:t>
                       </a:r>
                     </a:p>
                   </a:txBody>
@@ -3633,11 +3633,57 @@
                       <a:r>
                         <a:rPr sz="1000" b="0">
                           <a:solidFill>
+                            <a:srgbClr val="0B7A3B"/>
+                          </a:solidFill>
+                          <a:latin typeface="Calibri"/>
+                        </a:rPr>
+                        <a:t>+0.70%</a:t>
+                      </a:r>
+                    </a:p>
+                  </a:txBody>
+                  <a:tcPr>
+                    <a:solidFill>
+                      <a:srgbClr val="FFFFFF"/>
+                    </a:solidFill>
+                  </a:tcPr>
+                </a:tc>
+                <a:tc>
+                  <a:txBody>
+                    <a:bodyPr/>
+                    <a:lstStyle/>
+                    <a:p>
+                      <a:pPr algn="r"/>
+                      <a:r>
+                        <a:rPr sz="1000" b="0">
+                          <a:solidFill>
+                            <a:srgbClr val="0B7A3B"/>
+                          </a:solidFill>
+                          <a:latin typeface="Calibri"/>
+                        </a:rPr>
+                        <a:t>+0.01%</a:t>
+                      </a:r>
+                    </a:p>
+                  </a:txBody>
+                  <a:tcPr>
+                    <a:solidFill>
+                      <a:srgbClr val="FFFFFF"/>
+                    </a:solidFill>
+                  </a:tcPr>
+                </a:tc>
+                <a:tc>
+                  <a:txBody>
+                    <a:bodyPr/>
+                    <a:lstStyle/>
+                    <a:p>
+                      <a:pPr algn="r"/>
+                      <a:r>
+                        <a:rPr sz="1000" b="0">
+                          <a:solidFill>
                             <a:srgbClr val="B3261E"/>
                           </a:solidFill>
                           <a:latin typeface="Calibri"/>
                         </a:rPr>
-                        <a:t>-0.41%</a:t>
+                        <a:t>-3.73%</a:t>
                       </a:r>
                     </a:p>
                   </a:txBody>
@@ -3656,11 +3702,11 @@
                       <a:r>
                         <a:rPr sz="1000" b="0">
                           <a:solidFill>
-                            <a:srgbClr val="B3261E"/>
-                          </a:solidFill>
-                          <a:latin typeface="Calibri"/>
-                        </a:rPr>
-                        <a:t>-1.23%</a:t>
+                            <a:srgbClr val="1F2A37"/>
+                          </a:solidFill>
+                          <a:latin typeface="Calibri"/>
+                        </a:rPr>
+                        <a:t>-27.0%</a:t>
                       </a:r>
                     </a:p>
                   </a:txBody>
@@ -3679,11 +3725,11 @@
                       <a:r>
                         <a:rPr sz="1000" b="0">
                           <a:solidFill>
-                            <a:srgbClr val="B3261E"/>
-                          </a:solidFill>
-                          <a:latin typeface="Calibri"/>
-                        </a:rPr>
-                        <a:t>-5.44%</a:t>
+                            <a:srgbClr val="1F2A37"/>
+                          </a:solidFill>
+                          <a:latin typeface="Calibri"/>
+                        </a:rPr>
+                        <a:t>20%</a:t>
                       </a:r>
                     </a:p>
                   </a:txBody>
@@ -3706,53 +3752,7 @@
                           </a:solidFill>
                           <a:latin typeface="Calibri"/>
                         </a:rPr>
-                        <a:t>-27.5%</a:t>
-                      </a:r>
-                    </a:p>
-                  </a:txBody>
-                  <a:tcPr>
-                    <a:solidFill>
-                      <a:srgbClr val="FFFFFF"/>
-                    </a:solidFill>
-                  </a:tcPr>
-                </a:tc>
-                <a:tc>
-                  <a:txBody>
-                    <a:bodyPr/>
-                    <a:lstStyle/>
-                    <a:p>
-                      <a:pPr algn="r"/>
-                      <a:r>
-                        <a:rPr sz="1000" b="0">
-                          <a:solidFill>
-                            <a:srgbClr val="1F2A37"/>
-                          </a:solidFill>
-                          <a:latin typeface="Calibri"/>
-                        </a:rPr>
-                        <a:t>20%</a:t>
-                      </a:r>
-                    </a:p>
-                  </a:txBody>
-                  <a:tcPr>
-                    <a:solidFill>
-                      <a:srgbClr val="FFFFFF"/>
-                    </a:solidFill>
-                  </a:tcPr>
-                </a:tc>
-                <a:tc>
-                  <a:txBody>
-                    <a:bodyPr/>
-                    <a:lstStyle/>
-                    <a:p>
-                      <a:pPr algn="r"/>
-                      <a:r>
-                        <a:rPr sz="1000" b="0">
-                          <a:solidFill>
-                            <a:srgbClr val="1F2A37"/>
-                          </a:solidFill>
-                          <a:latin typeface="Calibri"/>
-                        </a:rPr>
-                        <a:t>15.7</a:t>
+                        <a:t>15.9</a:t>
                       </a:r>
                     </a:p>
                   </a:txBody>
@@ -3800,7 +3800,7 @@
                           </a:solidFill>
                           <a:latin typeface="Calibri"/>
                         </a:rPr>
-                        <a:t>1,402</a:t>
+                        <a:t>1,412</a:t>
                       </a:r>
                     </a:p>
                   </a:txBody>
@@ -3819,11 +3819,57 @@
                       <a:r>
                         <a:rPr sz="1000" b="0">
                           <a:solidFill>
+                            <a:srgbClr val="0B7A3B"/>
+                          </a:solidFill>
+                          <a:latin typeface="Calibri"/>
+                        </a:rPr>
+                        <a:t>+0.71%</a:t>
+                      </a:r>
+                    </a:p>
+                  </a:txBody>
+                  <a:tcPr>
+                    <a:solidFill>
+                      <a:srgbClr val="F3F5F7"/>
+                    </a:solidFill>
+                  </a:tcPr>
+                </a:tc>
+                <a:tc>
+                  <a:txBody>
+                    <a:bodyPr/>
+                    <a:lstStyle/>
+                    <a:p>
+                      <a:pPr algn="r"/>
+                      <a:r>
+                        <a:rPr sz="1000" b="0">
+                          <a:solidFill>
+                            <a:srgbClr val="0B7A3B"/>
+                          </a:solidFill>
+                          <a:latin typeface="Calibri"/>
+                        </a:rPr>
+                        <a:t>+0.36%</a:t>
+                      </a:r>
+                    </a:p>
+                  </a:txBody>
+                  <a:tcPr>
+                    <a:solidFill>
+                      <a:srgbClr val="F3F5F7"/>
+                    </a:solidFill>
+                  </a:tcPr>
+                </a:tc>
+                <a:tc>
+                  <a:txBody>
+                    <a:bodyPr/>
+                    <a:lstStyle/>
+                    <a:p>
+                      <a:pPr algn="r"/>
+                      <a:r>
+                        <a:rPr sz="1000" b="0">
+                          <a:solidFill>
                             <a:srgbClr val="B3261E"/>
                           </a:solidFill>
                           <a:latin typeface="Calibri"/>
                         </a:rPr>
-                        <a:t>-0.71%</a:t>
+                        <a:t>-1.17%</a:t>
                       </a:r>
                     </a:p>
                   </a:txBody>
@@ -3842,57 +3888,11 @@
                       <a:r>
                         <a:rPr sz="1000" b="0">
                           <a:solidFill>
-                            <a:srgbClr val="B3261E"/>
-                          </a:solidFill>
-                          <a:latin typeface="Calibri"/>
-                        </a:rPr>
-                        <a:t>-2.07%</a:t>
-                      </a:r>
-                    </a:p>
-                  </a:txBody>
-                  <a:tcPr>
-                    <a:solidFill>
-                      <a:srgbClr val="F3F5F7"/>
-                    </a:solidFill>
-                  </a:tcPr>
-                </a:tc>
-                <a:tc>
-                  <a:txBody>
-                    <a:bodyPr/>
-                    <a:lstStyle/>
-                    <a:p>
-                      <a:pPr algn="r"/>
-                      <a:r>
-                        <a:rPr sz="1000" b="0">
-                          <a:solidFill>
-                            <a:srgbClr val="B3261E"/>
-                          </a:solidFill>
-                          <a:latin typeface="Calibri"/>
-                        </a:rPr>
-                        <a:t>-3.37%</a:t>
-                      </a:r>
-                    </a:p>
-                  </a:txBody>
-                  <a:tcPr>
-                    <a:solidFill>
-                      <a:srgbClr val="F3F5F7"/>
-                    </a:solidFill>
-                  </a:tcPr>
-                </a:tc>
-                <a:tc>
-                  <a:txBody>
-                    <a:bodyPr/>
-                    <a:lstStyle/>
-                    <a:p>
-                      <a:pPr algn="r"/>
-                      <a:r>
-                        <a:rPr sz="1000" b="0">
-                          <a:solidFill>
                             <a:srgbClr val="1F2A37"/>
                           </a:solidFill>
                           <a:latin typeface="Calibri"/>
                         </a:rPr>
-                        <a:t>-4.0%</a:t>
+                        <a:t>-3.3%</a:t>
                       </a:r>
                     </a:p>
                   </a:txBody>
@@ -3986,7 +3986,7 @@
                           </a:solidFill>
                           <a:latin typeface="Calibri"/>
                         </a:rPr>
-                        <a:t>1,120</a:t>
+                        <a:t>1,130</a:t>
                       </a:r>
                     </a:p>
                   </a:txBody>
@@ -4009,7 +4009,7 @@
                           </a:solidFill>
                           <a:latin typeface="Calibri"/>
                         </a:rPr>
-                        <a:t>+0.43%</a:t>
+                        <a:t>+0.91%</a:t>
                       </a:r>
                     </a:p>
                   </a:txBody>
@@ -4032,7 +4032,7 @@
                           </a:solidFill>
                           <a:latin typeface="Calibri"/>
                         </a:rPr>
-                        <a:t>-4.79%</a:t>
+                        <a:t>-3.83%</a:t>
                       </a:r>
                     </a:p>
                   </a:txBody>
@@ -4055,7 +4055,7 @@
                           </a:solidFill>
                           <a:latin typeface="Calibri"/>
                         </a:rPr>
-                        <a:t>+4.31%</a:t>
+                        <a:t>+7.40%</a:t>
                       </a:r>
                     </a:p>
                   </a:txBody>
@@ -4078,7 +4078,7 @@
                           </a:solidFill>
                           <a:latin typeface="Calibri"/>
                         </a:rPr>
-                        <a:t>-32.3%</a:t>
+                        <a:t>-31.7%</a:t>
                       </a:r>
                     </a:p>
                   </a:txBody>
@@ -4124,7 +4124,7 @@
                           </a:solidFill>
                           <a:latin typeface="Calibri"/>
                         </a:rPr>
-                        <a:t>14.5</a:t>
+                        <a:t>14.6</a:t>
                       </a:r>
                     </a:p>
                   </a:txBody>
@@ -4172,7 +4172,7 @@
                           </a:solidFill>
                           <a:latin typeface="Calibri"/>
                         </a:rPr>
-                        <a:t>267</a:t>
+                        <a:t>272</a:t>
                       </a:r>
                     </a:p>
                   </a:txBody>
@@ -4191,11 +4191,34 @@
                       <a:r>
                         <a:rPr sz="1000" b="0">
                           <a:solidFill>
+                            <a:srgbClr val="0B7A3B"/>
+                          </a:solidFill>
+                          <a:latin typeface="Calibri"/>
+                        </a:rPr>
+                        <a:t>+1.72%</a:t>
+                      </a:r>
+                    </a:p>
+                  </a:txBody>
+                  <a:tcPr>
+                    <a:solidFill>
+                      <a:srgbClr val="F3F5F7"/>
+                    </a:solidFill>
+                  </a:tcPr>
+                </a:tc>
+                <a:tc>
+                  <a:txBody>
+                    <a:bodyPr/>
+                    <a:lstStyle/>
+                    <a:p>
+                      <a:pPr algn="r"/>
+                      <a:r>
+                        <a:rPr sz="1000" b="0">
+                          <a:solidFill>
                             <a:srgbClr val="B3261E"/>
                           </a:solidFill>
                           <a:latin typeface="Calibri"/>
                         </a:rPr>
-                        <a:t>-1.09%</a:t>
+                        <a:t>-2.46%</a:t>
                       </a:r>
                     </a:p>
                   </a:txBody>
@@ -4218,7 +4241,7 @@
                           </a:solidFill>
                           <a:latin typeface="Calibri"/>
                         </a:rPr>
-                        <a:t>-3.30%</a:t>
+                        <a:t>-3.26%</a:t>
                       </a:r>
                     </a:p>
                   </a:txBody>
@@ -4237,11 +4260,11 @@
                       <a:r>
                         <a:rPr sz="1000" b="0">
                           <a:solidFill>
-                            <a:srgbClr val="B3261E"/>
-                          </a:solidFill>
-                          <a:latin typeface="Calibri"/>
-                        </a:rPr>
-                        <a:t>-4.96%</a:t>
+                            <a:srgbClr val="1F2A37"/>
+                          </a:solidFill>
+                          <a:latin typeface="Calibri"/>
+                        </a:rPr>
+                        <a:t>-32.4%</a:t>
                       </a:r>
                     </a:p>
                   </a:txBody>
@@ -4264,7 +4287,7 @@
                           </a:solidFill>
                           <a:latin typeface="Calibri"/>
                         </a:rPr>
-                        <a:t>-33.6%</a:t>
+                        <a:t>16%</a:t>
                       </a:r>
                     </a:p>
                   </a:txBody>
@@ -4287,30 +4310,7 @@
                           </a:solidFill>
                           <a:latin typeface="Calibri"/>
                         </a:rPr>
-                        <a:t>15%</a:t>
-                      </a:r>
-                    </a:p>
-                  </a:txBody>
-                  <a:tcPr>
-                    <a:solidFill>
-                      <a:srgbClr val="F3F5F7"/>
-                    </a:solidFill>
-                  </a:tcPr>
-                </a:tc>
-                <a:tc>
-                  <a:txBody>
-                    <a:bodyPr/>
-                    <a:lstStyle/>
-                    <a:p>
-                      <a:pPr algn="r"/>
-                      <a:r>
-                        <a:rPr sz="1000" b="0">
-                          <a:solidFill>
-                            <a:srgbClr val="1F2A37"/>
-                          </a:solidFill>
-                          <a:latin typeface="Calibri"/>
-                        </a:rPr>
-                        <a:t>16.8</a:t>
+                        <a:t>17.3</a:t>
                       </a:r>
                     </a:p>
                   </a:txBody>
@@ -4358,7 +4358,7 @@
                           </a:solidFill>
                           <a:latin typeface="Calibri"/>
                         </a:rPr>
-                        <a:t>4,041</a:t>
+                        <a:t>4,081</a:t>
                       </a:r>
                     </a:p>
                   </a:txBody>
@@ -4377,11 +4377,11 @@
                       <a:r>
                         <a:rPr sz="1000" b="0">
                           <a:solidFill>
-                            <a:srgbClr val="B3261E"/>
-                          </a:solidFill>
-                          <a:latin typeface="Calibri"/>
-                        </a:rPr>
-                        <a:t>-0.57%</a:t>
+                            <a:srgbClr val="0B7A3B"/>
+                          </a:solidFill>
+                          <a:latin typeface="Calibri"/>
+                        </a:rPr>
+                        <a:t>+0.98%</a:t>
                       </a:r>
                     </a:p>
                   </a:txBody>
@@ -4404,7 +4404,7 @@
                           </a:solidFill>
                           <a:latin typeface="Calibri"/>
                         </a:rPr>
-                        <a:t>+0.53%</a:t>
+                        <a:t>+0.25%</a:t>
                       </a:r>
                     </a:p>
                   </a:txBody>
@@ -4427,7 +4427,7 @@
                           </a:solidFill>
                           <a:latin typeface="Calibri"/>
                         </a:rPr>
-                        <a:t>+5.06%</a:t>
+                        <a:t>+6.91%</a:t>
                       </a:r>
                     </a:p>
                   </a:txBody>
@@ -4450,7 +4450,7 @@
                           </a:solidFill>
                           <a:latin typeface="Calibri"/>
                         </a:rPr>
-                        <a:t>-7.6%</a:t>
+                        <a:t>-6.7%</a:t>
                       </a:r>
                     </a:p>
                   </a:txBody>
@@ -4496,7 +4496,7 @@
                           </a:solidFill>
                           <a:latin typeface="Calibri"/>
                         </a:rPr>
-                        <a:t>33.5</a:t>
+                        <a:t>33.9</a:t>
                       </a:r>
                     </a:p>
                   </a:txBody>
@@ -4544,7 +4544,7 @@
                           </a:solidFill>
                           <a:latin typeface="Calibri"/>
                         </a:rPr>
-                        <a:t>1,311</a:t>
+                        <a:t>1,313</a:t>
                       </a:r>
                     </a:p>
                   </a:txBody>
@@ -4563,11 +4563,34 @@
                       <a:r>
                         <a:rPr sz="1000" b="0">
                           <a:solidFill>
+                            <a:srgbClr val="0B7A3B"/>
+                          </a:solidFill>
+                          <a:latin typeface="Calibri"/>
+                        </a:rPr>
+                        <a:t>+0.17%</a:t>
+                      </a:r>
+                    </a:p>
+                  </a:txBody>
+                  <a:tcPr>
+                    <a:solidFill>
+                      <a:srgbClr val="F3F5F7"/>
+                    </a:solidFill>
+                  </a:tcPr>
+                </a:tc>
+                <a:tc>
+                  <a:txBody>
+                    <a:bodyPr/>
+                    <a:lstStyle/>
+                    <a:p>
+                      <a:pPr algn="r"/>
+                      <a:r>
+                        <a:rPr sz="1000" b="0">
+                          <a:solidFill>
                             <a:srgbClr val="B3261E"/>
                           </a:solidFill>
                           <a:latin typeface="Calibri"/>
                         </a:rPr>
-                        <a:t>-0.83%</a:t>
+                        <a:t>-0.29%</a:t>
                       </a:r>
                     </a:p>
                   </a:txBody>
@@ -4586,11 +4609,11 @@
                       <a:r>
                         <a:rPr sz="1000" b="0">
                           <a:solidFill>
-                            <a:srgbClr val="B3261E"/>
-                          </a:solidFill>
-                          <a:latin typeface="Calibri"/>
-                        </a:rPr>
-                        <a:t>-1.35%</a:t>
+                            <a:srgbClr val="0B7A3B"/>
+                          </a:solidFill>
+                          <a:latin typeface="Calibri"/>
+                        </a:rPr>
+                        <a:t>+1.91%</a:t>
                       </a:r>
                     </a:p>
                   </a:txBody>
@@ -4609,11 +4632,11 @@
                       <a:r>
                         <a:rPr sz="1000" b="0">
                           <a:solidFill>
-                            <a:srgbClr val="0B7A3B"/>
-                          </a:solidFill>
-                          <a:latin typeface="Calibri"/>
-                        </a:rPr>
-                        <a:t>+0.56%</a:t>
+                            <a:srgbClr val="1F2A37"/>
+                          </a:solidFill>
+                          <a:latin typeface="Calibri"/>
+                        </a:rPr>
+                        <a:t>-17.1%</a:t>
                       </a:r>
                     </a:p>
                   </a:txBody>
@@ -4636,7 +4659,7 @@
                           </a:solidFill>
                           <a:latin typeface="Calibri"/>
                         </a:rPr>
-                        <a:t>-17.3%</a:t>
+                        <a:t>19%</a:t>
                       </a:r>
                     </a:p>
                   </a:txBody>
@@ -4659,30 +4682,7 @@
                           </a:solidFill>
                           <a:latin typeface="Calibri"/>
                         </a:rPr>
-                        <a:t>19%</a:t>
-                      </a:r>
-                    </a:p>
-                  </a:txBody>
-                  <a:tcPr>
-                    <a:solidFill>
-                      <a:srgbClr val="F3F5F7"/>
-                    </a:solidFill>
-                  </a:tcPr>
-                </a:tc>
-                <a:tc>
-                  <a:txBody>
-                    <a:bodyPr/>
-                    <a:lstStyle/>
-                    <a:p>
-                      <a:pPr algn="r"/>
-                      <a:r>
-                        <a:rPr sz="1000" b="0">
-                          <a:solidFill>
-                            <a:srgbClr val="1F2A37"/>
-                          </a:solidFill>
-                          <a:latin typeface="Calibri"/>
-                        </a:rPr>
-                        <a:t>23.7</a:t>
+                        <a:t>23.8</a:t>
                       </a:r>
                     </a:p>
                   </a:txBody>
@@ -4730,7 +4730,7 @@
                           </a:solidFill>
                           <a:latin typeface="Calibri"/>
                         </a:rPr>
-                        <a:t>2,289</a:t>
+                        <a:t>2,298</a:t>
                       </a:r>
                     </a:p>
                   </a:txBody>
@@ -4776,7 +4776,7 @@
                           </a:solidFill>
                           <a:latin typeface="Calibri"/>
                         </a:rPr>
-                        <a:t>-2.58%</a:t>
+                        <a:t>-3.24%</a:t>
                       </a:r>
                     </a:p>
                   </a:txBody>
@@ -4799,7 +4799,7 @@
                           </a:solidFill>
                           <a:latin typeface="Calibri"/>
                         </a:rPr>
-                        <a:t>+3.06%</a:t>
+                        <a:t>+4.06%</a:t>
                       </a:r>
                     </a:p>
                   </a:txBody>
@@ -4822,7 +4822,7 @@
                           </a:solidFill>
                           <a:latin typeface="Calibri"/>
                         </a:rPr>
-                        <a:t>-28.6%</a:t>
+                        <a:t>-28.3%</a:t>
                       </a:r>
                     </a:p>
                   </a:txBody>
@@ -4952,7 +4952,7 @@
                 </a:solidFill>
                 <a:latin typeface="Calibri"/>
               </a:rPr>
-              <a:t>Breadth was risk-off: 2 of 8 names advanced on the day.</a:t>
+              <a:t>Breadth was risk-on: 8 of 8 names advanced on the day.</a:t>
             </a:r>
           </a:p>
           <a:p>
@@ -4968,7 +4968,7 @@
                 </a:solidFill>
                 <a:latin typeface="Calibri"/>
               </a:rPr>
-              <a:t>•  Best performer on the day: INFY.NS at +0.43%.</a:t>
+              <a:t>•  Best performer on the day: ITC.NS at +1.72%.</a:t>
             </a:r>
           </a:p>
           <a:p>
@@ -4984,7 +4984,7 @@
                 </a:solidFill>
                 <a:latin typeface="Calibri"/>
               </a:rPr>
-              <a:t>•  Weakest on the day: ITC.NS at -1.09%.</a:t>
+              <a:t>•  Weakest on the day: RELIANCE.NS at +0.17%.</a:t>
             </a:r>
           </a:p>
           <a:p>
@@ -5000,7 +5000,7 @@
                 </a:solidFill>
                 <a:latin typeface="Calibri"/>
               </a:rPr>
-              <a:t>•  Median one-day move across the watchlist: -0.60%.</a:t>
+              <a:t>•  Median one-day move across the watchlist: +0.81%.</a:t>
             </a:r>
           </a:p>
           <a:p>
@@ -5016,7 +5016,7 @@
                 </a:solidFill>
                 <a:latin typeface="Calibri"/>
               </a:rPr>
-              <a:t>•  ITC.NS sits furthest below its 52-week high, at -33.6%.</a:t>
+              <a:t>•  ITC.NS sits furthest below its 52-week high, at -32.4%.</a:t>
             </a:r>
           </a:p>
           <a:p>
@@ -5064,7 +5064,7 @@
                 </a:solidFill>
                 <a:latin typeface="Calibri"/>
               </a:rPr>
-              <a:t>•  Highest 30-day realised volatility: TCS.NS at 34.7% annualised.</a:t>
+              <a:t>•  Highest 30-day realised volatility: TCS.NS at 34.6% annualised.</a:t>
             </a:r>
           </a:p>
           <a:p>
@@ -5080,7 +5080,7 @@
                 </a:solidFill>
                 <a:latin typeface="Calibri"/>
               </a:rPr>
-              <a:t>•  60 headlines collected, 5 tagged to a watchlist name by substring match (unverified).</a:t>
+              <a:t>•  60 headlines collected, 1 tagged to a watchlist name by substring match (unverified).</a:t>
             </a:r>
           </a:p>
           <a:p>

--- a/public/deskbrief.pptx
+++ b/public/deskbrief.pptx
@@ -3128,7 +3128,7 @@
                 </a:solidFill>
                 <a:latin typeface="Calibri"/>
               </a:rPr>
-              <a:t>8 names  |  generated 20 Aug 2026 13:26  |  source: Yahoo Finance via yfinance, Indian financial RSS</a:t>
+              <a:t>8 names  |  generated 21 Aug 2026 13:25  |  source: Yahoo Finance via yfinance, Indian financial RSS</a:t>
             </a:r>
           </a:p>
         </p:txBody>
@@ -3428,7 +3428,7 @@
                           </a:solidFill>
                           <a:latin typeface="Calibri"/>
                         </a:rPr>
-                        <a:t>1,942</a:t>
+                        <a:t>1,946</a:t>
                       </a:r>
                     </a:p>
                   </a:txBody>
@@ -3451,7 +3451,7 @@
                           </a:solidFill>
                           <a:latin typeface="Calibri"/>
                         </a:rPr>
-                        <a:t>+1.02%</a:t>
+                        <a:t>+0.22%</a:t>
                       </a:r>
                     </a:p>
                   </a:txBody>
@@ -3470,11 +3470,34 @@
                       <a:r>
                         <a:rPr sz="1000" b="0">
                           <a:solidFill>
+                            <a:srgbClr val="B3261E"/>
+                          </a:solidFill>
+                          <a:latin typeface="Calibri"/>
+                        </a:rPr>
+                        <a:t>-2.31%</a:t>
+                      </a:r>
+                    </a:p>
+                  </a:txBody>
+                  <a:tcPr>
+                    <a:solidFill>
+                      <a:srgbClr val="F3F5F7"/>
+                    </a:solidFill>
+                  </a:tcPr>
+                </a:tc>
+                <a:tc>
+                  <a:txBody>
+                    <a:bodyPr/>
+                    <a:lstStyle/>
+                    <a:p>
+                      <a:pPr algn="r"/>
+                      <a:r>
+                        <a:rPr sz="1000" b="0">
+                          <a:solidFill>
                             <a:srgbClr val="0B7A3B"/>
                           </a:solidFill>
                           <a:latin typeface="Calibri"/>
                         </a:rPr>
-                        <a:t>+0.13%</a:t>
+                        <a:t>+2.05%</a:t>
                       </a:r>
                     </a:p>
                   </a:txBody>
@@ -3493,11 +3516,11 @@
                       <a:r>
                         <a:rPr sz="1000" b="0">
                           <a:solidFill>
-                            <a:srgbClr val="0B7A3B"/>
-                          </a:solidFill>
-                          <a:latin typeface="Calibri"/>
-                        </a:rPr>
-                        <a:t>+0.88%</a:t>
+                            <a:srgbClr val="1F2A37"/>
+                          </a:solidFill>
+                          <a:latin typeface="Calibri"/>
+                        </a:rPr>
+                        <a:t>-8.9%</a:t>
                       </a:r>
                     </a:p>
                   </a:txBody>
@@ -3520,7 +3543,7 @@
                           </a:solidFill>
                           <a:latin typeface="Calibri"/>
                         </a:rPr>
-                        <a:t>-9.1%</a:t>
+                        <a:t>18%</a:t>
                       </a:r>
                     </a:p>
                   </a:txBody>
@@ -3543,30 +3566,7 @@
                           </a:solidFill>
                           <a:latin typeface="Calibri"/>
                         </a:rPr>
-                        <a:t>18%</a:t>
-                      </a:r>
-                    </a:p>
-                  </a:txBody>
-                  <a:tcPr>
-                    <a:solidFill>
-                      <a:srgbClr val="F3F5F7"/>
-                    </a:solidFill>
-                  </a:tcPr>
-                </a:tc>
-                <a:tc>
-                  <a:txBody>
-                    <a:bodyPr/>
-                    <a:lstStyle/>
-                    <a:p>
-                      <a:pPr algn="r"/>
-                      <a:r>
-                        <a:rPr sz="1000" b="0">
-                          <a:solidFill>
-                            <a:srgbClr val="1F2A37"/>
-                          </a:solidFill>
-                          <a:latin typeface="Calibri"/>
-                        </a:rPr>
-                        <a:t>40.6</a:t>
+                        <a:t>40.7</a:t>
                       </a:r>
                     </a:p>
                   </a:txBody>
@@ -3614,7 +3614,7 @@
                           </a:solidFill>
                           <a:latin typeface="Calibri"/>
                         </a:rPr>
-                        <a:t>725</a:t>
+                        <a:t>727</a:t>
                       </a:r>
                     </a:p>
                   </a:txBody>
@@ -3637,7 +3637,7 @@
                           </a:solidFill>
                           <a:latin typeface="Calibri"/>
                         </a:rPr>
-                        <a:t>+0.70%</a:t>
+                        <a:t>+0.26%</a:t>
                       </a:r>
                     </a:p>
                   </a:txBody>
@@ -3656,11 +3656,11 @@
                       <a:r>
                         <a:rPr sz="1000" b="0">
                           <a:solidFill>
-                            <a:srgbClr val="0B7A3B"/>
-                          </a:solidFill>
-                          <a:latin typeface="Calibri"/>
-                        </a:rPr>
-                        <a:t>+0.01%</a:t>
+                            <a:srgbClr val="B3261E"/>
+                          </a:solidFill>
+                          <a:latin typeface="Calibri"/>
+                        </a:rPr>
+                        <a:t>-0.01%</a:t>
                       </a:r>
                     </a:p>
                   </a:txBody>
@@ -3683,7 +3683,7 @@
                           </a:solidFill>
                           <a:latin typeface="Calibri"/>
                         </a:rPr>
-                        <a:t>-3.73%</a:t>
+                        <a:t>-2.72%</a:t>
                       </a:r>
                     </a:p>
                   </a:txBody>
@@ -3706,7 +3706,7 @@
                           </a:solidFill>
                           <a:latin typeface="Calibri"/>
                         </a:rPr>
-                        <a:t>-27.0%</a:t>
+                        <a:t>-26.8%</a:t>
                       </a:r>
                     </a:p>
                   </a:txBody>
@@ -3800,7 +3800,7 @@
                           </a:solidFill>
                           <a:latin typeface="Calibri"/>
                         </a:rPr>
-                        <a:t>1,412</a:t>
+                        <a:t>1,420</a:t>
                       </a:r>
                     </a:p>
                   </a:txBody>
@@ -3823,7 +3823,7 @@
                           </a:solidFill>
                           <a:latin typeface="Calibri"/>
                         </a:rPr>
-                        <a:t>+0.71%</a:t>
+                        <a:t>+0.57%</a:t>
                       </a:r>
                     </a:p>
                   </a:txBody>
@@ -3846,7 +3846,7 @@
                           </a:solidFill>
                           <a:latin typeface="Calibri"/>
                         </a:rPr>
-                        <a:t>+0.36%</a:t>
+                        <a:t>+0.21%</a:t>
                       </a:r>
                     </a:p>
                   </a:txBody>
@@ -3869,7 +3869,7 @@
                           </a:solidFill>
                           <a:latin typeface="Calibri"/>
                         </a:rPr>
-                        <a:t>-1.17%</a:t>
+                        <a:t>-0.18%</a:t>
                       </a:r>
                     </a:p>
                   </a:txBody>
@@ -3892,7 +3892,7 @@
                           </a:solidFill>
                           <a:latin typeface="Calibri"/>
                         </a:rPr>
-                        <a:t>-3.3%</a:t>
+                        <a:t>-2.7%</a:t>
                       </a:r>
                     </a:p>
                   </a:txBody>
@@ -3938,7 +3938,7 @@
                           </a:solidFill>
                           <a:latin typeface="Calibri"/>
                         </a:rPr>
-                        <a:t>18.2</a:t>
+                        <a:t>18.4</a:t>
                       </a:r>
                     </a:p>
                   </a:txBody>
@@ -3986,7 +3986,7 @@
                           </a:solidFill>
                           <a:latin typeface="Calibri"/>
                         </a:rPr>
-                        <a:t>1,130</a:t>
+                        <a:t>1,121</a:t>
                       </a:r>
                     </a:p>
                   </a:txBody>
@@ -4005,11 +4005,57 @@
                       <a:r>
                         <a:rPr sz="1000" b="0">
                           <a:solidFill>
+                            <a:srgbClr val="B3261E"/>
+                          </a:solidFill>
+                          <a:latin typeface="Calibri"/>
+                        </a:rPr>
+                        <a:t>-0.80%</a:t>
+                      </a:r>
+                    </a:p>
+                  </a:txBody>
+                  <a:tcPr>
+                    <a:solidFill>
+                      <a:srgbClr val="FFFFFF"/>
+                    </a:solidFill>
+                  </a:tcPr>
+                </a:tc>
+                <a:tc>
+                  <a:txBody>
+                    <a:bodyPr/>
+                    <a:lstStyle/>
+                    <a:p>
+                      <a:pPr algn="r"/>
+                      <a:r>
+                        <a:rPr sz="1000" b="0">
+                          <a:solidFill>
+                            <a:srgbClr val="B3261E"/>
+                          </a:solidFill>
+                          <a:latin typeface="Calibri"/>
+                        </a:rPr>
+                        <a:t>-4.12%</a:t>
+                      </a:r>
+                    </a:p>
+                  </a:txBody>
+                  <a:tcPr>
+                    <a:solidFill>
+                      <a:srgbClr val="FFFFFF"/>
+                    </a:solidFill>
+                  </a:tcPr>
+                </a:tc>
+                <a:tc>
+                  <a:txBody>
+                    <a:bodyPr/>
+                    <a:lstStyle/>
+                    <a:p>
+                      <a:pPr algn="r"/>
+                      <a:r>
+                        <a:rPr sz="1000" b="0">
+                          <a:solidFill>
                             <a:srgbClr val="0B7A3B"/>
                           </a:solidFill>
                           <a:latin typeface="Calibri"/>
                         </a:rPr>
-                        <a:t>+0.91%</a:t>
+                        <a:t>+7.03%</a:t>
                       </a:r>
                     </a:p>
                   </a:txBody>
@@ -4028,11 +4074,11 @@
                       <a:r>
                         <a:rPr sz="1000" b="0">
                           <a:solidFill>
-                            <a:srgbClr val="B3261E"/>
-                          </a:solidFill>
-                          <a:latin typeface="Calibri"/>
-                        </a:rPr>
-                        <a:t>-3.83%</a:t>
+                            <a:srgbClr val="1F2A37"/>
+                          </a:solidFill>
+                          <a:latin typeface="Calibri"/>
+                        </a:rPr>
+                        <a:t>-32.2%</a:t>
                       </a:r>
                     </a:p>
                   </a:txBody>
@@ -4051,11 +4097,11 @@
                       <a:r>
                         <a:rPr sz="1000" b="0">
                           <a:solidFill>
-                            <a:srgbClr val="0B7A3B"/>
-                          </a:solidFill>
-                          <a:latin typeface="Calibri"/>
-                        </a:rPr>
-                        <a:t>+7.40%</a:t>
+                            <a:srgbClr val="1F2A37"/>
+                          </a:solidFill>
+                          <a:latin typeface="Calibri"/>
+                        </a:rPr>
+                        <a:t>30%</a:t>
                       </a:r>
                     </a:p>
                   </a:txBody>
@@ -4078,53 +4124,7 @@
                           </a:solidFill>
                           <a:latin typeface="Calibri"/>
                         </a:rPr>
-                        <a:t>-31.7%</a:t>
-                      </a:r>
-                    </a:p>
-                  </a:txBody>
-                  <a:tcPr>
-                    <a:solidFill>
-                      <a:srgbClr val="FFFFFF"/>
-                    </a:solidFill>
-                  </a:tcPr>
-                </a:tc>
-                <a:tc>
-                  <a:txBody>
-                    <a:bodyPr/>
-                    <a:lstStyle/>
-                    <a:p>
-                      <a:pPr algn="r"/>
-                      <a:r>
-                        <a:rPr sz="1000" b="0">
-                          <a:solidFill>
-                            <a:srgbClr val="1F2A37"/>
-                          </a:solidFill>
-                          <a:latin typeface="Calibri"/>
-                        </a:rPr>
-                        <a:t>30%</a:t>
-                      </a:r>
-                    </a:p>
-                  </a:txBody>
-                  <a:tcPr>
-                    <a:solidFill>
-                      <a:srgbClr val="FFFFFF"/>
-                    </a:solidFill>
-                  </a:tcPr>
-                </a:tc>
-                <a:tc>
-                  <a:txBody>
-                    <a:bodyPr/>
-                    <a:lstStyle/>
-                    <a:p>
-                      <a:pPr algn="r"/>
-                      <a:r>
-                        <a:rPr sz="1000" b="0">
-                          <a:solidFill>
-                            <a:srgbClr val="1F2A37"/>
-                          </a:solidFill>
-                          <a:latin typeface="Calibri"/>
-                        </a:rPr>
-                        <a:t>14.6</a:t>
+                        <a:t>14.3</a:t>
                       </a:r>
                     </a:p>
                   </a:txBody>
@@ -4172,7 +4172,7 @@
                           </a:solidFill>
                           <a:latin typeface="Calibri"/>
                         </a:rPr>
-                        <a:t>272</a:t>
+                        <a:t>269</a:t>
                       </a:r>
                     </a:p>
                   </a:txBody>
@@ -4191,11 +4191,11 @@
                       <a:r>
                         <a:rPr sz="1000" b="0">
                           <a:solidFill>
-                            <a:srgbClr val="0B7A3B"/>
-                          </a:solidFill>
-                          <a:latin typeface="Calibri"/>
-                        </a:rPr>
-                        <a:t>+1.72%</a:t>
+                            <a:srgbClr val="B3261E"/>
+                          </a:solidFill>
+                          <a:latin typeface="Calibri"/>
+                        </a:rPr>
+                        <a:t>-0.83%</a:t>
                       </a:r>
                     </a:p>
                   </a:txBody>
@@ -4218,7 +4218,7 @@
                           </a:solidFill>
                           <a:latin typeface="Calibri"/>
                         </a:rPr>
-                        <a:t>-2.46%</a:t>
+                        <a:t>-3.16%</a:t>
                       </a:r>
                     </a:p>
                   </a:txBody>
@@ -4241,7 +4241,7 @@
                           </a:solidFill>
                           <a:latin typeface="Calibri"/>
                         </a:rPr>
-                        <a:t>-3.26%</a:t>
+                        <a:t>-4.23%</a:t>
                       </a:r>
                     </a:p>
                   </a:txBody>
@@ -4264,7 +4264,7 @@
                           </a:solidFill>
                           <a:latin typeface="Calibri"/>
                         </a:rPr>
-                        <a:t>-32.4%</a:t>
+                        <a:t>-33.0%</a:t>
                       </a:r>
                     </a:p>
                   </a:txBody>
@@ -4310,7 +4310,7 @@
                           </a:solidFill>
                           <a:latin typeface="Calibri"/>
                         </a:rPr>
-                        <a:t>17.3</a:t>
+                        <a:t>17.0</a:t>
                       </a:r>
                     </a:p>
                   </a:txBody>
@@ -4358,7 +4358,7 @@
                           </a:solidFill>
                           <a:latin typeface="Calibri"/>
                         </a:rPr>
-                        <a:t>4,081</a:t>
+                        <a:t>4,093</a:t>
                       </a:r>
                     </a:p>
                   </a:txBody>
@@ -4381,7 +4381,7 @@
                           </a:solidFill>
                           <a:latin typeface="Calibri"/>
                         </a:rPr>
-                        <a:t>+0.98%</a:t>
+                        <a:t>+0.29%</a:t>
                       </a:r>
                     </a:p>
                   </a:txBody>
@@ -4404,7 +4404,7 @@
                           </a:solidFill>
                           <a:latin typeface="Calibri"/>
                         </a:rPr>
-                        <a:t>+0.25%</a:t>
+                        <a:t>+0.89%</a:t>
                       </a:r>
                     </a:p>
                   </a:txBody>
@@ -4427,7 +4427,7 @@
                           </a:solidFill>
                           <a:latin typeface="Calibri"/>
                         </a:rPr>
-                        <a:t>+6.91%</a:t>
+                        <a:t>+7.93%</a:t>
                       </a:r>
                     </a:p>
                   </a:txBody>
@@ -4450,7 +4450,7 @@
                           </a:solidFill>
                           <a:latin typeface="Calibri"/>
                         </a:rPr>
-                        <a:t>-6.7%</a:t>
+                        <a:t>-6.5%</a:t>
                       </a:r>
                     </a:p>
                   </a:txBody>
@@ -4473,7 +4473,7 @@
                           </a:solidFill>
                           <a:latin typeface="Calibri"/>
                         </a:rPr>
-                        <a:t>17%</a:t>
+                        <a:t>16%</a:t>
                       </a:r>
                     </a:p>
                   </a:txBody>
@@ -4496,7 +4496,7 @@
                           </a:solidFill>
                           <a:latin typeface="Calibri"/>
                         </a:rPr>
-                        <a:t>33.9</a:t>
+                        <a:t>34.0</a:t>
                       </a:r>
                     </a:p>
                   </a:txBody>
@@ -4544,7 +4544,7 @@
                           </a:solidFill>
                           <a:latin typeface="Calibri"/>
                         </a:rPr>
-                        <a:t>1,313</a:t>
+                        <a:t>1,316</a:t>
                       </a:r>
                     </a:p>
                   </a:txBody>
@@ -4567,7 +4567,7 @@
                           </a:solidFill>
                           <a:latin typeface="Calibri"/>
                         </a:rPr>
-                        <a:t>+0.17%</a:t>
+                        <a:t>+0.21%</a:t>
                       </a:r>
                     </a:p>
                   </a:txBody>
@@ -4586,11 +4586,11 @@
                       <a:r>
                         <a:rPr sz="1000" b="0">
                           <a:solidFill>
-                            <a:srgbClr val="B3261E"/>
-                          </a:solidFill>
-                          <a:latin typeface="Calibri"/>
-                        </a:rPr>
-                        <a:t>-0.29%</a:t>
+                            <a:srgbClr val="0B7A3B"/>
+                          </a:solidFill>
+                          <a:latin typeface="Calibri"/>
+                        </a:rPr>
+                        <a:t>+0.46%</a:t>
                       </a:r>
                     </a:p>
                   </a:txBody>
@@ -4613,7 +4613,7 @@
                           </a:solidFill>
                           <a:latin typeface="Calibri"/>
                         </a:rPr>
-                        <a:t>+1.91%</a:t>
+                        <a:t>+3.44%</a:t>
                       </a:r>
                     </a:p>
                   </a:txBody>
@@ -4636,7 +4636,7 @@
                           </a:solidFill>
                           <a:latin typeface="Calibri"/>
                         </a:rPr>
-                        <a:t>-17.1%</a:t>
+                        <a:t>-17.0%</a:t>
                       </a:r>
                     </a:p>
                   </a:txBody>
@@ -4659,7 +4659,7 @@
                           </a:solidFill>
                           <a:latin typeface="Calibri"/>
                         </a:rPr>
-                        <a:t>19%</a:t>
+                        <a:t>18%</a:t>
                       </a:r>
                     </a:p>
                   </a:txBody>
@@ -4682,7 +4682,7 @@
                           </a:solidFill>
                           <a:latin typeface="Calibri"/>
                         </a:rPr>
-                        <a:t>23.8</a:t>
+                        <a:t>23.9</a:t>
                       </a:r>
                     </a:p>
                   </a:txBody>
@@ -4730,7 +4730,7 @@
                           </a:solidFill>
                           <a:latin typeface="Calibri"/>
                         </a:rPr>
-                        <a:t>2,298</a:t>
+                        <a:t>2,302</a:t>
                       </a:r>
                     </a:p>
                   </a:txBody>
@@ -4753,7 +4753,7 @@
                           </a:solidFill>
                           <a:latin typeface="Calibri"/>
                         </a:rPr>
-                        <a:t>+0.39%</a:t>
+                        <a:t>+0.17%</a:t>
                       </a:r>
                     </a:p>
                   </a:txBody>
@@ -4776,7 +4776,7 @@
                           </a:solidFill>
                           <a:latin typeface="Calibri"/>
                         </a:rPr>
-                        <a:t>-3.24%</a:t>
+                        <a:t>-2.50%</a:t>
                       </a:r>
                     </a:p>
                   </a:txBody>
@@ -4799,7 +4799,7 @@
                           </a:solidFill>
                           <a:latin typeface="Calibri"/>
                         </a:rPr>
-                        <a:t>+4.06%</a:t>
+                        <a:t>+2.63%</a:t>
                       </a:r>
                     </a:p>
                   </a:txBody>
@@ -4822,7 +4822,7 @@
                           </a:solidFill>
                           <a:latin typeface="Calibri"/>
                         </a:rPr>
-                        <a:t>-28.3%</a:t>
+                        <a:t>-28.2%</a:t>
                       </a:r>
                     </a:p>
                   </a:txBody>
@@ -4868,7 +4868,7 @@
                           </a:solidFill>
                           <a:latin typeface="Calibri"/>
                         </a:rPr>
-                        <a:t>16.6</a:t>
+                        <a:t>16.7</a:t>
                       </a:r>
                     </a:p>
                   </a:txBody>
@@ -4952,7 +4952,7 @@
                 </a:solidFill>
                 <a:latin typeface="Calibri"/>
               </a:rPr>
-              <a:t>Breadth was risk-on: 8 of 8 names advanced on the day.</a:t>
+              <a:t>Breadth was risk-on: 6 of 8 names advanced on the day.</a:t>
             </a:r>
           </a:p>
           <a:p>
@@ -4968,7 +4968,7 @@
                 </a:solidFill>
                 <a:latin typeface="Calibri"/>
               </a:rPr>
-              <a:t>•  Best performer on the day: ITC.NS at +1.72%.</a:t>
+              <a:t>•  Best performer on the day: ICICIBANK.NS at +0.57%.</a:t>
             </a:r>
           </a:p>
           <a:p>
@@ -4984,7 +4984,7 @@
                 </a:solidFill>
                 <a:latin typeface="Calibri"/>
               </a:rPr>
-              <a:t>•  Weakest on the day: RELIANCE.NS at +0.17%.</a:t>
+              <a:t>•  Weakest on the day: ITC.NS at -0.83%.</a:t>
             </a:r>
           </a:p>
           <a:p>
@@ -5000,7 +5000,7 @@
                 </a:solidFill>
                 <a:latin typeface="Calibri"/>
               </a:rPr>
-              <a:t>•  Median one-day move across the watchlist: +0.81%.</a:t>
+              <a:t>•  Median one-day move across the watchlist: +0.22%.</a:t>
             </a:r>
           </a:p>
           <a:p>
@@ -5016,7 +5016,7 @@
                 </a:solidFill>
                 <a:latin typeface="Calibri"/>
               </a:rPr>
-              <a:t>•  ITC.NS sits furthest below its 52-week high, at -32.4%.</a:t>
+              <a:t>•  ITC.NS sits furthest below its 52-week high, at -33.0%.</a:t>
             </a:r>
           </a:p>
           <a:p>
@@ -5080,7 +5080,7 @@
                 </a:solidFill>
                 <a:latin typeface="Calibri"/>
               </a:rPr>
-              <a:t>•  60 headlines collected, 1 tagged to a watchlist name by substring match (unverified).</a:t>
+              <a:t>•  60 headlines collected, 4 tagged to a watchlist name by substring match (unverified).</a:t>
             </a:r>
           </a:p>
           <a:p>

--- a/public/deskbrief.pptx
+++ b/public/deskbrief.pptx
@@ -3128,7 +3128,7 @@
                 </a:solidFill>
                 <a:latin typeface="Calibri"/>
               </a:rPr>
-              <a:t>8 names  |  generated 21 Aug 2026 13:25  |  source: Yahoo Finance via yfinance, Indian financial RSS</a:t>
+              <a:t>8 names  |  generated 24 Aug 2026 13:29  |  source: Yahoo Finance via yfinance, Indian financial RSS</a:t>
             </a:r>
           </a:p>
         </p:txBody>
@@ -3428,7 +3428,7 @@
                           </a:solidFill>
                           <a:latin typeface="Calibri"/>
                         </a:rPr>
-                        <a:t>1,946</a:t>
+                        <a:t>1,935</a:t>
                       </a:r>
                     </a:p>
                   </a:txBody>
@@ -3447,11 +3447,57 @@
                       <a:r>
                         <a:rPr sz="1000" b="0">
                           <a:solidFill>
+                            <a:srgbClr val="B3261E"/>
+                          </a:solidFill>
+                          <a:latin typeface="Calibri"/>
+                        </a:rPr>
+                        <a:t>-0.57%</a:t>
+                      </a:r>
+                    </a:p>
+                  </a:txBody>
+                  <a:tcPr>
+                    <a:solidFill>
+                      <a:srgbClr val="F3F5F7"/>
+                    </a:solidFill>
+                  </a:tcPr>
+                </a:tc>
+                <a:tc>
+                  <a:txBody>
+                    <a:bodyPr/>
+                    <a:lstStyle/>
+                    <a:p>
+                      <a:pPr algn="r"/>
+                      <a:r>
+                        <a:rPr sz="1000" b="0">
+                          <a:solidFill>
+                            <a:srgbClr val="B3261E"/>
+                          </a:solidFill>
+                          <a:latin typeface="Calibri"/>
+                        </a:rPr>
+                        <a:t>-1.74%</a:t>
+                      </a:r>
+                    </a:p>
+                  </a:txBody>
+                  <a:tcPr>
+                    <a:solidFill>
+                      <a:srgbClr val="F3F5F7"/>
+                    </a:solidFill>
+                  </a:tcPr>
+                </a:tc>
+                <a:tc>
+                  <a:txBody>
+                    <a:bodyPr/>
+                    <a:lstStyle/>
+                    <a:p>
+                      <a:pPr algn="r"/>
+                      <a:r>
+                        <a:rPr sz="1000" b="0">
+                          <a:solidFill>
                             <a:srgbClr val="0B7A3B"/>
                           </a:solidFill>
                           <a:latin typeface="Calibri"/>
                         </a:rPr>
-                        <a:t>+0.22%</a:t>
+                        <a:t>+1.94%</a:t>
                       </a:r>
                     </a:p>
                   </a:txBody>
@@ -3470,11 +3516,11 @@
                       <a:r>
                         <a:rPr sz="1000" b="0">
                           <a:solidFill>
-                            <a:srgbClr val="B3261E"/>
-                          </a:solidFill>
-                          <a:latin typeface="Calibri"/>
-                        </a:rPr>
-                        <a:t>-2.31%</a:t>
+                            <a:srgbClr val="1F2A37"/>
+                          </a:solidFill>
+                          <a:latin typeface="Calibri"/>
+                        </a:rPr>
+                        <a:t>-9.4%</a:t>
                       </a:r>
                     </a:p>
                   </a:txBody>
@@ -3493,11 +3539,11 @@
                       <a:r>
                         <a:rPr sz="1000" b="0">
                           <a:solidFill>
-                            <a:srgbClr val="0B7A3B"/>
-                          </a:solidFill>
-                          <a:latin typeface="Calibri"/>
-                        </a:rPr>
-                        <a:t>+2.05%</a:t>
+                            <a:srgbClr val="1F2A37"/>
+                          </a:solidFill>
+                          <a:latin typeface="Calibri"/>
+                        </a:rPr>
+                        <a:t>18%</a:t>
                       </a:r>
                     </a:p>
                   </a:txBody>
@@ -3520,53 +3566,7 @@
                           </a:solidFill>
                           <a:latin typeface="Calibri"/>
                         </a:rPr>
-                        <a:t>-8.9%</a:t>
-                      </a:r>
-                    </a:p>
-                  </a:txBody>
-                  <a:tcPr>
-                    <a:solidFill>
-                      <a:srgbClr val="F3F5F7"/>
-                    </a:solidFill>
-                  </a:tcPr>
-                </a:tc>
-                <a:tc>
-                  <a:txBody>
-                    <a:bodyPr/>
-                    <a:lstStyle/>
-                    <a:p>
-                      <a:pPr algn="r"/>
-                      <a:r>
-                        <a:rPr sz="1000" b="0">
-                          <a:solidFill>
-                            <a:srgbClr val="1F2A37"/>
-                          </a:solidFill>
-                          <a:latin typeface="Calibri"/>
-                        </a:rPr>
-                        <a:t>18%</a:t>
-                      </a:r>
-                    </a:p>
-                  </a:txBody>
-                  <a:tcPr>
-                    <a:solidFill>
-                      <a:srgbClr val="F3F5F7"/>
-                    </a:solidFill>
-                  </a:tcPr>
-                </a:tc>
-                <a:tc>
-                  <a:txBody>
-                    <a:bodyPr/>
-                    <a:lstStyle/>
-                    <a:p>
-                      <a:pPr algn="r"/>
-                      <a:r>
-                        <a:rPr sz="1000" b="0">
-                          <a:solidFill>
-                            <a:srgbClr val="1F2A37"/>
-                          </a:solidFill>
-                          <a:latin typeface="Calibri"/>
-                        </a:rPr>
-                        <a:t>40.7</a:t>
+                        <a:t>40.4</a:t>
                       </a:r>
                     </a:p>
                   </a:txBody>
@@ -3614,7 +3614,7 @@
                           </a:solidFill>
                           <a:latin typeface="Calibri"/>
                         </a:rPr>
-                        <a:t>727</a:t>
+                        <a:t>729</a:t>
                       </a:r>
                     </a:p>
                   </a:txBody>
@@ -3637,7 +3637,7 @@
                           </a:solidFill>
                           <a:latin typeface="Calibri"/>
                         </a:rPr>
-                        <a:t>+0.26%</a:t>
+                        <a:t>+0.28%</a:t>
                       </a:r>
                     </a:p>
                   </a:txBody>
@@ -3656,11 +3656,34 @@
                       <a:r>
                         <a:rPr sz="1000" b="0">
                           <a:solidFill>
+                            <a:srgbClr val="1F2A37"/>
+                          </a:solidFill>
+                          <a:latin typeface="Calibri"/>
+                        </a:rPr>
+                        <a:t>+0.00%</a:t>
+                      </a:r>
+                    </a:p>
+                  </a:txBody>
+                  <a:tcPr>
+                    <a:solidFill>
+                      <a:srgbClr val="FFFFFF"/>
+                    </a:solidFill>
+                  </a:tcPr>
+                </a:tc>
+                <a:tc>
+                  <a:txBody>
+                    <a:bodyPr/>
+                    <a:lstStyle/>
+                    <a:p>
+                      <a:pPr algn="r"/>
+                      <a:r>
+                        <a:rPr sz="1000" b="0">
+                          <a:solidFill>
                             <a:srgbClr val="B3261E"/>
                           </a:solidFill>
                           <a:latin typeface="Calibri"/>
                         </a:rPr>
-                        <a:t>-0.01%</a:t>
+                        <a:t>-1.86%</a:t>
                       </a:r>
                     </a:p>
                   </a:txBody>
@@ -3679,34 +3702,11 @@
                       <a:r>
                         <a:rPr sz="1000" b="0">
                           <a:solidFill>
-                            <a:srgbClr val="B3261E"/>
-                          </a:solidFill>
-                          <a:latin typeface="Calibri"/>
-                        </a:rPr>
-                        <a:t>-2.72%</a:t>
-                      </a:r>
-                    </a:p>
-                  </a:txBody>
-                  <a:tcPr>
-                    <a:solidFill>
-                      <a:srgbClr val="FFFFFF"/>
-                    </a:solidFill>
-                  </a:tcPr>
-                </a:tc>
-                <a:tc>
-                  <a:txBody>
-                    <a:bodyPr/>
-                    <a:lstStyle/>
-                    <a:p>
-                      <a:pPr algn="r"/>
-                      <a:r>
-                        <a:rPr sz="1000" b="0">
-                          <a:solidFill>
                             <a:srgbClr val="1F2A37"/>
                           </a:solidFill>
                           <a:latin typeface="Calibri"/>
                         </a:rPr>
-                        <a:t>-26.8%</a:t>
+                        <a:t>-26.6%</a:t>
                       </a:r>
                     </a:p>
                   </a:txBody>
@@ -3800,7 +3800,7 @@
                           </a:solidFill>
                           <a:latin typeface="Calibri"/>
                         </a:rPr>
-                        <a:t>1,420</a:t>
+                        <a:t>1,415</a:t>
                       </a:r>
                     </a:p>
                   </a:txBody>
@@ -3819,11 +3819,11 @@
                       <a:r>
                         <a:rPr sz="1000" b="0">
                           <a:solidFill>
-                            <a:srgbClr val="0B7A3B"/>
-                          </a:solidFill>
-                          <a:latin typeface="Calibri"/>
-                        </a:rPr>
-                        <a:t>+0.57%</a:t>
+                            <a:srgbClr val="B3261E"/>
+                          </a:solidFill>
+                          <a:latin typeface="Calibri"/>
+                        </a:rPr>
+                        <a:t>-0.35%</a:t>
                       </a:r>
                     </a:p>
                   </a:txBody>
@@ -3842,11 +3842,11 @@
                       <a:r>
                         <a:rPr sz="1000" b="0">
                           <a:solidFill>
-                            <a:srgbClr val="0B7A3B"/>
-                          </a:solidFill>
-                          <a:latin typeface="Calibri"/>
-                        </a:rPr>
-                        <a:t>+0.21%</a:t>
+                            <a:srgbClr val="B3261E"/>
+                          </a:solidFill>
+                          <a:latin typeface="Calibri"/>
+                        </a:rPr>
+                        <a:t>-0.02%</a:t>
                       </a:r>
                     </a:p>
                   </a:txBody>
@@ -3869,7 +3869,7 @@
                           </a:solidFill>
                           <a:latin typeface="Calibri"/>
                         </a:rPr>
-                        <a:t>-0.18%</a:t>
+                        <a:t>-0.42%</a:t>
                       </a:r>
                     </a:p>
                   </a:txBody>
@@ -3892,7 +3892,7 @@
                           </a:solidFill>
                           <a:latin typeface="Calibri"/>
                         </a:rPr>
-                        <a:t>-2.7%</a:t>
+                        <a:t>-3.1%</a:t>
                       </a:r>
                     </a:p>
                   </a:txBody>
@@ -3938,7 +3938,7 @@
                           </a:solidFill>
                           <a:latin typeface="Calibri"/>
                         </a:rPr>
-                        <a:t>18.4</a:t>
+                        <a:t>18.3</a:t>
                       </a:r>
                     </a:p>
                   </a:txBody>
@@ -3986,7 +3986,7 @@
                           </a:solidFill>
                           <a:latin typeface="Calibri"/>
                         </a:rPr>
-                        <a:t>1,121</a:t>
+                        <a:t>1,130</a:t>
                       </a:r>
                     </a:p>
                   </a:txBody>
@@ -4005,11 +4005,34 @@
                       <a:r>
                         <a:rPr sz="1000" b="0">
                           <a:solidFill>
+                            <a:srgbClr val="0B7A3B"/>
+                          </a:solidFill>
+                          <a:latin typeface="Calibri"/>
+                        </a:rPr>
+                        <a:t>+0.80%</a:t>
+                      </a:r>
+                    </a:p>
+                  </a:txBody>
+                  <a:tcPr>
+                    <a:solidFill>
+                      <a:srgbClr val="FFFFFF"/>
+                    </a:solidFill>
+                  </a:tcPr>
+                </a:tc>
+                <a:tc>
+                  <a:txBody>
+                    <a:bodyPr/>
+                    <a:lstStyle/>
+                    <a:p>
+                      <a:pPr algn="r"/>
+                      <a:r>
+                        <a:rPr sz="1000" b="0">
+                          <a:solidFill>
                             <a:srgbClr val="B3261E"/>
                           </a:solidFill>
                           <a:latin typeface="Calibri"/>
                         </a:rPr>
-                        <a:t>-0.80%</a:t>
+                        <a:t>-0.87%</a:t>
                       </a:r>
                     </a:p>
                   </a:txBody>
@@ -4028,11 +4051,11 @@
                       <a:r>
                         <a:rPr sz="1000" b="0">
                           <a:solidFill>
-                            <a:srgbClr val="B3261E"/>
-                          </a:solidFill>
-                          <a:latin typeface="Calibri"/>
-                        </a:rPr>
-                        <a:t>-4.12%</a:t>
+                            <a:srgbClr val="0B7A3B"/>
+                          </a:solidFill>
+                          <a:latin typeface="Calibri"/>
+                        </a:rPr>
+                        <a:t>+8.56%</a:t>
                       </a:r>
                     </a:p>
                   </a:txBody>
@@ -4051,11 +4074,11 @@
                       <a:r>
                         <a:rPr sz="1000" b="0">
                           <a:solidFill>
-                            <a:srgbClr val="0B7A3B"/>
-                          </a:solidFill>
-                          <a:latin typeface="Calibri"/>
-                        </a:rPr>
-                        <a:t>+7.03%</a:t>
+                            <a:srgbClr val="1F2A37"/>
+                          </a:solidFill>
+                          <a:latin typeface="Calibri"/>
+                        </a:rPr>
+                        <a:t>-31.7%</a:t>
                       </a:r>
                     </a:p>
                   </a:txBody>
@@ -4078,7 +4101,7 @@
                           </a:solidFill>
                           <a:latin typeface="Calibri"/>
                         </a:rPr>
-                        <a:t>-32.2%</a:t>
+                        <a:t>28%</a:t>
                       </a:r>
                     </a:p>
                   </a:txBody>
@@ -4101,30 +4124,7 @@
                           </a:solidFill>
                           <a:latin typeface="Calibri"/>
                         </a:rPr>
-                        <a:t>30%</a:t>
-                      </a:r>
-                    </a:p>
-                  </a:txBody>
-                  <a:tcPr>
-                    <a:solidFill>
-                      <a:srgbClr val="FFFFFF"/>
-                    </a:solidFill>
-                  </a:tcPr>
-                </a:tc>
-                <a:tc>
-                  <a:txBody>
-                    <a:bodyPr/>
-                    <a:lstStyle/>
-                    <a:p>
-                      <a:pPr algn="r"/>
-                      <a:r>
-                        <a:rPr sz="1000" b="0">
-                          <a:solidFill>
-                            <a:srgbClr val="1F2A37"/>
-                          </a:solidFill>
-                          <a:latin typeface="Calibri"/>
-                        </a:rPr>
-                        <a:t>14.3</a:t>
+                        <a:t>14.6</a:t>
                       </a:r>
                     </a:p>
                   </a:txBody>
@@ -4172,7 +4172,7 @@
                           </a:solidFill>
                           <a:latin typeface="Calibri"/>
                         </a:rPr>
-                        <a:t>269</a:t>
+                        <a:t>270</a:t>
                       </a:r>
                     </a:p>
                   </a:txBody>
@@ -4191,11 +4191,34 @@
                       <a:r>
                         <a:rPr sz="1000" b="0">
                           <a:solidFill>
+                            <a:srgbClr val="0B7A3B"/>
+                          </a:solidFill>
+                          <a:latin typeface="Calibri"/>
+                        </a:rPr>
+                        <a:t>+0.11%</a:t>
+                      </a:r>
+                    </a:p>
+                  </a:txBody>
+                  <a:tcPr>
+                    <a:solidFill>
+                      <a:srgbClr val="F3F5F7"/>
+                    </a:solidFill>
+                  </a:tcPr>
+                </a:tc>
+                <a:tc>
+                  <a:txBody>
+                    <a:bodyPr/>
+                    <a:lstStyle/>
+                    <a:p>
+                      <a:pPr algn="r"/>
+                      <a:r>
+                        <a:rPr sz="1000" b="0">
+                          <a:solidFill>
                             <a:srgbClr val="B3261E"/>
                           </a:solidFill>
                           <a:latin typeface="Calibri"/>
                         </a:rPr>
-                        <a:t>-0.83%</a:t>
+                        <a:t>-1.23%</a:t>
                       </a:r>
                     </a:p>
                   </a:txBody>
@@ -4218,7 +4241,7 @@
                           </a:solidFill>
                           <a:latin typeface="Calibri"/>
                         </a:rPr>
-                        <a:t>-3.16%</a:t>
+                        <a:t>-4.85%</a:t>
                       </a:r>
                     </a:p>
                   </a:txBody>
@@ -4237,34 +4260,11 @@
                       <a:r>
                         <a:rPr sz="1000" b="0">
                           <a:solidFill>
-                            <a:srgbClr val="B3261E"/>
-                          </a:solidFill>
-                          <a:latin typeface="Calibri"/>
-                        </a:rPr>
-                        <a:t>-4.23%</a:t>
-                      </a:r>
-                    </a:p>
-                  </a:txBody>
-                  <a:tcPr>
-                    <a:solidFill>
-                      <a:srgbClr val="F3F5F7"/>
-                    </a:solidFill>
-                  </a:tcPr>
-                </a:tc>
-                <a:tc>
-                  <a:txBody>
-                    <a:bodyPr/>
-                    <a:lstStyle/>
-                    <a:p>
-                      <a:pPr algn="r"/>
-                      <a:r>
-                        <a:rPr sz="1000" b="0">
-                          <a:solidFill>
                             <a:srgbClr val="1F2A37"/>
                           </a:solidFill>
                           <a:latin typeface="Calibri"/>
                         </a:rPr>
-                        <a:t>-33.0%</a:t>
+                        <a:t>-32.9%</a:t>
                       </a:r>
                     </a:p>
                   </a:txBody>
@@ -4358,7 +4358,7 @@
                           </a:solidFill>
                           <a:latin typeface="Calibri"/>
                         </a:rPr>
-                        <a:t>4,093</a:t>
+                        <a:t>4,090</a:t>
                       </a:r>
                     </a:p>
                   </a:txBody>
@@ -4377,11 +4377,34 @@
                       <a:r>
                         <a:rPr sz="1000" b="0">
                           <a:solidFill>
+                            <a:srgbClr val="B3261E"/>
+                          </a:solidFill>
+                          <a:latin typeface="Calibri"/>
+                        </a:rPr>
+                        <a:t>-0.07%</a:t>
+                      </a:r>
+                    </a:p>
+                  </a:txBody>
+                  <a:tcPr>
+                    <a:solidFill>
+                      <a:srgbClr val="FFFFFF"/>
+                    </a:solidFill>
+                  </a:tcPr>
+                </a:tc>
+                <a:tc>
+                  <a:txBody>
+                    <a:bodyPr/>
+                    <a:lstStyle/>
+                    <a:p>
+                      <a:pPr algn="r"/>
+                      <a:r>
+                        <a:rPr sz="1000" b="0">
+                          <a:solidFill>
                             <a:srgbClr val="0B7A3B"/>
                           </a:solidFill>
                           <a:latin typeface="Calibri"/>
                         </a:rPr>
-                        <a:t>+0.29%</a:t>
+                        <a:t>+0.08%</a:t>
                       </a:r>
                     </a:p>
                   </a:txBody>
@@ -4404,7 +4427,7 @@
                           </a:solidFill>
                           <a:latin typeface="Calibri"/>
                         </a:rPr>
-                        <a:t>+0.89%</a:t>
+                        <a:t>+8.04%</a:t>
                       </a:r>
                     </a:p>
                   </a:txBody>
@@ -4423,11 +4446,11 @@
                       <a:r>
                         <a:rPr sz="1000" b="0">
                           <a:solidFill>
-                            <a:srgbClr val="0B7A3B"/>
-                          </a:solidFill>
-                          <a:latin typeface="Calibri"/>
-                        </a:rPr>
-                        <a:t>+7.93%</a:t>
+                            <a:srgbClr val="1F2A37"/>
+                          </a:solidFill>
+                          <a:latin typeface="Calibri"/>
+                        </a:rPr>
+                        <a:t>-6.5%</a:t>
                       </a:r>
                     </a:p>
                   </a:txBody>
@@ -4450,7 +4473,7 @@
                           </a:solidFill>
                           <a:latin typeface="Calibri"/>
                         </a:rPr>
-                        <a:t>-6.5%</a:t>
+                        <a:t>16%</a:t>
                       </a:r>
                     </a:p>
                   </a:txBody>
@@ -4473,30 +4496,7 @@
                           </a:solidFill>
                           <a:latin typeface="Calibri"/>
                         </a:rPr>
-                        <a:t>16%</a:t>
-                      </a:r>
-                    </a:p>
-                  </a:txBody>
-                  <a:tcPr>
-                    <a:solidFill>
-                      <a:srgbClr val="FFFFFF"/>
-                    </a:solidFill>
-                  </a:tcPr>
-                </a:tc>
-                <a:tc>
-                  <a:txBody>
-                    <a:bodyPr/>
-                    <a:lstStyle/>
-                    <a:p>
-                      <a:pPr algn="r"/>
-                      <a:r>
-                        <a:rPr sz="1000" b="0">
-                          <a:solidFill>
-                            <a:srgbClr val="1F2A37"/>
-                          </a:solidFill>
-                          <a:latin typeface="Calibri"/>
-                        </a:rPr>
-                        <a:t>34.0</a:t>
+                        <a:t>33.9</a:t>
                       </a:r>
                     </a:p>
                   </a:txBody>
@@ -4544,7 +4544,7 @@
                           </a:solidFill>
                           <a:latin typeface="Calibri"/>
                         </a:rPr>
-                        <a:t>1,316</a:t>
+                        <a:t>1,310</a:t>
                       </a:r>
                     </a:p>
                   </a:txBody>
@@ -4563,11 +4563,57 @@
                       <a:r>
                         <a:rPr sz="1000" b="0">
                           <a:solidFill>
+                            <a:srgbClr val="B3261E"/>
+                          </a:solidFill>
+                          <a:latin typeface="Calibri"/>
+                        </a:rPr>
+                        <a:t>-0.47%</a:t>
+                      </a:r>
+                    </a:p>
+                  </a:txBody>
+                  <a:tcPr>
+                    <a:solidFill>
+                      <a:srgbClr val="F3F5F7"/>
+                    </a:solidFill>
+                  </a:tcPr>
+                </a:tc>
+                <a:tc>
+                  <a:txBody>
+                    <a:bodyPr/>
+                    <a:lstStyle/>
+                    <a:p>
+                      <a:pPr algn="r"/>
+                      <a:r>
+                        <a:rPr sz="1000" b="0">
+                          <a:solidFill>
+                            <a:srgbClr val="B3261E"/>
+                          </a:solidFill>
+                          <a:latin typeface="Calibri"/>
+                        </a:rPr>
+                        <a:t>-0.47%</a:t>
+                      </a:r>
+                    </a:p>
+                  </a:txBody>
+                  <a:tcPr>
+                    <a:solidFill>
+                      <a:srgbClr val="F3F5F7"/>
+                    </a:solidFill>
+                  </a:tcPr>
+                </a:tc>
+                <a:tc>
+                  <a:txBody>
+                    <a:bodyPr/>
+                    <a:lstStyle/>
+                    <a:p>
+                      <a:pPr algn="r"/>
+                      <a:r>
+                        <a:rPr sz="1000" b="0">
+                          <a:solidFill>
                             <a:srgbClr val="0B7A3B"/>
                           </a:solidFill>
                           <a:latin typeface="Calibri"/>
                         </a:rPr>
-                        <a:t>+0.21%</a:t>
+                        <a:t>+2.49%</a:t>
                       </a:r>
                     </a:p>
                   </a:txBody>
@@ -4586,11 +4632,11 @@
                       <a:r>
                         <a:rPr sz="1000" b="0">
                           <a:solidFill>
-                            <a:srgbClr val="0B7A3B"/>
-                          </a:solidFill>
-                          <a:latin typeface="Calibri"/>
-                        </a:rPr>
-                        <a:t>+0.46%</a:t>
+                            <a:srgbClr val="1F2A37"/>
+                          </a:solidFill>
+                          <a:latin typeface="Calibri"/>
+                        </a:rPr>
+                        <a:t>-17.4%</a:t>
                       </a:r>
                     </a:p>
                   </a:txBody>
@@ -4609,11 +4655,11 @@
                       <a:r>
                         <a:rPr sz="1000" b="0">
                           <a:solidFill>
-                            <a:srgbClr val="0B7A3B"/>
-                          </a:solidFill>
-                          <a:latin typeface="Calibri"/>
-                        </a:rPr>
-                        <a:t>+3.44%</a:t>
+                            <a:srgbClr val="1F2A37"/>
+                          </a:solidFill>
+                          <a:latin typeface="Calibri"/>
+                        </a:rPr>
+                        <a:t>18%</a:t>
                       </a:r>
                     </a:p>
                   </a:txBody>
@@ -4636,53 +4682,7 @@
                           </a:solidFill>
                           <a:latin typeface="Calibri"/>
                         </a:rPr>
-                        <a:t>-17.0%</a:t>
-                      </a:r>
-                    </a:p>
-                  </a:txBody>
-                  <a:tcPr>
-                    <a:solidFill>
-                      <a:srgbClr val="F3F5F7"/>
-                    </a:solidFill>
-                  </a:tcPr>
-                </a:tc>
-                <a:tc>
-                  <a:txBody>
-                    <a:bodyPr/>
-                    <a:lstStyle/>
-                    <a:p>
-                      <a:pPr algn="r"/>
-                      <a:r>
-                        <a:rPr sz="1000" b="0">
-                          <a:solidFill>
-                            <a:srgbClr val="1F2A37"/>
-                          </a:solidFill>
-                          <a:latin typeface="Calibri"/>
-                        </a:rPr>
-                        <a:t>18%</a:t>
-                      </a:r>
-                    </a:p>
-                  </a:txBody>
-                  <a:tcPr>
-                    <a:solidFill>
-                      <a:srgbClr val="F3F5F7"/>
-                    </a:solidFill>
-                  </a:tcPr>
-                </a:tc>
-                <a:tc>
-                  <a:txBody>
-                    <a:bodyPr/>
-                    <a:lstStyle/>
-                    <a:p>
-                      <a:pPr algn="r"/>
-                      <a:r>
-                        <a:rPr sz="1000" b="0">
-                          <a:solidFill>
-                            <a:srgbClr val="1F2A37"/>
-                          </a:solidFill>
-                          <a:latin typeface="Calibri"/>
-                        </a:rPr>
-                        <a:t>23.9</a:t>
+                        <a:t>23.7</a:t>
                       </a:r>
                     </a:p>
                   </a:txBody>
@@ -4730,7 +4730,7 @@
                           </a:solidFill>
                           <a:latin typeface="Calibri"/>
                         </a:rPr>
-                        <a:t>2,302</a:t>
+                        <a:t>2,284</a:t>
                       </a:r>
                     </a:p>
                   </a:txBody>
@@ -4749,11 +4749,57 @@
                       <a:r>
                         <a:rPr sz="1000" b="0">
                           <a:solidFill>
+                            <a:srgbClr val="B3261E"/>
+                          </a:solidFill>
+                          <a:latin typeface="Calibri"/>
+                        </a:rPr>
+                        <a:t>-0.78%</a:t>
+                      </a:r>
+                    </a:p>
+                  </a:txBody>
+                  <a:tcPr>
+                    <a:solidFill>
+                      <a:srgbClr val="FFFFFF"/>
+                    </a:solidFill>
+                  </a:tcPr>
+                </a:tc>
+                <a:tc>
+                  <a:txBody>
+                    <a:bodyPr/>
+                    <a:lstStyle/>
+                    <a:p>
+                      <a:pPr algn="r"/>
+                      <a:r>
+                        <a:rPr sz="1000" b="0">
+                          <a:solidFill>
+                            <a:srgbClr val="B3261E"/>
+                          </a:solidFill>
+                          <a:latin typeface="Calibri"/>
+                        </a:rPr>
+                        <a:t>-1.26%</a:t>
+                      </a:r>
+                    </a:p>
+                  </a:txBody>
+                  <a:tcPr>
+                    <a:solidFill>
+                      <a:srgbClr val="FFFFFF"/>
+                    </a:solidFill>
+                  </a:tcPr>
+                </a:tc>
+                <a:tc>
+                  <a:txBody>
+                    <a:bodyPr/>
+                    <a:lstStyle/>
+                    <a:p>
+                      <a:pPr algn="r"/>
+                      <a:r>
+                        <a:rPr sz="1000" b="0">
+                          <a:solidFill>
                             <a:srgbClr val="0B7A3B"/>
                           </a:solidFill>
                           <a:latin typeface="Calibri"/>
                         </a:rPr>
-                        <a:t>+0.17%</a:t>
+                        <a:t>+1.32%</a:t>
                       </a:r>
                     </a:p>
                   </a:txBody>
@@ -4772,11 +4818,11 @@
                       <a:r>
                         <a:rPr sz="1000" b="0">
                           <a:solidFill>
-                            <a:srgbClr val="B3261E"/>
-                          </a:solidFill>
-                          <a:latin typeface="Calibri"/>
-                        </a:rPr>
-                        <a:t>-2.50%</a:t>
+                            <a:srgbClr val="1F2A37"/>
+                          </a:solidFill>
+                          <a:latin typeface="Calibri"/>
+                        </a:rPr>
+                        <a:t>-28.7%</a:t>
                       </a:r>
                     </a:p>
                   </a:txBody>
@@ -4795,11 +4841,11 @@
                       <a:r>
                         <a:rPr sz="1000" b="0">
                           <a:solidFill>
-                            <a:srgbClr val="0B7A3B"/>
-                          </a:solidFill>
-                          <a:latin typeface="Calibri"/>
-                        </a:rPr>
-                        <a:t>+2.63%</a:t>
+                            <a:srgbClr val="1F2A37"/>
+                          </a:solidFill>
+                          <a:latin typeface="Calibri"/>
+                        </a:rPr>
+                        <a:t>31%</a:t>
                       </a:r>
                     </a:p>
                   </a:txBody>
@@ -4822,53 +4868,7 @@
                           </a:solidFill>
                           <a:latin typeface="Calibri"/>
                         </a:rPr>
-                        <a:t>-28.2%</a:t>
-                      </a:r>
-                    </a:p>
-                  </a:txBody>
-                  <a:tcPr>
-                    <a:solidFill>
-                      <a:srgbClr val="FFFFFF"/>
-                    </a:solidFill>
-                  </a:tcPr>
-                </a:tc>
-                <a:tc>
-                  <a:txBody>
-                    <a:bodyPr/>
-                    <a:lstStyle/>
-                    <a:p>
-                      <a:pPr algn="r"/>
-                      <a:r>
-                        <a:rPr sz="1000" b="0">
-                          <a:solidFill>
-                            <a:srgbClr val="1F2A37"/>
-                          </a:solidFill>
-                          <a:latin typeface="Calibri"/>
-                        </a:rPr>
-                        <a:t>35%</a:t>
-                      </a:r>
-                    </a:p>
-                  </a:txBody>
-                  <a:tcPr>
-                    <a:solidFill>
-                      <a:srgbClr val="FFFFFF"/>
-                    </a:solidFill>
-                  </a:tcPr>
-                </a:tc>
-                <a:tc>
-                  <a:txBody>
-                    <a:bodyPr/>
-                    <a:lstStyle/>
-                    <a:p>
-                      <a:pPr algn="r"/>
-                      <a:r>
-                        <a:rPr sz="1000" b="0">
-                          <a:solidFill>
-                            <a:srgbClr val="1F2A37"/>
-                          </a:solidFill>
-                          <a:latin typeface="Calibri"/>
-                        </a:rPr>
-                        <a:t>16.7</a:t>
+                        <a:t>16.6</a:t>
                       </a:r>
                     </a:p>
                   </a:txBody>
@@ -4952,7 +4952,7 @@
                 </a:solidFill>
                 <a:latin typeface="Calibri"/>
               </a:rPr>
-              <a:t>Breadth was risk-on: 6 of 8 names advanced on the day.</a:t>
+              <a:t>Breadth was risk-off: 3 of 8 names advanced on the day.</a:t>
             </a:r>
           </a:p>
           <a:p>
@@ -4968,7 +4968,7 @@
                 </a:solidFill>
                 <a:latin typeface="Calibri"/>
               </a:rPr>
-              <a:t>•  Best performer on the day: ICICIBANK.NS at +0.57%.</a:t>
+              <a:t>•  Best performer on the day: INFY.NS at +0.80%.</a:t>
             </a:r>
           </a:p>
           <a:p>
@@ -4984,7 +4984,7 @@
                 </a:solidFill>
                 <a:latin typeface="Calibri"/>
               </a:rPr>
-              <a:t>•  Weakest on the day: ITC.NS at -0.83%.</a:t>
+              <a:t>•  Weakest on the day: TCS.NS at -0.78%.</a:t>
             </a:r>
           </a:p>
           <a:p>
@@ -5000,7 +5000,7 @@
                 </a:solidFill>
                 <a:latin typeface="Calibri"/>
               </a:rPr>
-              <a:t>•  Median one-day move across the watchlist: +0.22%.</a:t>
+              <a:t>•  Median one-day move across the watchlist: -0.21%.</a:t>
             </a:r>
           </a:p>
           <a:p>
@@ -5016,7 +5016,7 @@
                 </a:solidFill>
                 <a:latin typeface="Calibri"/>
               </a:rPr>
-              <a:t>•  ITC.NS sits furthest below its 52-week high, at -33.0%.</a:t>
+              <a:t>•  ITC.NS sits furthest below its 52-week high, at -32.9%.</a:t>
             </a:r>
           </a:p>
           <a:p>
@@ -5064,7 +5064,7 @@
                 </a:solidFill>
                 <a:latin typeface="Calibri"/>
               </a:rPr>
-              <a:t>•  Highest 30-day realised volatility: TCS.NS at 34.6% annualised.</a:t>
+              <a:t>•  Highest 30-day realised volatility: TCS.NS at 31.4% annualised.</a:t>
             </a:r>
           </a:p>
           <a:p>

--- a/public/deskbrief.pptx
+++ b/public/deskbrief.pptx
@@ -3128,7 +3128,7 @@
                 </a:solidFill>
                 <a:latin typeface="Calibri"/>
               </a:rPr>
-              <a:t>8 names  |  generated 24 Aug 2026 13:29  |  source: Yahoo Finance via yfinance, Indian financial RSS</a:t>
+              <a:t>8 names  |  generated 25 Aug 2026 13:27  |  source: Yahoo Finance via yfinance, Indian financial RSS</a:t>
             </a:r>
           </a:p>
         </p:txBody>
@@ -3428,7 +3428,7 @@
                           </a:solidFill>
                           <a:latin typeface="Calibri"/>
                         </a:rPr>
-                        <a:t>1,935</a:t>
+                        <a:t>1,947</a:t>
                       </a:r>
                     </a:p>
                   </a:txBody>
@@ -3447,11 +3447,11 @@
                       <a:r>
                         <a:rPr sz="1000" b="0">
                           <a:solidFill>
-                            <a:srgbClr val="B3261E"/>
-                          </a:solidFill>
-                          <a:latin typeface="Calibri"/>
-                        </a:rPr>
-                        <a:t>-0.57%</a:t>
+                            <a:srgbClr val="0B7A3B"/>
+                          </a:solidFill>
+                          <a:latin typeface="Calibri"/>
+                        </a:rPr>
+                        <a:t>+0.62%</a:t>
                       </a:r>
                     </a:p>
                   </a:txBody>
@@ -3470,11 +3470,11 @@
                       <a:r>
                         <a:rPr sz="1000" b="0">
                           <a:solidFill>
-                            <a:srgbClr val="B3261E"/>
-                          </a:solidFill>
-                          <a:latin typeface="Calibri"/>
-                        </a:rPr>
-                        <a:t>-1.74%</a:t>
+                            <a:srgbClr val="0B7A3B"/>
+                          </a:solidFill>
+                          <a:latin typeface="Calibri"/>
+                        </a:rPr>
+                        <a:t>+0.66%</a:t>
                       </a:r>
                     </a:p>
                   </a:txBody>
@@ -3497,7 +3497,7 @@
                           </a:solidFill>
                           <a:latin typeface="Calibri"/>
                         </a:rPr>
-                        <a:t>+1.94%</a:t>
+                        <a:t>+2.19%</a:t>
                       </a:r>
                     </a:p>
                   </a:txBody>
@@ -3520,7 +3520,7 @@
                           </a:solidFill>
                           <a:latin typeface="Calibri"/>
                         </a:rPr>
-                        <a:t>-9.4%</a:t>
+                        <a:t>-8.8%</a:t>
                       </a:r>
                     </a:p>
                   </a:txBody>
@@ -3543,7 +3543,7 @@
                           </a:solidFill>
                           <a:latin typeface="Calibri"/>
                         </a:rPr>
-                        <a:t>18%</a:t>
+                        <a:t>17%</a:t>
                       </a:r>
                     </a:p>
                   </a:txBody>
@@ -3566,7 +3566,7 @@
                           </a:solidFill>
                           <a:latin typeface="Calibri"/>
                         </a:rPr>
-                        <a:t>40.4</a:t>
+                        <a:t>40.9</a:t>
                       </a:r>
                     </a:p>
                   </a:txBody>
@@ -3614,7 +3614,7 @@
                           </a:solidFill>
                           <a:latin typeface="Calibri"/>
                         </a:rPr>
-                        <a:t>729</a:t>
+                        <a:t>728</a:t>
                       </a:r>
                     </a:p>
                   </a:txBody>
@@ -3633,11 +3633,34 @@
                       <a:r>
                         <a:rPr sz="1000" b="0">
                           <a:solidFill>
+                            <a:srgbClr val="B3261E"/>
+                          </a:solidFill>
+                          <a:latin typeface="Calibri"/>
+                        </a:rPr>
+                        <a:t>-0.21%</a:t>
+                      </a:r>
+                    </a:p>
+                  </a:txBody>
+                  <a:tcPr>
+                    <a:solidFill>
+                      <a:srgbClr val="FFFFFF"/>
+                    </a:solidFill>
+                  </a:tcPr>
+                </a:tc>
+                <a:tc>
+                  <a:txBody>
+                    <a:bodyPr/>
+                    <a:lstStyle/>
+                    <a:p>
+                      <a:pPr algn="r"/>
+                      <a:r>
+                        <a:rPr sz="1000" b="0">
+                          <a:solidFill>
                             <a:srgbClr val="0B7A3B"/>
                           </a:solidFill>
                           <a:latin typeface="Calibri"/>
                         </a:rPr>
-                        <a:t>+0.28%</a:t>
+                        <a:t>+0.62%</a:t>
                       </a:r>
                     </a:p>
                   </a:txBody>
@@ -3656,57 +3679,34 @@
                       <a:r>
                         <a:rPr sz="1000" b="0">
                           <a:solidFill>
+                            <a:srgbClr val="B3261E"/>
+                          </a:solidFill>
+                          <a:latin typeface="Calibri"/>
+                        </a:rPr>
+                        <a:t>-1.63%</a:t>
+                      </a:r>
+                    </a:p>
+                  </a:txBody>
+                  <a:tcPr>
+                    <a:solidFill>
+                      <a:srgbClr val="FFFFFF"/>
+                    </a:solidFill>
+                  </a:tcPr>
+                </a:tc>
+                <a:tc>
+                  <a:txBody>
+                    <a:bodyPr/>
+                    <a:lstStyle/>
+                    <a:p>
+                      <a:pPr algn="r"/>
+                      <a:r>
+                        <a:rPr sz="1000" b="0">
+                          <a:solidFill>
                             <a:srgbClr val="1F2A37"/>
                           </a:solidFill>
                           <a:latin typeface="Calibri"/>
                         </a:rPr>
-                        <a:t>+0.00%</a:t>
-                      </a:r>
-                    </a:p>
-                  </a:txBody>
-                  <a:tcPr>
-                    <a:solidFill>
-                      <a:srgbClr val="FFFFFF"/>
-                    </a:solidFill>
-                  </a:tcPr>
-                </a:tc>
-                <a:tc>
-                  <a:txBody>
-                    <a:bodyPr/>
-                    <a:lstStyle/>
-                    <a:p>
-                      <a:pPr algn="r"/>
-                      <a:r>
-                        <a:rPr sz="1000" b="0">
-                          <a:solidFill>
-                            <a:srgbClr val="B3261E"/>
-                          </a:solidFill>
-                          <a:latin typeface="Calibri"/>
-                        </a:rPr>
-                        <a:t>-1.86%</a:t>
-                      </a:r>
-                    </a:p>
-                  </a:txBody>
-                  <a:tcPr>
-                    <a:solidFill>
-                      <a:srgbClr val="FFFFFF"/>
-                    </a:solidFill>
-                  </a:tcPr>
-                </a:tc>
-                <a:tc>
-                  <a:txBody>
-                    <a:bodyPr/>
-                    <a:lstStyle/>
-                    <a:p>
-                      <a:pPr algn="r"/>
-                      <a:r>
-                        <a:rPr sz="1000" b="0">
-                          <a:solidFill>
-                            <a:srgbClr val="1F2A37"/>
-                          </a:solidFill>
-                          <a:latin typeface="Calibri"/>
-                        </a:rPr>
-                        <a:t>-26.6%</a:t>
+                        <a:t>-26.7%</a:t>
                       </a:r>
                     </a:p>
                   </a:txBody>
@@ -3800,7 +3800,7 @@
                           </a:solidFill>
                           <a:latin typeface="Calibri"/>
                         </a:rPr>
-                        <a:t>1,415</a:t>
+                        <a:t>1,423</a:t>
                       </a:r>
                     </a:p>
                   </a:txBody>
@@ -3819,11 +3819,57 @@
                       <a:r>
                         <a:rPr sz="1000" b="0">
                           <a:solidFill>
+                            <a:srgbClr val="0B7A3B"/>
+                          </a:solidFill>
+                          <a:latin typeface="Calibri"/>
+                        </a:rPr>
+                        <a:t>+0.54%</a:t>
+                      </a:r>
+                    </a:p>
+                  </a:txBody>
+                  <a:tcPr>
+                    <a:solidFill>
+                      <a:srgbClr val="F3F5F7"/>
+                    </a:solidFill>
+                  </a:tcPr>
+                </a:tc>
+                <a:tc>
+                  <a:txBody>
+                    <a:bodyPr/>
+                    <a:lstStyle/>
+                    <a:p>
+                      <a:pPr algn="r"/>
+                      <a:r>
+                        <a:rPr sz="1000" b="0">
+                          <a:solidFill>
+                            <a:srgbClr val="0B7A3B"/>
+                          </a:solidFill>
+                          <a:latin typeface="Calibri"/>
+                        </a:rPr>
+                        <a:t>+0.76%</a:t>
+                      </a:r>
+                    </a:p>
+                  </a:txBody>
+                  <a:tcPr>
+                    <a:solidFill>
+                      <a:srgbClr val="F3F5F7"/>
+                    </a:solidFill>
+                  </a:tcPr>
+                </a:tc>
+                <a:tc>
+                  <a:txBody>
+                    <a:bodyPr/>
+                    <a:lstStyle/>
+                    <a:p>
+                      <a:pPr algn="r"/>
+                      <a:r>
+                        <a:rPr sz="1000" b="0">
+                          <a:solidFill>
                             <a:srgbClr val="B3261E"/>
                           </a:solidFill>
                           <a:latin typeface="Calibri"/>
                         </a:rPr>
-                        <a:t>-0.35%</a:t>
+                        <a:t>-0.76%</a:t>
                       </a:r>
                     </a:p>
                   </a:txBody>
@@ -3842,11 +3888,11 @@
                       <a:r>
                         <a:rPr sz="1000" b="0">
                           <a:solidFill>
-                            <a:srgbClr val="B3261E"/>
-                          </a:solidFill>
-                          <a:latin typeface="Calibri"/>
-                        </a:rPr>
-                        <a:t>-0.02%</a:t>
+                            <a:srgbClr val="1F2A37"/>
+                          </a:solidFill>
+                          <a:latin typeface="Calibri"/>
+                        </a:rPr>
+                        <a:t>-2.6%</a:t>
                       </a:r>
                     </a:p>
                   </a:txBody>
@@ -3865,11 +3911,11 @@
                       <a:r>
                         <a:rPr sz="1000" b="0">
                           <a:solidFill>
-                            <a:srgbClr val="B3261E"/>
-                          </a:solidFill>
-                          <a:latin typeface="Calibri"/>
-                        </a:rPr>
-                        <a:t>-0.42%</a:t>
+                            <a:srgbClr val="1F2A37"/>
+                          </a:solidFill>
+                          <a:latin typeface="Calibri"/>
+                        </a:rPr>
+                        <a:t>16%</a:t>
                       </a:r>
                     </a:p>
                   </a:txBody>
@@ -3892,53 +3938,7 @@
                           </a:solidFill>
                           <a:latin typeface="Calibri"/>
                         </a:rPr>
-                        <a:t>-3.1%</a:t>
-                      </a:r>
-                    </a:p>
-                  </a:txBody>
-                  <a:tcPr>
-                    <a:solidFill>
-                      <a:srgbClr val="F3F5F7"/>
-                    </a:solidFill>
-                  </a:tcPr>
-                </a:tc>
-                <a:tc>
-                  <a:txBody>
-                    <a:bodyPr/>
-                    <a:lstStyle/>
-                    <a:p>
-                      <a:pPr algn="r"/>
-                      <a:r>
-                        <a:rPr sz="1000" b="0">
-                          <a:solidFill>
-                            <a:srgbClr val="1F2A37"/>
-                          </a:solidFill>
-                          <a:latin typeface="Calibri"/>
-                        </a:rPr>
-                        <a:t>16%</a:t>
-                      </a:r>
-                    </a:p>
-                  </a:txBody>
-                  <a:tcPr>
-                    <a:solidFill>
-                      <a:srgbClr val="F3F5F7"/>
-                    </a:solidFill>
-                  </a:tcPr>
-                </a:tc>
-                <a:tc>
-                  <a:txBody>
-                    <a:bodyPr/>
-                    <a:lstStyle/>
-                    <a:p>
-                      <a:pPr algn="r"/>
-                      <a:r>
-                        <a:rPr sz="1000" b="0">
-                          <a:solidFill>
-                            <a:srgbClr val="1F2A37"/>
-                          </a:solidFill>
-                          <a:latin typeface="Calibri"/>
-                        </a:rPr>
-                        <a:t>18.3</a:t>
+                        <a:t>18.4</a:t>
                       </a:r>
                     </a:p>
                   </a:txBody>
@@ -3986,7 +3986,7 @@
                           </a:solidFill>
                           <a:latin typeface="Calibri"/>
                         </a:rPr>
-                        <a:t>1,130</a:t>
+                        <a:t>1,144</a:t>
                       </a:r>
                     </a:p>
                   </a:txBody>
@@ -4009,7 +4009,7 @@
                           </a:solidFill>
                           <a:latin typeface="Calibri"/>
                         </a:rPr>
-                        <a:t>+0.80%</a:t>
+                        <a:t>+1.24%</a:t>
                       </a:r>
                     </a:p>
                   </a:txBody>
@@ -4028,11 +4028,11 @@
                       <a:r>
                         <a:rPr sz="1000" b="0">
                           <a:solidFill>
-                            <a:srgbClr val="B3261E"/>
-                          </a:solidFill>
-                          <a:latin typeface="Calibri"/>
-                        </a:rPr>
-                        <a:t>-0.87%</a:t>
+                            <a:srgbClr val="0B7A3B"/>
+                          </a:solidFill>
+                          <a:latin typeface="Calibri"/>
+                        </a:rPr>
+                        <a:t>+2.60%</a:t>
                       </a:r>
                     </a:p>
                   </a:txBody>
@@ -4055,7 +4055,7 @@
                           </a:solidFill>
                           <a:latin typeface="Calibri"/>
                         </a:rPr>
-                        <a:t>+8.56%</a:t>
+                        <a:t>+6.00%</a:t>
                       </a:r>
                     </a:p>
                   </a:txBody>
@@ -4078,7 +4078,7 @@
                           </a:solidFill>
                           <a:latin typeface="Calibri"/>
                         </a:rPr>
-                        <a:t>-31.7%</a:t>
+                        <a:t>-30.8%</a:t>
                       </a:r>
                     </a:p>
                   </a:txBody>
@@ -4124,7 +4124,7 @@
                           </a:solidFill>
                           <a:latin typeface="Calibri"/>
                         </a:rPr>
-                        <a:t>14.6</a:t>
+                        <a:t>14.8</a:t>
                       </a:r>
                     </a:p>
                   </a:txBody>
@@ -4172,7 +4172,7 @@
                           </a:solidFill>
                           <a:latin typeface="Calibri"/>
                         </a:rPr>
-                        <a:t>270</a:t>
+                        <a:t>271</a:t>
                       </a:r>
                     </a:p>
                   </a:txBody>
@@ -4195,7 +4195,7 @@
                           </a:solidFill>
                           <a:latin typeface="Calibri"/>
                         </a:rPr>
-                        <a:t>+0.11%</a:t>
+                        <a:t>+0.63%</a:t>
                       </a:r>
                     </a:p>
                   </a:txBody>
@@ -4214,11 +4214,34 @@
                       <a:r>
                         <a:rPr sz="1000" b="0">
                           <a:solidFill>
+                            <a:srgbClr val="0B7A3B"/>
+                          </a:solidFill>
+                          <a:latin typeface="Calibri"/>
+                        </a:rPr>
+                        <a:t>+0.52%</a:t>
+                      </a:r>
+                    </a:p>
+                  </a:txBody>
+                  <a:tcPr>
+                    <a:solidFill>
+                      <a:srgbClr val="F3F5F7"/>
+                    </a:solidFill>
+                  </a:tcPr>
+                </a:tc>
+                <a:tc>
+                  <a:txBody>
+                    <a:bodyPr/>
+                    <a:lstStyle/>
+                    <a:p>
+                      <a:pPr algn="r"/>
+                      <a:r>
+                        <a:rPr sz="1000" b="0">
+                          <a:solidFill>
                             <a:srgbClr val="B3261E"/>
                           </a:solidFill>
                           <a:latin typeface="Calibri"/>
                         </a:rPr>
-                        <a:t>-1.23%</a:t>
+                        <a:t>-5.06%</a:t>
                       </a:r>
                     </a:p>
                   </a:txBody>
@@ -4237,11 +4260,11 @@
                       <a:r>
                         <a:rPr sz="1000" b="0">
                           <a:solidFill>
-                            <a:srgbClr val="B3261E"/>
-                          </a:solidFill>
-                          <a:latin typeface="Calibri"/>
-                        </a:rPr>
-                        <a:t>-4.85%</a:t>
+                            <a:srgbClr val="1F2A37"/>
+                          </a:solidFill>
+                          <a:latin typeface="Calibri"/>
+                        </a:rPr>
+                        <a:t>-32.5%</a:t>
                       </a:r>
                     </a:p>
                   </a:txBody>
@@ -4264,7 +4287,7 @@
                           </a:solidFill>
                           <a:latin typeface="Calibri"/>
                         </a:rPr>
-                        <a:t>-32.9%</a:t>
+                        <a:t>15%</a:t>
                       </a:r>
                     </a:p>
                   </a:txBody>
@@ -4287,30 +4310,7 @@
                           </a:solidFill>
                           <a:latin typeface="Calibri"/>
                         </a:rPr>
-                        <a:t>16%</a:t>
-                      </a:r>
-                    </a:p>
-                  </a:txBody>
-                  <a:tcPr>
-                    <a:solidFill>
-                      <a:srgbClr val="F3F5F7"/>
-                    </a:solidFill>
-                  </a:tcPr>
-                </a:tc>
-                <a:tc>
-                  <a:txBody>
-                    <a:bodyPr/>
-                    <a:lstStyle/>
-                    <a:p>
-                      <a:pPr algn="r"/>
-                      <a:r>
-                        <a:rPr sz="1000" b="0">
-                          <a:solidFill>
-                            <a:srgbClr val="1F2A37"/>
-                          </a:solidFill>
-                          <a:latin typeface="Calibri"/>
-                        </a:rPr>
-                        <a:t>17.0</a:t>
+                        <a:t>17.1</a:t>
                       </a:r>
                     </a:p>
                   </a:txBody>
@@ -4358,7 +4358,7 @@
                           </a:solidFill>
                           <a:latin typeface="Calibri"/>
                         </a:rPr>
-                        <a:t>4,090</a:t>
+                        <a:t>4,119</a:t>
                       </a:r>
                     </a:p>
                   </a:txBody>
@@ -4377,11 +4377,11 @@
                       <a:r>
                         <a:rPr sz="1000" b="0">
                           <a:solidFill>
-                            <a:srgbClr val="B3261E"/>
-                          </a:solidFill>
-                          <a:latin typeface="Calibri"/>
-                        </a:rPr>
-                        <a:t>-0.07%</a:t>
+                            <a:srgbClr val="0B7A3B"/>
+                          </a:solidFill>
+                          <a:latin typeface="Calibri"/>
+                        </a:rPr>
+                        <a:t>+0.71%</a:t>
                       </a:r>
                     </a:p>
                   </a:txBody>
@@ -4404,7 +4404,7 @@
                           </a:solidFill>
                           <a:latin typeface="Calibri"/>
                         </a:rPr>
-                        <a:t>+0.08%</a:t>
+                        <a:t>+1.35%</a:t>
                       </a:r>
                     </a:p>
                   </a:txBody>
@@ -4427,7 +4427,7 @@
                           </a:solidFill>
                           <a:latin typeface="Calibri"/>
                         </a:rPr>
-                        <a:t>+8.04%</a:t>
+                        <a:t>+8.22%</a:t>
                       </a:r>
                     </a:p>
                   </a:txBody>
@@ -4450,7 +4450,7 @@
                           </a:solidFill>
                           <a:latin typeface="Calibri"/>
                         </a:rPr>
-                        <a:t>-6.5%</a:t>
+                        <a:t>-5.9%</a:t>
                       </a:r>
                     </a:p>
                   </a:txBody>
@@ -4473,7 +4473,7 @@
                           </a:solidFill>
                           <a:latin typeface="Calibri"/>
                         </a:rPr>
-                        <a:t>16%</a:t>
+                        <a:t>15%</a:t>
                       </a:r>
                     </a:p>
                   </a:txBody>
@@ -4496,7 +4496,7 @@
                           </a:solidFill>
                           <a:latin typeface="Calibri"/>
                         </a:rPr>
-                        <a:t>33.9</a:t>
+                        <a:t>34.1</a:t>
                       </a:r>
                     </a:p>
                   </a:txBody>
@@ -4544,7 +4544,7 @@
                           </a:solidFill>
                           <a:latin typeface="Calibri"/>
                         </a:rPr>
-                        <a:t>1,310</a:t>
+                        <a:t>1,317</a:t>
                       </a:r>
                     </a:p>
                   </a:txBody>
@@ -4563,11 +4563,34 @@
                       <a:r>
                         <a:rPr sz="1000" b="0">
                           <a:solidFill>
+                            <a:srgbClr val="0B7A3B"/>
+                          </a:solidFill>
+                          <a:latin typeface="Calibri"/>
+                        </a:rPr>
+                        <a:t>+0.55%</a:t>
+                      </a:r>
+                    </a:p>
+                  </a:txBody>
+                  <a:tcPr>
+                    <a:solidFill>
+                      <a:srgbClr val="F3F5F7"/>
+                    </a:solidFill>
+                  </a:tcPr>
+                </a:tc>
+                <a:tc>
+                  <a:txBody>
+                    <a:bodyPr/>
+                    <a:lstStyle/>
+                    <a:p>
+                      <a:pPr algn="r"/>
+                      <a:r>
+                        <a:rPr sz="1000" b="0">
+                          <a:solidFill>
                             <a:srgbClr val="B3261E"/>
                           </a:solidFill>
                           <a:latin typeface="Calibri"/>
                         </a:rPr>
-                        <a:t>-0.47%</a:t>
+                        <a:t>-0.38%</a:t>
                       </a:r>
                     </a:p>
                   </a:txBody>
@@ -4586,11 +4609,11 @@
                       <a:r>
                         <a:rPr sz="1000" b="0">
                           <a:solidFill>
-                            <a:srgbClr val="B3261E"/>
-                          </a:solidFill>
-                          <a:latin typeface="Calibri"/>
-                        </a:rPr>
-                        <a:t>-0.47%</a:t>
+                            <a:srgbClr val="0B7A3B"/>
+                          </a:solidFill>
+                          <a:latin typeface="Calibri"/>
+                        </a:rPr>
+                        <a:t>+2.89%</a:t>
                       </a:r>
                     </a:p>
                   </a:txBody>
@@ -4609,11 +4632,11 @@
                       <a:r>
                         <a:rPr sz="1000" b="0">
                           <a:solidFill>
-                            <a:srgbClr val="0B7A3B"/>
-                          </a:solidFill>
-                          <a:latin typeface="Calibri"/>
-                        </a:rPr>
-                        <a:t>+2.49%</a:t>
+                            <a:srgbClr val="1F2A37"/>
+                          </a:solidFill>
+                          <a:latin typeface="Calibri"/>
+                        </a:rPr>
+                        <a:t>-16.9%</a:t>
                       </a:r>
                     </a:p>
                   </a:txBody>
@@ -4636,7 +4659,7 @@
                           </a:solidFill>
                           <a:latin typeface="Calibri"/>
                         </a:rPr>
-                        <a:t>-17.4%</a:t>
+                        <a:t>18%</a:t>
                       </a:r>
                     </a:p>
                   </a:txBody>
@@ -4659,30 +4682,7 @@
                           </a:solidFill>
                           <a:latin typeface="Calibri"/>
                         </a:rPr>
-                        <a:t>18%</a:t>
-                      </a:r>
-                    </a:p>
-                  </a:txBody>
-                  <a:tcPr>
-                    <a:solidFill>
-                      <a:srgbClr val="F3F5F7"/>
-                    </a:solidFill>
-                  </a:tcPr>
-                </a:tc>
-                <a:tc>
-                  <a:txBody>
-                    <a:bodyPr/>
-                    <a:lstStyle/>
-                    <a:p>
-                      <a:pPr algn="r"/>
-                      <a:r>
-                        <a:rPr sz="1000" b="0">
-                          <a:solidFill>
-                            <a:srgbClr val="1F2A37"/>
-                          </a:solidFill>
-                          <a:latin typeface="Calibri"/>
-                        </a:rPr>
-                        <a:t>23.7</a:t>
+                        <a:t>23.8</a:t>
                       </a:r>
                     </a:p>
                   </a:txBody>
@@ -4730,7 +4730,7 @@
                           </a:solidFill>
                           <a:latin typeface="Calibri"/>
                         </a:rPr>
-                        <a:t>2,284</a:t>
+                        <a:t>2,296</a:t>
                       </a:r>
                     </a:p>
                   </a:txBody>
@@ -4749,11 +4749,11 @@
                       <a:r>
                         <a:rPr sz="1000" b="0">
                           <a:solidFill>
-                            <a:srgbClr val="B3261E"/>
-                          </a:solidFill>
-                          <a:latin typeface="Calibri"/>
-                        </a:rPr>
-                        <a:t>-0.78%</a:t>
+                            <a:srgbClr val="0B7A3B"/>
+                          </a:solidFill>
+                          <a:latin typeface="Calibri"/>
+                        </a:rPr>
+                        <a:t>+0.53%</a:t>
                       </a:r>
                     </a:p>
                   </a:txBody>
@@ -4772,11 +4772,11 @@
                       <a:r>
                         <a:rPr sz="1000" b="0">
                           <a:solidFill>
-                            <a:srgbClr val="B3261E"/>
-                          </a:solidFill>
-                          <a:latin typeface="Calibri"/>
-                        </a:rPr>
-                        <a:t>-1.26%</a:t>
+                            <a:srgbClr val="0B7A3B"/>
+                          </a:solidFill>
+                          <a:latin typeface="Calibri"/>
+                        </a:rPr>
+                        <a:t>+0.71%</a:t>
                       </a:r>
                     </a:p>
                   </a:txBody>
@@ -4799,7 +4799,7 @@
                           </a:solidFill>
                           <a:latin typeface="Calibri"/>
                         </a:rPr>
-                        <a:t>+1.32%</a:t>
+                        <a:t>+0.03%</a:t>
                       </a:r>
                     </a:p>
                   </a:txBody>
@@ -4822,7 +4822,7 @@
                           </a:solidFill>
                           <a:latin typeface="Calibri"/>
                         </a:rPr>
-                        <a:t>-28.7%</a:t>
+                        <a:t>-28.3%</a:t>
                       </a:r>
                     </a:p>
                   </a:txBody>
@@ -4868,7 +4868,7 @@
                           </a:solidFill>
                           <a:latin typeface="Calibri"/>
                         </a:rPr>
-                        <a:t>16.6</a:t>
+                        <a:t>16.7</a:t>
                       </a:r>
                     </a:p>
                   </a:txBody>
@@ -4952,7 +4952,7 @@
                 </a:solidFill>
                 <a:latin typeface="Calibri"/>
               </a:rPr>
-              <a:t>Breadth was risk-off: 3 of 8 names advanced on the day.</a:t>
+              <a:t>Breadth was risk-on: 7 of 8 names advanced on the day.</a:t>
             </a:r>
           </a:p>
           <a:p>
@@ -4968,7 +4968,7 @@
                 </a:solidFill>
                 <a:latin typeface="Calibri"/>
               </a:rPr>
-              <a:t>•  Best performer on the day: INFY.NS at +0.80%.</a:t>
+              <a:t>•  Best performer on the day: INFY.NS at +1.24%.</a:t>
             </a:r>
           </a:p>
           <a:p>
@@ -4984,7 +4984,7 @@
                 </a:solidFill>
                 <a:latin typeface="Calibri"/>
               </a:rPr>
-              <a:t>•  Weakest on the day: TCS.NS at -0.78%.</a:t>
+              <a:t>•  Weakest on the day: HDFCBANK.NS at -0.21%.</a:t>
             </a:r>
           </a:p>
           <a:p>
@@ -5000,7 +5000,7 @@
                 </a:solidFill>
                 <a:latin typeface="Calibri"/>
               </a:rPr>
-              <a:t>•  Median one-day move across the watchlist: -0.21%.</a:t>
+              <a:t>•  Median one-day move across the watchlist: +0.58%.</a:t>
             </a:r>
           </a:p>
           <a:p>
@@ -5016,7 +5016,7 @@
                 </a:solidFill>
                 <a:latin typeface="Calibri"/>
               </a:rPr>
-              <a:t>•  ITC.NS sits furthest below its 52-week high, at -32.9%.</a:t>
+              <a:t>•  ITC.NS sits furthest below its 52-week high, at -32.5%.</a:t>
             </a:r>
           </a:p>
           <a:p>
@@ -5080,7 +5080,7 @@
                 </a:solidFill>
                 <a:latin typeface="Calibri"/>
               </a:rPr>
-              <a:t>•  60 headlines collected, 4 tagged to a watchlist name by substring match (unverified).</a:t>
+              <a:t>•  60 headlines collected, 2 tagged to a watchlist name by substring match (unverified).</a:t>
             </a:r>
           </a:p>
           <a:p>

--- a/public/deskbrief.pptx
+++ b/public/deskbrief.pptx
@@ -3128,7 +3128,7 @@
                 </a:solidFill>
                 <a:latin typeface="Calibri"/>
               </a:rPr>
-              <a:t>8 names  |  generated 25 Aug 2026 13:27  |  source: Yahoo Finance via yfinance, Indian financial RSS</a:t>
+              <a:t>8 names  |  generated 26 Aug 2026 13:32  |  source: Yahoo Finance via yfinance, Indian financial RSS</a:t>
             </a:r>
           </a:p>
         </p:txBody>
@@ -3428,7 +3428,7 @@
                           </a:solidFill>
                           <a:latin typeface="Calibri"/>
                         </a:rPr>
-                        <a:t>1,947</a:t>
+                        <a:t>1,902</a:t>
                       </a:r>
                     </a:p>
                   </a:txBody>
@@ -3447,11 +3447,57 @@
                       <a:r>
                         <a:rPr sz="1000" b="0">
                           <a:solidFill>
+                            <a:srgbClr val="B3261E"/>
+                          </a:solidFill>
+                          <a:latin typeface="Calibri"/>
+                        </a:rPr>
+                        <a:t>-2.31%</a:t>
+                      </a:r>
+                    </a:p>
+                  </a:txBody>
+                  <a:tcPr>
+                    <a:solidFill>
+                      <a:srgbClr val="F3F5F7"/>
+                    </a:solidFill>
+                  </a:tcPr>
+                </a:tc>
+                <a:tc>
+                  <a:txBody>
+                    <a:bodyPr/>
+                    <a:lstStyle/>
+                    <a:p>
+                      <a:pPr algn="r"/>
+                      <a:r>
+                        <a:rPr sz="1000" b="0">
+                          <a:solidFill>
+                            <a:srgbClr val="B3261E"/>
+                          </a:solidFill>
+                          <a:latin typeface="Calibri"/>
+                        </a:rPr>
+                        <a:t>-1.04%</a:t>
+                      </a:r>
+                    </a:p>
+                  </a:txBody>
+                  <a:tcPr>
+                    <a:solidFill>
+                      <a:srgbClr val="F3F5F7"/>
+                    </a:solidFill>
+                  </a:tcPr>
+                </a:tc>
+                <a:tc>
+                  <a:txBody>
+                    <a:bodyPr/>
+                    <a:lstStyle/>
+                    <a:p>
+                      <a:pPr algn="r"/>
+                      <a:r>
+                        <a:rPr sz="1000" b="0">
+                          <a:solidFill>
                             <a:srgbClr val="0B7A3B"/>
                           </a:solidFill>
                           <a:latin typeface="Calibri"/>
                         </a:rPr>
-                        <a:t>+0.62%</a:t>
+                        <a:t>+0.02%</a:t>
                       </a:r>
                     </a:p>
                   </a:txBody>
@@ -3470,11 +3516,11 @@
                       <a:r>
                         <a:rPr sz="1000" b="0">
                           <a:solidFill>
-                            <a:srgbClr val="0B7A3B"/>
-                          </a:solidFill>
-                          <a:latin typeface="Calibri"/>
-                        </a:rPr>
-                        <a:t>+0.66%</a:t>
+                            <a:srgbClr val="1F2A37"/>
+                          </a:solidFill>
+                          <a:latin typeface="Calibri"/>
+                        </a:rPr>
+                        <a:t>-10.9%</a:t>
                       </a:r>
                     </a:p>
                   </a:txBody>
@@ -3493,11 +3539,11 @@
                       <a:r>
                         <a:rPr sz="1000" b="0">
                           <a:solidFill>
-                            <a:srgbClr val="0B7A3B"/>
-                          </a:solidFill>
-                          <a:latin typeface="Calibri"/>
-                        </a:rPr>
-                        <a:t>+2.19%</a:t>
+                            <a:srgbClr val="1F2A37"/>
+                          </a:solidFill>
+                          <a:latin typeface="Calibri"/>
+                        </a:rPr>
+                        <a:t>18%</a:t>
                       </a:r>
                     </a:p>
                   </a:txBody>
@@ -3520,53 +3566,7 @@
                           </a:solidFill>
                           <a:latin typeface="Calibri"/>
                         </a:rPr>
-                        <a:t>-8.8%</a:t>
-                      </a:r>
-                    </a:p>
-                  </a:txBody>
-                  <a:tcPr>
-                    <a:solidFill>
-                      <a:srgbClr val="F3F5F7"/>
-                    </a:solidFill>
-                  </a:tcPr>
-                </a:tc>
-                <a:tc>
-                  <a:txBody>
-                    <a:bodyPr/>
-                    <a:lstStyle/>
-                    <a:p>
-                      <a:pPr algn="r"/>
-                      <a:r>
-                        <a:rPr sz="1000" b="0">
-                          <a:solidFill>
-                            <a:srgbClr val="1F2A37"/>
-                          </a:solidFill>
-                          <a:latin typeface="Calibri"/>
-                        </a:rPr>
-                        <a:t>17%</a:t>
-                      </a:r>
-                    </a:p>
-                  </a:txBody>
-                  <a:tcPr>
-                    <a:solidFill>
-                      <a:srgbClr val="F3F5F7"/>
-                    </a:solidFill>
-                  </a:tcPr>
-                </a:tc>
-                <a:tc>
-                  <a:txBody>
-                    <a:bodyPr/>
-                    <a:lstStyle/>
-                    <a:p>
-                      <a:pPr algn="r"/>
-                      <a:r>
-                        <a:rPr sz="1000" b="0">
-                          <a:solidFill>
-                            <a:srgbClr val="1F2A37"/>
-                          </a:solidFill>
-                          <a:latin typeface="Calibri"/>
-                        </a:rPr>
-                        <a:t>40.9</a:t>
+                        <a:t>39.7</a:t>
                       </a:r>
                     </a:p>
                   </a:txBody>
@@ -3614,7 +3614,7 @@
                           </a:solidFill>
                           <a:latin typeface="Calibri"/>
                         </a:rPr>
-                        <a:t>728</a:t>
+                        <a:t>727</a:t>
                       </a:r>
                     </a:p>
                   </a:txBody>
@@ -3637,7 +3637,7 @@
                           </a:solidFill>
                           <a:latin typeface="Calibri"/>
                         </a:rPr>
-                        <a:t>-0.21%</a:t>
+                        <a:t>-0.04%</a:t>
                       </a:r>
                     </a:p>
                   </a:txBody>
@@ -3660,7 +3660,7 @@
                           </a:solidFill>
                           <a:latin typeface="Calibri"/>
                         </a:rPr>
-                        <a:t>+0.62%</a:t>
+                        <a:t>+1.00%</a:t>
                       </a:r>
                     </a:p>
                   </a:txBody>
@@ -3683,7 +3683,7 @@
                           </a:solidFill>
                           <a:latin typeface="Calibri"/>
                         </a:rPr>
-                        <a:t>-1.63%</a:t>
+                        <a:t>-1.12%</a:t>
                       </a:r>
                     </a:p>
                   </a:txBody>
@@ -3706,7 +3706,7 @@
                           </a:solidFill>
                           <a:latin typeface="Calibri"/>
                         </a:rPr>
-                        <a:t>-26.7%</a:t>
+                        <a:t>-26.8%</a:t>
                       </a:r>
                     </a:p>
                   </a:txBody>
@@ -3729,7 +3729,7 @@
                           </a:solidFill>
                           <a:latin typeface="Calibri"/>
                         </a:rPr>
-                        <a:t>20%</a:t>
+                        <a:t>19%</a:t>
                       </a:r>
                     </a:p>
                   </a:txBody>
@@ -3800,7 +3800,7 @@
                           </a:solidFill>
                           <a:latin typeface="Calibri"/>
                         </a:rPr>
-                        <a:t>1,423</a:t>
+                        <a:t>1,430</a:t>
                       </a:r>
                     </a:p>
                   </a:txBody>
@@ -3823,7 +3823,7 @@
                           </a:solidFill>
                           <a:latin typeface="Calibri"/>
                         </a:rPr>
-                        <a:t>+0.54%</a:t>
+                        <a:t>+0.51%</a:t>
                       </a:r>
                     </a:p>
                   </a:txBody>
@@ -3846,7 +3846,7 @@
                           </a:solidFill>
                           <a:latin typeface="Calibri"/>
                         </a:rPr>
-                        <a:t>+0.76%</a:t>
+                        <a:t>+2.00%</a:t>
                       </a:r>
                     </a:p>
                   </a:txBody>
@@ -3865,11 +3865,11 @@
                       <a:r>
                         <a:rPr sz="1000" b="0">
                           <a:solidFill>
-                            <a:srgbClr val="B3261E"/>
-                          </a:solidFill>
-                          <a:latin typeface="Calibri"/>
-                        </a:rPr>
-                        <a:t>-0.76%</a:t>
+                            <a:srgbClr val="0B7A3B"/>
+                          </a:solidFill>
+                          <a:latin typeface="Calibri"/>
+                        </a:rPr>
+                        <a:t>+0.79%</a:t>
                       </a:r>
                     </a:p>
                   </a:txBody>
@@ -3892,7 +3892,7 @@
                           </a:solidFill>
                           <a:latin typeface="Calibri"/>
                         </a:rPr>
-                        <a:t>-2.6%</a:t>
+                        <a:t>-2.1%</a:t>
                       </a:r>
                     </a:p>
                   </a:txBody>
@@ -3938,7 +3938,7 @@
                           </a:solidFill>
                           <a:latin typeface="Calibri"/>
                         </a:rPr>
-                        <a:t>18.4</a:t>
+                        <a:t>18.5</a:t>
                       </a:r>
                     </a:p>
                   </a:txBody>
@@ -3986,7 +3986,7 @@
                           </a:solidFill>
                           <a:latin typeface="Calibri"/>
                         </a:rPr>
-                        <a:t>1,144</a:t>
+                        <a:t>1,120</a:t>
                       </a:r>
                     </a:p>
                   </a:txBody>
@@ -4005,11 +4005,34 @@
                       <a:r>
                         <a:rPr sz="1000" b="0">
                           <a:solidFill>
+                            <a:srgbClr val="B3261E"/>
+                          </a:solidFill>
+                          <a:latin typeface="Calibri"/>
+                        </a:rPr>
+                        <a:t>-2.10%</a:t>
+                      </a:r>
+                    </a:p>
+                  </a:txBody>
+                  <a:tcPr>
+                    <a:solidFill>
+                      <a:srgbClr val="FFFFFF"/>
+                    </a:solidFill>
+                  </a:tcPr>
+                </a:tc>
+                <a:tc>
+                  <a:txBody>
+                    <a:bodyPr/>
+                    <a:lstStyle/>
+                    <a:p>
+                      <a:pPr algn="r"/>
+                      <a:r>
+                        <a:rPr sz="1000" b="0">
+                          <a:solidFill>
                             <a:srgbClr val="0B7A3B"/>
                           </a:solidFill>
                           <a:latin typeface="Calibri"/>
                         </a:rPr>
-                        <a:t>+1.24%</a:t>
+                        <a:t>+0.02%</a:t>
                       </a:r>
                     </a:p>
                   </a:txBody>
@@ -4032,7 +4055,7 @@
                           </a:solidFill>
                           <a:latin typeface="Calibri"/>
                         </a:rPr>
-                        <a:t>+2.60%</a:t>
+                        <a:t>+1.29%</a:t>
                       </a:r>
                     </a:p>
                   </a:txBody>
@@ -4051,11 +4074,11 @@
                       <a:r>
                         <a:rPr sz="1000" b="0">
                           <a:solidFill>
-                            <a:srgbClr val="0B7A3B"/>
-                          </a:solidFill>
-                          <a:latin typeface="Calibri"/>
-                        </a:rPr>
-                        <a:t>+6.00%</a:t>
+                            <a:srgbClr val="1F2A37"/>
+                          </a:solidFill>
+                          <a:latin typeface="Calibri"/>
+                        </a:rPr>
+                        <a:t>-32.3%</a:t>
                       </a:r>
                     </a:p>
                   </a:txBody>
@@ -4078,7 +4101,7 @@
                           </a:solidFill>
                           <a:latin typeface="Calibri"/>
                         </a:rPr>
-                        <a:t>-30.8%</a:t>
+                        <a:t>29%</a:t>
                       </a:r>
                     </a:p>
                   </a:txBody>
@@ -4101,30 +4124,7 @@
                           </a:solidFill>
                           <a:latin typeface="Calibri"/>
                         </a:rPr>
-                        <a:t>28%</a:t>
-                      </a:r>
-                    </a:p>
-                  </a:txBody>
-                  <a:tcPr>
-                    <a:solidFill>
-                      <a:srgbClr val="FFFFFF"/>
-                    </a:solidFill>
-                  </a:tcPr>
-                </a:tc>
-                <a:tc>
-                  <a:txBody>
-                    <a:bodyPr/>
-                    <a:lstStyle/>
-                    <a:p>
-                      <a:pPr algn="r"/>
-                      <a:r>
-                        <a:rPr sz="1000" b="0">
-                          <a:solidFill>
-                            <a:srgbClr val="1F2A37"/>
-                          </a:solidFill>
-                          <a:latin typeface="Calibri"/>
-                        </a:rPr>
-                        <a:t>14.8</a:t>
+                        <a:t>14.4</a:t>
                       </a:r>
                     </a:p>
                   </a:txBody>
@@ -4172,7 +4172,7 @@
                           </a:solidFill>
                           <a:latin typeface="Calibri"/>
                         </a:rPr>
-                        <a:t>271</a:t>
+                        <a:t>270</a:t>
                       </a:r>
                     </a:p>
                   </a:txBody>
@@ -4191,11 +4191,34 @@
                       <a:r>
                         <a:rPr sz="1000" b="0">
                           <a:solidFill>
+                            <a:srgbClr val="B3261E"/>
+                          </a:solidFill>
+                          <a:latin typeface="Calibri"/>
+                        </a:rPr>
+                        <a:t>-0.42%</a:t>
+                      </a:r>
+                    </a:p>
+                  </a:txBody>
+                  <a:tcPr>
+                    <a:solidFill>
+                      <a:srgbClr val="F3F5F7"/>
+                    </a:solidFill>
+                  </a:tcPr>
+                </a:tc>
+                <a:tc>
+                  <a:txBody>
+                    <a:bodyPr/>
+                    <a:lstStyle/>
+                    <a:p>
+                      <a:pPr algn="r"/>
+                      <a:r>
+                        <a:rPr sz="1000" b="0">
+                          <a:solidFill>
                             <a:srgbClr val="0B7A3B"/>
                           </a:solidFill>
                           <a:latin typeface="Calibri"/>
                         </a:rPr>
-                        <a:t>+0.63%</a:t>
+                        <a:t>+1.20%</a:t>
                       </a:r>
                     </a:p>
                   </a:txBody>
@@ -4214,11 +4237,11 @@
                       <a:r>
                         <a:rPr sz="1000" b="0">
                           <a:solidFill>
-                            <a:srgbClr val="0B7A3B"/>
-                          </a:solidFill>
-                          <a:latin typeface="Calibri"/>
-                        </a:rPr>
-                        <a:t>+0.52%</a:t>
+                            <a:srgbClr val="B3261E"/>
+                          </a:solidFill>
+                          <a:latin typeface="Calibri"/>
+                        </a:rPr>
+                        <a:t>-5.06%</a:t>
                       </a:r>
                     </a:p>
                   </a:txBody>
@@ -4237,34 +4260,11 @@
                       <a:r>
                         <a:rPr sz="1000" b="0">
                           <a:solidFill>
-                            <a:srgbClr val="B3261E"/>
-                          </a:solidFill>
-                          <a:latin typeface="Calibri"/>
-                        </a:rPr>
-                        <a:t>-5.06%</a:t>
-                      </a:r>
-                    </a:p>
-                  </a:txBody>
-                  <a:tcPr>
-                    <a:solidFill>
-                      <a:srgbClr val="F3F5F7"/>
-                    </a:solidFill>
-                  </a:tcPr>
-                </a:tc>
-                <a:tc>
-                  <a:txBody>
-                    <a:bodyPr/>
-                    <a:lstStyle/>
-                    <a:p>
-                      <a:pPr algn="r"/>
-                      <a:r>
-                        <a:rPr sz="1000" b="0">
-                          <a:solidFill>
                             <a:srgbClr val="1F2A37"/>
                           </a:solidFill>
                           <a:latin typeface="Calibri"/>
                         </a:rPr>
-                        <a:t>-32.5%</a:t>
+                        <a:t>-32.8%</a:t>
                       </a:r>
                     </a:p>
                   </a:txBody>
@@ -4358,7 +4358,7 @@
                           </a:solidFill>
                           <a:latin typeface="Calibri"/>
                         </a:rPr>
-                        <a:t>4,119</a:t>
+                        <a:t>4,038</a:t>
                       </a:r>
                     </a:p>
                   </a:txBody>
@@ -4377,11 +4377,57 @@
                       <a:r>
                         <a:rPr sz="1000" b="0">
                           <a:solidFill>
+                            <a:srgbClr val="B3261E"/>
+                          </a:solidFill>
+                          <a:latin typeface="Calibri"/>
+                        </a:rPr>
+                        <a:t>-1.96%</a:t>
+                      </a:r>
+                    </a:p>
+                  </a:txBody>
+                  <a:tcPr>
+                    <a:solidFill>
+                      <a:srgbClr val="FFFFFF"/>
+                    </a:solidFill>
+                  </a:tcPr>
+                </a:tc>
+                <a:tc>
+                  <a:txBody>
+                    <a:bodyPr/>
+                    <a:lstStyle/>
+                    <a:p>
+                      <a:pPr algn="r"/>
+                      <a:r>
+                        <a:rPr sz="1000" b="0">
+                          <a:solidFill>
+                            <a:srgbClr val="B3261E"/>
+                          </a:solidFill>
+                          <a:latin typeface="Calibri"/>
+                        </a:rPr>
+                        <a:t>-0.08%</a:t>
+                      </a:r>
+                    </a:p>
+                  </a:txBody>
+                  <a:tcPr>
+                    <a:solidFill>
+                      <a:srgbClr val="FFFFFF"/>
+                    </a:solidFill>
+                  </a:tcPr>
+                </a:tc>
+                <a:tc>
+                  <a:txBody>
+                    <a:bodyPr/>
+                    <a:lstStyle/>
+                    <a:p>
+                      <a:pPr algn="r"/>
+                      <a:r>
+                        <a:rPr sz="1000" b="0">
+                          <a:solidFill>
                             <a:srgbClr val="0B7A3B"/>
                           </a:solidFill>
                           <a:latin typeface="Calibri"/>
                         </a:rPr>
-                        <a:t>+0.71%</a:t>
+                        <a:t>+5.38%</a:t>
                       </a:r>
                     </a:p>
                   </a:txBody>
@@ -4400,11 +4446,11 @@
                       <a:r>
                         <a:rPr sz="1000" b="0">
                           <a:solidFill>
-                            <a:srgbClr val="0B7A3B"/>
-                          </a:solidFill>
-                          <a:latin typeface="Calibri"/>
-                        </a:rPr>
-                        <a:t>+1.35%</a:t>
+                            <a:srgbClr val="1F2A37"/>
+                          </a:solidFill>
+                          <a:latin typeface="Calibri"/>
+                        </a:rPr>
+                        <a:t>-7.7%</a:t>
                       </a:r>
                     </a:p>
                   </a:txBody>
@@ -4423,11 +4469,11 @@
                       <a:r>
                         <a:rPr sz="1000" b="0">
                           <a:solidFill>
-                            <a:srgbClr val="0B7A3B"/>
-                          </a:solidFill>
-                          <a:latin typeface="Calibri"/>
-                        </a:rPr>
-                        <a:t>+8.22%</a:t>
+                            <a:srgbClr val="1F2A37"/>
+                          </a:solidFill>
+                          <a:latin typeface="Calibri"/>
+                        </a:rPr>
+                        <a:t>15%</a:t>
                       </a:r>
                     </a:p>
                   </a:txBody>
@@ -4450,53 +4496,7 @@
                           </a:solidFill>
                           <a:latin typeface="Calibri"/>
                         </a:rPr>
-                        <a:t>-5.9%</a:t>
-                      </a:r>
-                    </a:p>
-                  </a:txBody>
-                  <a:tcPr>
-                    <a:solidFill>
-                      <a:srgbClr val="FFFFFF"/>
-                    </a:solidFill>
-                  </a:tcPr>
-                </a:tc>
-                <a:tc>
-                  <a:txBody>
-                    <a:bodyPr/>
-                    <a:lstStyle/>
-                    <a:p>
-                      <a:pPr algn="r"/>
-                      <a:r>
-                        <a:rPr sz="1000" b="0">
-                          <a:solidFill>
-                            <a:srgbClr val="1F2A37"/>
-                          </a:solidFill>
-                          <a:latin typeface="Calibri"/>
-                        </a:rPr>
-                        <a:t>15%</a:t>
-                      </a:r>
-                    </a:p>
-                  </a:txBody>
-                  <a:tcPr>
-                    <a:solidFill>
-                      <a:srgbClr val="FFFFFF"/>
-                    </a:solidFill>
-                  </a:tcPr>
-                </a:tc>
-                <a:tc>
-                  <a:txBody>
-                    <a:bodyPr/>
-                    <a:lstStyle/>
-                    <a:p>
-                      <a:pPr algn="r"/>
-                      <a:r>
-                        <a:rPr sz="1000" b="0">
-                          <a:solidFill>
-                            <a:srgbClr val="1F2A37"/>
-                          </a:solidFill>
-                          <a:latin typeface="Calibri"/>
-                        </a:rPr>
-                        <a:t>34.1</a:t>
+                        <a:t>33.5</a:t>
                       </a:r>
                     </a:p>
                   </a:txBody>
@@ -4544,7 +4544,7 @@
                           </a:solidFill>
                           <a:latin typeface="Calibri"/>
                         </a:rPr>
-                        <a:t>1,317</a:t>
+                        <a:t>1,298</a:t>
                       </a:r>
                     </a:p>
                   </a:txBody>
@@ -4563,11 +4563,57 @@
                       <a:r>
                         <a:rPr sz="1000" b="0">
                           <a:solidFill>
+                            <a:srgbClr val="B3261E"/>
+                          </a:solidFill>
+                          <a:latin typeface="Calibri"/>
+                        </a:rPr>
+                        <a:t>-1.44%</a:t>
+                      </a:r>
+                    </a:p>
+                  </a:txBody>
+                  <a:tcPr>
+                    <a:solidFill>
+                      <a:srgbClr val="F3F5F7"/>
+                    </a:solidFill>
+                  </a:tcPr>
+                </a:tc>
+                <a:tc>
+                  <a:txBody>
+                    <a:bodyPr/>
+                    <a:lstStyle/>
+                    <a:p>
+                      <a:pPr algn="r"/>
+                      <a:r>
+                        <a:rPr sz="1000" b="0">
+                          <a:solidFill>
+                            <a:srgbClr val="B3261E"/>
+                          </a:solidFill>
+                          <a:latin typeface="Calibri"/>
+                        </a:rPr>
+                        <a:t>-0.99%</a:t>
+                      </a:r>
+                    </a:p>
+                  </a:txBody>
+                  <a:tcPr>
+                    <a:solidFill>
+                      <a:srgbClr val="F3F5F7"/>
+                    </a:solidFill>
+                  </a:tcPr>
+                </a:tc>
+                <a:tc>
+                  <a:txBody>
+                    <a:bodyPr/>
+                    <a:lstStyle/>
+                    <a:p>
+                      <a:pPr algn="r"/>
+                      <a:r>
+                        <a:rPr sz="1000" b="0">
+                          <a:solidFill>
                             <a:srgbClr val="0B7A3B"/>
                           </a:solidFill>
                           <a:latin typeface="Calibri"/>
                         </a:rPr>
-                        <a:t>+0.55%</a:t>
+                        <a:t>+2.39%</a:t>
                       </a:r>
                     </a:p>
                   </a:txBody>
@@ -4586,11 +4632,11 @@
                       <a:r>
                         <a:rPr sz="1000" b="0">
                           <a:solidFill>
-                            <a:srgbClr val="B3261E"/>
-                          </a:solidFill>
-                          <a:latin typeface="Calibri"/>
-                        </a:rPr>
-                        <a:t>-0.38%</a:t>
+                            <a:srgbClr val="1F2A37"/>
+                          </a:solidFill>
+                          <a:latin typeface="Calibri"/>
+                        </a:rPr>
+                        <a:t>-18.1%</a:t>
                       </a:r>
                     </a:p>
                   </a:txBody>
@@ -4609,11 +4655,11 @@
                       <a:r>
                         <a:rPr sz="1000" b="0">
                           <a:solidFill>
-                            <a:srgbClr val="0B7A3B"/>
-                          </a:solidFill>
-                          <a:latin typeface="Calibri"/>
-                        </a:rPr>
-                        <a:t>+2.89%</a:t>
+                            <a:srgbClr val="1F2A37"/>
+                          </a:solidFill>
+                          <a:latin typeface="Calibri"/>
+                        </a:rPr>
+                        <a:t>19%</a:t>
                       </a:r>
                     </a:p>
                   </a:txBody>
@@ -4636,53 +4682,7 @@
                           </a:solidFill>
                           <a:latin typeface="Calibri"/>
                         </a:rPr>
-                        <a:t>-16.9%</a:t>
-                      </a:r>
-                    </a:p>
-                  </a:txBody>
-                  <a:tcPr>
-                    <a:solidFill>
-                      <a:srgbClr val="F3F5F7"/>
-                    </a:solidFill>
-                  </a:tcPr>
-                </a:tc>
-                <a:tc>
-                  <a:txBody>
-                    <a:bodyPr/>
-                    <a:lstStyle/>
-                    <a:p>
-                      <a:pPr algn="r"/>
-                      <a:r>
-                        <a:rPr sz="1000" b="0">
-                          <a:solidFill>
-                            <a:srgbClr val="1F2A37"/>
-                          </a:solidFill>
-                          <a:latin typeface="Calibri"/>
-                        </a:rPr>
-                        <a:t>18%</a:t>
-                      </a:r>
-                    </a:p>
-                  </a:txBody>
-                  <a:tcPr>
-                    <a:solidFill>
-                      <a:srgbClr val="F3F5F7"/>
-                    </a:solidFill>
-                  </a:tcPr>
-                </a:tc>
-                <a:tc>
-                  <a:txBody>
-                    <a:bodyPr/>
-                    <a:lstStyle/>
-                    <a:p>
-                      <a:pPr algn="r"/>
-                      <a:r>
-                        <a:rPr sz="1000" b="0">
-                          <a:solidFill>
-                            <a:srgbClr val="1F2A37"/>
-                          </a:solidFill>
-                          <a:latin typeface="Calibri"/>
-                        </a:rPr>
-                        <a:t>23.8</a:t>
+                        <a:t>23.4</a:t>
                       </a:r>
                     </a:p>
                   </a:txBody>
@@ -4730,7 +4730,7 @@
                           </a:solidFill>
                           <a:latin typeface="Calibri"/>
                         </a:rPr>
-                        <a:t>2,296</a:t>
+                        <a:t>2,270</a:t>
                       </a:r>
                     </a:p>
                   </a:txBody>
@@ -4749,11 +4749,11 @@
                       <a:r>
                         <a:rPr sz="1000" b="0">
                           <a:solidFill>
-                            <a:srgbClr val="0B7A3B"/>
-                          </a:solidFill>
-                          <a:latin typeface="Calibri"/>
-                        </a:rPr>
-                        <a:t>+0.53%</a:t>
+                            <a:srgbClr val="B3261E"/>
+                          </a:solidFill>
+                          <a:latin typeface="Calibri"/>
+                        </a:rPr>
+                        <a:t>-1.14%</a:t>
                       </a:r>
                     </a:p>
                   </a:txBody>
@@ -4772,11 +4772,11 @@
                       <a:r>
                         <a:rPr sz="1000" b="0">
                           <a:solidFill>
-                            <a:srgbClr val="0B7A3B"/>
-                          </a:solidFill>
-                          <a:latin typeface="Calibri"/>
-                        </a:rPr>
-                        <a:t>+0.71%</a:t>
+                            <a:srgbClr val="B3261E"/>
+                          </a:solidFill>
+                          <a:latin typeface="Calibri"/>
+                        </a:rPr>
+                        <a:t>-0.83%</a:t>
                       </a:r>
                     </a:p>
                   </a:txBody>
@@ -4795,11 +4795,11 @@
                       <a:r>
                         <a:rPr sz="1000" b="0">
                           <a:solidFill>
-                            <a:srgbClr val="0B7A3B"/>
-                          </a:solidFill>
-                          <a:latin typeface="Calibri"/>
-                        </a:rPr>
-                        <a:t>+0.03%</a:t>
+                            <a:srgbClr val="B3261E"/>
+                          </a:solidFill>
+                          <a:latin typeface="Calibri"/>
+                        </a:rPr>
+                        <a:t>-5.34%</a:t>
                       </a:r>
                     </a:p>
                   </a:txBody>
@@ -4822,7 +4822,7 @@
                           </a:solidFill>
                           <a:latin typeface="Calibri"/>
                         </a:rPr>
-                        <a:t>-28.3%</a:t>
+                        <a:t>-29.2%</a:t>
                       </a:r>
                     </a:p>
                   </a:txBody>
@@ -4845,7 +4845,7 @@
                           </a:solidFill>
                           <a:latin typeface="Calibri"/>
                         </a:rPr>
-                        <a:t>31%</a:t>
+                        <a:t>32%</a:t>
                       </a:r>
                     </a:p>
                   </a:txBody>
@@ -4868,7 +4868,7 @@
                           </a:solidFill>
                           <a:latin typeface="Calibri"/>
                         </a:rPr>
-                        <a:t>16.7</a:t>
+                        <a:t>16.4</a:t>
                       </a:r>
                     </a:p>
                   </a:txBody>
@@ -4952,7 +4952,7 @@
                 </a:solidFill>
                 <a:latin typeface="Calibri"/>
               </a:rPr>
-              <a:t>Breadth was risk-on: 7 of 8 names advanced on the day.</a:t>
+              <a:t>Breadth was risk-off: 1 of 8 names advanced on the day.</a:t>
             </a:r>
           </a:p>
           <a:p>
@@ -4968,7 +4968,7 @@
                 </a:solidFill>
                 <a:latin typeface="Calibri"/>
               </a:rPr>
-              <a:t>•  Best performer on the day: INFY.NS at +1.24%.</a:t>
+              <a:t>•  Best performer on the day: ICICIBANK.NS at +0.51%.</a:t>
             </a:r>
           </a:p>
           <a:p>
@@ -4984,7 +4984,7 @@
                 </a:solidFill>
                 <a:latin typeface="Calibri"/>
               </a:rPr>
-              <a:t>•  Weakest on the day: HDFCBANK.NS at -0.21%.</a:t>
+              <a:t>•  Weakest on the day: BHARTIARTL.NS at -2.31%.</a:t>
             </a:r>
           </a:p>
           <a:p>
@@ -5000,7 +5000,7 @@
                 </a:solidFill>
                 <a:latin typeface="Calibri"/>
               </a:rPr>
-              <a:t>•  Median one-day move across the watchlist: +0.58%.</a:t>
+              <a:t>•  Median one-day move across the watchlist: -1.29%.</a:t>
             </a:r>
           </a:p>
           <a:p>
@@ -5016,7 +5016,7 @@
                 </a:solidFill>
                 <a:latin typeface="Calibri"/>
               </a:rPr>
-              <a:t>•  ITC.NS sits furthest below its 52-week high, at -32.5%.</a:t>
+              <a:t>•  ITC.NS sits furthest below its 52-week high, at -32.8%.</a:t>
             </a:r>
           </a:p>
           <a:p>
@@ -5064,7 +5064,7 @@
                 </a:solidFill>
                 <a:latin typeface="Calibri"/>
               </a:rPr>
-              <a:t>•  Highest 30-day realised volatility: TCS.NS at 31.4% annualised.</a:t>
+              <a:t>•  Highest 30-day realised volatility: TCS.NS at 31.6% annualised.</a:t>
             </a:r>
           </a:p>
           <a:p>
@@ -5080,7 +5080,7 @@
                 </a:solidFill>
                 <a:latin typeface="Calibri"/>
               </a:rPr>
-              <a:t>•  60 headlines collected, 2 tagged to a watchlist name by substring match (unverified).</a:t>
+              <a:t>•  60 headlines collected, 3 tagged to a watchlist name by substring match (unverified).</a:t>
             </a:r>
           </a:p>
           <a:p>

--- a/public/deskbrief.pptx
+++ b/public/deskbrief.pptx
@@ -3128,7 +3128,7 @@
                 </a:solidFill>
                 <a:latin typeface="Calibri"/>
               </a:rPr>
-              <a:t>8 names  |  generated 26 Aug 2026 13:32  |  source: Yahoo Finance via yfinance, Indian financial RSS</a:t>
+              <a:t>8 names  |  generated 27 Aug 2026 22:27  |  source: Yahoo Finance via yfinance, Indian financial RSS</a:t>
             </a:r>
           </a:p>
         </p:txBody>
@@ -3566,7 +3566,7 @@
                           </a:solidFill>
                           <a:latin typeface="Calibri"/>
                         </a:rPr>
-                        <a:t>39.7</a:t>
+                        <a:t>39.2</a:t>
                       </a:r>
                     </a:p>
                   </a:txBody>
@@ -3752,7 +3752,7 @@
                           </a:solidFill>
                           <a:latin typeface="Calibri"/>
                         </a:rPr>
-                        <a:t>15.9</a:t>
+                        <a:t>15.5</a:t>
                       </a:r>
                     </a:p>
                   </a:txBody>
@@ -3938,7 +3938,7 @@
                           </a:solidFill>
                           <a:latin typeface="Calibri"/>
                         </a:rPr>
-                        <a:t>18.5</a:t>
+                        <a:t>18.7</a:t>
                       </a:r>
                     </a:p>
                   </a:txBody>
@@ -4124,7 +4124,7 @@
                           </a:solidFill>
                           <a:latin typeface="Calibri"/>
                         </a:rPr>
-                        <a:t>14.4</a:t>
+                        <a:t>14.3</a:t>
                       </a:r>
                     </a:p>
                   </a:txBody>
@@ -4310,7 +4310,7 @@
                           </a:solidFill>
                           <a:latin typeface="Calibri"/>
                         </a:rPr>
-                        <a:t>17.1</a:t>
+                        <a:t>17.0</a:t>
                       </a:r>
                     </a:p>
                   </a:txBody>
@@ -4496,7 +4496,7 @@
                           </a:solidFill>
                           <a:latin typeface="Calibri"/>
                         </a:rPr>
-                        <a:t>33.5</a:t>
+                        <a:t>33.4</a:t>
                       </a:r>
                     </a:p>
                   </a:txBody>
@@ -4682,7 +4682,7 @@
                           </a:solidFill>
                           <a:latin typeface="Calibri"/>
                         </a:rPr>
-                        <a:t>23.4</a:t>
+                        <a:t>23.2</a:t>
                       </a:r>
                     </a:p>
                   </a:txBody>
@@ -4868,7 +4868,7 @@
                           </a:solidFill>
                           <a:latin typeface="Calibri"/>
                         </a:rPr>
-                        <a:t>16.4</a:t>
+                        <a:t>16.3</a:t>
                       </a:r>
                     </a:p>
                   </a:txBody>
@@ -5080,7 +5080,7 @@
                 </a:solidFill>
                 <a:latin typeface="Calibri"/>
               </a:rPr>
-              <a:t>•  60 headlines collected, 3 tagged to a watchlist name by substring match (unverified).</a:t>
+              <a:t>•  60 headlines collected, 6 tagged to a watchlist name by substring match (unverified).</a:t>
             </a:r>
           </a:p>
           <a:p>

--- a/public/deskbrief.pptx
+++ b/public/deskbrief.pptx
@@ -3128,7 +3128,7 @@
                 </a:solidFill>
                 <a:latin typeface="Calibri"/>
               </a:rPr>
-              <a:t>8 names  |  generated 27 Aug 2026 22:27  |  source: Yahoo Finance via yfinance, Indian financial RSS</a:t>
+              <a:t>8 names  |  generated 28 Aug 2026 22:30  |  source: Yahoo Finance via yfinance, Indian financial RSS</a:t>
             </a:r>
           </a:p>
         </p:txBody>
@@ -3428,7 +3428,7 @@
                           </a:solidFill>
                           <a:latin typeface="Calibri"/>
                         </a:rPr>
-                        <a:t>1,902</a:t>
+                        <a:t>1,878</a:t>
                       </a:r>
                     </a:p>
                   </a:txBody>
@@ -3451,7 +3451,7 @@
                           </a:solidFill>
                           <a:latin typeface="Calibri"/>
                         </a:rPr>
-                        <a:t>-2.31%</a:t>
+                        <a:t>-1.25%</a:t>
                       </a:r>
                     </a:p>
                   </a:txBody>
@@ -3474,7 +3474,7 @@
                           </a:solidFill>
                           <a:latin typeface="Calibri"/>
                         </a:rPr>
-                        <a:t>-1.04%</a:t>
+                        <a:t>-3.27%</a:t>
                       </a:r>
                     </a:p>
                   </a:txBody>
@@ -3493,11 +3493,11 @@
                       <a:r>
                         <a:rPr sz="1000" b="0">
                           <a:solidFill>
-                            <a:srgbClr val="0B7A3B"/>
-                          </a:solidFill>
-                          <a:latin typeface="Calibri"/>
-                        </a:rPr>
-                        <a:t>+0.02%</a:t>
+                            <a:srgbClr val="B3261E"/>
+                          </a:solidFill>
+                          <a:latin typeface="Calibri"/>
+                        </a:rPr>
+                        <a:t>-3.69%</a:t>
                       </a:r>
                     </a:p>
                   </a:txBody>
@@ -3520,7 +3520,7 @@
                           </a:solidFill>
                           <a:latin typeface="Calibri"/>
                         </a:rPr>
-                        <a:t>-10.9%</a:t>
+                        <a:t>-12.1%</a:t>
                       </a:r>
                     </a:p>
                   </a:txBody>
@@ -3543,7 +3543,7 @@
                           </a:solidFill>
                           <a:latin typeface="Calibri"/>
                         </a:rPr>
-                        <a:t>18%</a:t>
+                        <a:t>19%</a:t>
                       </a:r>
                     </a:p>
                   </a:txBody>
@@ -3566,7 +3566,7 @@
                           </a:solidFill>
                           <a:latin typeface="Calibri"/>
                         </a:rPr>
-                        <a:t>39.2</a:t>
+                        <a:t>39.3</a:t>
                       </a:r>
                     </a:p>
                   </a:txBody>
@@ -3614,7 +3614,7 @@
                           </a:solidFill>
                           <a:latin typeface="Calibri"/>
                         </a:rPr>
-                        <a:t>727</a:t>
+                        <a:t>711</a:t>
                       </a:r>
                     </a:p>
                   </a:txBody>
@@ -3637,7 +3637,7 @@
                           </a:solidFill>
                           <a:latin typeface="Calibri"/>
                         </a:rPr>
-                        <a:t>-0.04%</a:t>
+                        <a:t>-2.23%</a:t>
                       </a:r>
                     </a:p>
                   </a:txBody>
@@ -3656,11 +3656,11 @@
                       <a:r>
                         <a:rPr sz="1000" b="0">
                           <a:solidFill>
-                            <a:srgbClr val="0B7A3B"/>
-                          </a:solidFill>
-                          <a:latin typeface="Calibri"/>
-                        </a:rPr>
-                        <a:t>+1.00%</a:t>
+                            <a:srgbClr val="B3261E"/>
+                          </a:solidFill>
+                          <a:latin typeface="Calibri"/>
+                        </a:rPr>
+                        <a:t>-1.94%</a:t>
                       </a:r>
                     </a:p>
                   </a:txBody>
@@ -3683,7 +3683,7 @@
                           </a:solidFill>
                           <a:latin typeface="Calibri"/>
                         </a:rPr>
-                        <a:t>-1.12%</a:t>
+                        <a:t>-4.97%</a:t>
                       </a:r>
                     </a:p>
                   </a:txBody>
@@ -3706,7 +3706,7 @@
                           </a:solidFill>
                           <a:latin typeface="Calibri"/>
                         </a:rPr>
-                        <a:t>-26.8%</a:t>
+                        <a:t>-28.4%</a:t>
                       </a:r>
                     </a:p>
                   </a:txBody>
@@ -3729,7 +3729,7 @@
                           </a:solidFill>
                           <a:latin typeface="Calibri"/>
                         </a:rPr>
-                        <a:t>19%</a:t>
+                        <a:t>20%</a:t>
                       </a:r>
                     </a:p>
                   </a:txBody>
@@ -3752,7 +3752,7 @@
                           </a:solidFill>
                           <a:latin typeface="Calibri"/>
                         </a:rPr>
-                        <a:t>15.5</a:t>
+                        <a:t>15.8</a:t>
                       </a:r>
                     </a:p>
                   </a:txBody>
@@ -3800,7 +3800,7 @@
                           </a:solidFill>
                           <a:latin typeface="Calibri"/>
                         </a:rPr>
-                        <a:t>1,430</a:t>
+                        <a:t>1,443</a:t>
                       </a:r>
                     </a:p>
                   </a:txBody>
@@ -3823,7 +3823,7 @@
                           </a:solidFill>
                           <a:latin typeface="Calibri"/>
                         </a:rPr>
-                        <a:t>+0.51%</a:t>
+                        <a:t>+0.91%</a:t>
                       </a:r>
                     </a:p>
                   </a:txBody>
@@ -3846,7 +3846,7 @@
                           </a:solidFill>
                           <a:latin typeface="Calibri"/>
                         </a:rPr>
-                        <a:t>+2.00%</a:t>
+                        <a:t>+2.20%</a:t>
                       </a:r>
                     </a:p>
                   </a:txBody>
@@ -3869,7 +3869,7 @@
                           </a:solidFill>
                           <a:latin typeface="Calibri"/>
                         </a:rPr>
-                        <a:t>+0.79%</a:t>
+                        <a:t>+1.20%</a:t>
                       </a:r>
                     </a:p>
                   </a:txBody>
@@ -3892,7 +3892,7 @@
                           </a:solidFill>
                           <a:latin typeface="Calibri"/>
                         </a:rPr>
-                        <a:t>-2.1%</a:t>
+                        <a:t>-1.2%</a:t>
                       </a:r>
                     </a:p>
                   </a:txBody>
@@ -3938,7 +3938,7 @@
                           </a:solidFill>
                           <a:latin typeface="Calibri"/>
                         </a:rPr>
-                        <a:t>18.7</a:t>
+                        <a:t>18.4</a:t>
                       </a:r>
                     </a:p>
                   </a:txBody>
@@ -3986,7 +3986,7 @@
                           </a:solidFill>
                           <a:latin typeface="Calibri"/>
                         </a:rPr>
-                        <a:t>1,120</a:t>
+                        <a:t>1,111</a:t>
                       </a:r>
                     </a:p>
                   </a:txBody>
@@ -4009,7 +4009,7 @@
                           </a:solidFill>
                           <a:latin typeface="Calibri"/>
                         </a:rPr>
-                        <a:t>-2.10%</a:t>
+                        <a:t>-0.82%</a:t>
                       </a:r>
                     </a:p>
                   </a:txBody>
@@ -4028,11 +4028,11 @@
                       <a:r>
                         <a:rPr sz="1000" b="0">
                           <a:solidFill>
-                            <a:srgbClr val="0B7A3B"/>
-                          </a:solidFill>
-                          <a:latin typeface="Calibri"/>
-                        </a:rPr>
-                        <a:t>+0.02%</a:t>
+                            <a:srgbClr val="B3261E"/>
+                          </a:solidFill>
+                          <a:latin typeface="Calibri"/>
+                        </a:rPr>
+                        <a:t>-1.70%</a:t>
                       </a:r>
                     </a:p>
                   </a:txBody>
@@ -4051,11 +4051,11 @@
                       <a:r>
                         <a:rPr sz="1000" b="0">
                           <a:solidFill>
-                            <a:srgbClr val="0B7A3B"/>
-                          </a:solidFill>
-                          <a:latin typeface="Calibri"/>
-                        </a:rPr>
-                        <a:t>+1.29%</a:t>
+                            <a:srgbClr val="B3261E"/>
+                          </a:solidFill>
+                          <a:latin typeface="Calibri"/>
+                        </a:rPr>
+                        <a:t>-3.88%</a:t>
                       </a:r>
                     </a:p>
                   </a:txBody>
@@ -4078,7 +4078,7 @@
                           </a:solidFill>
                           <a:latin typeface="Calibri"/>
                         </a:rPr>
-                        <a:t>-32.3%</a:t>
+                        <a:t>-32.8%</a:t>
                       </a:r>
                     </a:p>
                   </a:txBody>
@@ -4124,7 +4124,7 @@
                           </a:solidFill>
                           <a:latin typeface="Calibri"/>
                         </a:rPr>
-                        <a:t>14.3</a:t>
+                        <a:t>14.6</a:t>
                       </a:r>
                     </a:p>
                   </a:txBody>
@@ -4172,7 +4172,7 @@
                           </a:solidFill>
                           <a:latin typeface="Calibri"/>
                         </a:rPr>
-                        <a:t>270</a:t>
+                        <a:t>269</a:t>
                       </a:r>
                     </a:p>
                   </a:txBody>
@@ -4195,7 +4195,7 @@
                           </a:solidFill>
                           <a:latin typeface="Calibri"/>
                         </a:rPr>
-                        <a:t>-0.42%</a:t>
+                        <a:t>-0.46%</a:t>
                       </a:r>
                     </a:p>
                   </a:txBody>
@@ -4214,11 +4214,11 @@
                       <a:r>
                         <a:rPr sz="1000" b="0">
                           <a:solidFill>
-                            <a:srgbClr val="0B7A3B"/>
-                          </a:solidFill>
-                          <a:latin typeface="Calibri"/>
-                        </a:rPr>
-                        <a:t>+1.20%</a:t>
+                            <a:srgbClr val="B3261E"/>
+                          </a:solidFill>
+                          <a:latin typeface="Calibri"/>
+                        </a:rPr>
+                        <a:t>-0.98%</a:t>
                       </a:r>
                     </a:p>
                   </a:txBody>
@@ -4241,7 +4241,7 @@
                           </a:solidFill>
                           <a:latin typeface="Calibri"/>
                         </a:rPr>
-                        <a:t>-5.06%</a:t>
+                        <a:t>-6.03%</a:t>
                       </a:r>
                     </a:p>
                   </a:txBody>
@@ -4264,7 +4264,7 @@
                           </a:solidFill>
                           <a:latin typeface="Calibri"/>
                         </a:rPr>
-                        <a:t>-32.8%</a:t>
+                        <a:t>-33.1%</a:t>
                       </a:r>
                     </a:p>
                   </a:txBody>
@@ -4310,7 +4310,7 @@
                           </a:solidFill>
                           <a:latin typeface="Calibri"/>
                         </a:rPr>
-                        <a:t>17.0</a:t>
+                        <a:t>16.8</a:t>
                       </a:r>
                     </a:p>
                   </a:txBody>
@@ -4358,7 +4358,7 @@
                           </a:solidFill>
                           <a:latin typeface="Calibri"/>
                         </a:rPr>
-                        <a:t>4,038</a:t>
+                        <a:t>4,027</a:t>
                       </a:r>
                     </a:p>
                   </a:txBody>
@@ -4381,7 +4381,7 @@
                           </a:solidFill>
                           <a:latin typeface="Calibri"/>
                         </a:rPr>
-                        <a:t>-1.96%</a:t>
+                        <a:t>-0.27%</a:t>
                       </a:r>
                     </a:p>
                   </a:txBody>
@@ -4404,7 +4404,7 @@
                           </a:solidFill>
                           <a:latin typeface="Calibri"/>
                         </a:rPr>
-                        <a:t>-0.08%</a:t>
+                        <a:t>-1.32%</a:t>
                       </a:r>
                     </a:p>
                   </a:txBody>
@@ -4427,7 +4427,7 @@
                           </a:solidFill>
                           <a:latin typeface="Calibri"/>
                         </a:rPr>
-                        <a:t>+5.38%</a:t>
+                        <a:t>+2.43%</a:t>
                       </a:r>
                     </a:p>
                   </a:txBody>
@@ -4450,7 +4450,7 @@
                           </a:solidFill>
                           <a:latin typeface="Calibri"/>
                         </a:rPr>
-                        <a:t>-7.7%</a:t>
+                        <a:t>-8.0%</a:t>
                       </a:r>
                     </a:p>
                   </a:txBody>
@@ -4496,7 +4496,7 @@
                           </a:solidFill>
                           <a:latin typeface="Calibri"/>
                         </a:rPr>
-                        <a:t>33.4</a:t>
+                        <a:t>33.6</a:t>
                       </a:r>
                     </a:p>
                   </a:txBody>
@@ -4544,7 +4544,7 @@
                           </a:solidFill>
                           <a:latin typeface="Calibri"/>
                         </a:rPr>
-                        <a:t>1,298</a:t>
+                        <a:t>1,282</a:t>
                       </a:r>
                     </a:p>
                   </a:txBody>
@@ -4567,7 +4567,7 @@
                           </a:solidFill>
                           <a:latin typeface="Calibri"/>
                         </a:rPr>
-                        <a:t>-1.44%</a:t>
+                        <a:t>-1.22%</a:t>
                       </a:r>
                     </a:p>
                   </a:txBody>
@@ -4590,7 +4590,7 @@
                           </a:solidFill>
                           <a:latin typeface="Calibri"/>
                         </a:rPr>
-                        <a:t>-0.99%</a:t>
+                        <a:t>-2.36%</a:t>
                       </a:r>
                     </a:p>
                   </a:txBody>
@@ -4613,7 +4613,7 @@
                           </a:solidFill>
                           <a:latin typeface="Calibri"/>
                         </a:rPr>
-                        <a:t>+2.39%</a:t>
+                        <a:t>+0.49%</a:t>
                       </a:r>
                     </a:p>
                   </a:txBody>
@@ -4636,7 +4636,7 @@
                           </a:solidFill>
                           <a:latin typeface="Calibri"/>
                         </a:rPr>
-                        <a:t>-18.1%</a:t>
+                        <a:t>-19.1%</a:t>
                       </a:r>
                     </a:p>
                   </a:txBody>
@@ -4682,7 +4682,7 @@
                           </a:solidFill>
                           <a:latin typeface="Calibri"/>
                         </a:rPr>
-                        <a:t>23.2</a:t>
+                        <a:t>23.3</a:t>
                       </a:r>
                     </a:p>
                   </a:txBody>
@@ -4730,7 +4730,7 @@
                           </a:solidFill>
                           <a:latin typeface="Calibri"/>
                         </a:rPr>
-                        <a:t>2,270</a:t>
+                        <a:t>2,248</a:t>
                       </a:r>
                     </a:p>
                   </a:txBody>
@@ -4753,7 +4753,7 @@
                           </a:solidFill>
                           <a:latin typeface="Calibri"/>
                         </a:rPr>
-                        <a:t>-1.14%</a:t>
+                        <a:t>-0.95%</a:t>
                       </a:r>
                     </a:p>
                   </a:txBody>
@@ -4776,7 +4776,7 @@
                           </a:solidFill>
                           <a:latin typeface="Calibri"/>
                         </a:rPr>
-                        <a:t>-0.83%</a:t>
+                        <a:t>-2.16%</a:t>
                       </a:r>
                     </a:p>
                   </a:txBody>
@@ -4799,7 +4799,7 @@
                           </a:solidFill>
                           <a:latin typeface="Calibri"/>
                         </a:rPr>
-                        <a:t>-5.34%</a:t>
+                        <a:t>-8.10%</a:t>
                       </a:r>
                     </a:p>
                   </a:txBody>
@@ -4822,7 +4822,7 @@
                           </a:solidFill>
                           <a:latin typeface="Calibri"/>
                         </a:rPr>
-                        <a:t>-29.2%</a:t>
+                        <a:t>-29.8%</a:t>
                       </a:r>
                     </a:p>
                   </a:txBody>
@@ -4868,7 +4868,7 @@
                           </a:solidFill>
                           <a:latin typeface="Calibri"/>
                         </a:rPr>
-                        <a:t>16.3</a:t>
+                        <a:t>17.0</a:t>
                       </a:r>
                     </a:p>
                   </a:txBody>
@@ -4968,7 +4968,7 @@
                 </a:solidFill>
                 <a:latin typeface="Calibri"/>
               </a:rPr>
-              <a:t>•  Best performer on the day: ICICIBANK.NS at +0.51%.</a:t>
+              <a:t>•  Best performer on the day: ICICIBANK.NS at +0.91%.</a:t>
             </a:r>
           </a:p>
           <a:p>
@@ -4984,7 +4984,7 @@
                 </a:solidFill>
                 <a:latin typeface="Calibri"/>
               </a:rPr>
-              <a:t>•  Weakest on the day: BHARTIARTL.NS at -2.31%.</a:t>
+              <a:t>•  Weakest on the day: HDFCBANK.NS at -2.23%.</a:t>
             </a:r>
           </a:p>
           <a:p>
@@ -5000,7 +5000,7 @@
                 </a:solidFill>
                 <a:latin typeface="Calibri"/>
               </a:rPr>
-              <a:t>•  Median one-day move across the watchlist: -1.29%.</a:t>
+              <a:t>•  Median one-day move across the watchlist: -0.89%.</a:t>
             </a:r>
           </a:p>
           <a:p>
@@ -5016,7 +5016,7 @@
                 </a:solidFill>
                 <a:latin typeface="Calibri"/>
               </a:rPr>
-              <a:t>•  ITC.NS sits furthest below its 52-week high, at -32.8%.</a:t>
+              <a:t>•  ITC.NS sits furthest below its 52-week high, at -33.1%.</a:t>
             </a:r>
           </a:p>
           <a:p>
@@ -5064,7 +5064,7 @@
                 </a:solidFill>
                 <a:latin typeface="Calibri"/>
               </a:rPr>
-              <a:t>•  Highest 30-day realised volatility: TCS.NS at 31.6% annualised.</a:t>
+              <a:t>•  Highest 30-day realised volatility: TCS.NS at 31.7% annualised.</a:t>
             </a:r>
           </a:p>
           <a:p>

--- a/public/deskbrief.pptx
+++ b/public/deskbrief.pptx
@@ -3128,7 +3128,7 @@
                 </a:solidFill>
                 <a:latin typeface="Calibri"/>
               </a:rPr>
-              <a:t>8 names  |  generated 28 Aug 2026 22:30  |  source: Yahoo Finance via yfinance, Indian financial RSS</a:t>
+              <a:t>8 names  |  generated 31 Aug 2026 19:11  |  source: Yahoo Finance via yfinance, Indian financial RSS</a:t>
             </a:r>
           </a:p>
         </p:txBody>
@@ -3428,7 +3428,7 @@
                           </a:solidFill>
                           <a:latin typeface="Calibri"/>
                         </a:rPr>
-                        <a:t>1,878</a:t>
+                        <a:t>1,882</a:t>
                       </a:r>
                     </a:p>
                   </a:txBody>
@@ -3447,11 +3447,34 @@
                       <a:r>
                         <a:rPr sz="1000" b="0">
                           <a:solidFill>
+                            <a:srgbClr val="0B7A3B"/>
+                          </a:solidFill>
+                          <a:latin typeface="Calibri"/>
+                        </a:rPr>
+                        <a:t>+0.22%</a:t>
+                      </a:r>
+                    </a:p>
+                  </a:txBody>
+                  <a:tcPr>
+                    <a:solidFill>
+                      <a:srgbClr val="F3F5F7"/>
+                    </a:solidFill>
+                  </a:tcPr>
+                </a:tc>
+                <a:tc>
+                  <a:txBody>
+                    <a:bodyPr/>
+                    <a:lstStyle/>
+                    <a:p>
+                      <a:pPr algn="r"/>
+                      <a:r>
+                        <a:rPr sz="1000" b="0">
+                          <a:solidFill>
                             <a:srgbClr val="B3261E"/>
                           </a:solidFill>
                           <a:latin typeface="Calibri"/>
                         </a:rPr>
-                        <a:t>-1.25%</a:t>
+                        <a:t>-3.27%</a:t>
                       </a:r>
                     </a:p>
                   </a:txBody>
@@ -3474,7 +3497,7 @@
                           </a:solidFill>
                           <a:latin typeface="Calibri"/>
                         </a:rPr>
-                        <a:t>-3.27%</a:t>
+                        <a:t>-3.80%</a:t>
                       </a:r>
                     </a:p>
                   </a:txBody>
@@ -3493,11 +3516,11 @@
                       <a:r>
                         <a:rPr sz="1000" b="0">
                           <a:solidFill>
-                            <a:srgbClr val="B3261E"/>
-                          </a:solidFill>
-                          <a:latin typeface="Calibri"/>
-                        </a:rPr>
-                        <a:t>-3.69%</a:t>
+                            <a:srgbClr val="1F2A37"/>
+                          </a:solidFill>
+                          <a:latin typeface="Calibri"/>
+                        </a:rPr>
+                        <a:t>-11.9%</a:t>
                       </a:r>
                     </a:p>
                   </a:txBody>
@@ -3520,7 +3543,7 @@
                           </a:solidFill>
                           <a:latin typeface="Calibri"/>
                         </a:rPr>
-                        <a:t>-12.1%</a:t>
+                        <a:t>19%</a:t>
                       </a:r>
                     </a:p>
                   </a:txBody>
@@ -3543,30 +3566,7 @@
                           </a:solidFill>
                           <a:latin typeface="Calibri"/>
                         </a:rPr>
-                        <a:t>19%</a:t>
-                      </a:r>
-                    </a:p>
-                  </a:txBody>
-                  <a:tcPr>
-                    <a:solidFill>
-                      <a:srgbClr val="F3F5F7"/>
-                    </a:solidFill>
-                  </a:tcPr>
-                </a:tc>
-                <a:tc>
-                  <a:txBody>
-                    <a:bodyPr/>
-                    <a:lstStyle/>
-                    <a:p>
-                      <a:pPr algn="r"/>
-                      <a:r>
-                        <a:rPr sz="1000" b="0">
-                          <a:solidFill>
-                            <a:srgbClr val="1F2A37"/>
-                          </a:solidFill>
-                          <a:latin typeface="Calibri"/>
-                        </a:rPr>
-                        <a:t>39.3</a:t>
+                        <a:t>37.9</a:t>
                       </a:r>
                     </a:p>
                   </a:txBody>
@@ -3614,7 +3614,7 @@
                           </a:solidFill>
                           <a:latin typeface="Calibri"/>
                         </a:rPr>
-                        <a:t>711</a:t>
+                        <a:t>720</a:t>
                       </a:r>
                     </a:p>
                   </a:txBody>
@@ -3633,11 +3633,34 @@
                       <a:r>
                         <a:rPr sz="1000" b="0">
                           <a:solidFill>
+                            <a:srgbClr val="0B7A3B"/>
+                          </a:solidFill>
+                          <a:latin typeface="Calibri"/>
+                        </a:rPr>
+                        <a:t>+1.31%</a:t>
+                      </a:r>
+                    </a:p>
+                  </a:txBody>
+                  <a:tcPr>
+                    <a:solidFill>
+                      <a:srgbClr val="FFFFFF"/>
+                    </a:solidFill>
+                  </a:tcPr>
+                </a:tc>
+                <a:tc>
+                  <a:txBody>
+                    <a:bodyPr/>
+                    <a:lstStyle/>
+                    <a:p>
+                      <a:pPr algn="r"/>
+                      <a:r>
+                        <a:rPr sz="1000" b="0">
+                          <a:solidFill>
                             <a:srgbClr val="B3261E"/>
                           </a:solidFill>
                           <a:latin typeface="Calibri"/>
                         </a:rPr>
-                        <a:t>-2.23%</a:t>
+                        <a:t>-0.91%</a:t>
                       </a:r>
                     </a:p>
                   </a:txBody>
@@ -3660,7 +3683,7 @@
                           </a:solidFill>
                           <a:latin typeface="Calibri"/>
                         </a:rPr>
-                        <a:t>-1.94%</a:t>
+                        <a:t>-4.46%</a:t>
                       </a:r>
                     </a:p>
                   </a:txBody>
@@ -3679,11 +3702,11 @@
                       <a:r>
                         <a:rPr sz="1000" b="0">
                           <a:solidFill>
-                            <a:srgbClr val="B3261E"/>
-                          </a:solidFill>
-                          <a:latin typeface="Calibri"/>
-                        </a:rPr>
-                        <a:t>-4.97%</a:t>
+                            <a:srgbClr val="1F2A37"/>
+                          </a:solidFill>
+                          <a:latin typeface="Calibri"/>
+                        </a:rPr>
+                        <a:t>-27.5%</a:t>
                       </a:r>
                     </a:p>
                   </a:txBody>
@@ -3706,7 +3729,7 @@
                           </a:solidFill>
                           <a:latin typeface="Calibri"/>
                         </a:rPr>
-                        <a:t>-28.4%</a:t>
+                        <a:t>20%</a:t>
                       </a:r>
                     </a:p>
                   </a:txBody>
@@ -3729,30 +3752,7 @@
                           </a:solidFill>
                           <a:latin typeface="Calibri"/>
                         </a:rPr>
-                        <a:t>20%</a:t>
-                      </a:r>
-                    </a:p>
-                  </a:txBody>
-                  <a:tcPr>
-                    <a:solidFill>
-                      <a:srgbClr val="FFFFFF"/>
-                    </a:solidFill>
-                  </a:tcPr>
-                </a:tc>
-                <a:tc>
-                  <a:txBody>
-                    <a:bodyPr/>
-                    <a:lstStyle/>
-                    <a:p>
-                      <a:pPr algn="r"/>
-                      <a:r>
-                        <a:rPr sz="1000" b="0">
-                          <a:solidFill>
-                            <a:srgbClr val="1F2A37"/>
-                          </a:solidFill>
-                          <a:latin typeface="Calibri"/>
-                        </a:rPr>
-                        <a:t>15.8</a:t>
+                        <a:t>15.5</a:t>
                       </a:r>
                     </a:p>
                   </a:txBody>
@@ -3800,7 +3800,7 @@
                           </a:solidFill>
                           <a:latin typeface="Calibri"/>
                         </a:rPr>
-                        <a:t>1,443</a:t>
+                        <a:t>1,423</a:t>
                       </a:r>
                     </a:p>
                   </a:txBody>
@@ -3819,11 +3819,34 @@
                       <a:r>
                         <a:rPr sz="1000" b="0">
                           <a:solidFill>
+                            <a:srgbClr val="B3261E"/>
+                          </a:solidFill>
+                          <a:latin typeface="Calibri"/>
+                        </a:rPr>
+                        <a:t>-1.40%</a:t>
+                      </a:r>
+                    </a:p>
+                  </a:txBody>
+                  <a:tcPr>
+                    <a:solidFill>
+                      <a:srgbClr val="F3F5F7"/>
+                    </a:solidFill>
+                  </a:tcPr>
+                </a:tc>
+                <a:tc>
+                  <a:txBody>
+                    <a:bodyPr/>
+                    <a:lstStyle/>
+                    <a:p>
+                      <a:pPr algn="r"/>
+                      <a:r>
+                        <a:rPr sz="1000" b="0">
+                          <a:solidFill>
                             <a:srgbClr val="0B7A3B"/>
                           </a:solidFill>
                           <a:latin typeface="Calibri"/>
                         </a:rPr>
-                        <a:t>+0.91%</a:t>
+                        <a:t>+0.20%</a:t>
                       </a:r>
                     </a:p>
                   </a:txBody>
@@ -3846,7 +3869,7 @@
                           </a:solidFill>
                           <a:latin typeface="Calibri"/>
                         </a:rPr>
-                        <a:t>+2.20%</a:t>
+                        <a:t>+0.06%</a:t>
                       </a:r>
                     </a:p>
                   </a:txBody>
@@ -3865,11 +3888,11 @@
                       <a:r>
                         <a:rPr sz="1000" b="0">
                           <a:solidFill>
-                            <a:srgbClr val="0B7A3B"/>
-                          </a:solidFill>
-                          <a:latin typeface="Calibri"/>
-                        </a:rPr>
-                        <a:t>+1.20%</a:t>
+                            <a:srgbClr val="1F2A37"/>
+                          </a:solidFill>
+                          <a:latin typeface="Calibri"/>
+                        </a:rPr>
+                        <a:t>-2.5%</a:t>
                       </a:r>
                     </a:p>
                   </a:txBody>
@@ -3892,7 +3915,7 @@
                           </a:solidFill>
                           <a:latin typeface="Calibri"/>
                         </a:rPr>
-                        <a:t>-1.2%</a:t>
+                        <a:t>16%</a:t>
                       </a:r>
                     </a:p>
                   </a:txBody>
@@ -3915,30 +3938,7 @@
                           </a:solidFill>
                           <a:latin typeface="Calibri"/>
                         </a:rPr>
-                        <a:t>16%</a:t>
-                      </a:r>
-                    </a:p>
-                  </a:txBody>
-                  <a:tcPr>
-                    <a:solidFill>
-                      <a:srgbClr val="F3F5F7"/>
-                    </a:solidFill>
-                  </a:tcPr>
-                </a:tc>
-                <a:tc>
-                  <a:txBody>
-                    <a:bodyPr/>
-                    <a:lstStyle/>
-                    <a:p>
-                      <a:pPr algn="r"/>
-                      <a:r>
-                        <a:rPr sz="1000" b="0">
-                          <a:solidFill>
-                            <a:srgbClr val="1F2A37"/>
-                          </a:solidFill>
-                          <a:latin typeface="Calibri"/>
-                        </a:rPr>
-                        <a:t>18.4</a:t>
+                        <a:t>18.8</a:t>
                       </a:r>
                     </a:p>
                   </a:txBody>
@@ -3986,7 +3986,7 @@
                           </a:solidFill>
                           <a:latin typeface="Calibri"/>
                         </a:rPr>
-                        <a:t>1,111</a:t>
+                        <a:t>1,144</a:t>
                       </a:r>
                     </a:p>
                   </a:txBody>
@@ -4005,11 +4005,57 @@
                       <a:r>
                         <a:rPr sz="1000" b="0">
                           <a:solidFill>
+                            <a:srgbClr val="0B7A3B"/>
+                          </a:solidFill>
+                          <a:latin typeface="Calibri"/>
+                        </a:rPr>
+                        <a:t>+2.99%</a:t>
+                      </a:r>
+                    </a:p>
+                  </a:txBody>
+                  <a:tcPr>
+                    <a:solidFill>
+                      <a:srgbClr val="FFFFFF"/>
+                    </a:solidFill>
+                  </a:tcPr>
+                </a:tc>
+                <a:tc>
+                  <a:txBody>
+                    <a:bodyPr/>
+                    <a:lstStyle/>
+                    <a:p>
+                      <a:pPr algn="r"/>
+                      <a:r>
+                        <a:rPr sz="1000" b="0">
+                          <a:solidFill>
+                            <a:srgbClr val="0B7A3B"/>
+                          </a:solidFill>
+                          <a:latin typeface="Calibri"/>
+                        </a:rPr>
+                        <a:t>+2.05%</a:t>
+                      </a:r>
+                    </a:p>
+                  </a:txBody>
+                  <a:tcPr>
+                    <a:solidFill>
+                      <a:srgbClr val="FFFFFF"/>
+                    </a:solidFill>
+                  </a:tcPr>
+                </a:tc>
+                <a:tc>
+                  <a:txBody>
+                    <a:bodyPr/>
+                    <a:lstStyle/>
+                    <a:p>
+                      <a:pPr algn="r"/>
+                      <a:r>
+                        <a:rPr sz="1000" b="0">
+                          <a:solidFill>
                             <a:srgbClr val="B3261E"/>
                           </a:solidFill>
                           <a:latin typeface="Calibri"/>
                         </a:rPr>
-                        <a:t>-0.82%</a:t>
+                        <a:t>-0.96%</a:t>
                       </a:r>
                     </a:p>
                   </a:txBody>
@@ -4028,11 +4074,11 @@
                       <a:r>
                         <a:rPr sz="1000" b="0">
                           <a:solidFill>
-                            <a:srgbClr val="B3261E"/>
-                          </a:solidFill>
-                          <a:latin typeface="Calibri"/>
-                        </a:rPr>
-                        <a:t>-1.70%</a:t>
+                            <a:srgbClr val="1F2A37"/>
+                          </a:solidFill>
+                          <a:latin typeface="Calibri"/>
+                        </a:rPr>
+                        <a:t>-30.8%</a:t>
                       </a:r>
                     </a:p>
                   </a:txBody>
@@ -4051,11 +4097,11 @@
                       <a:r>
                         <a:rPr sz="1000" b="0">
                           <a:solidFill>
-                            <a:srgbClr val="B3261E"/>
-                          </a:solidFill>
-                          <a:latin typeface="Calibri"/>
-                        </a:rPr>
-                        <a:t>-3.88%</a:t>
+                            <a:srgbClr val="1F2A37"/>
+                          </a:solidFill>
+                          <a:latin typeface="Calibri"/>
+                        </a:rPr>
+                        <a:t>30%</a:t>
                       </a:r>
                     </a:p>
                   </a:txBody>
@@ -4078,53 +4124,7 @@
                           </a:solidFill>
                           <a:latin typeface="Calibri"/>
                         </a:rPr>
-                        <a:t>-32.8%</a:t>
-                      </a:r>
-                    </a:p>
-                  </a:txBody>
-                  <a:tcPr>
-                    <a:solidFill>
-                      <a:srgbClr val="FFFFFF"/>
-                    </a:solidFill>
-                  </a:tcPr>
-                </a:tc>
-                <a:tc>
-                  <a:txBody>
-                    <a:bodyPr/>
-                    <a:lstStyle/>
-                    <a:p>
-                      <a:pPr algn="r"/>
-                      <a:r>
-                        <a:rPr sz="1000" b="0">
-                          <a:solidFill>
-                            <a:srgbClr val="1F2A37"/>
-                          </a:solidFill>
-                          <a:latin typeface="Calibri"/>
-                        </a:rPr>
-                        <a:t>29%</a:t>
-                      </a:r>
-                    </a:p>
-                  </a:txBody>
-                  <a:tcPr>
-                    <a:solidFill>
-                      <a:srgbClr val="FFFFFF"/>
-                    </a:solidFill>
-                  </a:tcPr>
-                </a:tc>
-                <a:tc>
-                  <a:txBody>
-                    <a:bodyPr/>
-                    <a:lstStyle/>
-                    <a:p>
-                      <a:pPr algn="r"/>
-                      <a:r>
-                        <a:rPr sz="1000" b="0">
-                          <a:solidFill>
-                            <a:srgbClr val="1F2A37"/>
-                          </a:solidFill>
-                          <a:latin typeface="Calibri"/>
-                        </a:rPr>
-                        <a:t>14.6</a:t>
+                        <a:t>14.7</a:t>
                       </a:r>
                     </a:p>
                   </a:txBody>
@@ -4172,7 +4172,7 @@
                           </a:solidFill>
                           <a:latin typeface="Calibri"/>
                         </a:rPr>
-                        <a:t>269</a:t>
+                        <a:t>266</a:t>
                       </a:r>
                     </a:p>
                   </a:txBody>
@@ -4195,7 +4195,7 @@
                           </a:solidFill>
                           <a:latin typeface="Calibri"/>
                         </a:rPr>
-                        <a:t>-0.46%</a:t>
+                        <a:t>-1.12%</a:t>
                       </a:r>
                     </a:p>
                   </a:txBody>
@@ -4218,7 +4218,7 @@
                           </a:solidFill>
                           <a:latin typeface="Calibri"/>
                         </a:rPr>
-                        <a:t>-0.98%</a:t>
+                        <a:t>-1.26%</a:t>
                       </a:r>
                     </a:p>
                   </a:txBody>
@@ -4241,7 +4241,7 @@
                           </a:solidFill>
                           <a:latin typeface="Calibri"/>
                         </a:rPr>
-                        <a:t>-6.03%</a:t>
+                        <a:t>-6.68%</a:t>
                       </a:r>
                     </a:p>
                   </a:txBody>
@@ -4264,7 +4264,7 @@
                           </a:solidFill>
                           <a:latin typeface="Calibri"/>
                         </a:rPr>
-                        <a:t>-33.1%</a:t>
+                        <a:t>-33.8%</a:t>
                       </a:r>
                     </a:p>
                   </a:txBody>
@@ -4310,7 +4310,7 @@
                           </a:solidFill>
                           <a:latin typeface="Calibri"/>
                         </a:rPr>
-                        <a:t>16.8</a:t>
+                        <a:t>16.1</a:t>
                       </a:r>
                     </a:p>
                   </a:txBody>
@@ -4358,7 +4358,7 @@
                           </a:solidFill>
                           <a:latin typeface="Calibri"/>
                         </a:rPr>
-                        <a:t>4,027</a:t>
+                        <a:t>4,046</a:t>
                       </a:r>
                     </a:p>
                   </a:txBody>
@@ -4377,11 +4377,34 @@
                       <a:r>
                         <a:rPr sz="1000" b="0">
                           <a:solidFill>
+                            <a:srgbClr val="0B7A3B"/>
+                          </a:solidFill>
+                          <a:latin typeface="Calibri"/>
+                        </a:rPr>
+                        <a:t>+0.47%</a:t>
+                      </a:r>
+                    </a:p>
+                  </a:txBody>
+                  <a:tcPr>
+                    <a:solidFill>
+                      <a:srgbClr val="FFFFFF"/>
+                    </a:solidFill>
+                  </a:tcPr>
+                </a:tc>
+                <a:tc>
+                  <a:txBody>
+                    <a:bodyPr/>
+                    <a:lstStyle/>
+                    <a:p>
+                      <a:pPr algn="r"/>
+                      <a:r>
+                        <a:rPr sz="1000" b="0">
+                          <a:solidFill>
                             <a:srgbClr val="B3261E"/>
                           </a:solidFill>
                           <a:latin typeface="Calibri"/>
                         </a:rPr>
-                        <a:t>-0.27%</a:t>
+                        <a:t>-1.15%</a:t>
                       </a:r>
                     </a:p>
                   </a:txBody>
@@ -4400,11 +4423,11 @@
                       <a:r>
                         <a:rPr sz="1000" b="0">
                           <a:solidFill>
-                            <a:srgbClr val="B3261E"/>
-                          </a:solidFill>
-                          <a:latin typeface="Calibri"/>
-                        </a:rPr>
-                        <a:t>-1.32%</a:t>
+                            <a:srgbClr val="0B7A3B"/>
+                          </a:solidFill>
+                          <a:latin typeface="Calibri"/>
+                        </a:rPr>
+                        <a:t>+2.75%</a:t>
                       </a:r>
                     </a:p>
                   </a:txBody>
@@ -4423,34 +4446,11 @@
                       <a:r>
                         <a:rPr sz="1000" b="0">
                           <a:solidFill>
-                            <a:srgbClr val="0B7A3B"/>
-                          </a:solidFill>
-                          <a:latin typeface="Calibri"/>
-                        </a:rPr>
-                        <a:t>+2.43%</a:t>
-                      </a:r>
-                    </a:p>
-                  </a:txBody>
-                  <a:tcPr>
-                    <a:solidFill>
-                      <a:srgbClr val="FFFFFF"/>
-                    </a:solidFill>
-                  </a:tcPr>
-                </a:tc>
-                <a:tc>
-                  <a:txBody>
-                    <a:bodyPr/>
-                    <a:lstStyle/>
-                    <a:p>
-                      <a:pPr algn="r"/>
-                      <a:r>
-                        <a:rPr sz="1000" b="0">
-                          <a:solidFill>
                             <a:srgbClr val="1F2A37"/>
                           </a:solidFill>
                           <a:latin typeface="Calibri"/>
                         </a:rPr>
-                        <a:t>-8.0%</a:t>
+                        <a:t>-7.5%</a:t>
                       </a:r>
                     </a:p>
                   </a:txBody>
@@ -4544,7 +4544,7 @@
                           </a:solidFill>
                           <a:latin typeface="Calibri"/>
                         </a:rPr>
-                        <a:t>1,282</a:t>
+                        <a:t>1,287</a:t>
                       </a:r>
                     </a:p>
                   </a:txBody>
@@ -4563,11 +4563,34 @@
                       <a:r>
                         <a:rPr sz="1000" b="0">
                           <a:solidFill>
+                            <a:srgbClr val="0B7A3B"/>
+                          </a:solidFill>
+                          <a:latin typeface="Calibri"/>
+                        </a:rPr>
+                        <a:t>+0.37%</a:t>
+                      </a:r>
+                    </a:p>
+                  </a:txBody>
+                  <a:tcPr>
+                    <a:solidFill>
+                      <a:srgbClr val="F3F5F7"/>
+                    </a:solidFill>
+                  </a:tcPr>
+                </a:tc>
+                <a:tc>
+                  <a:txBody>
+                    <a:bodyPr/>
+                    <a:lstStyle/>
+                    <a:p>
+                      <a:pPr algn="r"/>
+                      <a:r>
+                        <a:rPr sz="1000" b="0">
+                          <a:solidFill>
                             <a:srgbClr val="B3261E"/>
                           </a:solidFill>
                           <a:latin typeface="Calibri"/>
                         </a:rPr>
-                        <a:t>-1.22%</a:t>
+                        <a:t>-2.20%</a:t>
                       </a:r>
                     </a:p>
                   </a:txBody>
@@ -4590,7 +4613,7 @@
                           </a:solidFill>
                           <a:latin typeface="Calibri"/>
                         </a:rPr>
-                        <a:t>-2.36%</a:t>
+                        <a:t>-0.46%</a:t>
                       </a:r>
                     </a:p>
                   </a:txBody>
@@ -4609,11 +4632,11 @@
                       <a:r>
                         <a:rPr sz="1000" b="0">
                           <a:solidFill>
-                            <a:srgbClr val="0B7A3B"/>
-                          </a:solidFill>
-                          <a:latin typeface="Calibri"/>
-                        </a:rPr>
-                        <a:t>+0.49%</a:t>
+                            <a:srgbClr val="1F2A37"/>
+                          </a:solidFill>
+                          <a:latin typeface="Calibri"/>
+                        </a:rPr>
+                        <a:t>-18.8%</a:t>
                       </a:r>
                     </a:p>
                   </a:txBody>
@@ -4636,7 +4659,7 @@
                           </a:solidFill>
                           <a:latin typeface="Calibri"/>
                         </a:rPr>
-                        <a:t>-19.1%</a:t>
+                        <a:t>18%</a:t>
                       </a:r>
                     </a:p>
                   </a:txBody>
@@ -4659,30 +4682,7 @@
                           </a:solidFill>
                           <a:latin typeface="Calibri"/>
                         </a:rPr>
-                        <a:t>19%</a:t>
-                      </a:r>
-                    </a:p>
-                  </a:txBody>
-                  <a:tcPr>
-                    <a:solidFill>
-                      <a:srgbClr val="F3F5F7"/>
-                    </a:solidFill>
-                  </a:tcPr>
-                </a:tc>
-                <a:tc>
-                  <a:txBody>
-                    <a:bodyPr/>
-                    <a:lstStyle/>
-                    <a:p>
-                      <a:pPr algn="r"/>
-                      <a:r>
-                        <a:rPr sz="1000" b="0">
-                          <a:solidFill>
-                            <a:srgbClr val="1F2A37"/>
-                          </a:solidFill>
-                          <a:latin typeface="Calibri"/>
-                        </a:rPr>
-                        <a:t>23.3</a:t>
+                        <a:t>23.1</a:t>
                       </a:r>
                     </a:p>
                   </a:txBody>
@@ -4730,7 +4730,7 @@
                           </a:solidFill>
                           <a:latin typeface="Calibri"/>
                         </a:rPr>
-                        <a:t>2,248</a:t>
+                        <a:t>2,342</a:t>
                       </a:r>
                     </a:p>
                   </a:txBody>
@@ -4749,11 +4749,57 @@
                       <a:r>
                         <a:rPr sz="1000" b="0">
                           <a:solidFill>
+                            <a:srgbClr val="0B7A3B"/>
+                          </a:solidFill>
+                          <a:latin typeface="Calibri"/>
+                        </a:rPr>
+                        <a:t>+4.16%</a:t>
+                      </a:r>
+                    </a:p>
+                  </a:txBody>
+                  <a:tcPr>
+                    <a:solidFill>
+                      <a:srgbClr val="FFFFFF"/>
+                    </a:solidFill>
+                  </a:tcPr>
+                </a:tc>
+                <a:tc>
+                  <a:txBody>
+                    <a:bodyPr/>
+                    <a:lstStyle/>
+                    <a:p>
+                      <a:pPr algn="r"/>
+                      <a:r>
+                        <a:rPr sz="1000" b="0">
+                          <a:solidFill>
+                            <a:srgbClr val="0B7A3B"/>
+                          </a:solidFill>
+                          <a:latin typeface="Calibri"/>
+                        </a:rPr>
+                        <a:t>+1.74%</a:t>
+                      </a:r>
+                    </a:p>
+                  </a:txBody>
+                  <a:tcPr>
+                    <a:solidFill>
+                      <a:srgbClr val="FFFFFF"/>
+                    </a:solidFill>
+                  </a:tcPr>
+                </a:tc>
+                <a:tc>
+                  <a:txBody>
+                    <a:bodyPr/>
+                    <a:lstStyle/>
+                    <a:p>
+                      <a:pPr algn="r"/>
+                      <a:r>
+                        <a:rPr sz="1000" b="0">
+                          <a:solidFill>
                             <a:srgbClr val="B3261E"/>
                           </a:solidFill>
                           <a:latin typeface="Calibri"/>
                         </a:rPr>
-                        <a:t>-0.95%</a:t>
+                        <a:t>-3.69%</a:t>
                       </a:r>
                     </a:p>
                   </a:txBody>
@@ -4772,11 +4818,11 @@
                       <a:r>
                         <a:rPr sz="1000" b="0">
                           <a:solidFill>
-                            <a:srgbClr val="B3261E"/>
-                          </a:solidFill>
-                          <a:latin typeface="Calibri"/>
-                        </a:rPr>
-                        <a:t>-2.16%</a:t>
+                            <a:srgbClr val="1F2A37"/>
+                          </a:solidFill>
+                          <a:latin typeface="Calibri"/>
+                        </a:rPr>
+                        <a:t>-26.9%</a:t>
                       </a:r>
                     </a:p>
                   </a:txBody>
@@ -4795,11 +4841,11 @@
                       <a:r>
                         <a:rPr sz="1000" b="0">
                           <a:solidFill>
-                            <a:srgbClr val="B3261E"/>
-                          </a:solidFill>
-                          <a:latin typeface="Calibri"/>
-                        </a:rPr>
-                        <a:t>-8.10%</a:t>
+                            <a:srgbClr val="1F2A37"/>
+                          </a:solidFill>
+                          <a:latin typeface="Calibri"/>
+                        </a:rPr>
+                        <a:t>33%</a:t>
                       </a:r>
                     </a:p>
                   </a:txBody>
@@ -4822,53 +4868,7 @@
                           </a:solidFill>
                           <a:latin typeface="Calibri"/>
                         </a:rPr>
-                        <a:t>-29.8%</a:t>
-                      </a:r>
-                    </a:p>
-                  </a:txBody>
-                  <a:tcPr>
-                    <a:solidFill>
-                      <a:srgbClr val="FFFFFF"/>
-                    </a:solidFill>
-                  </a:tcPr>
-                </a:tc>
-                <a:tc>
-                  <a:txBody>
-                    <a:bodyPr/>
-                    <a:lstStyle/>
-                    <a:p>
-                      <a:pPr algn="r"/>
-                      <a:r>
-                        <a:rPr sz="1000" b="0">
-                          <a:solidFill>
-                            <a:srgbClr val="1F2A37"/>
-                          </a:solidFill>
-                          <a:latin typeface="Calibri"/>
-                        </a:rPr>
-                        <a:t>32%</a:t>
-                      </a:r>
-                    </a:p>
-                  </a:txBody>
-                  <a:tcPr>
-                    <a:solidFill>
-                      <a:srgbClr val="FFFFFF"/>
-                    </a:solidFill>
-                  </a:tcPr>
-                </a:tc>
-                <a:tc>
-                  <a:txBody>
-                    <a:bodyPr/>
-                    <a:lstStyle/>
-                    <a:p>
-                      <a:pPr algn="r"/>
-                      <a:r>
-                        <a:rPr sz="1000" b="0">
-                          <a:solidFill>
-                            <a:srgbClr val="1F2A37"/>
-                          </a:solidFill>
-                          <a:latin typeface="Calibri"/>
-                        </a:rPr>
-                        <a:t>17.0</a:t>
+                        <a:t>17.4</a:t>
                       </a:r>
                     </a:p>
                   </a:txBody>
@@ -4952,7 +4952,7 @@
                 </a:solidFill>
                 <a:latin typeface="Calibri"/>
               </a:rPr>
-              <a:t>Breadth was risk-off: 1 of 8 names advanced on the day.</a:t>
+              <a:t>Breadth was risk-on: 6 of 8 names advanced on the day.</a:t>
             </a:r>
           </a:p>
           <a:p>
@@ -4968,7 +4968,7 @@
                 </a:solidFill>
                 <a:latin typeface="Calibri"/>
               </a:rPr>
-              <a:t>•  Best performer on the day: ICICIBANK.NS at +0.91%.</a:t>
+              <a:t>•  Best performer on the day: TCS.NS at +4.16%.</a:t>
             </a:r>
           </a:p>
           <a:p>
@@ -4984,7 +4984,7 @@
                 </a:solidFill>
                 <a:latin typeface="Calibri"/>
               </a:rPr>
-              <a:t>•  Weakest on the day: HDFCBANK.NS at -2.23%.</a:t>
+              <a:t>•  Weakest on the day: ICICIBANK.NS at -1.40%.</a:t>
             </a:r>
           </a:p>
           <a:p>
@@ -5000,7 +5000,7 @@
                 </a:solidFill>
                 <a:latin typeface="Calibri"/>
               </a:rPr>
-              <a:t>•  Median one-day move across the watchlist: -0.89%.</a:t>
+              <a:t>•  Median one-day move across the watchlist: +0.42%.</a:t>
             </a:r>
           </a:p>
           <a:p>
@@ -5016,7 +5016,7 @@
                 </a:solidFill>
                 <a:latin typeface="Calibri"/>
               </a:rPr>
-              <a:t>•  ITC.NS sits furthest below its 52-week high, at -33.1%.</a:t>
+              <a:t>•  ITC.NS sits furthest below its 52-week high, at -33.8%.</a:t>
             </a:r>
           </a:p>
           <a:p>
@@ -5064,7 +5064,7 @@
                 </a:solidFill>
                 <a:latin typeface="Calibri"/>
               </a:rPr>
-              <a:t>•  Highest 30-day realised volatility: TCS.NS at 31.7% annualised.</a:t>
+              <a:t>•  Highest 30-day realised volatility: TCS.NS at 32.7% annualised.</a:t>
             </a:r>
           </a:p>
           <a:p>
@@ -5080,7 +5080,7 @@
                 </a:solidFill>
                 <a:latin typeface="Calibri"/>
               </a:rPr>
-              <a:t>•  60 headlines collected, 6 tagged to a watchlist name by substring match (unverified).</a:t>
+              <a:t>•  60 headlines collected, 3 tagged to a watchlist name by substring match (unverified).</a:t>
             </a:r>
           </a:p>
           <a:p>

--- a/public/deskbrief.pptx
+++ b/public/deskbrief.pptx
@@ -3128,7 +3128,7 @@
                 </a:solidFill>
                 <a:latin typeface="Calibri"/>
               </a:rPr>
-              <a:t>8 names  |  generated 31 Aug 2026 19:11  |  source: Yahoo Finance via yfinance, Indian financial RSS</a:t>
+              <a:t>8 names  |  generated 01 Sep 2026 16:48  |  source: Yahoo Finance via yfinance, Indian financial RSS</a:t>
             </a:r>
           </a:p>
         </p:txBody>
@@ -3428,7 +3428,7 @@
                           </a:solidFill>
                           <a:latin typeface="Calibri"/>
                         </a:rPr>
-                        <a:t>1,882</a:t>
+                        <a:t>1,877</a:t>
                       </a:r>
                     </a:p>
                   </a:txBody>
@@ -3451,7 +3451,7 @@
                           </a:solidFill>
                           <a:latin typeface="Calibri"/>
                         </a:rPr>
-                        <a:t>+0.22%</a:t>
+                        <a:t>+3.60%</a:t>
                       </a:r>
                     </a:p>
                   </a:txBody>
@@ -3474,7 +3474,7 @@
                           </a:solidFill>
                           <a:latin typeface="Calibri"/>
                         </a:rPr>
-                        <a:t>-3.27%</a:t>
+                        <a:t>-3.59%</a:t>
                       </a:r>
                     </a:p>
                   </a:txBody>
@@ -3497,7 +3497,7 @@
                           </a:solidFill>
                           <a:latin typeface="Calibri"/>
                         </a:rPr>
-                        <a:t>-3.80%</a:t>
+                        <a:t>-4.73%</a:t>
                       </a:r>
                     </a:p>
                   </a:txBody>
@@ -3520,7 +3520,7 @@
                           </a:solidFill>
                           <a:latin typeface="Calibri"/>
                         </a:rPr>
-                        <a:t>-11.9%</a:t>
+                        <a:t>-12.1%</a:t>
                       </a:r>
                     </a:p>
                   </a:txBody>
@@ -3543,7 +3543,7 @@
                           </a:solidFill>
                           <a:latin typeface="Calibri"/>
                         </a:rPr>
-                        <a:t>19%</a:t>
+                        <a:t>24%</a:t>
                       </a:r>
                     </a:p>
                   </a:txBody>
@@ -3566,7 +3566,7 @@
                           </a:solidFill>
                           <a:latin typeface="Calibri"/>
                         </a:rPr>
-                        <a:t>37.9</a:t>
+                        <a:t>39.2</a:t>
                       </a:r>
                     </a:p>
                   </a:txBody>
@@ -3614,7 +3614,7 @@
                           </a:solidFill>
                           <a:latin typeface="Calibri"/>
                         </a:rPr>
-                        <a:t>720</a:t>
+                        <a:t>712</a:t>
                       </a:r>
                     </a:p>
                   </a:txBody>
@@ -3637,7 +3637,7 @@
                           </a:solidFill>
                           <a:latin typeface="Calibri"/>
                         </a:rPr>
-                        <a:t>+1.31%</a:t>
+                        <a:t>+0.41%</a:t>
                       </a:r>
                     </a:p>
                   </a:txBody>
@@ -3660,7 +3660,7 @@
                           </a:solidFill>
                           <a:latin typeface="Calibri"/>
                         </a:rPr>
-                        <a:t>-0.91%</a:t>
+                        <a:t>-2.14%</a:t>
                       </a:r>
                     </a:p>
                   </a:txBody>
@@ -3683,7 +3683,7 @@
                           </a:solidFill>
                           <a:latin typeface="Calibri"/>
                         </a:rPr>
-                        <a:t>-4.46%</a:t>
+                        <a:t>-5.46%</a:t>
                       </a:r>
                     </a:p>
                   </a:txBody>
@@ -3706,7 +3706,7 @@
                           </a:solidFill>
                           <a:latin typeface="Calibri"/>
                         </a:rPr>
-                        <a:t>-27.5%</a:t>
+                        <a:t>-28.3%</a:t>
                       </a:r>
                     </a:p>
                   </a:txBody>
@@ -3729,7 +3729,7 @@
                           </a:solidFill>
                           <a:latin typeface="Calibri"/>
                         </a:rPr>
-                        <a:t>20%</a:t>
+                        <a:t>13%</a:t>
                       </a:r>
                     </a:p>
                   </a:txBody>
@@ -3752,7 +3752,7 @@
                           </a:solidFill>
                           <a:latin typeface="Calibri"/>
                         </a:rPr>
-                        <a:t>15.5</a:t>
+                        <a:t>15.6</a:t>
                       </a:r>
                     </a:p>
                   </a:txBody>
@@ -3800,7 +3800,7 @@
                           </a:solidFill>
                           <a:latin typeface="Calibri"/>
                         </a:rPr>
-                        <a:t>1,423</a:t>
+                        <a:t>1,438</a:t>
                       </a:r>
                     </a:p>
                   </a:txBody>
@@ -3823,7 +3823,7 @@
                           </a:solidFill>
                           <a:latin typeface="Calibri"/>
                         </a:rPr>
-                        <a:t>-1.40%</a:t>
+                        <a:t>-1.10%</a:t>
                       </a:r>
                     </a:p>
                   </a:txBody>
@@ -3846,7 +3846,7 @@
                           </a:solidFill>
                           <a:latin typeface="Calibri"/>
                         </a:rPr>
-                        <a:t>+0.20%</a:t>
+                        <a:t>+1.08%</a:t>
                       </a:r>
                     </a:p>
                   </a:txBody>
@@ -3865,11 +3865,11 @@
                       <a:r>
                         <a:rPr sz="1000" b="0">
                           <a:solidFill>
-                            <a:srgbClr val="0B7A3B"/>
-                          </a:solidFill>
-                          <a:latin typeface="Calibri"/>
-                        </a:rPr>
-                        <a:t>+0.06%</a:t>
+                            <a:srgbClr val="B3261E"/>
+                          </a:solidFill>
+                          <a:latin typeface="Calibri"/>
+                        </a:rPr>
+                        <a:t>-1.51%</a:t>
                       </a:r>
                     </a:p>
                   </a:txBody>
@@ -3892,7 +3892,7 @@
                           </a:solidFill>
                           <a:latin typeface="Calibri"/>
                         </a:rPr>
-                        <a:t>-2.5%</a:t>
+                        <a:t>-1.5%</a:t>
                       </a:r>
                     </a:p>
                   </a:txBody>
@@ -3915,7 +3915,7 @@
                           </a:solidFill>
                           <a:latin typeface="Calibri"/>
                         </a:rPr>
-                        <a:t>16%</a:t>
+                        <a:t>17%</a:t>
                       </a:r>
                     </a:p>
                   </a:txBody>
@@ -3938,7 +3938,7 @@
                           </a:solidFill>
                           <a:latin typeface="Calibri"/>
                         </a:rPr>
-                        <a:t>18.8</a:t>
+                        <a:t>18.6</a:t>
                       </a:r>
                     </a:p>
                   </a:txBody>
@@ -3986,7 +3986,7 @@
                           </a:solidFill>
                           <a:latin typeface="Calibri"/>
                         </a:rPr>
-                        <a:t>1,144</a:t>
+                        <a:t>1,156</a:t>
                       </a:r>
                     </a:p>
                   </a:txBody>
@@ -4009,7 +4009,7 @@
                           </a:solidFill>
                           <a:latin typeface="Calibri"/>
                         </a:rPr>
-                        <a:t>+2.99%</a:t>
+                        <a:t>+1.96%</a:t>
                       </a:r>
                     </a:p>
                   </a:txBody>
@@ -4032,7 +4032,7 @@
                           </a:solidFill>
                           <a:latin typeface="Calibri"/>
                         </a:rPr>
-                        <a:t>+2.05%</a:t>
+                        <a:t>+1.05%</a:t>
                       </a:r>
                     </a:p>
                   </a:txBody>
@@ -4055,7 +4055,7 @@
                           </a:solidFill>
                           <a:latin typeface="Calibri"/>
                         </a:rPr>
-                        <a:t>-0.96%</a:t>
+                        <a:t>-2.03%</a:t>
                       </a:r>
                     </a:p>
                   </a:txBody>
@@ -4078,7 +4078,7 @@
                           </a:solidFill>
                           <a:latin typeface="Calibri"/>
                         </a:rPr>
-                        <a:t>-30.8%</a:t>
+                        <a:t>-30.1%</a:t>
                       </a:r>
                     </a:p>
                   </a:txBody>
@@ -4124,7 +4124,7 @@
                           </a:solidFill>
                           <a:latin typeface="Calibri"/>
                         </a:rPr>
-                        <a:t>14.7</a:t>
+                        <a:t>15.0</a:t>
                       </a:r>
                     </a:p>
                   </a:txBody>
@@ -4172,7 +4172,7 @@
                           </a:solidFill>
                           <a:latin typeface="Calibri"/>
                         </a:rPr>
-                        <a:t>266</a:t>
+                        <a:t>267</a:t>
                       </a:r>
                     </a:p>
                   </a:txBody>
@@ -4191,11 +4191,34 @@
                       <a:r>
                         <a:rPr sz="1000" b="0">
                           <a:solidFill>
+                            <a:srgbClr val="0B7A3B"/>
+                          </a:solidFill>
+                          <a:latin typeface="Calibri"/>
+                        </a:rPr>
+                        <a:t>+4.34%</a:t>
+                      </a:r>
+                    </a:p>
+                  </a:txBody>
+                  <a:tcPr>
+                    <a:solidFill>
+                      <a:srgbClr val="F3F5F7"/>
+                    </a:solidFill>
+                  </a:tcPr>
+                </a:tc>
+                <a:tc>
+                  <a:txBody>
+                    <a:bodyPr/>
+                    <a:lstStyle/>
+                    <a:p>
+                      <a:pPr algn="r"/>
+                      <a:r>
+                        <a:rPr sz="1000" b="0">
+                          <a:solidFill>
                             <a:srgbClr val="B3261E"/>
                           </a:solidFill>
                           <a:latin typeface="Calibri"/>
                         </a:rPr>
-                        <a:t>-1.12%</a:t>
+                        <a:t>-1.77%</a:t>
                       </a:r>
                     </a:p>
                   </a:txBody>
@@ -4218,7 +4241,7 @@
                           </a:solidFill>
                           <a:latin typeface="Calibri"/>
                         </a:rPr>
-                        <a:t>-1.26%</a:t>
+                        <a:t>-7.11%</a:t>
                       </a:r>
                     </a:p>
                   </a:txBody>
@@ -4237,11 +4260,11 @@
                       <a:r>
                         <a:rPr sz="1000" b="0">
                           <a:solidFill>
-                            <a:srgbClr val="B3261E"/>
-                          </a:solidFill>
-                          <a:latin typeface="Calibri"/>
-                        </a:rPr>
-                        <a:t>-6.68%</a:t>
+                            <a:srgbClr val="1F2A37"/>
+                          </a:solidFill>
+                          <a:latin typeface="Calibri"/>
+                        </a:rPr>
+                        <a:t>-33.7%</a:t>
                       </a:r>
                     </a:p>
                   </a:txBody>
@@ -4264,7 +4287,7 @@
                           </a:solidFill>
                           <a:latin typeface="Calibri"/>
                         </a:rPr>
-                        <a:t>-33.8%</a:t>
+                        <a:t>23%</a:t>
                       </a:r>
                     </a:p>
                   </a:txBody>
@@ -4287,30 +4310,7 @@
                           </a:solidFill>
                           <a:latin typeface="Calibri"/>
                         </a:rPr>
-                        <a:t>15%</a:t>
-                      </a:r>
-                    </a:p>
-                  </a:txBody>
-                  <a:tcPr>
-                    <a:solidFill>
-                      <a:srgbClr val="F3F5F7"/>
-                    </a:solidFill>
-                  </a:tcPr>
-                </a:tc>
-                <a:tc>
-                  <a:txBody>
-                    <a:bodyPr/>
-                    <a:lstStyle/>
-                    <a:p>
-                      <a:pPr algn="r"/>
-                      <a:r>
-                        <a:rPr sz="1000" b="0">
-                          <a:solidFill>
-                            <a:srgbClr val="1F2A37"/>
-                          </a:solidFill>
-                          <a:latin typeface="Calibri"/>
-                        </a:rPr>
-                        <a:t>16.1</a:t>
+                        <a:t>16.8</a:t>
                       </a:r>
                     </a:p>
                   </a:txBody>
@@ -4358,7 +4358,7 @@
                           </a:solidFill>
                           <a:latin typeface="Calibri"/>
                         </a:rPr>
-                        <a:t>4,046</a:t>
+                        <a:t>3,980</a:t>
                       </a:r>
                     </a:p>
                   </a:txBody>
@@ -4377,11 +4377,11 @@
                       <a:r>
                         <a:rPr sz="1000" b="0">
                           <a:solidFill>
-                            <a:srgbClr val="0B7A3B"/>
-                          </a:solidFill>
-                          <a:latin typeface="Calibri"/>
-                        </a:rPr>
-                        <a:t>+0.47%</a:t>
+                            <a:srgbClr val="B3261E"/>
+                          </a:solidFill>
+                          <a:latin typeface="Calibri"/>
+                        </a:rPr>
+                        <a:t>-1.60%</a:t>
                       </a:r>
                     </a:p>
                   </a:txBody>
@@ -4404,7 +4404,7 @@
                           </a:solidFill>
                           <a:latin typeface="Calibri"/>
                         </a:rPr>
-                        <a:t>-1.15%</a:t>
+                        <a:t>-3.37%</a:t>
                       </a:r>
                     </a:p>
                   </a:txBody>
@@ -4423,11 +4423,11 @@
                       <a:r>
                         <a:rPr sz="1000" b="0">
                           <a:solidFill>
-                            <a:srgbClr val="0B7A3B"/>
-                          </a:solidFill>
-                          <a:latin typeface="Calibri"/>
-                        </a:rPr>
-                        <a:t>+2.75%</a:t>
+                            <a:srgbClr val="B3261E"/>
+                          </a:solidFill>
+                          <a:latin typeface="Calibri"/>
+                        </a:rPr>
+                        <a:t>-1.12%</a:t>
                       </a:r>
                     </a:p>
                   </a:txBody>
@@ -4450,7 +4450,7 @@
                           </a:solidFill>
                           <a:latin typeface="Calibri"/>
                         </a:rPr>
-                        <a:t>-7.5%</a:t>
+                        <a:t>-9.0%</a:t>
                       </a:r>
                     </a:p>
                   </a:txBody>
@@ -4473,7 +4473,7 @@
                           </a:solidFill>
                           <a:latin typeface="Calibri"/>
                         </a:rPr>
-                        <a:t>15%</a:t>
+                        <a:t>16%</a:t>
                       </a:r>
                     </a:p>
                   </a:txBody>
@@ -4496,7 +4496,7 @@
                           </a:solidFill>
                           <a:latin typeface="Calibri"/>
                         </a:rPr>
-                        <a:t>33.6</a:t>
+                        <a:t>33.0</a:t>
                       </a:r>
                     </a:p>
                   </a:txBody>
@@ -4544,7 +4544,7 @@
                           </a:solidFill>
                           <a:latin typeface="Calibri"/>
                         </a:rPr>
-                        <a:t>1,287</a:t>
+                        <a:t>1,309</a:t>
                       </a:r>
                     </a:p>
                   </a:txBody>
@@ -4567,7 +4567,7 @@
                           </a:solidFill>
                           <a:latin typeface="Calibri"/>
                         </a:rPr>
-                        <a:t>+0.37%</a:t>
+                        <a:t>+2.51%</a:t>
                       </a:r>
                     </a:p>
                   </a:txBody>
@@ -4590,7 +4590,7 @@
                           </a:solidFill>
                           <a:latin typeface="Calibri"/>
                         </a:rPr>
-                        <a:t>-2.20%</a:t>
+                        <a:t>-0.61%</a:t>
                       </a:r>
                     </a:p>
                   </a:txBody>
@@ -4613,7 +4613,7 @@
                           </a:solidFill>
                           <a:latin typeface="Calibri"/>
                         </a:rPr>
-                        <a:t>-0.46%</a:t>
+                        <a:t>-0.76%</a:t>
                       </a:r>
                     </a:p>
                   </a:txBody>
@@ -4636,7 +4636,7 @@
                           </a:solidFill>
                           <a:latin typeface="Calibri"/>
                         </a:rPr>
-                        <a:t>-18.8%</a:t>
+                        <a:t>-17.4%</a:t>
                       </a:r>
                     </a:p>
                   </a:txBody>
@@ -4659,7 +4659,7 @@
                           </a:solidFill>
                           <a:latin typeface="Calibri"/>
                         </a:rPr>
-                        <a:t>18%</a:t>
+                        <a:t>19%</a:t>
                       </a:r>
                     </a:p>
                   </a:txBody>
@@ -4682,7 +4682,7 @@
                           </a:solidFill>
                           <a:latin typeface="Calibri"/>
                         </a:rPr>
-                        <a:t>23.1</a:t>
+                        <a:t>23.7</a:t>
                       </a:r>
                     </a:p>
                   </a:txBody>
@@ -4730,7 +4730,7 @@
                           </a:solidFill>
                           <a:latin typeface="Calibri"/>
                         </a:rPr>
-                        <a:t>2,342</a:t>
+                        <a:t>2,369</a:t>
                       </a:r>
                     </a:p>
                   </a:txBody>
@@ -4749,11 +4749,34 @@
                       <a:r>
                         <a:rPr sz="1000" b="0">
                           <a:solidFill>
+                            <a:srgbClr val="B3261E"/>
+                          </a:solidFill>
+                          <a:latin typeface="Calibri"/>
+                        </a:rPr>
+                        <a:t>-1.26%</a:t>
+                      </a:r>
+                    </a:p>
+                  </a:txBody>
+                  <a:tcPr>
+                    <a:solidFill>
+                      <a:srgbClr val="FFFFFF"/>
+                    </a:solidFill>
+                  </a:tcPr>
+                </a:tc>
+                <a:tc>
+                  <a:txBody>
+                    <a:bodyPr/>
+                    <a:lstStyle/>
+                    <a:p>
+                      <a:pPr algn="r"/>
+                      <a:r>
+                        <a:rPr sz="1000" b="0">
+                          <a:solidFill>
                             <a:srgbClr val="0B7A3B"/>
                           </a:solidFill>
                           <a:latin typeface="Calibri"/>
                         </a:rPr>
-                        <a:t>+4.16%</a:t>
+                        <a:t>+3.17%</a:t>
                       </a:r>
                     </a:p>
                   </a:txBody>
@@ -4772,11 +4795,11 @@
                       <a:r>
                         <a:rPr sz="1000" b="0">
                           <a:solidFill>
-                            <a:srgbClr val="0B7A3B"/>
-                          </a:solidFill>
-                          <a:latin typeface="Calibri"/>
-                        </a:rPr>
-                        <a:t>+1.74%</a:t>
+                            <a:srgbClr val="B3261E"/>
+                          </a:solidFill>
+                          <a:latin typeface="Calibri"/>
+                        </a:rPr>
+                        <a:t>-4.23%</a:t>
                       </a:r>
                     </a:p>
                   </a:txBody>
@@ -4795,11 +4818,11 @@
                       <a:r>
                         <a:rPr sz="1000" b="0">
                           <a:solidFill>
-                            <a:srgbClr val="B3261E"/>
-                          </a:solidFill>
-                          <a:latin typeface="Calibri"/>
-                        </a:rPr>
-                        <a:t>-3.69%</a:t>
+                            <a:srgbClr val="1F2A37"/>
+                          </a:solidFill>
+                          <a:latin typeface="Calibri"/>
+                        </a:rPr>
+                        <a:t>-26.1%</a:t>
                       </a:r>
                     </a:p>
                   </a:txBody>
@@ -4822,7 +4845,7 @@
                           </a:solidFill>
                           <a:latin typeface="Calibri"/>
                         </a:rPr>
-                        <a:t>-26.9%</a:t>
+                        <a:t>33%</a:t>
                       </a:r>
                     </a:p>
                   </a:txBody>
@@ -4845,30 +4868,7 @@
                           </a:solidFill>
                           <a:latin typeface="Calibri"/>
                         </a:rPr>
-                        <a:t>33%</a:t>
-                      </a:r>
-                    </a:p>
-                  </a:txBody>
-                  <a:tcPr>
-                    <a:solidFill>
-                      <a:srgbClr val="FFFFFF"/>
-                    </a:solidFill>
-                  </a:tcPr>
-                </a:tc>
-                <a:tc>
-                  <a:txBody>
-                    <a:bodyPr/>
-                    <a:lstStyle/>
-                    <a:p>
-                      <a:pPr algn="r"/>
-                      <a:r>
-                        <a:rPr sz="1000" b="0">
-                          <a:solidFill>
-                            <a:srgbClr val="1F2A37"/>
-                          </a:solidFill>
-                          <a:latin typeface="Calibri"/>
-                        </a:rPr>
-                        <a:t>17.4</a:t>
+                        <a:t>17.2</a:t>
                       </a:r>
                     </a:p>
                   </a:txBody>
@@ -4952,7 +4952,7 @@
                 </a:solidFill>
                 <a:latin typeface="Calibri"/>
               </a:rPr>
-              <a:t>Breadth was risk-on: 6 of 8 names advanced on the day.</a:t>
+              <a:t>Breadth was risk-on: 5 of 8 names advanced on the day.</a:t>
             </a:r>
           </a:p>
           <a:p>
@@ -4968,7 +4968,7 @@
                 </a:solidFill>
                 <a:latin typeface="Calibri"/>
               </a:rPr>
-              <a:t>•  Best performer on the day: TCS.NS at +4.16%.</a:t>
+              <a:t>•  Best performer on the day: ITC.NS at +4.34%.</a:t>
             </a:r>
           </a:p>
           <a:p>
@@ -4984,7 +4984,7 @@
                 </a:solidFill>
                 <a:latin typeface="Calibri"/>
               </a:rPr>
-              <a:t>•  Weakest on the day: ICICIBANK.NS at -1.40%.</a:t>
+              <a:t>•  Weakest on the day: LT.NS at -1.60%.</a:t>
             </a:r>
           </a:p>
           <a:p>
@@ -5000,7 +5000,7 @@
                 </a:solidFill>
                 <a:latin typeface="Calibri"/>
               </a:rPr>
-              <a:t>•  Median one-day move across the watchlist: +0.42%.</a:t>
+              <a:t>•  Median one-day move across the watchlist: +1.18%.</a:t>
             </a:r>
           </a:p>
           <a:p>
@@ -5016,7 +5016,7 @@
                 </a:solidFill>
                 <a:latin typeface="Calibri"/>
               </a:rPr>
-              <a:t>•  ITC.NS sits furthest below its 52-week high, at -33.8%.</a:t>
+              <a:t>•  ITC.NS sits furthest below its 52-week high, at -33.7%.</a:t>
             </a:r>
           </a:p>
           <a:p>
@@ -5064,7 +5064,7 @@
                 </a:solidFill>
                 <a:latin typeface="Calibri"/>
               </a:rPr>
-              <a:t>•  Highest 30-day realised volatility: TCS.NS at 32.7% annualised.</a:t>
+              <a:t>•  Highest 30-day realised volatility: TCS.NS at 33.2% annualised.</a:t>
             </a:r>
           </a:p>
           <a:p>

--- a/public/deskbrief.pptx
+++ b/public/deskbrief.pptx
@@ -3128,7 +3128,7 @@
                 </a:solidFill>
                 <a:latin typeface="Calibri"/>
               </a:rPr>
-              <a:t>8 names  |  generated 01 Sep 2026 16:48  |  source: Yahoo Finance via yfinance, Indian financial RSS</a:t>
+              <a:t>8 names  |  generated 02 Sep 2026 16:44  |  source: Yahoo Finance via yfinance, Indian financial RSS</a:t>
             </a:r>
           </a:p>
         </p:txBody>
@@ -3428,7 +3428,7 @@
                           </a:solidFill>
                           <a:latin typeface="Calibri"/>
                         </a:rPr>
-                        <a:t>1,877</a:t>
+                        <a:t>1,863</a:t>
                       </a:r>
                     </a:p>
                   </a:txBody>
@@ -3447,11 +3447,11 @@
                       <a:r>
                         <a:rPr sz="1000" b="0">
                           <a:solidFill>
-                            <a:srgbClr val="0B7A3B"/>
-                          </a:solidFill>
-                          <a:latin typeface="Calibri"/>
-                        </a:rPr>
-                        <a:t>+3.60%</a:t>
+                            <a:srgbClr val="B3261E"/>
+                          </a:solidFill>
+                          <a:latin typeface="Calibri"/>
+                        </a:rPr>
+                        <a:t>-0.77%</a:t>
                       </a:r>
                     </a:p>
                   </a:txBody>
@@ -3474,7 +3474,7 @@
                           </a:solidFill>
                           <a:latin typeface="Calibri"/>
                         </a:rPr>
-                        <a:t>-3.59%</a:t>
+                        <a:t>-2.07%</a:t>
                       </a:r>
                     </a:p>
                   </a:txBody>
@@ -3497,7 +3497,7 @@
                           </a:solidFill>
                           <a:latin typeface="Calibri"/>
                         </a:rPr>
-                        <a:t>-4.73%</a:t>
+                        <a:t>-5.45%</a:t>
                       </a:r>
                     </a:p>
                   </a:txBody>
@@ -3520,7 +3520,7 @@
                           </a:solidFill>
                           <a:latin typeface="Calibri"/>
                         </a:rPr>
-                        <a:t>-12.1%</a:t>
+                        <a:t>-12.8%</a:t>
                       </a:r>
                     </a:p>
                   </a:txBody>
@@ -3566,7 +3566,7 @@
                           </a:solidFill>
                           <a:latin typeface="Calibri"/>
                         </a:rPr>
-                        <a:t>39.2</a:t>
+                        <a:t>38.9</a:t>
                       </a:r>
                     </a:p>
                   </a:txBody>
@@ -3614,7 +3614,7 @@
                           </a:solidFill>
                           <a:latin typeface="Calibri"/>
                         </a:rPr>
-                        <a:t>712</a:t>
+                        <a:t>701</a:t>
                       </a:r>
                     </a:p>
                   </a:txBody>
@@ -3633,11 +3633,11 @@
                       <a:r>
                         <a:rPr sz="1000" b="0">
                           <a:solidFill>
-                            <a:srgbClr val="0B7A3B"/>
-                          </a:solidFill>
-                          <a:latin typeface="Calibri"/>
-                        </a:rPr>
-                        <a:t>+0.41%</a:t>
+                            <a:srgbClr val="B3261E"/>
+                          </a:solidFill>
+                          <a:latin typeface="Calibri"/>
+                        </a:rPr>
+                        <a:t>-1.56%</a:t>
                       </a:r>
                     </a:p>
                   </a:txBody>
@@ -3660,7 +3660,7 @@
                           </a:solidFill>
                           <a:latin typeface="Calibri"/>
                         </a:rPr>
-                        <a:t>-2.14%</a:t>
+                        <a:t>-3.63%</a:t>
                       </a:r>
                     </a:p>
                   </a:txBody>
@@ -3683,7 +3683,7 @@
                           </a:solidFill>
                           <a:latin typeface="Calibri"/>
                         </a:rPr>
-                        <a:t>-5.46%</a:t>
+                        <a:t>-5.55%</a:t>
                       </a:r>
                     </a:p>
                   </a:txBody>
@@ -3706,7 +3706,7 @@
                           </a:solidFill>
                           <a:latin typeface="Calibri"/>
                         </a:rPr>
-                        <a:t>-28.3%</a:t>
+                        <a:t>-29.4%</a:t>
                       </a:r>
                     </a:p>
                   </a:txBody>
@@ -3729,7 +3729,7 @@
                           </a:solidFill>
                           <a:latin typeface="Calibri"/>
                         </a:rPr>
-                        <a:t>13%</a:t>
+                        <a:t>14%</a:t>
                       </a:r>
                     </a:p>
                   </a:txBody>
@@ -3752,7 +3752,7 @@
                           </a:solidFill>
                           <a:latin typeface="Calibri"/>
                         </a:rPr>
-                        <a:t>15.6</a:t>
+                        <a:t>15.3</a:t>
                       </a:r>
                     </a:p>
                   </a:txBody>
@@ -3800,7 +3800,7 @@
                           </a:solidFill>
                           <a:latin typeface="Calibri"/>
                         </a:rPr>
-                        <a:t>1,438</a:t>
+                        <a:t>1,426</a:t>
                       </a:r>
                     </a:p>
                   </a:txBody>
@@ -3823,7 +3823,7 @@
                           </a:solidFill>
                           <a:latin typeface="Calibri"/>
                         </a:rPr>
-                        <a:t>-1.10%</a:t>
+                        <a:t>-0.80%</a:t>
                       </a:r>
                     </a:p>
                   </a:txBody>
@@ -3842,11 +3842,11 @@
                       <a:r>
                         <a:rPr sz="1000" b="0">
                           <a:solidFill>
-                            <a:srgbClr val="0B7A3B"/>
-                          </a:solidFill>
-                          <a:latin typeface="Calibri"/>
-                        </a:rPr>
-                        <a:t>+1.08%</a:t>
+                            <a:srgbClr val="B3261E"/>
+                          </a:solidFill>
+                          <a:latin typeface="Calibri"/>
+                        </a:rPr>
+                        <a:t>-0.24%</a:t>
                       </a:r>
                     </a:p>
                   </a:txBody>
@@ -3869,7 +3869,7 @@
                           </a:solidFill>
                           <a:latin typeface="Calibri"/>
                         </a:rPr>
-                        <a:t>-1.51%</a:t>
+                        <a:t>-1.93%</a:t>
                       </a:r>
                     </a:p>
                   </a:txBody>
@@ -3892,7 +3892,7 @@
                           </a:solidFill>
                           <a:latin typeface="Calibri"/>
                         </a:rPr>
-                        <a:t>-1.5%</a:t>
+                        <a:t>-2.3%</a:t>
                       </a:r>
                     </a:p>
                   </a:txBody>
@@ -3938,7 +3938,7 @@
                           </a:solidFill>
                           <a:latin typeface="Calibri"/>
                         </a:rPr>
-                        <a:t>18.6</a:t>
+                        <a:t>18.4</a:t>
                       </a:r>
                     </a:p>
                   </a:txBody>
@@ -3986,7 +3986,7 @@
                           </a:solidFill>
                           <a:latin typeface="Calibri"/>
                         </a:rPr>
-                        <a:t>1,156</a:t>
+                        <a:t>1,140</a:t>
                       </a:r>
                     </a:p>
                   </a:txBody>
@@ -4005,11 +4005,34 @@
                       <a:r>
                         <a:rPr sz="1000" b="0">
                           <a:solidFill>
+                            <a:srgbClr val="B3261E"/>
+                          </a:solidFill>
+                          <a:latin typeface="Calibri"/>
+                        </a:rPr>
+                        <a:t>-1.38%</a:t>
+                      </a:r>
+                    </a:p>
+                  </a:txBody>
+                  <a:tcPr>
+                    <a:solidFill>
+                      <a:srgbClr val="FFFFFF"/>
+                    </a:solidFill>
+                  </a:tcPr>
+                </a:tc>
+                <a:tc>
+                  <a:txBody>
+                    <a:bodyPr/>
+                    <a:lstStyle/>
+                    <a:p>
+                      <a:pPr algn="r"/>
+                      <a:r>
+                        <a:rPr sz="1000" b="0">
+                          <a:solidFill>
                             <a:srgbClr val="0B7A3B"/>
                           </a:solidFill>
                           <a:latin typeface="Calibri"/>
                         </a:rPr>
-                        <a:t>+1.96%</a:t>
+                        <a:t>+1.79%</a:t>
                       </a:r>
                     </a:p>
                   </a:txBody>
@@ -4028,11 +4051,11 @@
                       <a:r>
                         <a:rPr sz="1000" b="0">
                           <a:solidFill>
-                            <a:srgbClr val="0B7A3B"/>
-                          </a:solidFill>
-                          <a:latin typeface="Calibri"/>
-                        </a:rPr>
-                        <a:t>+1.05%</a:t>
+                            <a:srgbClr val="B3261E"/>
+                          </a:solidFill>
+                          <a:latin typeface="Calibri"/>
+                        </a:rPr>
+                        <a:t>-2.36%</a:t>
                       </a:r>
                     </a:p>
                   </a:txBody>
@@ -4051,11 +4074,11 @@
                       <a:r>
                         <a:rPr sz="1000" b="0">
                           <a:solidFill>
-                            <a:srgbClr val="B3261E"/>
-                          </a:solidFill>
-                          <a:latin typeface="Calibri"/>
-                        </a:rPr>
-                        <a:t>-2.03%</a:t>
+                            <a:srgbClr val="1F2A37"/>
+                          </a:solidFill>
+                          <a:latin typeface="Calibri"/>
+                        </a:rPr>
+                        <a:t>-31.1%</a:t>
                       </a:r>
                     </a:p>
                   </a:txBody>
@@ -4078,7 +4101,7 @@
                           </a:solidFill>
                           <a:latin typeface="Calibri"/>
                         </a:rPr>
-                        <a:t>-30.1%</a:t>
+                        <a:t>30%</a:t>
                       </a:r>
                     </a:p>
                   </a:txBody>
@@ -4101,30 +4124,7 @@
                           </a:solidFill>
                           <a:latin typeface="Calibri"/>
                         </a:rPr>
-                        <a:t>30%</a:t>
-                      </a:r>
-                    </a:p>
-                  </a:txBody>
-                  <a:tcPr>
-                    <a:solidFill>
-                      <a:srgbClr val="FFFFFF"/>
-                    </a:solidFill>
-                  </a:tcPr>
-                </a:tc>
-                <a:tc>
-                  <a:txBody>
-                    <a:bodyPr/>
-                    <a:lstStyle/>
-                    <a:p>
-                      <a:pPr algn="r"/>
-                      <a:r>
-                        <a:rPr sz="1000" b="0">
-                          <a:solidFill>
-                            <a:srgbClr val="1F2A37"/>
-                          </a:solidFill>
-                          <a:latin typeface="Calibri"/>
-                        </a:rPr>
-                        <a:t>15.0</a:t>
+                        <a:t>14.8</a:t>
                       </a:r>
                     </a:p>
                   </a:txBody>
@@ -4172,7 +4172,7 @@
                           </a:solidFill>
                           <a:latin typeface="Calibri"/>
                         </a:rPr>
-                        <a:t>267</a:t>
+                        <a:t>266</a:t>
                       </a:r>
                     </a:p>
                   </a:txBody>
@@ -4191,11 +4191,11 @@
                       <a:r>
                         <a:rPr sz="1000" b="0">
                           <a:solidFill>
-                            <a:srgbClr val="0B7A3B"/>
-                          </a:solidFill>
-                          <a:latin typeface="Calibri"/>
-                        </a:rPr>
-                        <a:t>+4.34%</a:t>
+                            <a:srgbClr val="B3261E"/>
+                          </a:solidFill>
+                          <a:latin typeface="Calibri"/>
+                        </a:rPr>
+                        <a:t>-0.11%</a:t>
                       </a:r>
                     </a:p>
                   </a:txBody>
@@ -4218,7 +4218,7 @@
                           </a:solidFill>
                           <a:latin typeface="Calibri"/>
                         </a:rPr>
-                        <a:t>-1.77%</a:t>
+                        <a:t>-1.46%</a:t>
                       </a:r>
                     </a:p>
                   </a:txBody>
@@ -4241,7 +4241,7 @@
                           </a:solidFill>
                           <a:latin typeface="Calibri"/>
                         </a:rPr>
-                        <a:t>-7.11%</a:t>
+                        <a:t>-7.85%</a:t>
                       </a:r>
                     </a:p>
                   </a:txBody>
@@ -4264,7 +4264,7 @@
                           </a:solidFill>
                           <a:latin typeface="Calibri"/>
                         </a:rPr>
-                        <a:t>-33.7%</a:t>
+                        <a:t>-33.8%</a:t>
                       </a:r>
                     </a:p>
                   </a:txBody>
@@ -4358,7 +4358,7 @@
                           </a:solidFill>
                           <a:latin typeface="Calibri"/>
                         </a:rPr>
-                        <a:t>3,980</a:t>
+                        <a:t>3,981</a:t>
                       </a:r>
                     </a:p>
                   </a:txBody>
@@ -4377,11 +4377,34 @@
                       <a:r>
                         <a:rPr sz="1000" b="0">
                           <a:solidFill>
+                            <a:srgbClr val="0B7A3B"/>
+                          </a:solidFill>
+                          <a:latin typeface="Calibri"/>
+                        </a:rPr>
+                        <a:t>+0.02%</a:t>
+                      </a:r>
+                    </a:p>
+                  </a:txBody>
+                  <a:tcPr>
+                    <a:solidFill>
+                      <a:srgbClr val="FFFFFF"/>
+                    </a:solidFill>
+                  </a:tcPr>
+                </a:tc>
+                <a:tc>
+                  <a:txBody>
+                    <a:bodyPr/>
+                    <a:lstStyle/>
+                    <a:p>
+                      <a:pPr algn="r"/>
+                      <a:r>
+                        <a:rPr sz="1000" b="0">
+                          <a:solidFill>
                             <a:srgbClr val="B3261E"/>
                           </a:solidFill>
                           <a:latin typeface="Calibri"/>
                         </a:rPr>
-                        <a:t>-1.60%</a:t>
+                        <a:t>-1.41%</a:t>
                       </a:r>
                     </a:p>
                   </a:txBody>
@@ -4404,30 +4427,7 @@
                           </a:solidFill>
                           <a:latin typeface="Calibri"/>
                         </a:rPr>
-                        <a:t>-3.37%</a:t>
-                      </a:r>
-                    </a:p>
-                  </a:txBody>
-                  <a:tcPr>
-                    <a:solidFill>
-                      <a:srgbClr val="FFFFFF"/>
-                    </a:solidFill>
-                  </a:tcPr>
-                </a:tc>
-                <a:tc>
-                  <a:txBody>
-                    <a:bodyPr/>
-                    <a:lstStyle/>
-                    <a:p>
-                      <a:pPr algn="r"/>
-                      <a:r>
-                        <a:rPr sz="1000" b="0">
-                          <a:solidFill>
-                            <a:srgbClr val="B3261E"/>
-                          </a:solidFill>
-                          <a:latin typeface="Calibri"/>
-                        </a:rPr>
-                        <a:t>-1.12%</a:t>
+                        <a:t>-0.23%</a:t>
                       </a:r>
                     </a:p>
                   </a:txBody>
@@ -4544,7 +4544,7 @@
                           </a:solidFill>
                           <a:latin typeface="Calibri"/>
                         </a:rPr>
-                        <a:t>1,309</a:t>
+                        <a:t>1,313</a:t>
                       </a:r>
                     </a:p>
                   </a:txBody>
@@ -4567,7 +4567,7 @@
                           </a:solidFill>
                           <a:latin typeface="Calibri"/>
                         </a:rPr>
-                        <a:t>+2.51%</a:t>
+                        <a:t>+0.31%</a:t>
                       </a:r>
                     </a:p>
                   </a:txBody>
@@ -4586,11 +4586,11 @@
                       <a:r>
                         <a:rPr sz="1000" b="0">
                           <a:solidFill>
-                            <a:srgbClr val="B3261E"/>
-                          </a:solidFill>
-                          <a:latin typeface="Calibri"/>
-                        </a:rPr>
-                        <a:t>-0.61%</a:t>
+                            <a:srgbClr val="0B7A3B"/>
+                          </a:solidFill>
+                          <a:latin typeface="Calibri"/>
+                        </a:rPr>
+                        <a:t>+1.16%</a:t>
                       </a:r>
                     </a:p>
                   </a:txBody>
@@ -4609,11 +4609,11 @@
                       <a:r>
                         <a:rPr sz="1000" b="0">
                           <a:solidFill>
-                            <a:srgbClr val="B3261E"/>
-                          </a:solidFill>
-                          <a:latin typeface="Calibri"/>
-                        </a:rPr>
-                        <a:t>-0.76%</a:t>
+                            <a:srgbClr val="0B7A3B"/>
+                          </a:solidFill>
+                          <a:latin typeface="Calibri"/>
+                        </a:rPr>
+                        <a:t>+1.72%</a:t>
                       </a:r>
                     </a:p>
                   </a:txBody>
@@ -4636,7 +4636,7 @@
                           </a:solidFill>
                           <a:latin typeface="Calibri"/>
                         </a:rPr>
-                        <a:t>-17.4%</a:t>
+                        <a:t>-17.2%</a:t>
                       </a:r>
                     </a:p>
                   </a:txBody>
@@ -4659,7 +4659,7 @@
                           </a:solidFill>
                           <a:latin typeface="Calibri"/>
                         </a:rPr>
-                        <a:t>19%</a:t>
+                        <a:t>18%</a:t>
                       </a:r>
                     </a:p>
                   </a:txBody>
@@ -4682,7 +4682,7 @@
                           </a:solidFill>
                           <a:latin typeface="Calibri"/>
                         </a:rPr>
-                        <a:t>23.7</a:t>
+                        <a:t>23.8</a:t>
                       </a:r>
                     </a:p>
                   </a:txBody>
@@ -4730,7 +4730,7 @@
                           </a:solidFill>
                           <a:latin typeface="Calibri"/>
                         </a:rPr>
-                        <a:t>2,369</a:t>
+                        <a:t>2,348</a:t>
                       </a:r>
                     </a:p>
                   </a:txBody>
@@ -4753,7 +4753,7 @@
                           </a:solidFill>
                           <a:latin typeface="Calibri"/>
                         </a:rPr>
-                        <a:t>-1.26%</a:t>
+                        <a:t>-0.89%</a:t>
                       </a:r>
                     </a:p>
                   </a:txBody>
@@ -4776,7 +4776,7 @@
                           </a:solidFill>
                           <a:latin typeface="Calibri"/>
                         </a:rPr>
-                        <a:t>+3.17%</a:t>
+                        <a:t>+3.44%</a:t>
                       </a:r>
                     </a:p>
                   </a:txBody>
@@ -4799,7 +4799,7 @@
                           </a:solidFill>
                           <a:latin typeface="Calibri"/>
                         </a:rPr>
-                        <a:t>-4.23%</a:t>
+                        <a:t>-4.55%</a:t>
                       </a:r>
                     </a:p>
                   </a:txBody>
@@ -4822,7 +4822,7 @@
                           </a:solidFill>
                           <a:latin typeface="Calibri"/>
                         </a:rPr>
-                        <a:t>-26.1%</a:t>
+                        <a:t>-26.7%</a:t>
                       </a:r>
                     </a:p>
                   </a:txBody>
@@ -4868,7 +4868,7 @@
                           </a:solidFill>
                           <a:latin typeface="Calibri"/>
                         </a:rPr>
-                        <a:t>17.2</a:t>
+                        <a:t>17.1</a:t>
                       </a:r>
                     </a:p>
                   </a:txBody>
@@ -4952,7 +4952,7 @@
                 </a:solidFill>
                 <a:latin typeface="Calibri"/>
               </a:rPr>
-              <a:t>Breadth was risk-on: 5 of 8 names advanced on the day.</a:t>
+              <a:t>Breadth was risk-off: 2 of 8 names advanced on the day.</a:t>
             </a:r>
           </a:p>
           <a:p>
@@ -4968,7 +4968,7 @@
                 </a:solidFill>
                 <a:latin typeface="Calibri"/>
               </a:rPr>
-              <a:t>•  Best performer on the day: ITC.NS at +4.34%.</a:t>
+              <a:t>•  Best performer on the day: RELIANCE.NS at +0.31%.</a:t>
             </a:r>
           </a:p>
           <a:p>
@@ -4984,7 +4984,7 @@
                 </a:solidFill>
                 <a:latin typeface="Calibri"/>
               </a:rPr>
-              <a:t>•  Weakest on the day: LT.NS at -1.60%.</a:t>
+              <a:t>•  Weakest on the day: HDFCBANK.NS at -1.56%.</a:t>
             </a:r>
           </a:p>
           <a:p>
@@ -5000,7 +5000,7 @@
                 </a:solidFill>
                 <a:latin typeface="Calibri"/>
               </a:rPr>
-              <a:t>•  Median one-day move across the watchlist: +1.18%.</a:t>
+              <a:t>•  Median one-day move across the watchlist: -0.78%.</a:t>
             </a:r>
           </a:p>
           <a:p>
@@ -5016,7 +5016,7 @@
                 </a:solidFill>
                 <a:latin typeface="Calibri"/>
               </a:rPr>
-              <a:t>•  ITC.NS sits furthest below its 52-week high, at -33.7%.</a:t>
+              <a:t>•  ITC.NS sits furthest below its 52-week high, at -33.8%.</a:t>
             </a:r>
           </a:p>
           <a:p>
@@ -5064,7 +5064,7 @@
                 </a:solidFill>
                 <a:latin typeface="Calibri"/>
               </a:rPr>
-              <a:t>•  Highest 30-day realised volatility: TCS.NS at 33.2% annualised.</a:t>
+              <a:t>•  Highest 30-day realised volatility: TCS.NS at 33.3% annualised.</a:t>
             </a:r>
           </a:p>
           <a:p>
@@ -5080,7 +5080,7 @@
                 </a:solidFill>
                 <a:latin typeface="Calibri"/>
               </a:rPr>
-              <a:t>•  60 headlines collected, 3 tagged to a watchlist name by substring match (unverified).</a:t>
+              <a:t>•  60 headlines collected, 2 tagged to a watchlist name by substring match (unverified).</a:t>
             </a:r>
           </a:p>
           <a:p>

--- a/public/deskbrief.pptx
+++ b/public/deskbrief.pptx
@@ -3128,7 +3128,7 @@
                 </a:solidFill>
                 <a:latin typeface="Calibri"/>
               </a:rPr>
-              <a:t>8 names  |  generated 02 Sep 2026 16:44  |  source: Yahoo Finance via yfinance, Indian financial RSS</a:t>
+              <a:t>8 names  |  generated 03 Sep 2026 16:35  |  source: Yahoo Finance via yfinance, Indian financial RSS</a:t>
             </a:r>
           </a:p>
         </p:txBody>
@@ -3428,7 +3428,7 @@
                           </a:solidFill>
                           <a:latin typeface="Calibri"/>
                         </a:rPr>
-                        <a:t>1,863</a:t>
+                        <a:t>1,869</a:t>
                       </a:r>
                     </a:p>
                   </a:txBody>
@@ -3447,11 +3447,34 @@
                       <a:r>
                         <a:rPr sz="1000" b="0">
                           <a:solidFill>
+                            <a:srgbClr val="0B7A3B"/>
+                          </a:solidFill>
+                          <a:latin typeface="Calibri"/>
+                        </a:rPr>
+                        <a:t>+0.33%</a:t>
+                      </a:r>
+                    </a:p>
+                  </a:txBody>
+                  <a:tcPr>
+                    <a:solidFill>
+                      <a:srgbClr val="F3F5F7"/>
+                    </a:solidFill>
+                  </a:tcPr>
+                </a:tc>
+                <a:tc>
+                  <a:txBody>
+                    <a:bodyPr/>
+                    <a:lstStyle/>
+                    <a:p>
+                      <a:pPr algn="r"/>
+                      <a:r>
+                        <a:rPr sz="1000" b="0">
+                          <a:solidFill>
                             <a:srgbClr val="B3261E"/>
                           </a:solidFill>
                           <a:latin typeface="Calibri"/>
                         </a:rPr>
-                        <a:t>-0.77%</a:t>
+                        <a:t>-0.50%</a:t>
                       </a:r>
                     </a:p>
                   </a:txBody>
@@ -3474,7 +3497,7 @@
                           </a:solidFill>
                           <a:latin typeface="Calibri"/>
                         </a:rPr>
-                        <a:t>-2.07%</a:t>
+                        <a:t>-5.51%</a:t>
                       </a:r>
                     </a:p>
                   </a:txBody>
@@ -3493,11 +3516,11 @@
                       <a:r>
                         <a:rPr sz="1000" b="0">
                           <a:solidFill>
-                            <a:srgbClr val="B3261E"/>
-                          </a:solidFill>
-                          <a:latin typeface="Calibri"/>
-                        </a:rPr>
-                        <a:t>-5.45%</a:t>
+                            <a:srgbClr val="1F2A37"/>
+                          </a:solidFill>
+                          <a:latin typeface="Calibri"/>
+                        </a:rPr>
+                        <a:t>-12.5%</a:t>
                       </a:r>
                     </a:p>
                   </a:txBody>
@@ -3520,7 +3543,7 @@
                           </a:solidFill>
                           <a:latin typeface="Calibri"/>
                         </a:rPr>
-                        <a:t>-12.8%</a:t>
+                        <a:t>24%</a:t>
                       </a:r>
                     </a:p>
                   </a:txBody>
@@ -3543,30 +3566,7 @@
                           </a:solidFill>
                           <a:latin typeface="Calibri"/>
                         </a:rPr>
-                        <a:t>24%</a:t>
-                      </a:r>
-                    </a:p>
-                  </a:txBody>
-                  <a:tcPr>
-                    <a:solidFill>
-                      <a:srgbClr val="F3F5F7"/>
-                    </a:solidFill>
-                  </a:tcPr>
-                </a:tc>
-                <a:tc>
-                  <a:txBody>
-                    <a:bodyPr/>
-                    <a:lstStyle/>
-                    <a:p>
-                      <a:pPr algn="r"/>
-                      <a:r>
-                        <a:rPr sz="1000" b="0">
-                          <a:solidFill>
-                            <a:srgbClr val="1F2A37"/>
-                          </a:solidFill>
-                          <a:latin typeface="Calibri"/>
-                        </a:rPr>
-                        <a:t>38.9</a:t>
+                        <a:t>39.3</a:t>
                       </a:r>
                     </a:p>
                   </a:txBody>
@@ -3614,7 +3614,7 @@
                           </a:solidFill>
                           <a:latin typeface="Calibri"/>
                         </a:rPr>
-                        <a:t>701</a:t>
+                        <a:t>707</a:t>
                       </a:r>
                     </a:p>
                   </a:txBody>
@@ -3633,11 +3633,34 @@
                       <a:r>
                         <a:rPr sz="1000" b="0">
                           <a:solidFill>
+                            <a:srgbClr val="0B7A3B"/>
+                          </a:solidFill>
+                          <a:latin typeface="Calibri"/>
+                        </a:rPr>
+                        <a:t>+0.83%</a:t>
+                      </a:r>
+                    </a:p>
+                  </a:txBody>
+                  <a:tcPr>
+                    <a:solidFill>
+                      <a:srgbClr val="FFFFFF"/>
+                    </a:solidFill>
+                  </a:tcPr>
+                </a:tc>
+                <a:tc>
+                  <a:txBody>
+                    <a:bodyPr/>
+                    <a:lstStyle/>
+                    <a:p>
+                      <a:pPr algn="r"/>
+                      <a:r>
+                        <a:rPr sz="1000" b="0">
+                          <a:solidFill>
                             <a:srgbClr val="B3261E"/>
                           </a:solidFill>
                           <a:latin typeface="Calibri"/>
                         </a:rPr>
-                        <a:t>-1.56%</a:t>
+                        <a:t>-0.61%</a:t>
                       </a:r>
                     </a:p>
                   </a:txBody>
@@ -3660,7 +3683,7 @@
                           </a:solidFill>
                           <a:latin typeface="Calibri"/>
                         </a:rPr>
-                        <a:t>-3.63%</a:t>
+                        <a:t>-3.86%</a:t>
                       </a:r>
                     </a:p>
                   </a:txBody>
@@ -3679,11 +3702,11 @@
                       <a:r>
                         <a:rPr sz="1000" b="0">
                           <a:solidFill>
-                            <a:srgbClr val="B3261E"/>
-                          </a:solidFill>
-                          <a:latin typeface="Calibri"/>
-                        </a:rPr>
-                        <a:t>-5.55%</a:t>
+                            <a:srgbClr val="1F2A37"/>
+                          </a:solidFill>
+                          <a:latin typeface="Calibri"/>
+                        </a:rPr>
+                        <a:t>-28.8%</a:t>
                       </a:r>
                     </a:p>
                   </a:txBody>
@@ -3706,7 +3729,7 @@
                           </a:solidFill>
                           <a:latin typeface="Calibri"/>
                         </a:rPr>
-                        <a:t>-29.4%</a:t>
+                        <a:t>14%</a:t>
                       </a:r>
                     </a:p>
                   </a:txBody>
@@ -3729,30 +3752,7 @@
                           </a:solidFill>
                           <a:latin typeface="Calibri"/>
                         </a:rPr>
-                        <a:t>14%</a:t>
-                      </a:r>
-                    </a:p>
-                  </a:txBody>
-                  <a:tcPr>
-                    <a:solidFill>
-                      <a:srgbClr val="FFFFFF"/>
-                    </a:solidFill>
-                  </a:tcPr>
-                </a:tc>
-                <a:tc>
-                  <a:txBody>
-                    <a:bodyPr/>
-                    <a:lstStyle/>
-                    <a:p>
-                      <a:pPr algn="r"/>
-                      <a:r>
-                        <a:rPr sz="1000" b="0">
-                          <a:solidFill>
-                            <a:srgbClr val="1F2A37"/>
-                          </a:solidFill>
-                          <a:latin typeface="Calibri"/>
-                        </a:rPr>
-                        <a:t>15.3</a:t>
+                        <a:t>15.4</a:t>
                       </a:r>
                     </a:p>
                   </a:txBody>
@@ -3800,7 +3800,7 @@
                           </a:solidFill>
                           <a:latin typeface="Calibri"/>
                         </a:rPr>
-                        <a:t>1,426</a:t>
+                        <a:t>1,430</a:t>
                       </a:r>
                     </a:p>
                   </a:txBody>
@@ -3819,11 +3819,34 @@
                       <a:r>
                         <a:rPr sz="1000" b="0">
                           <a:solidFill>
+                            <a:srgbClr val="0B7A3B"/>
+                          </a:solidFill>
+                          <a:latin typeface="Calibri"/>
+                        </a:rPr>
+                        <a:t>+0.25%</a:t>
+                      </a:r>
+                    </a:p>
+                  </a:txBody>
+                  <a:tcPr>
+                    <a:solidFill>
+                      <a:srgbClr val="F3F5F7"/>
+                    </a:solidFill>
+                  </a:tcPr>
+                </a:tc>
+                <a:tc>
+                  <a:txBody>
+                    <a:bodyPr/>
+                    <a:lstStyle/>
+                    <a:p>
+                      <a:pPr algn="r"/>
+                      <a:r>
+                        <a:rPr sz="1000" b="0">
+                          <a:solidFill>
                             <a:srgbClr val="B3261E"/>
                           </a:solidFill>
                           <a:latin typeface="Calibri"/>
                         </a:rPr>
-                        <a:t>-0.80%</a:t>
+                        <a:t>-0.90%</a:t>
                       </a:r>
                     </a:p>
                   </a:txBody>
@@ -3846,7 +3869,7 @@
                           </a:solidFill>
                           <a:latin typeface="Calibri"/>
                         </a:rPr>
-                        <a:t>-0.24%</a:t>
+                        <a:t>-1.39%</a:t>
                       </a:r>
                     </a:p>
                   </a:txBody>
@@ -3865,11 +3888,11 @@
                       <a:r>
                         <a:rPr sz="1000" b="0">
                           <a:solidFill>
-                            <a:srgbClr val="B3261E"/>
-                          </a:solidFill>
-                          <a:latin typeface="Calibri"/>
-                        </a:rPr>
-                        <a:t>-1.93%</a:t>
+                            <a:srgbClr val="1F2A37"/>
+                          </a:solidFill>
+                          <a:latin typeface="Calibri"/>
+                        </a:rPr>
+                        <a:t>-2.1%</a:t>
                       </a:r>
                     </a:p>
                   </a:txBody>
@@ -3892,7 +3915,7 @@
                           </a:solidFill>
                           <a:latin typeface="Calibri"/>
                         </a:rPr>
-                        <a:t>-2.3%</a:t>
+                        <a:t>16%</a:t>
                       </a:r>
                     </a:p>
                   </a:txBody>
@@ -3915,30 +3938,7 @@
                           </a:solidFill>
                           <a:latin typeface="Calibri"/>
                         </a:rPr>
-                        <a:t>17%</a:t>
-                      </a:r>
-                    </a:p>
-                  </a:txBody>
-                  <a:tcPr>
-                    <a:solidFill>
-                      <a:srgbClr val="F3F5F7"/>
-                    </a:solidFill>
-                  </a:tcPr>
-                </a:tc>
-                <a:tc>
-                  <a:txBody>
-                    <a:bodyPr/>
-                    <a:lstStyle/>
-                    <a:p>
-                      <a:pPr algn="r"/>
-                      <a:r>
-                        <a:rPr sz="1000" b="0">
-                          <a:solidFill>
-                            <a:srgbClr val="1F2A37"/>
-                          </a:solidFill>
-                          <a:latin typeface="Calibri"/>
-                        </a:rPr>
-                        <a:t>18.4</a:t>
+                        <a:t>18.5</a:t>
                       </a:r>
                     </a:p>
                   </a:txBody>
@@ -3986,7 +3986,7 @@
                           </a:solidFill>
                           <a:latin typeface="Calibri"/>
                         </a:rPr>
-                        <a:t>1,140</a:t>
+                        <a:t>1,130</a:t>
                       </a:r>
                     </a:p>
                   </a:txBody>
@@ -4009,7 +4009,7 @@
                           </a:solidFill>
                           <a:latin typeface="Calibri"/>
                         </a:rPr>
-                        <a:t>-1.38%</a:t>
+                        <a:t>-0.85%</a:t>
                       </a:r>
                     </a:p>
                   </a:txBody>
@@ -4032,7 +4032,7 @@
                           </a:solidFill>
                           <a:latin typeface="Calibri"/>
                         </a:rPr>
-                        <a:t>+1.79%</a:t>
+                        <a:t>+1.76%</a:t>
                       </a:r>
                     </a:p>
                   </a:txBody>
@@ -4055,7 +4055,7 @@
                           </a:solidFill>
                           <a:latin typeface="Calibri"/>
                         </a:rPr>
-                        <a:t>-2.36%</a:t>
+                        <a:t>-3.72%</a:t>
                       </a:r>
                     </a:p>
                   </a:txBody>
@@ -4078,7 +4078,7 @@
                           </a:solidFill>
                           <a:latin typeface="Calibri"/>
                         </a:rPr>
-                        <a:t>-31.1%</a:t>
+                        <a:t>-31.7%</a:t>
                       </a:r>
                     </a:p>
                   </a:txBody>
@@ -4124,7 +4124,7 @@
                           </a:solidFill>
                           <a:latin typeface="Calibri"/>
                         </a:rPr>
-                        <a:t>14.8</a:t>
+                        <a:t>14.7</a:t>
                       </a:r>
                     </a:p>
                   </a:txBody>
@@ -4172,7 +4172,7 @@
                           </a:solidFill>
                           <a:latin typeface="Calibri"/>
                         </a:rPr>
-                        <a:t>266</a:t>
+                        <a:t>263</a:t>
                       </a:r>
                     </a:p>
                   </a:txBody>
@@ -4195,7 +4195,7 @@
                           </a:solidFill>
                           <a:latin typeface="Calibri"/>
                         </a:rPr>
-                        <a:t>-0.11%</a:t>
+                        <a:t>-1.24%</a:t>
                       </a:r>
                     </a:p>
                   </a:txBody>
@@ -4218,7 +4218,7 @@
                           </a:solidFill>
                           <a:latin typeface="Calibri"/>
                         </a:rPr>
-                        <a:t>-1.46%</a:t>
+                        <a:t>-2.23%</a:t>
                       </a:r>
                     </a:p>
                   </a:txBody>
@@ -4241,7 +4241,7 @@
                           </a:solidFill>
                           <a:latin typeface="Calibri"/>
                         </a:rPr>
-                        <a:t>-7.85%</a:t>
+                        <a:t>-8.35%</a:t>
                       </a:r>
                     </a:p>
                   </a:txBody>
@@ -4264,7 +4264,7 @@
                           </a:solidFill>
                           <a:latin typeface="Calibri"/>
                         </a:rPr>
-                        <a:t>-33.8%</a:t>
+                        <a:t>-34.6%</a:t>
                       </a:r>
                     </a:p>
                   </a:txBody>
@@ -4310,7 +4310,7 @@
                           </a:solidFill>
                           <a:latin typeface="Calibri"/>
                         </a:rPr>
-                        <a:t>16.8</a:t>
+                        <a:t>16.6</a:t>
                       </a:r>
                     </a:p>
                   </a:txBody>
@@ -4358,7 +4358,7 @@
                           </a:solidFill>
                           <a:latin typeface="Calibri"/>
                         </a:rPr>
-                        <a:t>3,981</a:t>
+                        <a:t>3,975</a:t>
                       </a:r>
                     </a:p>
                   </a:txBody>
@@ -4377,11 +4377,11 @@
                       <a:r>
                         <a:rPr sz="1000" b="0">
                           <a:solidFill>
-                            <a:srgbClr val="0B7A3B"/>
-                          </a:solidFill>
-                          <a:latin typeface="Calibri"/>
-                        </a:rPr>
-                        <a:t>+0.02%</a:t>
+                            <a:srgbClr val="B3261E"/>
+                          </a:solidFill>
+                          <a:latin typeface="Calibri"/>
+                        </a:rPr>
+                        <a:t>-0.15%</a:t>
                       </a:r>
                     </a:p>
                   </a:txBody>
@@ -4404,7 +4404,7 @@
                           </a:solidFill>
                           <a:latin typeface="Calibri"/>
                         </a:rPr>
-                        <a:t>-1.41%</a:t>
+                        <a:t>-1.29%</a:t>
                       </a:r>
                     </a:p>
                   </a:txBody>
@@ -4427,7 +4427,7 @@
                           </a:solidFill>
                           <a:latin typeface="Calibri"/>
                         </a:rPr>
-                        <a:t>-0.23%</a:t>
+                        <a:t>-2.02%</a:t>
                       </a:r>
                     </a:p>
                   </a:txBody>
@@ -4450,7 +4450,7 @@
                           </a:solidFill>
                           <a:latin typeface="Calibri"/>
                         </a:rPr>
-                        <a:t>-9.0%</a:t>
+                        <a:t>-9.2%</a:t>
                       </a:r>
                     </a:p>
                   </a:txBody>
@@ -4544,7 +4544,7 @@
                           </a:solidFill>
                           <a:latin typeface="Calibri"/>
                         </a:rPr>
-                        <a:t>1,313</a:t>
+                        <a:t>1,302</a:t>
                       </a:r>
                     </a:p>
                   </a:txBody>
@@ -4563,11 +4563,34 @@
                       <a:r>
                         <a:rPr sz="1000" b="0">
                           <a:solidFill>
+                            <a:srgbClr val="B3261E"/>
+                          </a:solidFill>
+                          <a:latin typeface="Calibri"/>
+                        </a:rPr>
+                        <a:t>-0.81%</a:t>
+                      </a:r>
+                    </a:p>
+                  </a:txBody>
+                  <a:tcPr>
+                    <a:solidFill>
+                      <a:srgbClr val="F3F5F7"/>
+                    </a:solidFill>
+                  </a:tcPr>
+                </a:tc>
+                <a:tc>
+                  <a:txBody>
+                    <a:bodyPr/>
+                    <a:lstStyle/>
+                    <a:p>
+                      <a:pPr algn="r"/>
+                      <a:r>
+                        <a:rPr sz="1000" b="0">
+                          <a:solidFill>
                             <a:srgbClr val="0B7A3B"/>
                           </a:solidFill>
                           <a:latin typeface="Calibri"/>
                         </a:rPr>
-                        <a:t>+0.31%</a:t>
+                        <a:t>+1.58%</a:t>
                       </a:r>
                     </a:p>
                   </a:txBody>
@@ -4590,7 +4613,7 @@
                           </a:solidFill>
                           <a:latin typeface="Calibri"/>
                         </a:rPr>
-                        <a:t>+1.16%</a:t>
+                        <a:t>+1.76%</a:t>
                       </a:r>
                     </a:p>
                   </a:txBody>
@@ -4609,11 +4632,11 @@
                       <a:r>
                         <a:rPr sz="1000" b="0">
                           <a:solidFill>
-                            <a:srgbClr val="0B7A3B"/>
-                          </a:solidFill>
-                          <a:latin typeface="Calibri"/>
-                        </a:rPr>
-                        <a:t>+1.72%</a:t>
+                            <a:srgbClr val="1F2A37"/>
+                          </a:solidFill>
+                          <a:latin typeface="Calibri"/>
+                        </a:rPr>
+                        <a:t>-17.8%</a:t>
                       </a:r>
                     </a:p>
                   </a:txBody>
@@ -4636,7 +4659,7 @@
                           </a:solidFill>
                           <a:latin typeface="Calibri"/>
                         </a:rPr>
-                        <a:t>-17.2%</a:t>
+                        <a:t>18%</a:t>
                       </a:r>
                     </a:p>
                   </a:txBody>
@@ -4659,30 +4682,7 @@
                           </a:solidFill>
                           <a:latin typeface="Calibri"/>
                         </a:rPr>
-                        <a:t>18%</a:t>
-                      </a:r>
-                    </a:p>
-                  </a:txBody>
-                  <a:tcPr>
-                    <a:solidFill>
-                      <a:srgbClr val="F3F5F7"/>
-                    </a:solidFill>
-                  </a:tcPr>
-                </a:tc>
-                <a:tc>
-                  <a:txBody>
-                    <a:bodyPr/>
-                    <a:lstStyle/>
-                    <a:p>
-                      <a:pPr algn="r"/>
-                      <a:r>
-                        <a:rPr sz="1000" b="0">
-                          <a:solidFill>
-                            <a:srgbClr val="1F2A37"/>
-                          </a:solidFill>
-                          <a:latin typeface="Calibri"/>
-                        </a:rPr>
-                        <a:t>23.8</a:t>
+                        <a:t>23.6</a:t>
                       </a:r>
                     </a:p>
                   </a:txBody>
@@ -4730,7 +4730,7 @@
                           </a:solidFill>
                           <a:latin typeface="Calibri"/>
                         </a:rPr>
-                        <a:t>2,348</a:t>
+                        <a:t>2,320</a:t>
                       </a:r>
                     </a:p>
                   </a:txBody>
@@ -4753,7 +4753,7 @@
                           </a:solidFill>
                           <a:latin typeface="Calibri"/>
                         </a:rPr>
-                        <a:t>-0.89%</a:t>
+                        <a:t>-1.19%</a:t>
                       </a:r>
                     </a:p>
                   </a:txBody>
@@ -4776,7 +4776,7 @@
                           </a:solidFill>
                           <a:latin typeface="Calibri"/>
                         </a:rPr>
-                        <a:t>+3.44%</a:t>
+                        <a:t>+3.19%</a:t>
                       </a:r>
                     </a:p>
                   </a:txBody>
@@ -4799,7 +4799,7 @@
                           </a:solidFill>
                           <a:latin typeface="Calibri"/>
                         </a:rPr>
-                        <a:t>-4.55%</a:t>
+                        <a:t>-3.85%</a:t>
                       </a:r>
                     </a:p>
                   </a:txBody>
@@ -4822,7 +4822,7 @@
                           </a:solidFill>
                           <a:latin typeface="Calibri"/>
                         </a:rPr>
-                        <a:t>-26.7%</a:t>
+                        <a:t>-27.6%</a:t>
                       </a:r>
                     </a:p>
                   </a:txBody>
@@ -4868,7 +4868,7 @@
                           </a:solidFill>
                           <a:latin typeface="Calibri"/>
                         </a:rPr>
-                        <a:t>17.1</a:t>
+                        <a:t>16.9</a:t>
                       </a:r>
                     </a:p>
                   </a:txBody>
@@ -4952,7 +4952,7 @@
                 </a:solidFill>
                 <a:latin typeface="Calibri"/>
               </a:rPr>
-              <a:t>Breadth was risk-off: 2 of 8 names advanced on the day.</a:t>
+              <a:t>Breadth was risk-off: 3 of 8 names advanced on the day.</a:t>
             </a:r>
           </a:p>
           <a:p>
@@ -4968,7 +4968,7 @@
                 </a:solidFill>
                 <a:latin typeface="Calibri"/>
               </a:rPr>
-              <a:t>•  Best performer on the day: RELIANCE.NS at +0.31%.</a:t>
+              <a:t>•  Best performer on the day: HDFCBANK.NS at +0.83%.</a:t>
             </a:r>
           </a:p>
           <a:p>
@@ -4984,7 +4984,7 @@
                 </a:solidFill>
                 <a:latin typeface="Calibri"/>
               </a:rPr>
-              <a:t>•  Weakest on the day: HDFCBANK.NS at -1.56%.</a:t>
+              <a:t>•  Weakest on the day: ITC.NS at -1.24%.</a:t>
             </a:r>
           </a:p>
           <a:p>
@@ -5000,7 +5000,7 @@
                 </a:solidFill>
                 <a:latin typeface="Calibri"/>
               </a:rPr>
-              <a:t>•  Median one-day move across the watchlist: -0.78%.</a:t>
+              <a:t>•  Median one-day move across the watchlist: -0.48%.</a:t>
             </a:r>
           </a:p>
           <a:p>
@@ -5016,7 +5016,7 @@
                 </a:solidFill>
                 <a:latin typeface="Calibri"/>
               </a:rPr>
-              <a:t>•  ITC.NS sits furthest below its 52-week high, at -33.8%.</a:t>
+              <a:t>•  ITC.NS sits furthest below its 52-week high, at -34.6%.</a:t>
             </a:r>
           </a:p>
           <a:p>

--- a/public/deskbrief.pptx
+++ b/public/deskbrief.pptx
@@ -3128,7 +3128,7 @@
                 </a:solidFill>
                 <a:latin typeface="Calibri"/>
               </a:rPr>
-              <a:t>8 names  |  generated 03 Sep 2026 16:35  |  source: Yahoo Finance via yfinance, Indian financial RSS</a:t>
+              <a:t>8 names  |  generated 04 Sep 2026 16:30  |  source: Yahoo Finance via yfinance, Indian financial RSS</a:t>
             </a:r>
           </a:p>
         </p:txBody>
@@ -3428,7 +3428,7 @@
                           </a:solidFill>
                           <a:latin typeface="Calibri"/>
                         </a:rPr>
-                        <a:t>1,869</a:t>
+                        <a:t>1,840</a:t>
                       </a:r>
                     </a:p>
                   </a:txBody>
@@ -3447,11 +3447,11 @@
                       <a:r>
                         <a:rPr sz="1000" b="0">
                           <a:solidFill>
-                            <a:srgbClr val="0B7A3B"/>
-                          </a:solidFill>
-                          <a:latin typeface="Calibri"/>
-                        </a:rPr>
-                        <a:t>+0.33%</a:t>
+                            <a:srgbClr val="B3261E"/>
+                          </a:solidFill>
+                          <a:latin typeface="Calibri"/>
+                        </a:rPr>
+                        <a:t>-1.55%</a:t>
                       </a:r>
                     </a:p>
                   </a:txBody>
@@ -3474,7 +3474,7 @@
                           </a:solidFill>
                           <a:latin typeface="Calibri"/>
                         </a:rPr>
-                        <a:t>-0.50%</a:t>
+                        <a:t>-2.25%</a:t>
                       </a:r>
                     </a:p>
                   </a:txBody>
@@ -3497,7 +3497,7 @@
                           </a:solidFill>
                           <a:latin typeface="Calibri"/>
                         </a:rPr>
-                        <a:t>-5.51%</a:t>
+                        <a:t>-5.54%</a:t>
                       </a:r>
                     </a:p>
                   </a:txBody>
@@ -3520,7 +3520,7 @@
                           </a:solidFill>
                           <a:latin typeface="Calibri"/>
                         </a:rPr>
-                        <a:t>-12.5%</a:t>
+                        <a:t>-13.9%</a:t>
                       </a:r>
                     </a:p>
                   </a:txBody>
@@ -3566,7 +3566,7 @@
                           </a:solidFill>
                           <a:latin typeface="Calibri"/>
                         </a:rPr>
-                        <a:t>39.3</a:t>
+                        <a:t>38.5</a:t>
                       </a:r>
                     </a:p>
                   </a:txBody>
@@ -3614,7 +3614,7 @@
                           </a:solidFill>
                           <a:latin typeface="Calibri"/>
                         </a:rPr>
-                        <a:t>707</a:t>
+                        <a:t>712</a:t>
                       </a:r>
                     </a:p>
                   </a:txBody>
@@ -3637,7 +3637,7 @@
                           </a:solidFill>
                           <a:latin typeface="Calibri"/>
                         </a:rPr>
-                        <a:t>+0.83%</a:t>
+                        <a:t>+0.77%</a:t>
                       </a:r>
                     </a:p>
                   </a:txBody>
@@ -3660,7 +3660,7 @@
                           </a:solidFill>
                           <a:latin typeface="Calibri"/>
                         </a:rPr>
-                        <a:t>-0.61%</a:t>
+                        <a:t>-1.14%</a:t>
                       </a:r>
                     </a:p>
                   </a:txBody>
@@ -3683,7 +3683,7 @@
                           </a:solidFill>
                           <a:latin typeface="Calibri"/>
                         </a:rPr>
-                        <a:t>-3.86%</a:t>
+                        <a:t>-3.02%</a:t>
                       </a:r>
                     </a:p>
                   </a:txBody>
@@ -3706,7 +3706,7 @@
                           </a:solidFill>
                           <a:latin typeface="Calibri"/>
                         </a:rPr>
-                        <a:t>-28.8%</a:t>
+                        <a:t>-28.3%</a:t>
                       </a:r>
                     </a:p>
                   </a:txBody>
@@ -3752,7 +3752,7 @@
                           </a:solidFill>
                           <a:latin typeface="Calibri"/>
                         </a:rPr>
-                        <a:t>15.4</a:t>
+                        <a:t>15.6</a:t>
                       </a:r>
                     </a:p>
                   </a:txBody>
@@ -3800,7 +3800,7 @@
                           </a:solidFill>
                           <a:latin typeface="Calibri"/>
                         </a:rPr>
-                        <a:t>1,430</a:t>
+                        <a:t>1,423</a:t>
                       </a:r>
                     </a:p>
                   </a:txBody>
@@ -3819,11 +3819,34 @@
                       <a:r>
                         <a:rPr sz="1000" b="0">
                           <a:solidFill>
+                            <a:srgbClr val="B3261E"/>
+                          </a:solidFill>
+                          <a:latin typeface="Calibri"/>
+                        </a:rPr>
+                        <a:t>-0.48%</a:t>
+                      </a:r>
+                    </a:p>
+                  </a:txBody>
+                  <a:tcPr>
+                    <a:solidFill>
+                      <a:srgbClr val="F3F5F7"/>
+                    </a:solidFill>
+                  </a:tcPr>
+                </a:tc>
+                <a:tc>
+                  <a:txBody>
+                    <a:bodyPr/>
+                    <a:lstStyle/>
+                    <a:p>
+                      <a:pPr algn="r"/>
+                      <a:r>
+                        <a:rPr sz="1000" b="0">
+                          <a:solidFill>
                             <a:srgbClr val="0B7A3B"/>
                           </a:solidFill>
                           <a:latin typeface="Calibri"/>
                         </a:rPr>
-                        <a:t>+0.25%</a:t>
+                        <a:t>+0.03%</a:t>
                       </a:r>
                     </a:p>
                   </a:txBody>
@@ -3846,7 +3869,7 @@
                           </a:solidFill>
                           <a:latin typeface="Calibri"/>
                         </a:rPr>
-                        <a:t>-0.90%</a:t>
+                        <a:t>-2.35%</a:t>
                       </a:r>
                     </a:p>
                   </a:txBody>
@@ -3865,11 +3888,11 @@
                       <a:r>
                         <a:rPr sz="1000" b="0">
                           <a:solidFill>
-                            <a:srgbClr val="B3261E"/>
-                          </a:solidFill>
-                          <a:latin typeface="Calibri"/>
-                        </a:rPr>
-                        <a:t>-1.39%</a:t>
+                            <a:srgbClr val="1F2A37"/>
+                          </a:solidFill>
+                          <a:latin typeface="Calibri"/>
+                        </a:rPr>
+                        <a:t>-2.5%</a:t>
                       </a:r>
                     </a:p>
                   </a:txBody>
@@ -3892,7 +3915,7 @@
                           </a:solidFill>
                           <a:latin typeface="Calibri"/>
                         </a:rPr>
-                        <a:t>-2.1%</a:t>
+                        <a:t>17%</a:t>
                       </a:r>
                     </a:p>
                   </a:txBody>
@@ -3915,30 +3938,7 @@
                           </a:solidFill>
                           <a:latin typeface="Calibri"/>
                         </a:rPr>
-                        <a:t>16%</a:t>
-                      </a:r>
-                    </a:p>
-                  </a:txBody>
-                  <a:tcPr>
-                    <a:solidFill>
-                      <a:srgbClr val="F3F5F7"/>
-                    </a:solidFill>
-                  </a:tcPr>
-                </a:tc>
-                <a:tc>
-                  <a:txBody>
-                    <a:bodyPr/>
-                    <a:lstStyle/>
-                    <a:p>
-                      <a:pPr algn="r"/>
-                      <a:r>
-                        <a:rPr sz="1000" b="0">
-                          <a:solidFill>
-                            <a:srgbClr val="1F2A37"/>
-                          </a:solidFill>
-                          <a:latin typeface="Calibri"/>
-                        </a:rPr>
-                        <a:t>18.5</a:t>
+                        <a:t>18.4</a:t>
                       </a:r>
                     </a:p>
                   </a:txBody>
@@ -4009,7 +4009,7 @@
                           </a:solidFill>
                           <a:latin typeface="Calibri"/>
                         </a:rPr>
-                        <a:t>-0.85%</a:t>
+                        <a:t>-0.03%</a:t>
                       </a:r>
                     </a:p>
                   </a:txBody>
@@ -4028,11 +4028,11 @@
                       <a:r>
                         <a:rPr sz="1000" b="0">
                           <a:solidFill>
-                            <a:srgbClr val="0B7A3B"/>
-                          </a:solidFill>
-                          <a:latin typeface="Calibri"/>
-                        </a:rPr>
-                        <a:t>+1.76%</a:t>
+                            <a:srgbClr val="B3261E"/>
+                          </a:solidFill>
+                          <a:latin typeface="Calibri"/>
+                        </a:rPr>
+                        <a:t>-1.22%</a:t>
                       </a:r>
                     </a:p>
                   </a:txBody>
@@ -4055,7 +4055,7 @@
                           </a:solidFill>
                           <a:latin typeface="Calibri"/>
                         </a:rPr>
-                        <a:t>-3.72%</a:t>
+                        <a:t>-3.00%</a:t>
                       </a:r>
                     </a:p>
                   </a:txBody>
@@ -4124,7 +4124,7 @@
                           </a:solidFill>
                           <a:latin typeface="Calibri"/>
                         </a:rPr>
-                        <a:t>14.7</a:t>
+                        <a:t>14.8</a:t>
                       </a:r>
                     </a:p>
                   </a:txBody>
@@ -4172,7 +4172,7 @@
                           </a:solidFill>
                           <a:latin typeface="Calibri"/>
                         </a:rPr>
-                        <a:t>263</a:t>
+                        <a:t>264</a:t>
                       </a:r>
                     </a:p>
                   </a:txBody>
@@ -4191,11 +4191,34 @@
                       <a:r>
                         <a:rPr sz="1000" b="0">
                           <a:solidFill>
+                            <a:srgbClr val="0B7A3B"/>
+                          </a:solidFill>
+                          <a:latin typeface="Calibri"/>
+                        </a:rPr>
+                        <a:t>+0.42%</a:t>
+                      </a:r>
+                    </a:p>
+                  </a:txBody>
+                  <a:tcPr>
+                    <a:solidFill>
+                      <a:srgbClr val="F3F5F7"/>
+                    </a:solidFill>
+                  </a:tcPr>
+                </a:tc>
+                <a:tc>
+                  <a:txBody>
+                    <a:bodyPr/>
+                    <a:lstStyle/>
+                    <a:p>
+                      <a:pPr algn="r"/>
+                      <a:r>
+                        <a:rPr sz="1000" b="0">
+                          <a:solidFill>
                             <a:srgbClr val="B3261E"/>
                           </a:solidFill>
                           <a:latin typeface="Calibri"/>
                         </a:rPr>
-                        <a:t>-1.24%</a:t>
+                        <a:t>-0.71%</a:t>
                       </a:r>
                     </a:p>
                   </a:txBody>
@@ -4218,7 +4241,7 @@
                           </a:solidFill>
                           <a:latin typeface="Calibri"/>
                         </a:rPr>
-                        <a:t>-2.23%</a:t>
+                        <a:t>-7.63%</a:t>
                       </a:r>
                     </a:p>
                   </a:txBody>
@@ -4237,11 +4260,11 @@
                       <a:r>
                         <a:rPr sz="1000" b="0">
                           <a:solidFill>
-                            <a:srgbClr val="B3261E"/>
-                          </a:solidFill>
-                          <a:latin typeface="Calibri"/>
-                        </a:rPr>
-                        <a:t>-8.35%</a:t>
+                            <a:srgbClr val="1F2A37"/>
+                          </a:solidFill>
+                          <a:latin typeface="Calibri"/>
+                        </a:rPr>
+                        <a:t>-34.3%</a:t>
                       </a:r>
                     </a:p>
                   </a:txBody>
@@ -4264,7 +4287,7 @@
                           </a:solidFill>
                           <a:latin typeface="Calibri"/>
                         </a:rPr>
-                        <a:t>-34.6%</a:t>
+                        <a:t>23%</a:t>
                       </a:r>
                     </a:p>
                   </a:txBody>
@@ -4287,30 +4310,7 @@
                           </a:solidFill>
                           <a:latin typeface="Calibri"/>
                         </a:rPr>
-                        <a:t>23%</a:t>
-                      </a:r>
-                    </a:p>
-                  </a:txBody>
-                  <a:tcPr>
-                    <a:solidFill>
-                      <a:srgbClr val="F3F5F7"/>
-                    </a:solidFill>
-                  </a:tcPr>
-                </a:tc>
-                <a:tc>
-                  <a:txBody>
-                    <a:bodyPr/>
-                    <a:lstStyle/>
-                    <a:p>
-                      <a:pPr algn="r"/>
-                      <a:r>
-                        <a:rPr sz="1000" b="0">
-                          <a:solidFill>
-                            <a:srgbClr val="1F2A37"/>
-                          </a:solidFill>
-                          <a:latin typeface="Calibri"/>
-                        </a:rPr>
-                        <a:t>16.6</a:t>
+                        <a:t>16.9</a:t>
                       </a:r>
                     </a:p>
                   </a:txBody>
@@ -4358,7 +4358,7 @@
                           </a:solidFill>
                           <a:latin typeface="Calibri"/>
                         </a:rPr>
-                        <a:t>3,975</a:t>
+                        <a:t>3,964</a:t>
                       </a:r>
                     </a:p>
                   </a:txBody>
@@ -4381,7 +4381,7 @@
                           </a:solidFill>
                           <a:latin typeface="Calibri"/>
                         </a:rPr>
-                        <a:t>-0.15%</a:t>
+                        <a:t>-0.27%</a:t>
                       </a:r>
                     </a:p>
                   </a:txBody>
@@ -4404,7 +4404,7 @@
                           </a:solidFill>
                           <a:latin typeface="Calibri"/>
                         </a:rPr>
-                        <a:t>-1.29%</a:t>
+                        <a:t>-2.02%</a:t>
                       </a:r>
                     </a:p>
                   </a:txBody>
@@ -4427,7 +4427,7 @@
                           </a:solidFill>
                           <a:latin typeface="Calibri"/>
                         </a:rPr>
-                        <a:t>-2.02%</a:t>
+                        <a:t>-2.41%</a:t>
                       </a:r>
                     </a:p>
                   </a:txBody>
@@ -4450,7 +4450,7 @@
                           </a:solidFill>
                           <a:latin typeface="Calibri"/>
                         </a:rPr>
-                        <a:t>-9.2%</a:t>
+                        <a:t>-9.4%</a:t>
                       </a:r>
                     </a:p>
                   </a:txBody>
@@ -4496,7 +4496,7 @@
                           </a:solidFill>
                           <a:latin typeface="Calibri"/>
                         </a:rPr>
-                        <a:t>33.0</a:t>
+                        <a:t>32.9</a:t>
                       </a:r>
                     </a:p>
                   </a:txBody>
@@ -4544,7 +4544,7 @@
                           </a:solidFill>
                           <a:latin typeface="Calibri"/>
                         </a:rPr>
-                        <a:t>1,302</a:t>
+                        <a:t>1,322</a:t>
                       </a:r>
                     </a:p>
                   </a:txBody>
@@ -4563,11 +4563,57 @@
                       <a:r>
                         <a:rPr sz="1000" b="0">
                           <a:solidFill>
+                            <a:srgbClr val="0B7A3B"/>
+                          </a:solidFill>
+                          <a:latin typeface="Calibri"/>
+                        </a:rPr>
+                        <a:t>+1.50%</a:t>
+                      </a:r>
+                    </a:p>
+                  </a:txBody>
+                  <a:tcPr>
+                    <a:solidFill>
+                      <a:srgbClr val="F3F5F7"/>
+                    </a:solidFill>
+                  </a:tcPr>
+                </a:tc>
+                <a:tc>
+                  <a:txBody>
+                    <a:bodyPr/>
+                    <a:lstStyle/>
+                    <a:p>
+                      <a:pPr algn="r"/>
+                      <a:r>
+                        <a:rPr sz="1000" b="0">
+                          <a:solidFill>
+                            <a:srgbClr val="0B7A3B"/>
+                          </a:solidFill>
+                          <a:latin typeface="Calibri"/>
+                        </a:rPr>
+                        <a:t>+2.72%</a:t>
+                      </a:r>
+                    </a:p>
+                  </a:txBody>
+                  <a:tcPr>
+                    <a:solidFill>
+                      <a:srgbClr val="F3F5F7"/>
+                    </a:solidFill>
+                  </a:tcPr>
+                </a:tc>
+                <a:tc>
+                  <a:txBody>
+                    <a:bodyPr/>
+                    <a:lstStyle/>
+                    <a:p>
+                      <a:pPr algn="r"/>
+                      <a:r>
+                        <a:rPr sz="1000" b="0">
+                          <a:solidFill>
                             <a:srgbClr val="B3261E"/>
                           </a:solidFill>
                           <a:latin typeface="Calibri"/>
                         </a:rPr>
-                        <a:t>-0.81%</a:t>
+                        <a:t>-0.23%</a:t>
                       </a:r>
                     </a:p>
                   </a:txBody>
@@ -4586,11 +4632,11 @@
                       <a:r>
                         <a:rPr sz="1000" b="0">
                           <a:solidFill>
-                            <a:srgbClr val="0B7A3B"/>
-                          </a:solidFill>
-                          <a:latin typeface="Calibri"/>
-                        </a:rPr>
-                        <a:t>+1.58%</a:t>
+                            <a:srgbClr val="1F2A37"/>
+                          </a:solidFill>
+                          <a:latin typeface="Calibri"/>
+                        </a:rPr>
+                        <a:t>-16.6%</a:t>
                       </a:r>
                     </a:p>
                   </a:txBody>
@@ -4609,11 +4655,11 @@
                       <a:r>
                         <a:rPr sz="1000" b="0">
                           <a:solidFill>
-                            <a:srgbClr val="0B7A3B"/>
-                          </a:solidFill>
-                          <a:latin typeface="Calibri"/>
-                        </a:rPr>
-                        <a:t>+1.76%</a:t>
+                            <a:srgbClr val="1F2A37"/>
+                          </a:solidFill>
+                          <a:latin typeface="Calibri"/>
+                        </a:rPr>
+                        <a:t>19%</a:t>
                       </a:r>
                     </a:p>
                   </a:txBody>
@@ -4636,53 +4682,7 @@
                           </a:solidFill>
                           <a:latin typeface="Calibri"/>
                         </a:rPr>
-                        <a:t>-17.8%</a:t>
-                      </a:r>
-                    </a:p>
-                  </a:txBody>
-                  <a:tcPr>
-                    <a:solidFill>
-                      <a:srgbClr val="F3F5F7"/>
-                    </a:solidFill>
-                  </a:tcPr>
-                </a:tc>
-                <a:tc>
-                  <a:txBody>
-                    <a:bodyPr/>
-                    <a:lstStyle/>
-                    <a:p>
-                      <a:pPr algn="r"/>
-                      <a:r>
-                        <a:rPr sz="1000" b="0">
-                          <a:solidFill>
-                            <a:srgbClr val="1F2A37"/>
-                          </a:solidFill>
-                          <a:latin typeface="Calibri"/>
-                        </a:rPr>
-                        <a:t>18%</a:t>
-                      </a:r>
-                    </a:p>
-                  </a:txBody>
-                  <a:tcPr>
-                    <a:solidFill>
-                      <a:srgbClr val="F3F5F7"/>
-                    </a:solidFill>
-                  </a:tcPr>
-                </a:tc>
-                <a:tc>
-                  <a:txBody>
-                    <a:bodyPr/>
-                    <a:lstStyle/>
-                    <a:p>
-                      <a:pPr algn="r"/>
-                      <a:r>
-                        <a:rPr sz="1000" b="0">
-                          <a:solidFill>
-                            <a:srgbClr val="1F2A37"/>
-                          </a:solidFill>
-                          <a:latin typeface="Calibri"/>
-                        </a:rPr>
-                        <a:t>23.6</a:t>
+                        <a:t>24.1</a:t>
                       </a:r>
                     </a:p>
                   </a:txBody>
@@ -4730,7 +4730,7 @@
                           </a:solidFill>
                           <a:latin typeface="Calibri"/>
                         </a:rPr>
-                        <a:t>2,320</a:t>
+                        <a:t>2,304</a:t>
                       </a:r>
                     </a:p>
                   </a:txBody>
@@ -4753,7 +4753,7 @@
                           </a:solidFill>
                           <a:latin typeface="Calibri"/>
                         </a:rPr>
-                        <a:t>-1.19%</a:t>
+                        <a:t>-0.69%</a:t>
                       </a:r>
                     </a:p>
                   </a:txBody>
@@ -4772,11 +4772,11 @@
                       <a:r>
                         <a:rPr sz="1000" b="0">
                           <a:solidFill>
-                            <a:srgbClr val="0B7A3B"/>
-                          </a:solidFill>
-                          <a:latin typeface="Calibri"/>
-                        </a:rPr>
-                        <a:t>+3.19%</a:t>
+                            <a:srgbClr val="B3261E"/>
+                          </a:solidFill>
+                          <a:latin typeface="Calibri"/>
+                        </a:rPr>
+                        <a:t>-1.62%</a:t>
                       </a:r>
                     </a:p>
                   </a:txBody>
@@ -4799,7 +4799,7 @@
                           </a:solidFill>
                           <a:latin typeface="Calibri"/>
                         </a:rPr>
-                        <a:t>-3.85%</a:t>
+                        <a:t>-2.91%</a:t>
                       </a:r>
                     </a:p>
                   </a:txBody>
@@ -4822,7 +4822,7 @@
                           </a:solidFill>
                           <a:latin typeface="Calibri"/>
                         </a:rPr>
-                        <a:t>-27.6%</a:t>
+                        <a:t>-28.1%</a:t>
                       </a:r>
                     </a:p>
                   </a:txBody>
@@ -4868,7 +4868,7 @@
                           </a:solidFill>
                           <a:latin typeface="Calibri"/>
                         </a:rPr>
-                        <a:t>16.9</a:t>
+                        <a:t>16.7</a:t>
                       </a:r>
                     </a:p>
                   </a:txBody>
@@ -4968,7 +4968,7 @@
                 </a:solidFill>
                 <a:latin typeface="Calibri"/>
               </a:rPr>
-              <a:t>•  Best performer on the day: HDFCBANK.NS at +0.83%.</a:t>
+              <a:t>•  Best performer on the day: RELIANCE.NS at +1.50%.</a:t>
             </a:r>
           </a:p>
           <a:p>
@@ -4984,7 +4984,7 @@
                 </a:solidFill>
                 <a:latin typeface="Calibri"/>
               </a:rPr>
-              <a:t>•  Weakest on the day: ITC.NS at -1.24%.</a:t>
+              <a:t>•  Weakest on the day: BHARTIARTL.NS at -1.55%.</a:t>
             </a:r>
           </a:p>
           <a:p>
@@ -5000,7 +5000,7 @@
                 </a:solidFill>
                 <a:latin typeface="Calibri"/>
               </a:rPr>
-              <a:t>•  Median one-day move across the watchlist: -0.48%.</a:t>
+              <a:t>•  Median one-day move across the watchlist: -0.15%.</a:t>
             </a:r>
           </a:p>
           <a:p>
@@ -5016,7 +5016,7 @@
                 </a:solidFill>
                 <a:latin typeface="Calibri"/>
               </a:rPr>
-              <a:t>•  ITC.NS sits furthest below its 52-week high, at -34.6%.</a:t>
+              <a:t>•  ITC.NS sits furthest below its 52-week high, at -34.3%.</a:t>
             </a:r>
           </a:p>
           <a:p>
@@ -5080,7 +5080,7 @@
                 </a:solidFill>
                 <a:latin typeface="Calibri"/>
               </a:rPr>
-              <a:t>•  60 headlines collected, 2 tagged to a watchlist name by substring match (unverified).</a:t>
+              <a:t>•  60 headlines collected, 3 tagged to a watchlist name by substring match (unverified).</a:t>
             </a:r>
           </a:p>
           <a:p>
